--- a/REVIEW PART.pptx
+++ b/REVIEW PART.pptx
@@ -124,24 +124,31 @@
   <pc:docChgLst>
     <pc:chgData name="Prabha Vel Durai" userId="bed1108984a0dc02" providerId="LiveId" clId="{19C086CD-C07F-40BB-AFEC-D555B075BCB6}"/>
     <pc:docChg chg="undo custSel modSld">
-      <pc:chgData name="Prabha Vel Durai" userId="bed1108984a0dc02" providerId="LiveId" clId="{19C086CD-C07F-40BB-AFEC-D555B075BCB6}" dt="2026-10-07T10:04:42.608" v="347" actId="20577"/>
+      <pc:chgData name="Prabha Vel Durai" userId="bed1108984a0dc02" providerId="LiveId" clId="{19C086CD-C07F-40BB-AFEC-D555B075BCB6}" dt="2026-10-13T05:11:55.603" v="350" actId="14100"/>
       <pc:docMkLst>
         <pc:docMk/>
       </pc:docMkLst>
+      <pc:sldChg chg="addSp modSp mod">
+        <pc:chgData name="Prabha Vel Durai" userId="bed1108984a0dc02" providerId="LiveId" clId="{19C086CD-C07F-40BB-AFEC-D555B075BCB6}" dt="2026-10-13T05:11:55.603" v="350" actId="14100"/>
+        <pc:sldMkLst>
+          <pc:docMk/>
+          <pc:sldMk cId="0" sldId="256"/>
+        </pc:sldMkLst>
+        <pc:spChg chg="add mod">
+          <ac:chgData name="Prabha Vel Durai" userId="bed1108984a0dc02" providerId="LiveId" clId="{19C086CD-C07F-40BB-AFEC-D555B075BCB6}" dt="2026-10-13T05:11:55.603" v="350" actId="14100"/>
+          <ac:spMkLst>
+            <pc:docMk/>
+            <pc:sldMk cId="0" sldId="256"/>
+            <ac:spMk id="5" creationId="{9AD2FC6D-A169-7464-3A3A-C6FF23BC907F}"/>
+          </ac:spMkLst>
+        </pc:spChg>
+      </pc:sldChg>
       <pc:sldChg chg="addSp delSp modSp mod">
         <pc:chgData name="Prabha Vel Durai" userId="bed1108984a0dc02" providerId="LiveId" clId="{19C086CD-C07F-40BB-AFEC-D555B075BCB6}" dt="2026-10-07T10:03:29.743" v="324" actId="1076"/>
         <pc:sldMkLst>
           <pc:docMk/>
           <pc:sldMk cId="0" sldId="258"/>
         </pc:sldMkLst>
-        <pc:spChg chg="add del">
-          <ac:chgData name="Prabha Vel Durai" userId="bed1108984a0dc02" providerId="LiveId" clId="{19C086CD-C07F-40BB-AFEC-D555B075BCB6}" dt="2026-10-07T10:02:59.922" v="315" actId="478"/>
-          <ac:spMkLst>
-            <pc:docMk/>
-            <pc:sldMk cId="0" sldId="258"/>
-            <ac:spMk id="4" creationId="{06AF3AF1-CADA-B163-4829-8CB2FBF1B322}"/>
-          </ac:spMkLst>
-        </pc:spChg>
         <pc:spChg chg="mod">
           <ac:chgData name="Prabha Vel Durai" userId="bed1108984a0dc02" providerId="LiveId" clId="{19C086CD-C07F-40BB-AFEC-D555B075BCB6}" dt="2026-10-07T10:03:13.958" v="319" actId="113"/>
           <ac:spMkLst>
@@ -165,14 +172,6 @@
           <pc:docMk/>
           <pc:sldMk cId="0" sldId="259"/>
         </pc:sldMkLst>
-        <pc:spChg chg="del mod">
-          <ac:chgData name="Prabha Vel Durai" userId="bed1108984a0dc02" providerId="LiveId" clId="{19C086CD-C07F-40BB-AFEC-D555B075BCB6}" dt="2026-10-07T09:57:36.176" v="15" actId="478"/>
-          <ac:spMkLst>
-            <pc:docMk/>
-            <pc:sldMk cId="0" sldId="259"/>
-            <ac:spMk id="5" creationId="{00000000-0000-0000-0000-000000000000}"/>
-          </ac:spMkLst>
-        </pc:spChg>
         <pc:graphicFrameChg chg="add mod modGraphic">
           <ac:chgData name="Prabha Vel Durai" userId="bed1108984a0dc02" providerId="LiveId" clId="{19C086CD-C07F-40BB-AFEC-D555B075BCB6}" dt="2026-10-07T09:57:56.972" v="20" actId="12269"/>
           <ac:graphicFrameMkLst>
@@ -1153,6 +1152,925 @@
 </file>
 
 <file path=ppt/diagrams/colors2.xml><?xml version="1.0" encoding="utf-8"?>
+<dgm:colorsDef xmlns:dgm="http://schemas.openxmlformats.org/drawingml/2006/diagram" xmlns:a="http://schemas.openxmlformats.org/drawingml/2006/main" uniqueId="urn:microsoft.com/office/officeart/2005/8/colors/colorful1">
+  <dgm:title val=""/>
+  <dgm:desc val=""/>
+  <dgm:catLst>
+    <dgm:cat type="colorful" pri="10100"/>
+  </dgm:catLst>
+  <dgm:styleLbl name="node0">
+    <dgm:fillClrLst meth="repeat">
+      <a:schemeClr val="accent1"/>
+    </dgm:fillClrLst>
+    <dgm:linClrLst meth="repeat">
+      <a:schemeClr val="lt1"/>
+    </dgm:linClrLst>
+    <dgm:effectClrLst/>
+    <dgm:txLinClrLst/>
+    <dgm:txFillClrLst/>
+    <dgm:txEffectClrLst/>
+  </dgm:styleLbl>
+  <dgm:styleLbl name="node1">
+    <dgm:fillClrLst meth="repeat">
+      <a:schemeClr val="accent2"/>
+      <a:schemeClr val="accent3"/>
+      <a:schemeClr val="accent4"/>
+      <a:schemeClr val="accent5"/>
+      <a:schemeClr val="accent6"/>
+    </dgm:fillClrLst>
+    <dgm:linClrLst meth="repeat">
+      <a:schemeClr val="lt1"/>
+    </dgm:linClrLst>
+    <dgm:effectClrLst/>
+    <dgm:txLinClrLst/>
+    <dgm:txFillClrLst/>
+    <dgm:txEffectClrLst/>
+  </dgm:styleLbl>
+  <dgm:styleLbl name="alignNode1">
+    <dgm:fillClrLst meth="repeat">
+      <a:schemeClr val="accent2"/>
+      <a:schemeClr val="accent3"/>
+      <a:schemeClr val="accent4"/>
+      <a:schemeClr val="accent5"/>
+      <a:schemeClr val="accent6"/>
+    </dgm:fillClrLst>
+    <dgm:linClrLst meth="repeat">
+      <a:schemeClr val="accent2"/>
+      <a:schemeClr val="accent3"/>
+      <a:schemeClr val="accent4"/>
+      <a:schemeClr val="accent5"/>
+      <a:schemeClr val="accent6"/>
+    </dgm:linClrLst>
+    <dgm:effectClrLst/>
+    <dgm:txLinClrLst/>
+    <dgm:txFillClrLst/>
+    <dgm:txEffectClrLst/>
+  </dgm:styleLbl>
+  <dgm:styleLbl name="lnNode1">
+    <dgm:fillClrLst meth="repeat">
+      <a:schemeClr val="accent2"/>
+      <a:schemeClr val="accent3"/>
+      <a:schemeClr val="accent4"/>
+      <a:schemeClr val="accent5"/>
+      <a:schemeClr val="accent6"/>
+    </dgm:fillClrLst>
+    <dgm:linClrLst meth="repeat">
+      <a:schemeClr val="lt1"/>
+    </dgm:linClrLst>
+    <dgm:effectClrLst/>
+    <dgm:txLinClrLst/>
+    <dgm:txFillClrLst/>
+    <dgm:txEffectClrLst/>
+  </dgm:styleLbl>
+  <dgm:styleLbl name="vennNode1">
+    <dgm:fillClrLst meth="repeat">
+      <a:schemeClr val="accent2">
+        <a:alpha val="50000"/>
+      </a:schemeClr>
+      <a:schemeClr val="accent3">
+        <a:alpha val="50000"/>
+      </a:schemeClr>
+      <a:schemeClr val="accent4">
+        <a:alpha val="50000"/>
+      </a:schemeClr>
+      <a:schemeClr val="accent5">
+        <a:alpha val="50000"/>
+      </a:schemeClr>
+      <a:schemeClr val="accent6">
+        <a:alpha val="50000"/>
+      </a:schemeClr>
+    </dgm:fillClrLst>
+    <dgm:linClrLst meth="repeat">
+      <a:schemeClr val="lt1"/>
+    </dgm:linClrLst>
+    <dgm:effectClrLst/>
+    <dgm:txLinClrLst/>
+    <dgm:txFillClrLst/>
+    <dgm:txEffectClrLst/>
+  </dgm:styleLbl>
+  <dgm:styleLbl name="node2">
+    <dgm:fillClrLst>
+      <a:schemeClr val="accent2"/>
+    </dgm:fillClrLst>
+    <dgm:linClrLst meth="repeat">
+      <a:schemeClr val="lt1"/>
+    </dgm:linClrLst>
+    <dgm:effectClrLst/>
+    <dgm:txLinClrLst/>
+    <dgm:txFillClrLst/>
+    <dgm:txEffectClrLst/>
+  </dgm:styleLbl>
+  <dgm:styleLbl name="node3">
+    <dgm:fillClrLst>
+      <a:schemeClr val="accent3"/>
+    </dgm:fillClrLst>
+    <dgm:linClrLst meth="repeat">
+      <a:schemeClr val="lt1"/>
+    </dgm:linClrLst>
+    <dgm:effectClrLst/>
+    <dgm:txLinClrLst/>
+    <dgm:txFillClrLst/>
+    <dgm:txEffectClrLst/>
+  </dgm:styleLbl>
+  <dgm:styleLbl name="node4">
+    <dgm:fillClrLst>
+      <a:schemeClr val="accent4"/>
+    </dgm:fillClrLst>
+    <dgm:linClrLst meth="repeat">
+      <a:schemeClr val="lt1"/>
+    </dgm:linClrLst>
+    <dgm:effectClrLst/>
+    <dgm:txLinClrLst/>
+    <dgm:txFillClrLst/>
+    <dgm:txEffectClrLst/>
+  </dgm:styleLbl>
+  <dgm:styleLbl name="fgImgPlace1">
+    <dgm:fillClrLst meth="repeat">
+      <a:schemeClr val="accent2">
+        <a:tint val="50000"/>
+      </a:schemeClr>
+      <a:schemeClr val="accent3">
+        <a:tint val="50000"/>
+      </a:schemeClr>
+      <a:schemeClr val="accent4">
+        <a:tint val="50000"/>
+      </a:schemeClr>
+      <a:schemeClr val="accent5">
+        <a:tint val="50000"/>
+      </a:schemeClr>
+      <a:schemeClr val="accent6">
+        <a:tint val="50000"/>
+      </a:schemeClr>
+    </dgm:fillClrLst>
+    <dgm:linClrLst meth="repeat">
+      <a:schemeClr val="lt1"/>
+    </dgm:linClrLst>
+    <dgm:effectClrLst/>
+    <dgm:txLinClrLst/>
+    <dgm:txFillClrLst meth="repeat">
+      <a:schemeClr val="lt1"/>
+    </dgm:txFillClrLst>
+    <dgm:txEffectClrLst/>
+  </dgm:styleLbl>
+  <dgm:styleLbl name="alignImgPlace1">
+    <dgm:fillClrLst>
+      <a:schemeClr val="accent1">
+        <a:tint val="50000"/>
+      </a:schemeClr>
+      <a:schemeClr val="accent2">
+        <a:tint val="20000"/>
+      </a:schemeClr>
+    </dgm:fillClrLst>
+    <dgm:linClrLst meth="repeat">
+      <a:schemeClr val="lt1"/>
+    </dgm:linClrLst>
+    <dgm:effectClrLst/>
+    <dgm:txLinClrLst/>
+    <dgm:txFillClrLst meth="repeat">
+      <a:schemeClr val="lt1"/>
+    </dgm:txFillClrLst>
+    <dgm:txEffectClrLst/>
+  </dgm:styleLbl>
+  <dgm:styleLbl name="bgImgPlace1">
+    <dgm:fillClrLst>
+      <a:schemeClr val="accent1">
+        <a:tint val="50000"/>
+      </a:schemeClr>
+      <a:schemeClr val="accent2">
+        <a:tint val="20000"/>
+      </a:schemeClr>
+    </dgm:fillClrLst>
+    <dgm:linClrLst meth="repeat">
+      <a:schemeClr val="lt1"/>
+    </dgm:linClrLst>
+    <dgm:effectClrLst/>
+    <dgm:txLinClrLst/>
+    <dgm:txFillClrLst meth="repeat">
+      <a:schemeClr val="lt1"/>
+    </dgm:txFillClrLst>
+    <dgm:txEffectClrLst/>
+  </dgm:styleLbl>
+  <dgm:styleLbl name="sibTrans2D1">
+    <dgm:fillClrLst meth="repeat">
+      <a:schemeClr val="accent2"/>
+      <a:schemeClr val="accent3"/>
+      <a:schemeClr val="accent4"/>
+      <a:schemeClr val="accent5"/>
+      <a:schemeClr val="accent6"/>
+    </dgm:fillClrLst>
+    <dgm:linClrLst meth="cycle">
+      <a:schemeClr val="lt1"/>
+    </dgm:linClrLst>
+    <dgm:effectClrLst/>
+    <dgm:txLinClrLst/>
+    <dgm:txFillClrLst/>
+    <dgm:txEffectClrLst/>
+  </dgm:styleLbl>
+  <dgm:styleLbl name="fgSibTrans2D1">
+    <dgm:fillClrLst meth="repeat">
+      <a:schemeClr val="accent2"/>
+      <a:schemeClr val="accent3"/>
+      <a:schemeClr val="accent4"/>
+      <a:schemeClr val="accent5"/>
+      <a:schemeClr val="accent6"/>
+    </dgm:fillClrLst>
+    <dgm:linClrLst meth="cycle">
+      <a:schemeClr val="lt1"/>
+    </dgm:linClrLst>
+    <dgm:effectClrLst/>
+    <dgm:txLinClrLst/>
+    <dgm:txFillClrLst meth="repeat">
+      <a:schemeClr val="lt1"/>
+    </dgm:txFillClrLst>
+    <dgm:txEffectClrLst/>
+  </dgm:styleLbl>
+  <dgm:styleLbl name="bgSibTrans2D1">
+    <dgm:fillClrLst meth="repeat">
+      <a:schemeClr val="accent2"/>
+      <a:schemeClr val="accent3"/>
+      <a:schemeClr val="accent4"/>
+      <a:schemeClr val="accent5"/>
+      <a:schemeClr val="accent6"/>
+    </dgm:fillClrLst>
+    <dgm:linClrLst meth="cycle">
+      <a:schemeClr val="lt1"/>
+    </dgm:linClrLst>
+    <dgm:effectClrLst/>
+    <dgm:txLinClrLst/>
+    <dgm:txFillClrLst meth="repeat">
+      <a:schemeClr val="lt1"/>
+    </dgm:txFillClrLst>
+    <dgm:txEffectClrLst/>
+  </dgm:styleLbl>
+  <dgm:styleLbl name="sibTrans1D1">
+    <dgm:fillClrLst meth="repeat">
+      <a:schemeClr val="accent2"/>
+      <a:schemeClr val="accent3"/>
+      <a:schemeClr val="accent4"/>
+      <a:schemeClr val="accent5"/>
+      <a:schemeClr val="accent6"/>
+    </dgm:fillClrLst>
+    <dgm:linClrLst meth="repeat">
+      <a:schemeClr val="accent2"/>
+      <a:schemeClr val="accent3"/>
+      <a:schemeClr val="accent4"/>
+      <a:schemeClr val="accent5"/>
+      <a:schemeClr val="accent6"/>
+    </dgm:linClrLst>
+    <dgm:effectClrLst/>
+    <dgm:txLinClrLst/>
+    <dgm:txFillClrLst meth="repeat">
+      <a:schemeClr val="tx1"/>
+    </dgm:txFillClrLst>
+    <dgm:txEffectClrLst/>
+  </dgm:styleLbl>
+  <dgm:styleLbl name="callout">
+    <dgm:fillClrLst meth="repeat">
+      <a:schemeClr val="accent2"/>
+    </dgm:fillClrLst>
+    <dgm:linClrLst meth="repeat">
+      <a:schemeClr val="accent2">
+        <a:tint val="50000"/>
+      </a:schemeClr>
+    </dgm:linClrLst>
+    <dgm:effectClrLst/>
+    <dgm:txLinClrLst/>
+    <dgm:txFillClrLst meth="repeat">
+      <a:schemeClr val="tx1"/>
+    </dgm:txFillClrLst>
+    <dgm:txEffectClrLst/>
+  </dgm:styleLbl>
+  <dgm:styleLbl name="asst0">
+    <dgm:fillClrLst meth="repeat">
+      <a:schemeClr val="accent1"/>
+    </dgm:fillClrLst>
+    <dgm:linClrLst meth="repeat">
+      <a:schemeClr val="lt1"/>
+    </dgm:linClrLst>
+    <dgm:effectClrLst/>
+    <dgm:txLinClrLst/>
+    <dgm:txFillClrLst/>
+    <dgm:txEffectClrLst/>
+  </dgm:styleLbl>
+  <dgm:styleLbl name="asst1">
+    <dgm:fillClrLst meth="repeat">
+      <a:schemeClr val="accent2"/>
+    </dgm:fillClrLst>
+    <dgm:linClrLst meth="repeat">
+      <a:schemeClr val="lt1"/>
+    </dgm:linClrLst>
+    <dgm:effectClrLst/>
+    <dgm:txLinClrLst/>
+    <dgm:txFillClrLst/>
+    <dgm:txEffectClrLst/>
+  </dgm:styleLbl>
+  <dgm:styleLbl name="asst2">
+    <dgm:fillClrLst>
+      <a:schemeClr val="accent3"/>
+    </dgm:fillClrLst>
+    <dgm:linClrLst meth="repeat">
+      <a:schemeClr val="lt1"/>
+    </dgm:linClrLst>
+    <dgm:effectClrLst/>
+    <dgm:txLinClrLst/>
+    <dgm:txFillClrLst/>
+    <dgm:txEffectClrLst/>
+  </dgm:styleLbl>
+  <dgm:styleLbl name="asst3">
+    <dgm:fillClrLst>
+      <a:schemeClr val="accent4"/>
+    </dgm:fillClrLst>
+    <dgm:linClrLst meth="repeat">
+      <a:schemeClr val="lt1"/>
+    </dgm:linClrLst>
+    <dgm:effectClrLst/>
+    <dgm:txLinClrLst/>
+    <dgm:txFillClrLst/>
+    <dgm:txEffectClrLst/>
+  </dgm:styleLbl>
+  <dgm:styleLbl name="asst4">
+    <dgm:fillClrLst>
+      <a:schemeClr val="accent5"/>
+    </dgm:fillClrLst>
+    <dgm:linClrLst meth="repeat">
+      <a:schemeClr val="lt1"/>
+    </dgm:linClrLst>
+    <dgm:effectClrLst/>
+    <dgm:txLinClrLst/>
+    <dgm:txFillClrLst/>
+    <dgm:txEffectClrLst/>
+  </dgm:styleLbl>
+  <dgm:styleLbl name="parChTrans2D1">
+    <dgm:fillClrLst meth="repeat">
+      <a:schemeClr val="accent2"/>
+    </dgm:fillClrLst>
+    <dgm:linClrLst meth="repeat">
+      <a:schemeClr val="lt1"/>
+    </dgm:linClrLst>
+    <dgm:effectClrLst/>
+    <dgm:txLinClrLst/>
+    <dgm:txFillClrLst meth="repeat">
+      <a:schemeClr val="lt1"/>
+    </dgm:txFillClrLst>
+    <dgm:txEffectClrLst/>
+  </dgm:styleLbl>
+  <dgm:styleLbl name="parChTrans2D2">
+    <dgm:fillClrLst meth="repeat">
+      <a:schemeClr val="accent3"/>
+    </dgm:fillClrLst>
+    <dgm:linClrLst meth="repeat">
+      <a:schemeClr val="lt1"/>
+    </dgm:linClrLst>
+    <dgm:effectClrLst/>
+    <dgm:txLinClrLst/>
+    <dgm:txFillClrLst/>
+    <dgm:txEffectClrLst/>
+  </dgm:styleLbl>
+  <dgm:styleLbl name="parChTrans2D3">
+    <dgm:fillClrLst meth="repeat">
+      <a:schemeClr val="accent4"/>
+    </dgm:fillClrLst>
+    <dgm:linClrLst meth="repeat">
+      <a:schemeClr val="lt1"/>
+    </dgm:linClrLst>
+    <dgm:effectClrLst/>
+    <dgm:txLinClrLst/>
+    <dgm:txFillClrLst/>
+    <dgm:txEffectClrLst/>
+  </dgm:styleLbl>
+  <dgm:styleLbl name="parChTrans2D4">
+    <dgm:fillClrLst meth="repeat">
+      <a:schemeClr val="accent5"/>
+    </dgm:fillClrLst>
+    <dgm:linClrLst meth="repeat">
+      <a:schemeClr val="lt1"/>
+    </dgm:linClrLst>
+    <dgm:effectClrLst/>
+    <dgm:txLinClrLst/>
+    <dgm:txFillClrLst meth="repeat">
+      <a:schemeClr val="lt1"/>
+    </dgm:txFillClrLst>
+    <dgm:txEffectClrLst/>
+  </dgm:styleLbl>
+  <dgm:styleLbl name="parChTrans1D1">
+    <dgm:fillClrLst meth="repeat">
+      <a:schemeClr val="accent2"/>
+    </dgm:fillClrLst>
+    <dgm:linClrLst meth="repeat">
+      <a:schemeClr val="accent1"/>
+    </dgm:linClrLst>
+    <dgm:effectClrLst/>
+    <dgm:txLinClrLst/>
+    <dgm:txFillClrLst meth="repeat">
+      <a:schemeClr val="tx1"/>
+    </dgm:txFillClrLst>
+    <dgm:txEffectClrLst/>
+  </dgm:styleLbl>
+  <dgm:styleLbl name="parChTrans1D2">
+    <dgm:fillClrLst meth="repeat">
+      <a:schemeClr val="accent3">
+        <a:tint val="90000"/>
+      </a:schemeClr>
+    </dgm:fillClrLst>
+    <dgm:linClrLst meth="repeat">
+      <a:schemeClr val="accent2"/>
+    </dgm:linClrLst>
+    <dgm:effectClrLst/>
+    <dgm:txLinClrLst/>
+    <dgm:txFillClrLst meth="repeat">
+      <a:schemeClr val="tx1"/>
+    </dgm:txFillClrLst>
+    <dgm:txEffectClrLst/>
+  </dgm:styleLbl>
+  <dgm:styleLbl name="parChTrans1D3">
+    <dgm:fillClrLst meth="repeat">
+      <a:schemeClr val="accent4">
+        <a:tint val="70000"/>
+      </a:schemeClr>
+    </dgm:fillClrLst>
+    <dgm:linClrLst meth="repeat">
+      <a:schemeClr val="accent3"/>
+    </dgm:linClrLst>
+    <dgm:effectClrLst/>
+    <dgm:txLinClrLst/>
+    <dgm:txFillClrLst meth="repeat">
+      <a:schemeClr val="tx1"/>
+    </dgm:txFillClrLst>
+    <dgm:txEffectClrLst/>
+  </dgm:styleLbl>
+  <dgm:styleLbl name="parChTrans1D4">
+    <dgm:fillClrLst meth="repeat">
+      <a:schemeClr val="accent5">
+        <a:tint val="50000"/>
+      </a:schemeClr>
+    </dgm:fillClrLst>
+    <dgm:linClrLst meth="repeat">
+      <a:schemeClr val="accent4"/>
+    </dgm:linClrLst>
+    <dgm:effectClrLst/>
+    <dgm:txLinClrLst/>
+    <dgm:txFillClrLst meth="repeat">
+      <a:schemeClr val="tx1"/>
+    </dgm:txFillClrLst>
+    <dgm:txEffectClrLst/>
+  </dgm:styleLbl>
+  <dgm:styleLbl name="fgAcc1">
+    <dgm:fillClrLst meth="repeat">
+      <a:schemeClr val="lt1">
+        <a:alpha val="90000"/>
+      </a:schemeClr>
+    </dgm:fillClrLst>
+    <dgm:linClrLst meth="repeat">
+      <a:schemeClr val="accent2"/>
+      <a:schemeClr val="accent3"/>
+      <a:schemeClr val="accent4"/>
+      <a:schemeClr val="accent5"/>
+      <a:schemeClr val="accent6"/>
+    </dgm:linClrLst>
+    <dgm:effectClrLst/>
+    <dgm:txLinClrLst/>
+    <dgm:txFillClrLst meth="repeat">
+      <a:schemeClr val="dk1"/>
+    </dgm:txFillClrLst>
+    <dgm:txEffectClrLst/>
+  </dgm:styleLbl>
+  <dgm:styleLbl name="conFgAcc1">
+    <dgm:fillClrLst meth="repeat">
+      <a:schemeClr val="lt1">
+        <a:alpha val="90000"/>
+      </a:schemeClr>
+    </dgm:fillClrLst>
+    <dgm:linClrLst meth="repeat">
+      <a:schemeClr val="accent2"/>
+      <a:schemeClr val="accent3"/>
+      <a:schemeClr val="accent4"/>
+      <a:schemeClr val="accent5"/>
+      <a:schemeClr val="accent6"/>
+    </dgm:linClrLst>
+    <dgm:effectClrLst/>
+    <dgm:txLinClrLst/>
+    <dgm:txFillClrLst meth="repeat">
+      <a:schemeClr val="dk1"/>
+    </dgm:txFillClrLst>
+    <dgm:txEffectClrLst/>
+  </dgm:styleLbl>
+  <dgm:styleLbl name="alignAcc1">
+    <dgm:fillClrLst meth="repeat">
+      <a:schemeClr val="lt1">
+        <a:alpha val="90000"/>
+      </a:schemeClr>
+    </dgm:fillClrLst>
+    <dgm:linClrLst meth="repeat">
+      <a:schemeClr val="accent2"/>
+      <a:schemeClr val="accent3"/>
+      <a:schemeClr val="accent4"/>
+      <a:schemeClr val="accent5"/>
+      <a:schemeClr val="accent6"/>
+    </dgm:linClrLst>
+    <dgm:effectClrLst/>
+    <dgm:txLinClrLst/>
+    <dgm:txFillClrLst meth="repeat">
+      <a:schemeClr val="dk1"/>
+    </dgm:txFillClrLst>
+    <dgm:txEffectClrLst/>
+  </dgm:styleLbl>
+  <dgm:styleLbl name="trAlignAcc1">
+    <dgm:fillClrLst meth="repeat">
+      <a:schemeClr val="lt1">
+        <a:alpha val="40000"/>
+      </a:schemeClr>
+    </dgm:fillClrLst>
+    <dgm:linClrLst meth="repeat">
+      <a:schemeClr val="accent1"/>
+    </dgm:linClrLst>
+    <dgm:effectClrLst/>
+    <dgm:txLinClrLst/>
+    <dgm:txFillClrLst meth="repeat">
+      <a:schemeClr val="dk1"/>
+    </dgm:txFillClrLst>
+    <dgm:txEffectClrLst/>
+  </dgm:styleLbl>
+  <dgm:styleLbl name="bgAcc1">
+    <dgm:fillClrLst meth="repeat">
+      <a:schemeClr val="lt1">
+        <a:alpha val="90000"/>
+      </a:schemeClr>
+    </dgm:fillClrLst>
+    <dgm:linClrLst meth="repeat">
+      <a:schemeClr val="accent2"/>
+      <a:schemeClr val="accent3"/>
+      <a:schemeClr val="accent4"/>
+      <a:schemeClr val="accent5"/>
+      <a:schemeClr val="accent6"/>
+    </dgm:linClrLst>
+    <dgm:effectClrLst/>
+    <dgm:txLinClrLst/>
+    <dgm:txFillClrLst meth="repeat">
+      <a:schemeClr val="dk1"/>
+    </dgm:txFillClrLst>
+    <dgm:txEffectClrLst/>
+  </dgm:styleLbl>
+  <dgm:styleLbl name="solidFgAcc1">
+    <dgm:fillClrLst meth="repeat">
+      <a:schemeClr val="lt1"/>
+    </dgm:fillClrLst>
+    <dgm:linClrLst meth="repeat">
+      <a:schemeClr val="accent2"/>
+      <a:schemeClr val="accent3"/>
+      <a:schemeClr val="accent4"/>
+      <a:schemeClr val="accent5"/>
+      <a:schemeClr val="accent6"/>
+    </dgm:linClrLst>
+    <dgm:effectClrLst/>
+    <dgm:txLinClrLst/>
+    <dgm:txFillClrLst meth="repeat">
+      <a:schemeClr val="dk1"/>
+    </dgm:txFillClrLst>
+    <dgm:txEffectClrLst/>
+  </dgm:styleLbl>
+  <dgm:styleLbl name="solidAlignAcc1">
+    <dgm:fillClrLst meth="repeat">
+      <a:schemeClr val="lt1"/>
+    </dgm:fillClrLst>
+    <dgm:linClrLst meth="repeat">
+      <a:schemeClr val="accent2"/>
+      <a:schemeClr val="accent3"/>
+      <a:schemeClr val="accent4"/>
+      <a:schemeClr val="accent5"/>
+      <a:schemeClr val="accent6"/>
+    </dgm:linClrLst>
+    <dgm:effectClrLst/>
+    <dgm:txLinClrLst/>
+    <dgm:txFillClrLst meth="repeat">
+      <a:schemeClr val="dk1"/>
+    </dgm:txFillClrLst>
+    <dgm:txEffectClrLst/>
+  </dgm:styleLbl>
+  <dgm:styleLbl name="solidBgAcc1">
+    <dgm:fillClrLst meth="repeat">
+      <a:schemeClr val="lt1"/>
+    </dgm:fillClrLst>
+    <dgm:linClrLst meth="repeat">
+      <a:schemeClr val="accent2"/>
+      <a:schemeClr val="accent3"/>
+      <a:schemeClr val="accent4"/>
+      <a:schemeClr val="accent5"/>
+      <a:schemeClr val="accent6"/>
+    </dgm:linClrLst>
+    <dgm:effectClrLst/>
+    <dgm:txLinClrLst/>
+    <dgm:txFillClrLst meth="repeat">
+      <a:schemeClr val="dk1"/>
+    </dgm:txFillClrLst>
+    <dgm:txEffectClrLst/>
+  </dgm:styleLbl>
+  <dgm:styleLbl name="fgAccFollowNode1">
+    <dgm:fillClrLst meth="repeat">
+      <a:schemeClr val="accent2">
+        <a:tint val="40000"/>
+        <a:alpha val="90000"/>
+      </a:schemeClr>
+      <a:schemeClr val="accent3">
+        <a:tint val="40000"/>
+        <a:alpha val="90000"/>
+      </a:schemeClr>
+      <a:schemeClr val="accent4">
+        <a:tint val="40000"/>
+        <a:alpha val="90000"/>
+      </a:schemeClr>
+      <a:schemeClr val="accent5">
+        <a:tint val="40000"/>
+        <a:alpha val="90000"/>
+      </a:schemeClr>
+      <a:schemeClr val="accent6">
+        <a:tint val="40000"/>
+        <a:alpha val="90000"/>
+      </a:schemeClr>
+    </dgm:fillClrLst>
+    <dgm:linClrLst meth="repeat">
+      <a:schemeClr val="accent2">
+        <a:tint val="40000"/>
+        <a:alpha val="90000"/>
+      </a:schemeClr>
+      <a:schemeClr val="accent3">
+        <a:tint val="40000"/>
+        <a:alpha val="90000"/>
+      </a:schemeClr>
+      <a:schemeClr val="accent4">
+        <a:tint val="40000"/>
+        <a:alpha val="90000"/>
+      </a:schemeClr>
+      <a:schemeClr val="accent5">
+        <a:tint val="40000"/>
+        <a:alpha val="90000"/>
+      </a:schemeClr>
+      <a:schemeClr val="accent6">
+        <a:tint val="40000"/>
+        <a:alpha val="90000"/>
+      </a:schemeClr>
+    </dgm:linClrLst>
+    <dgm:effectClrLst/>
+    <dgm:txLinClrLst/>
+    <dgm:txFillClrLst meth="repeat">
+      <a:schemeClr val="dk1"/>
+    </dgm:txFillClrLst>
+    <dgm:txEffectClrLst/>
+  </dgm:styleLbl>
+  <dgm:styleLbl name="alignAccFollowNode1">
+    <dgm:fillClrLst meth="repeat">
+      <a:schemeClr val="accent2">
+        <a:tint val="40000"/>
+        <a:alpha val="90000"/>
+      </a:schemeClr>
+      <a:schemeClr val="accent3">
+        <a:tint val="40000"/>
+        <a:alpha val="90000"/>
+      </a:schemeClr>
+      <a:schemeClr val="accent4">
+        <a:tint val="40000"/>
+        <a:alpha val="90000"/>
+      </a:schemeClr>
+      <a:schemeClr val="accent5">
+        <a:tint val="40000"/>
+        <a:alpha val="90000"/>
+      </a:schemeClr>
+      <a:schemeClr val="accent6">
+        <a:tint val="40000"/>
+        <a:alpha val="90000"/>
+      </a:schemeClr>
+    </dgm:fillClrLst>
+    <dgm:linClrLst meth="repeat">
+      <a:schemeClr val="accent2">
+        <a:tint val="40000"/>
+        <a:alpha val="90000"/>
+      </a:schemeClr>
+      <a:schemeClr val="accent3">
+        <a:tint val="40000"/>
+        <a:alpha val="90000"/>
+      </a:schemeClr>
+      <a:schemeClr val="accent4">
+        <a:tint val="40000"/>
+        <a:alpha val="90000"/>
+      </a:schemeClr>
+      <a:schemeClr val="accent5">
+        <a:tint val="40000"/>
+        <a:alpha val="90000"/>
+      </a:schemeClr>
+      <a:schemeClr val="accent6">
+        <a:tint val="40000"/>
+        <a:alpha val="90000"/>
+      </a:schemeClr>
+    </dgm:linClrLst>
+    <dgm:effectClrLst/>
+    <dgm:txLinClrLst/>
+    <dgm:txFillClrLst meth="repeat">
+      <a:schemeClr val="dk1"/>
+    </dgm:txFillClrLst>
+    <dgm:txEffectClrLst/>
+  </dgm:styleLbl>
+  <dgm:styleLbl name="bgAccFollowNode1">
+    <dgm:fillClrLst meth="repeat">
+      <a:schemeClr val="accent2">
+        <a:tint val="40000"/>
+        <a:alpha val="90000"/>
+      </a:schemeClr>
+      <a:schemeClr val="accent3">
+        <a:tint val="40000"/>
+        <a:alpha val="90000"/>
+      </a:schemeClr>
+      <a:schemeClr val="accent4">
+        <a:tint val="40000"/>
+        <a:alpha val="90000"/>
+      </a:schemeClr>
+      <a:schemeClr val="accent5">
+        <a:tint val="40000"/>
+        <a:alpha val="90000"/>
+      </a:schemeClr>
+      <a:schemeClr val="accent6">
+        <a:tint val="40000"/>
+        <a:alpha val="90000"/>
+      </a:schemeClr>
+    </dgm:fillClrLst>
+    <dgm:linClrLst meth="repeat">
+      <a:schemeClr val="accent2">
+        <a:tint val="40000"/>
+        <a:alpha val="90000"/>
+      </a:schemeClr>
+      <a:schemeClr val="accent3">
+        <a:tint val="40000"/>
+        <a:alpha val="90000"/>
+      </a:schemeClr>
+      <a:schemeClr val="accent4">
+        <a:tint val="40000"/>
+        <a:alpha val="90000"/>
+      </a:schemeClr>
+      <a:schemeClr val="accent5">
+        <a:tint val="40000"/>
+        <a:alpha val="90000"/>
+      </a:schemeClr>
+      <a:schemeClr val="accent6">
+        <a:tint val="40000"/>
+        <a:alpha val="90000"/>
+      </a:schemeClr>
+    </dgm:linClrLst>
+    <dgm:effectClrLst/>
+    <dgm:txLinClrLst/>
+    <dgm:txFillClrLst meth="repeat">
+      <a:schemeClr val="dk1"/>
+    </dgm:txFillClrLst>
+    <dgm:txEffectClrLst/>
+  </dgm:styleLbl>
+  <dgm:styleLbl name="fgAcc0">
+    <dgm:fillClrLst meth="repeat">
+      <a:schemeClr val="lt1">
+        <a:alpha val="90000"/>
+      </a:schemeClr>
+    </dgm:fillClrLst>
+    <dgm:linClrLst>
+      <a:schemeClr val="accent1"/>
+    </dgm:linClrLst>
+    <dgm:effectClrLst/>
+    <dgm:txLinClrLst/>
+    <dgm:txFillClrLst meth="repeat">
+      <a:schemeClr val="dk1"/>
+    </dgm:txFillClrLst>
+    <dgm:txEffectClrLst/>
+  </dgm:styleLbl>
+  <dgm:styleLbl name="fgAcc2">
+    <dgm:fillClrLst meth="repeat">
+      <a:schemeClr val="lt1">
+        <a:alpha val="90000"/>
+      </a:schemeClr>
+    </dgm:fillClrLst>
+    <dgm:linClrLst>
+      <a:schemeClr val="accent2"/>
+    </dgm:linClrLst>
+    <dgm:effectClrLst/>
+    <dgm:txLinClrLst/>
+    <dgm:txFillClrLst meth="repeat">
+      <a:schemeClr val="dk1"/>
+    </dgm:txFillClrLst>
+    <dgm:txEffectClrLst/>
+  </dgm:styleLbl>
+  <dgm:styleLbl name="fgAcc3">
+    <dgm:fillClrLst meth="repeat">
+      <a:schemeClr val="lt1">
+        <a:alpha val="90000"/>
+      </a:schemeClr>
+    </dgm:fillClrLst>
+    <dgm:linClrLst>
+      <a:schemeClr val="accent3"/>
+    </dgm:linClrLst>
+    <dgm:effectClrLst/>
+    <dgm:txLinClrLst/>
+    <dgm:txFillClrLst meth="repeat">
+      <a:schemeClr val="dk1"/>
+    </dgm:txFillClrLst>
+    <dgm:txEffectClrLst/>
+  </dgm:styleLbl>
+  <dgm:styleLbl name="fgAcc4">
+    <dgm:fillClrLst meth="repeat">
+      <a:schemeClr val="lt1">
+        <a:alpha val="90000"/>
+      </a:schemeClr>
+    </dgm:fillClrLst>
+    <dgm:linClrLst>
+      <a:schemeClr val="accent4"/>
+    </dgm:linClrLst>
+    <dgm:effectClrLst/>
+    <dgm:txLinClrLst/>
+    <dgm:txFillClrLst meth="repeat">
+      <a:schemeClr val="dk1"/>
+    </dgm:txFillClrLst>
+    <dgm:txEffectClrLst/>
+  </dgm:styleLbl>
+  <dgm:styleLbl name="bgShp">
+    <dgm:fillClrLst meth="repeat">
+      <a:schemeClr val="accent2">
+        <a:tint val="40000"/>
+      </a:schemeClr>
+    </dgm:fillClrLst>
+    <dgm:linClrLst meth="repeat">
+      <a:schemeClr val="dk1"/>
+    </dgm:linClrLst>
+    <dgm:effectClrLst/>
+    <dgm:txLinClrLst/>
+    <dgm:txFillClrLst meth="repeat">
+      <a:schemeClr val="dk1"/>
+    </dgm:txFillClrLst>
+    <dgm:txEffectClrLst/>
+  </dgm:styleLbl>
+  <dgm:styleLbl name="dkBgShp">
+    <dgm:fillClrLst meth="repeat">
+      <a:schemeClr val="accent2">
+        <a:shade val="90000"/>
+      </a:schemeClr>
+    </dgm:fillClrLst>
+    <dgm:linClrLst meth="repeat">
+      <a:schemeClr val="dk1"/>
+    </dgm:linClrLst>
+    <dgm:effectClrLst/>
+    <dgm:txLinClrLst/>
+    <dgm:txFillClrLst meth="repeat">
+      <a:schemeClr val="lt1"/>
+    </dgm:txFillClrLst>
+    <dgm:txEffectClrLst/>
+  </dgm:styleLbl>
+  <dgm:styleLbl name="trBgShp">
+    <dgm:fillClrLst meth="repeat">
+      <a:schemeClr val="accent1">
+        <a:tint val="50000"/>
+        <a:alpha val="40000"/>
+      </a:schemeClr>
+    </dgm:fillClrLst>
+    <dgm:linClrLst meth="repeat">
+      <a:schemeClr val="accent2"/>
+    </dgm:linClrLst>
+    <dgm:effectClrLst/>
+    <dgm:txLinClrLst/>
+    <dgm:txFillClrLst meth="repeat">
+      <a:schemeClr val="lt1"/>
+    </dgm:txFillClrLst>
+    <dgm:txEffectClrLst/>
+  </dgm:styleLbl>
+  <dgm:styleLbl name="fgShp">
+    <dgm:fillClrLst meth="repeat">
+      <a:schemeClr val="accent2">
+        <a:tint val="40000"/>
+      </a:schemeClr>
+    </dgm:fillClrLst>
+    <dgm:linClrLst meth="repeat">
+      <a:schemeClr val="lt1"/>
+    </dgm:linClrLst>
+    <dgm:effectClrLst/>
+    <dgm:txLinClrLst/>
+    <dgm:txFillClrLst meth="repeat">
+      <a:schemeClr val="dk1"/>
+    </dgm:txFillClrLst>
+    <dgm:txEffectClrLst/>
+  </dgm:styleLbl>
+  <dgm:styleLbl name="revTx">
+    <dgm:fillClrLst meth="repeat">
+      <a:schemeClr val="lt1">
+        <a:alpha val="0"/>
+      </a:schemeClr>
+    </dgm:fillClrLst>
+    <dgm:linClrLst meth="repeat">
+      <a:schemeClr val="dk1">
+        <a:alpha val="0"/>
+      </a:schemeClr>
+    </dgm:linClrLst>
+    <dgm:effectClrLst/>
+    <dgm:txLinClrLst/>
+    <dgm:txFillClrLst meth="repeat">
+      <a:schemeClr val="tx1"/>
+    </dgm:txFillClrLst>
+    <dgm:txEffectClrLst/>
+  </dgm:styleLbl>
+</dgm:colorsDef>
+</file>
+
+<file path=ppt/diagrams/colors3.xml><?xml version="1.0" encoding="utf-8"?>
 <dgm:colorsDef xmlns:dgm="http://schemas.openxmlformats.org/drawingml/2006/diagram" xmlns:a="http://schemas.openxmlformats.org/drawingml/2006/main" uniqueId="urn:microsoft.com/office/officeart/2005/8/colors/colorful1">
   <dgm:title val=""/>
   <dgm:desc val=""/>
@@ -2873,6 +3791,319 @@
 <file path=ppt/diagrams/data2.xml><?xml version="1.0" encoding="utf-8"?>
 <dgm:dataModel xmlns:dgm="http://schemas.openxmlformats.org/drawingml/2006/diagram" xmlns:a="http://schemas.openxmlformats.org/drawingml/2006/main">
   <dgm:ptLst>
+    <dgm:pt modelId="{597B8B57-8ABF-43B0-97AD-4F18BBCE21D9}" type="doc">
+      <dgm:prSet loTypeId="urn:microsoft.com/office/officeart/2005/8/layout/arrow2" loCatId="process" qsTypeId="urn:microsoft.com/office/officeart/2005/8/quickstyle/simple1" qsCatId="simple" csTypeId="urn:microsoft.com/office/officeart/2005/8/colors/colorful1" csCatId="colorful" phldr="1"/>
+      <dgm:spPr/>
+      <dgm:t>
+        <a:bodyPr/>
+        <a:lstStyle/>
+        <a:p>
+          <a:endParaRPr lang="en-IN"/>
+        </a:p>
+      </dgm:t>
+    </dgm:pt>
+    <dgm:pt modelId="{2892A328-D9BB-41F2-9105-FB200857D452}">
+      <dgm:prSet phldrT="[Text]" phldr="0"/>
+      <dgm:spPr/>
+      <dgm:t>
+        <a:bodyPr/>
+        <a:lstStyle/>
+        <a:p>
+          <a:r>
+            <a:rPr lang="en-US" dirty="0"/>
+            <a:t>Observe </a:t>
+          </a:r>
+          <a:endParaRPr lang="en-IN" dirty="0"/>
+        </a:p>
+      </dgm:t>
+    </dgm:pt>
+    <dgm:pt modelId="{18FEEB44-162F-4A22-814F-A05EC35C22EB}" type="parTrans" cxnId="{006BEDDB-249E-4FE1-8604-86F0AD977961}">
+      <dgm:prSet/>
+      <dgm:spPr/>
+      <dgm:t>
+        <a:bodyPr/>
+        <a:lstStyle/>
+        <a:p>
+          <a:endParaRPr lang="en-IN"/>
+        </a:p>
+      </dgm:t>
+    </dgm:pt>
+    <dgm:pt modelId="{7F0D3345-8C90-4A6D-A04F-2E9C5F783D78}" type="sibTrans" cxnId="{006BEDDB-249E-4FE1-8604-86F0AD977961}">
+      <dgm:prSet/>
+      <dgm:spPr/>
+      <dgm:t>
+        <a:bodyPr/>
+        <a:lstStyle/>
+        <a:p>
+          <a:endParaRPr lang="en-IN"/>
+        </a:p>
+      </dgm:t>
+    </dgm:pt>
+    <dgm:pt modelId="{FC3DF80D-1E51-4262-ADBE-05E5F8AB55F7}">
+      <dgm:prSet phldrT="[Text]" phldr="0"/>
+      <dgm:spPr/>
+      <dgm:t>
+        <a:bodyPr/>
+        <a:lstStyle/>
+        <a:p>
+          <a:r>
+            <a:rPr lang="en-US" dirty="0"/>
+            <a:t>Decide</a:t>
+          </a:r>
+          <a:endParaRPr lang="en-IN" dirty="0"/>
+        </a:p>
+      </dgm:t>
+    </dgm:pt>
+    <dgm:pt modelId="{403E638A-EE75-4149-9911-4B8554E136A0}" type="parTrans" cxnId="{8ECA33F1-7676-4707-9EDE-6D6FD13FFFA1}">
+      <dgm:prSet/>
+      <dgm:spPr/>
+      <dgm:t>
+        <a:bodyPr/>
+        <a:lstStyle/>
+        <a:p>
+          <a:endParaRPr lang="en-IN"/>
+        </a:p>
+      </dgm:t>
+    </dgm:pt>
+    <dgm:pt modelId="{4504205F-ACE1-4657-AE3C-AC8354223CBF}" type="sibTrans" cxnId="{8ECA33F1-7676-4707-9EDE-6D6FD13FFFA1}">
+      <dgm:prSet/>
+      <dgm:spPr/>
+      <dgm:t>
+        <a:bodyPr/>
+        <a:lstStyle/>
+        <a:p>
+          <a:endParaRPr lang="en-IN"/>
+        </a:p>
+      </dgm:t>
+    </dgm:pt>
+    <dgm:pt modelId="{9D816CEB-3DF1-41EA-B79B-60F622DCB7B0}">
+      <dgm:prSet phldrT="[Text]" phldr="0"/>
+      <dgm:spPr/>
+      <dgm:t>
+        <a:bodyPr/>
+        <a:lstStyle/>
+        <a:p>
+          <a:r>
+            <a:rPr lang="en-US" dirty="0"/>
+            <a:t>Generate</a:t>
+          </a:r>
+          <a:endParaRPr lang="en-IN" dirty="0"/>
+        </a:p>
+      </dgm:t>
+    </dgm:pt>
+    <dgm:pt modelId="{8583E8B3-2447-4364-A4B4-94D2EBD1A92B}" type="parTrans" cxnId="{F9BC74E2-55C0-4978-A7CB-4DA6A0B4DD3E}">
+      <dgm:prSet/>
+      <dgm:spPr/>
+      <dgm:t>
+        <a:bodyPr/>
+        <a:lstStyle/>
+        <a:p>
+          <a:endParaRPr lang="en-IN"/>
+        </a:p>
+      </dgm:t>
+    </dgm:pt>
+    <dgm:pt modelId="{73776B80-BDE3-4A93-86A7-C6AF779F6F98}" type="sibTrans" cxnId="{F9BC74E2-55C0-4978-A7CB-4DA6A0B4DD3E}">
+      <dgm:prSet/>
+      <dgm:spPr/>
+      <dgm:t>
+        <a:bodyPr/>
+        <a:lstStyle/>
+        <a:p>
+          <a:endParaRPr lang="en-IN"/>
+        </a:p>
+      </dgm:t>
+    </dgm:pt>
+    <dgm:pt modelId="{6B3E49A4-6E49-48C1-8C25-5F38E8D977E9}">
+      <dgm:prSet phldrT="[Text]" phldr="0"/>
+      <dgm:spPr/>
+      <dgm:t>
+        <a:bodyPr/>
+        <a:lstStyle/>
+        <a:p>
+          <a:r>
+            <a:rPr lang="en-US"/>
+            <a:t>Measure</a:t>
+          </a:r>
+          <a:endParaRPr lang="en-IN"/>
+        </a:p>
+      </dgm:t>
+    </dgm:pt>
+    <dgm:pt modelId="{5AC99B7C-45FD-4028-9113-5D8A6E49FD5B}" type="parTrans" cxnId="{0EF07EEE-B4CE-47A9-B606-116383C1B147}">
+      <dgm:prSet/>
+      <dgm:spPr/>
+      <dgm:t>
+        <a:bodyPr/>
+        <a:lstStyle/>
+        <a:p>
+          <a:endParaRPr lang="en-IN"/>
+        </a:p>
+      </dgm:t>
+    </dgm:pt>
+    <dgm:pt modelId="{F7531BC0-34EF-4AD1-8D8B-84410F98616C}" type="sibTrans" cxnId="{0EF07EEE-B4CE-47A9-B606-116383C1B147}">
+      <dgm:prSet/>
+      <dgm:spPr/>
+      <dgm:t>
+        <a:bodyPr/>
+        <a:lstStyle/>
+        <a:p>
+          <a:endParaRPr lang="en-IN"/>
+        </a:p>
+      </dgm:t>
+    </dgm:pt>
+    <dgm:pt modelId="{FE7393A4-2475-4B46-A360-8B12A2043EF5}">
+      <dgm:prSet phldrT="[Text]" phldr="0"/>
+      <dgm:spPr/>
+      <dgm:t>
+        <a:bodyPr/>
+        <a:lstStyle/>
+        <a:p>
+          <a:r>
+            <a:rPr lang="en-US"/>
+            <a:t>Check &amp; change</a:t>
+          </a:r>
+          <a:endParaRPr lang="en-IN" dirty="0"/>
+        </a:p>
+      </dgm:t>
+    </dgm:pt>
+    <dgm:pt modelId="{3F0A5809-2F1C-48F3-AF38-6AD2F5674F50}" type="parTrans" cxnId="{D25D807D-EFDA-4221-8FAD-4F1B4B5A8900}">
+      <dgm:prSet/>
+      <dgm:spPr/>
+      <dgm:t>
+        <a:bodyPr/>
+        <a:lstStyle/>
+        <a:p>
+          <a:endParaRPr lang="en-IN"/>
+        </a:p>
+      </dgm:t>
+    </dgm:pt>
+    <dgm:pt modelId="{E6BB07A4-D479-417C-A05D-3CC2DDB7A9DF}" type="sibTrans" cxnId="{D25D807D-EFDA-4221-8FAD-4F1B4B5A8900}">
+      <dgm:prSet/>
+      <dgm:spPr/>
+      <dgm:t>
+        <a:bodyPr/>
+        <a:lstStyle/>
+        <a:p>
+          <a:endParaRPr lang="en-IN"/>
+        </a:p>
+      </dgm:t>
+    </dgm:pt>
+    <dgm:pt modelId="{C36D9FF5-9FA3-46BF-A689-631682DCA18D}" type="pres">
+      <dgm:prSet presAssocID="{597B8B57-8ABF-43B0-97AD-4F18BBCE21D9}" presName="arrowDiagram" presStyleCnt="0">
+        <dgm:presLayoutVars>
+          <dgm:chMax val="5"/>
+          <dgm:dir/>
+          <dgm:resizeHandles val="exact"/>
+        </dgm:presLayoutVars>
+      </dgm:prSet>
+      <dgm:spPr/>
+    </dgm:pt>
+    <dgm:pt modelId="{760D4E85-113A-4152-A50B-7C8DDA2B9D71}" type="pres">
+      <dgm:prSet presAssocID="{597B8B57-8ABF-43B0-97AD-4F18BBCE21D9}" presName="arrow" presStyleLbl="bgShp" presStyleIdx="0" presStyleCnt="1"/>
+      <dgm:spPr/>
+    </dgm:pt>
+    <dgm:pt modelId="{DFA862D6-9AC8-40F0-A295-A743BB1987EE}" type="pres">
+      <dgm:prSet presAssocID="{597B8B57-8ABF-43B0-97AD-4F18BBCE21D9}" presName="arrowDiagram5" presStyleCnt="0"/>
+      <dgm:spPr/>
+    </dgm:pt>
+    <dgm:pt modelId="{6B52C549-4AD4-48E1-8214-2D18E5970FB2}" type="pres">
+      <dgm:prSet presAssocID="{2892A328-D9BB-41F2-9105-FB200857D452}" presName="bullet5a" presStyleLbl="node1" presStyleIdx="0" presStyleCnt="5"/>
+      <dgm:spPr/>
+    </dgm:pt>
+    <dgm:pt modelId="{60F29F0D-ED02-4EB4-8129-3753722CBF21}" type="pres">
+      <dgm:prSet presAssocID="{2892A328-D9BB-41F2-9105-FB200857D452}" presName="textBox5a" presStyleLbl="revTx" presStyleIdx="0" presStyleCnt="5">
+        <dgm:presLayoutVars>
+          <dgm:bulletEnabled val="1"/>
+        </dgm:presLayoutVars>
+      </dgm:prSet>
+      <dgm:spPr/>
+    </dgm:pt>
+    <dgm:pt modelId="{56C8E695-C8EB-4056-9291-DB0391E0DA4B}" type="pres">
+      <dgm:prSet presAssocID="{6B3E49A4-6E49-48C1-8C25-5F38E8D977E9}" presName="bullet5b" presStyleLbl="node1" presStyleIdx="1" presStyleCnt="5"/>
+      <dgm:spPr/>
+    </dgm:pt>
+    <dgm:pt modelId="{9C4AD88D-E58F-44D3-8EE2-230C265D077C}" type="pres">
+      <dgm:prSet presAssocID="{6B3E49A4-6E49-48C1-8C25-5F38E8D977E9}" presName="textBox5b" presStyleLbl="revTx" presStyleIdx="1" presStyleCnt="5">
+        <dgm:presLayoutVars>
+          <dgm:bulletEnabled val="1"/>
+        </dgm:presLayoutVars>
+      </dgm:prSet>
+      <dgm:spPr/>
+    </dgm:pt>
+    <dgm:pt modelId="{D8A35392-E98B-4BE1-B5C6-3281B597F807}" type="pres">
+      <dgm:prSet presAssocID="{FC3DF80D-1E51-4262-ADBE-05E5F8AB55F7}" presName="bullet5c" presStyleLbl="node1" presStyleIdx="2" presStyleCnt="5"/>
+      <dgm:spPr/>
+    </dgm:pt>
+    <dgm:pt modelId="{94BAFDB8-0FE7-4C03-8C47-19F2EDD1C27E}" type="pres">
+      <dgm:prSet presAssocID="{FC3DF80D-1E51-4262-ADBE-05E5F8AB55F7}" presName="textBox5c" presStyleLbl="revTx" presStyleIdx="2" presStyleCnt="5">
+        <dgm:presLayoutVars>
+          <dgm:bulletEnabled val="1"/>
+        </dgm:presLayoutVars>
+      </dgm:prSet>
+      <dgm:spPr/>
+    </dgm:pt>
+    <dgm:pt modelId="{D32310BC-F408-4A97-97F1-DD75701E3448}" type="pres">
+      <dgm:prSet presAssocID="{9D816CEB-3DF1-41EA-B79B-60F622DCB7B0}" presName="bullet5d" presStyleLbl="node1" presStyleIdx="3" presStyleCnt="5"/>
+      <dgm:spPr/>
+    </dgm:pt>
+    <dgm:pt modelId="{763EC63D-B622-455C-B1D8-504831082AFA}" type="pres">
+      <dgm:prSet presAssocID="{9D816CEB-3DF1-41EA-B79B-60F622DCB7B0}" presName="textBox5d" presStyleLbl="revTx" presStyleIdx="3" presStyleCnt="5">
+        <dgm:presLayoutVars>
+          <dgm:bulletEnabled val="1"/>
+        </dgm:presLayoutVars>
+      </dgm:prSet>
+      <dgm:spPr/>
+    </dgm:pt>
+    <dgm:pt modelId="{71EC9318-F2F0-4594-82BC-A0347A19D441}" type="pres">
+      <dgm:prSet presAssocID="{FE7393A4-2475-4B46-A360-8B12A2043EF5}" presName="bullet5e" presStyleLbl="node1" presStyleIdx="4" presStyleCnt="5"/>
+      <dgm:spPr/>
+    </dgm:pt>
+    <dgm:pt modelId="{85057D00-CCE9-42AA-82E2-C96B95C00E93}" type="pres">
+      <dgm:prSet presAssocID="{FE7393A4-2475-4B46-A360-8B12A2043EF5}" presName="textBox5e" presStyleLbl="revTx" presStyleIdx="4" presStyleCnt="5">
+        <dgm:presLayoutVars>
+          <dgm:bulletEnabled val="1"/>
+        </dgm:presLayoutVars>
+      </dgm:prSet>
+      <dgm:spPr/>
+    </dgm:pt>
+  </dgm:ptLst>
+  <dgm:cxnLst>
+    <dgm:cxn modelId="{0A5C1431-6EBE-496B-9816-E6F4D064248A}" type="presOf" srcId="{2892A328-D9BB-41F2-9105-FB200857D452}" destId="{60F29F0D-ED02-4EB4-8129-3753722CBF21}" srcOrd="0" destOrd="0" presId="urn:microsoft.com/office/officeart/2005/8/layout/arrow2"/>
+    <dgm:cxn modelId="{D25D807D-EFDA-4221-8FAD-4F1B4B5A8900}" srcId="{597B8B57-8ABF-43B0-97AD-4F18BBCE21D9}" destId="{FE7393A4-2475-4B46-A360-8B12A2043EF5}" srcOrd="4" destOrd="0" parTransId="{3F0A5809-2F1C-48F3-AF38-6AD2F5674F50}" sibTransId="{E6BB07A4-D479-417C-A05D-3CC2DDB7A9DF}"/>
+    <dgm:cxn modelId="{EBEBD084-A982-40CE-AE0B-5E74459B55CF}" type="presOf" srcId="{597B8B57-8ABF-43B0-97AD-4F18BBCE21D9}" destId="{C36D9FF5-9FA3-46BF-A689-631682DCA18D}" srcOrd="0" destOrd="0" presId="urn:microsoft.com/office/officeart/2005/8/layout/arrow2"/>
+    <dgm:cxn modelId="{5BA7D487-155B-421A-925A-47DDFFC163E9}" type="presOf" srcId="{FE7393A4-2475-4B46-A360-8B12A2043EF5}" destId="{85057D00-CCE9-42AA-82E2-C96B95C00E93}" srcOrd="0" destOrd="0" presId="urn:microsoft.com/office/officeart/2005/8/layout/arrow2"/>
+    <dgm:cxn modelId="{759D59A5-3BE3-4CB2-ADB0-E520ADE62032}" type="presOf" srcId="{FC3DF80D-1E51-4262-ADBE-05E5F8AB55F7}" destId="{94BAFDB8-0FE7-4C03-8C47-19F2EDD1C27E}" srcOrd="0" destOrd="0" presId="urn:microsoft.com/office/officeart/2005/8/layout/arrow2"/>
+    <dgm:cxn modelId="{F6525AB6-82F3-4147-A270-79F655CEC2AA}" type="presOf" srcId="{6B3E49A4-6E49-48C1-8C25-5F38E8D977E9}" destId="{9C4AD88D-E58F-44D3-8EE2-230C265D077C}" srcOrd="0" destOrd="0" presId="urn:microsoft.com/office/officeart/2005/8/layout/arrow2"/>
+    <dgm:cxn modelId="{F034A1CB-2683-402A-9EEC-EF5542E705C8}" type="presOf" srcId="{9D816CEB-3DF1-41EA-B79B-60F622DCB7B0}" destId="{763EC63D-B622-455C-B1D8-504831082AFA}" srcOrd="0" destOrd="0" presId="urn:microsoft.com/office/officeart/2005/8/layout/arrow2"/>
+    <dgm:cxn modelId="{006BEDDB-249E-4FE1-8604-86F0AD977961}" srcId="{597B8B57-8ABF-43B0-97AD-4F18BBCE21D9}" destId="{2892A328-D9BB-41F2-9105-FB200857D452}" srcOrd="0" destOrd="0" parTransId="{18FEEB44-162F-4A22-814F-A05EC35C22EB}" sibTransId="{7F0D3345-8C90-4A6D-A04F-2E9C5F783D78}"/>
+    <dgm:cxn modelId="{F9BC74E2-55C0-4978-A7CB-4DA6A0B4DD3E}" srcId="{597B8B57-8ABF-43B0-97AD-4F18BBCE21D9}" destId="{9D816CEB-3DF1-41EA-B79B-60F622DCB7B0}" srcOrd="3" destOrd="0" parTransId="{8583E8B3-2447-4364-A4B4-94D2EBD1A92B}" sibTransId="{73776B80-BDE3-4A93-86A7-C6AF779F6F98}"/>
+    <dgm:cxn modelId="{0EF07EEE-B4CE-47A9-B606-116383C1B147}" srcId="{597B8B57-8ABF-43B0-97AD-4F18BBCE21D9}" destId="{6B3E49A4-6E49-48C1-8C25-5F38E8D977E9}" srcOrd="1" destOrd="0" parTransId="{5AC99B7C-45FD-4028-9113-5D8A6E49FD5B}" sibTransId="{F7531BC0-34EF-4AD1-8D8B-84410F98616C}"/>
+    <dgm:cxn modelId="{8ECA33F1-7676-4707-9EDE-6D6FD13FFFA1}" srcId="{597B8B57-8ABF-43B0-97AD-4F18BBCE21D9}" destId="{FC3DF80D-1E51-4262-ADBE-05E5F8AB55F7}" srcOrd="2" destOrd="0" parTransId="{403E638A-EE75-4149-9911-4B8554E136A0}" sibTransId="{4504205F-ACE1-4657-AE3C-AC8354223CBF}"/>
+    <dgm:cxn modelId="{AD60D308-613F-400D-B744-E313508B5848}" type="presParOf" srcId="{C36D9FF5-9FA3-46BF-A689-631682DCA18D}" destId="{760D4E85-113A-4152-A50B-7C8DDA2B9D71}" srcOrd="0" destOrd="0" presId="urn:microsoft.com/office/officeart/2005/8/layout/arrow2"/>
+    <dgm:cxn modelId="{52F04CB9-7925-449B-9C6A-60593CFA8972}" type="presParOf" srcId="{C36D9FF5-9FA3-46BF-A689-631682DCA18D}" destId="{DFA862D6-9AC8-40F0-A295-A743BB1987EE}" srcOrd="1" destOrd="0" presId="urn:microsoft.com/office/officeart/2005/8/layout/arrow2"/>
+    <dgm:cxn modelId="{DD55111D-D127-492D-9C25-775BBCA81170}" type="presParOf" srcId="{DFA862D6-9AC8-40F0-A295-A743BB1987EE}" destId="{6B52C549-4AD4-48E1-8214-2D18E5970FB2}" srcOrd="0" destOrd="0" presId="urn:microsoft.com/office/officeart/2005/8/layout/arrow2"/>
+    <dgm:cxn modelId="{74D6D4B2-F348-4BBC-9D52-9BB067D590E3}" type="presParOf" srcId="{DFA862D6-9AC8-40F0-A295-A743BB1987EE}" destId="{60F29F0D-ED02-4EB4-8129-3753722CBF21}" srcOrd="1" destOrd="0" presId="urn:microsoft.com/office/officeart/2005/8/layout/arrow2"/>
+    <dgm:cxn modelId="{78D74413-E7F9-4442-B9D5-3AB64677F888}" type="presParOf" srcId="{DFA862D6-9AC8-40F0-A295-A743BB1987EE}" destId="{56C8E695-C8EB-4056-9291-DB0391E0DA4B}" srcOrd="2" destOrd="0" presId="urn:microsoft.com/office/officeart/2005/8/layout/arrow2"/>
+    <dgm:cxn modelId="{1236918B-818C-4C12-B03B-2DD402EB368B}" type="presParOf" srcId="{DFA862D6-9AC8-40F0-A295-A743BB1987EE}" destId="{9C4AD88D-E58F-44D3-8EE2-230C265D077C}" srcOrd="3" destOrd="0" presId="urn:microsoft.com/office/officeart/2005/8/layout/arrow2"/>
+    <dgm:cxn modelId="{CA98FE49-2B5C-425D-AE0F-999404D40A58}" type="presParOf" srcId="{DFA862D6-9AC8-40F0-A295-A743BB1987EE}" destId="{D8A35392-E98B-4BE1-B5C6-3281B597F807}" srcOrd="4" destOrd="0" presId="urn:microsoft.com/office/officeart/2005/8/layout/arrow2"/>
+    <dgm:cxn modelId="{09D3936B-31AB-45D9-A337-1CCF5E02A5F7}" type="presParOf" srcId="{DFA862D6-9AC8-40F0-A295-A743BB1987EE}" destId="{94BAFDB8-0FE7-4C03-8C47-19F2EDD1C27E}" srcOrd="5" destOrd="0" presId="urn:microsoft.com/office/officeart/2005/8/layout/arrow2"/>
+    <dgm:cxn modelId="{B44AD7C3-215E-4EDB-9D6C-41E1632381B8}" type="presParOf" srcId="{DFA862D6-9AC8-40F0-A295-A743BB1987EE}" destId="{D32310BC-F408-4A97-97F1-DD75701E3448}" srcOrd="6" destOrd="0" presId="urn:microsoft.com/office/officeart/2005/8/layout/arrow2"/>
+    <dgm:cxn modelId="{0BED44F8-51FE-4C5D-9E3E-779EE58B074F}" type="presParOf" srcId="{DFA862D6-9AC8-40F0-A295-A743BB1987EE}" destId="{763EC63D-B622-455C-B1D8-504831082AFA}" srcOrd="7" destOrd="0" presId="urn:microsoft.com/office/officeart/2005/8/layout/arrow2"/>
+    <dgm:cxn modelId="{E6FD82FB-2B05-41FB-92CE-BA3976113221}" type="presParOf" srcId="{DFA862D6-9AC8-40F0-A295-A743BB1987EE}" destId="{71EC9318-F2F0-4594-82BC-A0347A19D441}" srcOrd="8" destOrd="0" presId="urn:microsoft.com/office/officeart/2005/8/layout/arrow2"/>
+    <dgm:cxn modelId="{639EADFC-71FB-4177-B856-466DC0E5BD15}" type="presParOf" srcId="{DFA862D6-9AC8-40F0-A295-A743BB1987EE}" destId="{85057D00-CCE9-42AA-82E2-C96B95C00E93}" srcOrd="9" destOrd="0" presId="urn:microsoft.com/office/officeart/2005/8/layout/arrow2"/>
+  </dgm:cxnLst>
+  <dgm:bg/>
+  <dgm:whole/>
+  <dgm:extLst>
+    <a:ext uri="http://schemas.microsoft.com/office/drawing/2008/diagram">
+      <dsp:dataModelExt xmlns:dsp="http://schemas.microsoft.com/office/drawing/2008/diagram" relId="rId11" minVer="http://schemas.openxmlformats.org/drawingml/2006/diagram"/>
+    </a:ext>
+  </dgm:extLst>
+</dgm:dataModel>
+</file>
+
+<file path=ppt/diagrams/data3.xml><?xml version="1.0" encoding="utf-8"?>
+<dgm:dataModel xmlns:dgm="http://schemas.openxmlformats.org/drawingml/2006/diagram" xmlns:a="http://schemas.openxmlformats.org/drawingml/2006/main">
+  <dgm:ptLst>
     <dgm:pt modelId="{D9CA4A52-4A6E-49B5-9F4E-9A0394EDFA34}" type="doc">
       <dgm:prSet loTypeId="urn:microsoft.com/office/officeart/2005/8/layout/bProcess4" loCatId="process" qsTypeId="urn:microsoft.com/office/officeart/2005/8/quickstyle/3d3" qsCatId="3D" csTypeId="urn:microsoft.com/office/officeart/2005/8/colors/colorful1" csCatId="colorful" phldr="1"/>
       <dgm:spPr/>
@@ -3358,8 +4589,8 @@
       </dsp:nvSpPr>
       <dsp:spPr>
         <a:xfrm rot="5400000">
-          <a:off x="2540177" y="700724"/>
-          <a:ext cx="1092915" cy="131727"/>
+          <a:off x="499204" y="701149"/>
+          <a:ext cx="1090840" cy="131823"/>
         </a:xfrm>
         <a:prstGeom prst="rect">
           <a:avLst/>
@@ -3399,8 +4630,8 @@
       </dsp:nvSpPr>
       <dsp:spPr>
         <a:xfrm>
-          <a:off x="2791498" y="3085"/>
-          <a:ext cx="1463642" cy="878185"/>
+          <a:off x="747837" y="1568"/>
+          <a:ext cx="1464707" cy="878824"/>
         </a:xfrm>
         <a:prstGeom prst="roundRect">
           <a:avLst>
@@ -3469,8 +4700,8 @@
         </a:p>
       </dsp:txBody>
       <dsp:txXfrm>
-        <a:off x="2817219" y="28806"/>
-        <a:ext cx="1412200" cy="826743"/>
+        <a:off x="773577" y="27308"/>
+        <a:ext cx="1413227" cy="827344"/>
       </dsp:txXfrm>
     </dsp:sp>
     <dsp:sp modelId="{69D5BE91-E880-4450-9018-5DC527E4DEDC}">
@@ -3480,8 +4711,8 @@
       </dsp:nvSpPr>
       <dsp:spPr>
         <a:xfrm rot="5400000">
-          <a:off x="2540177" y="1798456"/>
-          <a:ext cx="1092915" cy="131727"/>
+          <a:off x="499204" y="1799680"/>
+          <a:ext cx="1090840" cy="131823"/>
         </a:xfrm>
         <a:prstGeom prst="rect">
           <a:avLst/>
@@ -3521,8 +4752,8 @@
       </dsp:nvSpPr>
       <dsp:spPr>
         <a:xfrm>
-          <a:off x="2791498" y="1100817"/>
-          <a:ext cx="1463642" cy="878185"/>
+          <a:off x="747837" y="1100098"/>
+          <a:ext cx="1464707" cy="878824"/>
         </a:xfrm>
         <a:prstGeom prst="roundRect">
           <a:avLst>
@@ -3591,8 +4822,8 @@
         </a:p>
       </dsp:txBody>
       <dsp:txXfrm>
-        <a:off x="2817219" y="1126538"/>
-        <a:ext cx="1412200" cy="826743"/>
+        <a:off x="773577" y="1125838"/>
+        <a:ext cx="1413227" cy="827344"/>
       </dsp:txXfrm>
     </dsp:sp>
     <dsp:sp modelId="{974EF221-AAD4-4479-87D8-7B1DEE135B14}">
@@ -3602,8 +4833,8 @@
       </dsp:nvSpPr>
       <dsp:spPr>
         <a:xfrm rot="5400000">
-          <a:off x="2540177" y="2896188"/>
-          <a:ext cx="1092915" cy="131727"/>
+          <a:off x="499204" y="2898210"/>
+          <a:ext cx="1090840" cy="131823"/>
         </a:xfrm>
         <a:prstGeom prst="rect">
           <a:avLst/>
@@ -3643,8 +4874,8 @@
       </dsp:nvSpPr>
       <dsp:spPr>
         <a:xfrm>
-          <a:off x="2791498" y="2198549"/>
-          <a:ext cx="1463642" cy="878185"/>
+          <a:off x="747837" y="2198629"/>
+          <a:ext cx="1464707" cy="878824"/>
         </a:xfrm>
         <a:prstGeom prst="roundRect">
           <a:avLst>
@@ -3713,8 +4944,8 @@
         </a:p>
       </dsp:txBody>
       <dsp:txXfrm>
-        <a:off x="2817219" y="2224270"/>
-        <a:ext cx="1412200" cy="826743"/>
+        <a:off x="773577" y="2224369"/>
+        <a:ext cx="1413227" cy="827344"/>
       </dsp:txXfrm>
     </dsp:sp>
     <dsp:sp modelId="{45244466-F277-456F-89A1-DFA7D0B99049}">
@@ -3724,8 +4955,8 @@
       </dsp:nvSpPr>
       <dsp:spPr>
         <a:xfrm>
-          <a:off x="3089043" y="3445054"/>
-          <a:ext cx="1941828" cy="131727"/>
+          <a:off x="1048469" y="3447476"/>
+          <a:ext cx="1940370" cy="131823"/>
         </a:xfrm>
         <a:prstGeom prst="rect">
           <a:avLst/>
@@ -3765,8 +4996,8 @@
       </dsp:nvSpPr>
       <dsp:spPr>
         <a:xfrm>
-          <a:off x="2791498" y="3296281"/>
-          <a:ext cx="1463642" cy="878185"/>
+          <a:off x="747837" y="3297160"/>
+          <a:ext cx="1464707" cy="878824"/>
         </a:xfrm>
         <a:prstGeom prst="roundRect">
           <a:avLst>
@@ -3835,8 +5066,8 @@
         </a:p>
       </dsp:txBody>
       <dsp:txXfrm>
-        <a:off x="2817219" y="3322002"/>
-        <a:ext cx="1412200" cy="826743"/>
+        <a:off x="773577" y="3322900"/>
+        <a:ext cx="1413227" cy="827344"/>
       </dsp:txXfrm>
     </dsp:sp>
     <dsp:sp modelId="{3DC01944-9B13-4E3A-A785-2F59DF3BC203}">
@@ -3846,8 +5077,8 @@
       </dsp:nvSpPr>
       <dsp:spPr>
         <a:xfrm rot="16200000">
-          <a:off x="4486821" y="2896188"/>
-          <a:ext cx="1092915" cy="131727"/>
+          <a:off x="2447265" y="2898210"/>
+          <a:ext cx="1090840" cy="131823"/>
         </a:xfrm>
         <a:prstGeom prst="rect">
           <a:avLst/>
@@ -3887,8 +5118,8 @@
       </dsp:nvSpPr>
       <dsp:spPr>
         <a:xfrm>
-          <a:off x="4738143" y="3296281"/>
-          <a:ext cx="1463642" cy="878185"/>
+          <a:off x="2695898" y="3297160"/>
+          <a:ext cx="1464707" cy="878824"/>
         </a:xfrm>
         <a:prstGeom prst="roundRect">
           <a:avLst>
@@ -3957,8 +5188,8 @@
         </a:p>
       </dsp:txBody>
       <dsp:txXfrm>
-        <a:off x="4763864" y="3322002"/>
-        <a:ext cx="1412200" cy="826743"/>
+        <a:off x="2721638" y="3322900"/>
+        <a:ext cx="1413227" cy="827344"/>
       </dsp:txXfrm>
     </dsp:sp>
     <dsp:sp modelId="{5B9BD511-C794-44FB-87A3-BD3E1E4593A6}">
@@ -3968,8 +5199,8 @@
       </dsp:nvSpPr>
       <dsp:spPr>
         <a:xfrm rot="16200000">
-          <a:off x="4486821" y="1798456"/>
-          <a:ext cx="1092915" cy="131727"/>
+          <a:off x="2447265" y="1799680"/>
+          <a:ext cx="1090840" cy="131823"/>
         </a:xfrm>
         <a:prstGeom prst="rect">
           <a:avLst/>
@@ -4009,8 +5240,8 @@
       </dsp:nvSpPr>
       <dsp:spPr>
         <a:xfrm>
-          <a:off x="4738143" y="2198549"/>
-          <a:ext cx="1463642" cy="878185"/>
+          <a:off x="2695898" y="2198629"/>
+          <a:ext cx="1464707" cy="878824"/>
         </a:xfrm>
         <a:prstGeom prst="roundRect">
           <a:avLst>
@@ -4079,8 +5310,8 @@
         </a:p>
       </dsp:txBody>
       <dsp:txXfrm>
-        <a:off x="4763864" y="2224270"/>
-        <a:ext cx="1412200" cy="826743"/>
+        <a:off x="2721638" y="2224369"/>
+        <a:ext cx="1413227" cy="827344"/>
       </dsp:txXfrm>
     </dsp:sp>
     <dsp:sp modelId="{DFF9CE82-9D0C-4D28-ACEE-9C68C1FAA45E}">
@@ -4090,8 +5321,8 @@
       </dsp:nvSpPr>
       <dsp:spPr>
         <a:xfrm rot="16200000">
-          <a:off x="4486821" y="700724"/>
-          <a:ext cx="1092915" cy="131727"/>
+          <a:off x="2447265" y="701149"/>
+          <a:ext cx="1090840" cy="131823"/>
         </a:xfrm>
         <a:prstGeom prst="rect">
           <a:avLst/>
@@ -4131,8 +5362,8 @@
       </dsp:nvSpPr>
       <dsp:spPr>
         <a:xfrm>
-          <a:off x="4738143" y="1100817"/>
-          <a:ext cx="1463642" cy="878185"/>
+          <a:off x="2695898" y="1100098"/>
+          <a:ext cx="1464707" cy="878824"/>
         </a:xfrm>
         <a:prstGeom prst="roundRect">
           <a:avLst>
@@ -4201,8 +5432,8 @@
         </a:p>
       </dsp:txBody>
       <dsp:txXfrm>
-        <a:off x="4763864" y="1126538"/>
-        <a:ext cx="1412200" cy="826743"/>
+        <a:off x="2721638" y="1125838"/>
+        <a:ext cx="1413227" cy="827344"/>
       </dsp:txXfrm>
     </dsp:sp>
     <dsp:sp modelId="{5D224C09-6BAA-4D49-A98E-4282D430602F}">
@@ -4212,8 +5443,8 @@
       </dsp:nvSpPr>
       <dsp:spPr>
         <a:xfrm>
-          <a:off x="5035688" y="151857"/>
-          <a:ext cx="1941828" cy="131727"/>
+          <a:off x="2996530" y="151884"/>
+          <a:ext cx="1940370" cy="131823"/>
         </a:xfrm>
         <a:prstGeom prst="rect">
           <a:avLst/>
@@ -4253,8 +5484,8 @@
       </dsp:nvSpPr>
       <dsp:spPr>
         <a:xfrm>
-          <a:off x="4738143" y="3085"/>
-          <a:ext cx="1463642" cy="878185"/>
+          <a:off x="2695898" y="1568"/>
+          <a:ext cx="1464707" cy="878824"/>
         </a:xfrm>
         <a:prstGeom prst="roundRect">
           <a:avLst>
@@ -4323,8 +5554,8 @@
         </a:p>
       </dsp:txBody>
       <dsp:txXfrm>
-        <a:off x="4763864" y="28806"/>
-        <a:ext cx="1412200" cy="826743"/>
+        <a:off x="2721638" y="27308"/>
+        <a:ext cx="1413227" cy="827344"/>
       </dsp:txXfrm>
     </dsp:sp>
     <dsp:sp modelId="{6DBAE5DB-2626-43EC-8F17-E2E634408BEB}">
@@ -4334,8 +5565,8 @@
       </dsp:nvSpPr>
       <dsp:spPr>
         <a:xfrm rot="5400000">
-          <a:off x="6433466" y="700724"/>
-          <a:ext cx="1092915" cy="131727"/>
+          <a:off x="4395326" y="701149"/>
+          <a:ext cx="1090840" cy="131823"/>
         </a:xfrm>
         <a:prstGeom prst="rect">
           <a:avLst/>
@@ -4375,8 +5606,8 @@
       </dsp:nvSpPr>
       <dsp:spPr>
         <a:xfrm>
-          <a:off x="6684788" y="3085"/>
-          <a:ext cx="1463642" cy="878185"/>
+          <a:off x="4643959" y="1568"/>
+          <a:ext cx="1464707" cy="878824"/>
         </a:xfrm>
         <a:prstGeom prst="roundRect">
           <a:avLst>
@@ -4445,8 +5676,8 @@
         </a:p>
       </dsp:txBody>
       <dsp:txXfrm>
-        <a:off x="6710509" y="28806"/>
-        <a:ext cx="1412200" cy="826743"/>
+        <a:off x="4669699" y="27308"/>
+        <a:ext cx="1413227" cy="827344"/>
       </dsp:txXfrm>
     </dsp:sp>
     <dsp:sp modelId="{8D8EEF47-0CDE-4CB6-B5E5-CCE97825134F}">
@@ -4456,8 +5687,8 @@
       </dsp:nvSpPr>
       <dsp:spPr>
         <a:xfrm rot="5400000">
-          <a:off x="6433466" y="1798456"/>
-          <a:ext cx="1092915" cy="131727"/>
+          <a:off x="4395326" y="1799680"/>
+          <a:ext cx="1090840" cy="131823"/>
         </a:xfrm>
         <a:prstGeom prst="rect">
           <a:avLst/>
@@ -4497,8 +5728,8 @@
       </dsp:nvSpPr>
       <dsp:spPr>
         <a:xfrm>
-          <a:off x="6684788" y="1100817"/>
-          <a:ext cx="1463642" cy="878185"/>
+          <a:off x="4643959" y="1100098"/>
+          <a:ext cx="1464707" cy="878824"/>
         </a:xfrm>
         <a:prstGeom prst="roundRect">
           <a:avLst>
@@ -4567,8 +5798,8 @@
         </a:p>
       </dsp:txBody>
       <dsp:txXfrm>
-        <a:off x="6710509" y="1126538"/>
-        <a:ext cx="1412200" cy="826743"/>
+        <a:off x="4669699" y="1125838"/>
+        <a:ext cx="1413227" cy="827344"/>
       </dsp:txXfrm>
     </dsp:sp>
     <dsp:sp modelId="{95EEF692-EB93-4651-8758-F9CC59806012}">
@@ -4578,8 +5809,8 @@
       </dsp:nvSpPr>
       <dsp:spPr>
         <a:xfrm rot="5400000">
-          <a:off x="6433466" y="2896188"/>
-          <a:ext cx="1092915" cy="131727"/>
+          <a:off x="4395326" y="2898210"/>
+          <a:ext cx="1090840" cy="131823"/>
         </a:xfrm>
         <a:prstGeom prst="rect">
           <a:avLst/>
@@ -4619,8 +5850,8 @@
       </dsp:nvSpPr>
       <dsp:spPr>
         <a:xfrm>
-          <a:off x="6684788" y="2198549"/>
-          <a:ext cx="1463642" cy="878185"/>
+          <a:off x="4643959" y="2198629"/>
+          <a:ext cx="1464707" cy="878824"/>
         </a:xfrm>
         <a:prstGeom prst="roundRect">
           <a:avLst>
@@ -4689,8 +5920,8 @@
         </a:p>
       </dsp:txBody>
       <dsp:txXfrm>
-        <a:off x="6710509" y="2224270"/>
-        <a:ext cx="1412200" cy="826743"/>
+        <a:off x="4669699" y="2224369"/>
+        <a:ext cx="1413227" cy="827344"/>
       </dsp:txXfrm>
     </dsp:sp>
     <dsp:sp modelId="{1B9AEEAD-FF58-413E-8B71-44B3A028C544}">
@@ -4700,8 +5931,8 @@
       </dsp:nvSpPr>
       <dsp:spPr>
         <a:xfrm>
-          <a:off x="6684788" y="3296281"/>
-          <a:ext cx="1463642" cy="878185"/>
+          <a:off x="4643959" y="3297160"/>
+          <a:ext cx="1464707" cy="878824"/>
         </a:xfrm>
         <a:prstGeom prst="roundRect">
           <a:avLst>
@@ -4770,8 +6001,8 @@
         </a:p>
       </dsp:txBody>
       <dsp:txXfrm>
-        <a:off x="6710509" y="3322002"/>
-        <a:ext cx="1412200" cy="826743"/>
+        <a:off x="4669699" y="3322900"/>
+        <a:ext cx="1413227" cy="827344"/>
       </dsp:txXfrm>
     </dsp:sp>
   </dsp:spTree>
@@ -4779,6 +6010,616 @@
 </file>
 
 <file path=ppt/diagrams/drawing2.xml><?xml version="1.0" encoding="utf-8"?>
+<dsp:drawing xmlns:dgm="http://schemas.openxmlformats.org/drawingml/2006/diagram" xmlns:dsp="http://schemas.microsoft.com/office/drawing/2008/diagram" xmlns:a="http://schemas.openxmlformats.org/drawingml/2006/main">
+  <dsp:spTree>
+    <dsp:nvGrpSpPr>
+      <dsp:cNvPr id="0" name=""/>
+      <dsp:cNvGrpSpPr/>
+    </dsp:nvGrpSpPr>
+    <dsp:grpSpPr/>
+    <dsp:sp modelId="{760D4E85-113A-4152-A50B-7C8DDA2B9D71}">
+      <dsp:nvSpPr>
+        <dsp:cNvPr id="0" name=""/>
+        <dsp:cNvSpPr/>
+      </dsp:nvSpPr>
+      <dsp:spPr>
+        <a:xfrm>
+          <a:off x="0" y="577849"/>
+          <a:ext cx="4834965" cy="3021853"/>
+        </a:xfrm>
+        <a:prstGeom prst="swooshArrow">
+          <a:avLst>
+            <a:gd name="adj1" fmla="val 25000"/>
+            <a:gd name="adj2" fmla="val 25000"/>
+          </a:avLst>
+        </a:prstGeom>
+        <a:solidFill>
+          <a:schemeClr val="accent2">
+            <a:tint val="40000"/>
+            <a:hueOff val="0"/>
+            <a:satOff val="0"/>
+            <a:lumOff val="0"/>
+            <a:alphaOff val="0"/>
+          </a:schemeClr>
+        </a:solidFill>
+        <a:ln>
+          <a:noFill/>
+        </a:ln>
+        <a:effectLst/>
+      </dsp:spPr>
+      <dsp:style>
+        <a:lnRef idx="0">
+          <a:scrgbClr r="0" g="0" b="0"/>
+        </a:lnRef>
+        <a:fillRef idx="1">
+          <a:scrgbClr r="0" g="0" b="0"/>
+        </a:fillRef>
+        <a:effectRef idx="0">
+          <a:scrgbClr r="0" g="0" b="0"/>
+        </a:effectRef>
+        <a:fontRef idx="minor"/>
+      </dsp:style>
+    </dsp:sp>
+    <dsp:sp modelId="{6B52C549-4AD4-48E1-8214-2D18E5970FB2}">
+      <dsp:nvSpPr>
+        <dsp:cNvPr id="0" name=""/>
+        <dsp:cNvSpPr/>
+      </dsp:nvSpPr>
+      <dsp:spPr>
+        <a:xfrm>
+          <a:off x="476244" y="2824899"/>
+          <a:ext cx="111204" cy="111204"/>
+        </a:xfrm>
+        <a:prstGeom prst="ellipse">
+          <a:avLst/>
+        </a:prstGeom>
+        <a:solidFill>
+          <a:schemeClr val="accent2">
+            <a:hueOff val="0"/>
+            <a:satOff val="0"/>
+            <a:lumOff val="0"/>
+            <a:alphaOff val="0"/>
+          </a:schemeClr>
+        </a:solidFill>
+        <a:ln w="12700" cap="flat" cmpd="sng" algn="ctr">
+          <a:solidFill>
+            <a:schemeClr val="lt1">
+              <a:hueOff val="0"/>
+              <a:satOff val="0"/>
+              <a:lumOff val="0"/>
+              <a:alphaOff val="0"/>
+            </a:schemeClr>
+          </a:solidFill>
+          <a:prstDash val="solid"/>
+          <a:miter lim="800000"/>
+        </a:ln>
+        <a:effectLst/>
+      </dsp:spPr>
+      <dsp:style>
+        <a:lnRef idx="2">
+          <a:scrgbClr r="0" g="0" b="0"/>
+        </a:lnRef>
+        <a:fillRef idx="1">
+          <a:scrgbClr r="0" g="0" b="0"/>
+        </a:fillRef>
+        <a:effectRef idx="0">
+          <a:scrgbClr r="0" g="0" b="0"/>
+        </a:effectRef>
+        <a:fontRef idx="minor">
+          <a:schemeClr val="lt1"/>
+        </a:fontRef>
+      </dsp:style>
+    </dsp:sp>
+    <dsp:sp modelId="{60F29F0D-ED02-4EB4-8129-3753722CBF21}">
+      <dsp:nvSpPr>
+        <dsp:cNvPr id="0" name=""/>
+        <dsp:cNvSpPr/>
+      </dsp:nvSpPr>
+      <dsp:spPr>
+        <a:xfrm>
+          <a:off x="531846" y="2880502"/>
+          <a:ext cx="633380" cy="719201"/>
+        </a:xfrm>
+        <a:prstGeom prst="rect">
+          <a:avLst/>
+        </a:prstGeom>
+        <a:noFill/>
+        <a:ln>
+          <a:noFill/>
+        </a:ln>
+        <a:effectLst/>
+      </dsp:spPr>
+      <dsp:style>
+        <a:lnRef idx="0">
+          <a:scrgbClr r="0" g="0" b="0"/>
+        </a:lnRef>
+        <a:fillRef idx="0">
+          <a:scrgbClr r="0" g="0" b="0"/>
+        </a:fillRef>
+        <a:effectRef idx="0">
+          <a:scrgbClr r="0" g="0" b="0"/>
+        </a:effectRef>
+        <a:fontRef idx="minor"/>
+      </dsp:style>
+      <dsp:txBody>
+        <a:bodyPr spcFirstLastPara="0" vert="horz" wrap="square" lIns="58925" tIns="0" rIns="0" bIns="0" numCol="1" spcCol="1270" anchor="t" anchorCtr="0">
+          <a:noAutofit/>
+        </a:bodyPr>
+        <a:lstStyle/>
+        <a:p>
+          <a:pPr marL="0" lvl="0" indent="0" algn="l" defTabSz="577850">
+            <a:lnSpc>
+              <a:spcPct val="90000"/>
+            </a:lnSpc>
+            <a:spcBef>
+              <a:spcPct val="0"/>
+            </a:spcBef>
+            <a:spcAft>
+              <a:spcPct val="35000"/>
+            </a:spcAft>
+            <a:buNone/>
+          </a:pPr>
+          <a:r>
+            <a:rPr lang="en-US" sz="1300" kern="1200" dirty="0"/>
+            <a:t>Observe </a:t>
+          </a:r>
+          <a:endParaRPr lang="en-IN" sz="1300" kern="1200" dirty="0"/>
+        </a:p>
+      </dsp:txBody>
+      <dsp:txXfrm>
+        <a:off x="531846" y="2880502"/>
+        <a:ext cx="633380" cy="719201"/>
+      </dsp:txXfrm>
+    </dsp:sp>
+    <dsp:sp modelId="{56C8E695-C8EB-4056-9291-DB0391E0DA4B}">
+      <dsp:nvSpPr>
+        <dsp:cNvPr id="0" name=""/>
+        <dsp:cNvSpPr/>
+      </dsp:nvSpPr>
+      <dsp:spPr>
+        <a:xfrm>
+          <a:off x="1078197" y="2246517"/>
+          <a:ext cx="174058" cy="174058"/>
+        </a:xfrm>
+        <a:prstGeom prst="ellipse">
+          <a:avLst/>
+        </a:prstGeom>
+        <a:solidFill>
+          <a:schemeClr val="accent3">
+            <a:hueOff val="0"/>
+            <a:satOff val="0"/>
+            <a:lumOff val="0"/>
+            <a:alphaOff val="0"/>
+          </a:schemeClr>
+        </a:solidFill>
+        <a:ln w="12700" cap="flat" cmpd="sng" algn="ctr">
+          <a:solidFill>
+            <a:schemeClr val="lt1">
+              <a:hueOff val="0"/>
+              <a:satOff val="0"/>
+              <a:lumOff val="0"/>
+              <a:alphaOff val="0"/>
+            </a:schemeClr>
+          </a:solidFill>
+          <a:prstDash val="solid"/>
+          <a:miter lim="800000"/>
+        </a:ln>
+        <a:effectLst/>
+      </dsp:spPr>
+      <dsp:style>
+        <a:lnRef idx="2">
+          <a:scrgbClr r="0" g="0" b="0"/>
+        </a:lnRef>
+        <a:fillRef idx="1">
+          <a:scrgbClr r="0" g="0" b="0"/>
+        </a:fillRef>
+        <a:effectRef idx="0">
+          <a:scrgbClr r="0" g="0" b="0"/>
+        </a:effectRef>
+        <a:fontRef idx="minor">
+          <a:schemeClr val="lt1"/>
+        </a:fontRef>
+      </dsp:style>
+    </dsp:sp>
+    <dsp:sp modelId="{9C4AD88D-E58F-44D3-8EE2-230C265D077C}">
+      <dsp:nvSpPr>
+        <dsp:cNvPr id="0" name=""/>
+        <dsp:cNvSpPr/>
+      </dsp:nvSpPr>
+      <dsp:spPr>
+        <a:xfrm>
+          <a:off x="1165226" y="2333546"/>
+          <a:ext cx="802604" cy="1266156"/>
+        </a:xfrm>
+        <a:prstGeom prst="rect">
+          <a:avLst/>
+        </a:prstGeom>
+        <a:noFill/>
+        <a:ln>
+          <a:noFill/>
+        </a:ln>
+        <a:effectLst/>
+      </dsp:spPr>
+      <dsp:style>
+        <a:lnRef idx="0">
+          <a:scrgbClr r="0" g="0" b="0"/>
+        </a:lnRef>
+        <a:fillRef idx="0">
+          <a:scrgbClr r="0" g="0" b="0"/>
+        </a:fillRef>
+        <a:effectRef idx="0">
+          <a:scrgbClr r="0" g="0" b="0"/>
+        </a:effectRef>
+        <a:fontRef idx="minor"/>
+      </dsp:style>
+      <dsp:txBody>
+        <a:bodyPr spcFirstLastPara="0" vert="horz" wrap="square" lIns="92230" tIns="0" rIns="0" bIns="0" numCol="1" spcCol="1270" anchor="t" anchorCtr="0">
+          <a:noAutofit/>
+        </a:bodyPr>
+        <a:lstStyle/>
+        <a:p>
+          <a:pPr marL="0" lvl="0" indent="0" algn="l" defTabSz="577850">
+            <a:lnSpc>
+              <a:spcPct val="90000"/>
+            </a:lnSpc>
+            <a:spcBef>
+              <a:spcPct val="0"/>
+            </a:spcBef>
+            <a:spcAft>
+              <a:spcPct val="35000"/>
+            </a:spcAft>
+            <a:buNone/>
+          </a:pPr>
+          <a:r>
+            <a:rPr lang="en-US" sz="1300" kern="1200"/>
+            <a:t>Measure</a:t>
+          </a:r>
+          <a:endParaRPr lang="en-IN" sz="1300" kern="1200"/>
+        </a:p>
+      </dsp:txBody>
+      <dsp:txXfrm>
+        <a:off x="1165226" y="2333546"/>
+        <a:ext cx="802604" cy="1266156"/>
+      </dsp:txXfrm>
+    </dsp:sp>
+    <dsp:sp modelId="{D8A35392-E98B-4BE1-B5C6-3281B597F807}">
+      <dsp:nvSpPr>
+        <dsp:cNvPr id="0" name=""/>
+        <dsp:cNvSpPr/>
+      </dsp:nvSpPr>
+      <dsp:spPr>
+        <a:xfrm>
+          <a:off x="1851791" y="1785382"/>
+          <a:ext cx="232078" cy="232078"/>
+        </a:xfrm>
+        <a:prstGeom prst="ellipse">
+          <a:avLst/>
+        </a:prstGeom>
+        <a:solidFill>
+          <a:schemeClr val="accent4">
+            <a:hueOff val="0"/>
+            <a:satOff val="0"/>
+            <a:lumOff val="0"/>
+            <a:alphaOff val="0"/>
+          </a:schemeClr>
+        </a:solidFill>
+        <a:ln w="12700" cap="flat" cmpd="sng" algn="ctr">
+          <a:solidFill>
+            <a:schemeClr val="lt1">
+              <a:hueOff val="0"/>
+              <a:satOff val="0"/>
+              <a:lumOff val="0"/>
+              <a:alphaOff val="0"/>
+            </a:schemeClr>
+          </a:solidFill>
+          <a:prstDash val="solid"/>
+          <a:miter lim="800000"/>
+        </a:ln>
+        <a:effectLst/>
+      </dsp:spPr>
+      <dsp:style>
+        <a:lnRef idx="2">
+          <a:scrgbClr r="0" g="0" b="0"/>
+        </a:lnRef>
+        <a:fillRef idx="1">
+          <a:scrgbClr r="0" g="0" b="0"/>
+        </a:fillRef>
+        <a:effectRef idx="0">
+          <a:scrgbClr r="0" g="0" b="0"/>
+        </a:effectRef>
+        <a:fontRef idx="minor">
+          <a:schemeClr val="lt1"/>
+        </a:fontRef>
+      </dsp:style>
+    </dsp:sp>
+    <dsp:sp modelId="{94BAFDB8-0FE7-4C03-8C47-19F2EDD1C27E}">
+      <dsp:nvSpPr>
+        <dsp:cNvPr id="0" name=""/>
+        <dsp:cNvSpPr/>
+      </dsp:nvSpPr>
+      <dsp:spPr>
+        <a:xfrm>
+          <a:off x="1967830" y="1901421"/>
+          <a:ext cx="933148" cy="1698281"/>
+        </a:xfrm>
+        <a:prstGeom prst="rect">
+          <a:avLst/>
+        </a:prstGeom>
+        <a:noFill/>
+        <a:ln>
+          <a:noFill/>
+        </a:ln>
+        <a:effectLst/>
+      </dsp:spPr>
+      <dsp:style>
+        <a:lnRef idx="0">
+          <a:scrgbClr r="0" g="0" b="0"/>
+        </a:lnRef>
+        <a:fillRef idx="0">
+          <a:scrgbClr r="0" g="0" b="0"/>
+        </a:fillRef>
+        <a:effectRef idx="0">
+          <a:scrgbClr r="0" g="0" b="0"/>
+        </a:effectRef>
+        <a:fontRef idx="minor"/>
+      </dsp:style>
+      <dsp:txBody>
+        <a:bodyPr spcFirstLastPara="0" vert="horz" wrap="square" lIns="122973" tIns="0" rIns="0" bIns="0" numCol="1" spcCol="1270" anchor="t" anchorCtr="0">
+          <a:noAutofit/>
+        </a:bodyPr>
+        <a:lstStyle/>
+        <a:p>
+          <a:pPr marL="0" lvl="0" indent="0" algn="l" defTabSz="577850">
+            <a:lnSpc>
+              <a:spcPct val="90000"/>
+            </a:lnSpc>
+            <a:spcBef>
+              <a:spcPct val="0"/>
+            </a:spcBef>
+            <a:spcAft>
+              <a:spcPct val="35000"/>
+            </a:spcAft>
+            <a:buNone/>
+          </a:pPr>
+          <a:r>
+            <a:rPr lang="en-US" sz="1300" kern="1200" dirty="0"/>
+            <a:t>Decide</a:t>
+          </a:r>
+          <a:endParaRPr lang="en-IN" sz="1300" kern="1200" dirty="0"/>
+        </a:p>
+      </dsp:txBody>
+      <dsp:txXfrm>
+        <a:off x="1967830" y="1901421"/>
+        <a:ext cx="933148" cy="1698281"/>
+      </dsp:txXfrm>
+    </dsp:sp>
+    <dsp:sp modelId="{D32310BC-F408-4A97-97F1-DD75701E3448}">
+      <dsp:nvSpPr>
+        <dsp:cNvPr id="0" name=""/>
+        <dsp:cNvSpPr/>
+      </dsp:nvSpPr>
+      <dsp:spPr>
+        <a:xfrm>
+          <a:off x="2751095" y="1425177"/>
+          <a:ext cx="299767" cy="299767"/>
+        </a:xfrm>
+        <a:prstGeom prst="ellipse">
+          <a:avLst/>
+        </a:prstGeom>
+        <a:solidFill>
+          <a:schemeClr val="accent5">
+            <a:hueOff val="0"/>
+            <a:satOff val="0"/>
+            <a:lumOff val="0"/>
+            <a:alphaOff val="0"/>
+          </a:schemeClr>
+        </a:solidFill>
+        <a:ln w="12700" cap="flat" cmpd="sng" algn="ctr">
+          <a:solidFill>
+            <a:schemeClr val="lt1">
+              <a:hueOff val="0"/>
+              <a:satOff val="0"/>
+              <a:lumOff val="0"/>
+              <a:alphaOff val="0"/>
+            </a:schemeClr>
+          </a:solidFill>
+          <a:prstDash val="solid"/>
+          <a:miter lim="800000"/>
+        </a:ln>
+        <a:effectLst/>
+      </dsp:spPr>
+      <dsp:style>
+        <a:lnRef idx="2">
+          <a:scrgbClr r="0" g="0" b="0"/>
+        </a:lnRef>
+        <a:fillRef idx="1">
+          <a:scrgbClr r="0" g="0" b="0"/>
+        </a:fillRef>
+        <a:effectRef idx="0">
+          <a:scrgbClr r="0" g="0" b="0"/>
+        </a:effectRef>
+        <a:fontRef idx="minor">
+          <a:schemeClr val="lt1"/>
+        </a:fontRef>
+      </dsp:style>
+    </dsp:sp>
+    <dsp:sp modelId="{763EC63D-B622-455C-B1D8-504831082AFA}">
+      <dsp:nvSpPr>
+        <dsp:cNvPr id="0" name=""/>
+        <dsp:cNvSpPr/>
+      </dsp:nvSpPr>
+      <dsp:spPr>
+        <a:xfrm>
+          <a:off x="2900979" y="1575061"/>
+          <a:ext cx="966993" cy="2024641"/>
+        </a:xfrm>
+        <a:prstGeom prst="rect">
+          <a:avLst/>
+        </a:prstGeom>
+        <a:noFill/>
+        <a:ln>
+          <a:noFill/>
+        </a:ln>
+        <a:effectLst/>
+      </dsp:spPr>
+      <dsp:style>
+        <a:lnRef idx="0">
+          <a:scrgbClr r="0" g="0" b="0"/>
+        </a:lnRef>
+        <a:fillRef idx="0">
+          <a:scrgbClr r="0" g="0" b="0"/>
+        </a:fillRef>
+        <a:effectRef idx="0">
+          <a:scrgbClr r="0" g="0" b="0"/>
+        </a:effectRef>
+        <a:fontRef idx="minor"/>
+      </dsp:style>
+      <dsp:txBody>
+        <a:bodyPr spcFirstLastPara="0" vert="horz" wrap="square" lIns="158841" tIns="0" rIns="0" bIns="0" numCol="1" spcCol="1270" anchor="t" anchorCtr="0">
+          <a:noAutofit/>
+        </a:bodyPr>
+        <a:lstStyle/>
+        <a:p>
+          <a:pPr marL="0" lvl="0" indent="0" algn="l" defTabSz="577850">
+            <a:lnSpc>
+              <a:spcPct val="90000"/>
+            </a:lnSpc>
+            <a:spcBef>
+              <a:spcPct val="0"/>
+            </a:spcBef>
+            <a:spcAft>
+              <a:spcPct val="35000"/>
+            </a:spcAft>
+            <a:buNone/>
+          </a:pPr>
+          <a:r>
+            <a:rPr lang="en-US" sz="1300" kern="1200" dirty="0"/>
+            <a:t>Generate</a:t>
+          </a:r>
+          <a:endParaRPr lang="en-IN" sz="1300" kern="1200" dirty="0"/>
+        </a:p>
+      </dsp:txBody>
+      <dsp:txXfrm>
+        <a:off x="2900979" y="1575061"/>
+        <a:ext cx="966993" cy="2024641"/>
+      </dsp:txXfrm>
+    </dsp:sp>
+    <dsp:sp modelId="{71EC9318-F2F0-4594-82BC-A0347A19D441}">
+      <dsp:nvSpPr>
+        <dsp:cNvPr id="0" name=""/>
+        <dsp:cNvSpPr/>
+      </dsp:nvSpPr>
+      <dsp:spPr>
+        <a:xfrm>
+          <a:off x="3676990" y="1184638"/>
+          <a:ext cx="381962" cy="381962"/>
+        </a:xfrm>
+        <a:prstGeom prst="ellipse">
+          <a:avLst/>
+        </a:prstGeom>
+        <a:solidFill>
+          <a:schemeClr val="accent6">
+            <a:hueOff val="0"/>
+            <a:satOff val="0"/>
+            <a:lumOff val="0"/>
+            <a:alphaOff val="0"/>
+          </a:schemeClr>
+        </a:solidFill>
+        <a:ln w="12700" cap="flat" cmpd="sng" algn="ctr">
+          <a:solidFill>
+            <a:schemeClr val="lt1">
+              <a:hueOff val="0"/>
+              <a:satOff val="0"/>
+              <a:lumOff val="0"/>
+              <a:alphaOff val="0"/>
+            </a:schemeClr>
+          </a:solidFill>
+          <a:prstDash val="solid"/>
+          <a:miter lim="800000"/>
+        </a:ln>
+        <a:effectLst/>
+      </dsp:spPr>
+      <dsp:style>
+        <a:lnRef idx="2">
+          <a:scrgbClr r="0" g="0" b="0"/>
+        </a:lnRef>
+        <a:fillRef idx="1">
+          <a:scrgbClr r="0" g="0" b="0"/>
+        </a:fillRef>
+        <a:effectRef idx="0">
+          <a:scrgbClr r="0" g="0" b="0"/>
+        </a:effectRef>
+        <a:fontRef idx="minor">
+          <a:schemeClr val="lt1"/>
+        </a:fontRef>
+      </dsp:style>
+    </dsp:sp>
+    <dsp:sp modelId="{85057D00-CCE9-42AA-82E2-C96B95C00E93}">
+      <dsp:nvSpPr>
+        <dsp:cNvPr id="0" name=""/>
+        <dsp:cNvSpPr/>
+      </dsp:nvSpPr>
+      <dsp:spPr>
+        <a:xfrm>
+          <a:off x="3867972" y="1375619"/>
+          <a:ext cx="966993" cy="2224083"/>
+        </a:xfrm>
+        <a:prstGeom prst="rect">
+          <a:avLst/>
+        </a:prstGeom>
+        <a:noFill/>
+        <a:ln>
+          <a:noFill/>
+        </a:ln>
+        <a:effectLst/>
+      </dsp:spPr>
+      <dsp:style>
+        <a:lnRef idx="0">
+          <a:scrgbClr r="0" g="0" b="0"/>
+        </a:lnRef>
+        <a:fillRef idx="0">
+          <a:scrgbClr r="0" g="0" b="0"/>
+        </a:fillRef>
+        <a:effectRef idx="0">
+          <a:scrgbClr r="0" g="0" b="0"/>
+        </a:effectRef>
+        <a:fontRef idx="minor"/>
+      </dsp:style>
+      <dsp:txBody>
+        <a:bodyPr spcFirstLastPara="0" vert="horz" wrap="square" lIns="202394" tIns="0" rIns="0" bIns="0" numCol="1" spcCol="1270" anchor="t" anchorCtr="0">
+          <a:noAutofit/>
+        </a:bodyPr>
+        <a:lstStyle/>
+        <a:p>
+          <a:pPr marL="0" lvl="0" indent="0" algn="l" defTabSz="577850">
+            <a:lnSpc>
+              <a:spcPct val="90000"/>
+            </a:lnSpc>
+            <a:spcBef>
+              <a:spcPct val="0"/>
+            </a:spcBef>
+            <a:spcAft>
+              <a:spcPct val="35000"/>
+            </a:spcAft>
+            <a:buNone/>
+          </a:pPr>
+          <a:r>
+            <a:rPr lang="en-US" sz="1300" kern="1200"/>
+            <a:t>Check &amp; change</a:t>
+          </a:r>
+          <a:endParaRPr lang="en-IN" sz="1300" kern="1200" dirty="0"/>
+        </a:p>
+      </dsp:txBody>
+      <dsp:txXfrm>
+        <a:off x="3867972" y="1375619"/>
+        <a:ext cx="966993" cy="2224083"/>
+      </dsp:txXfrm>
+    </dsp:sp>
+  </dsp:spTree>
+</dsp:drawing>
+</file>
+
+<file path=ppt/diagrams/drawing3.xml><?xml version="1.0" encoding="utf-8"?>
 <dsp:drawing xmlns:dgm="http://schemas.openxmlformats.org/drawingml/2006/diagram" xmlns:dsp="http://schemas.microsoft.com/office/drawing/2008/diagram" xmlns:a="http://schemas.openxmlformats.org/drawingml/2006/main">
   <dsp:spTree>
     <dsp:nvGrpSpPr>
@@ -5911,6 +7752,1651 @@
 </file>
 
 <file path=ppt/diagrams/layout2.xml><?xml version="1.0" encoding="utf-8"?>
+<dgm:layoutDef xmlns:dgm="http://schemas.openxmlformats.org/drawingml/2006/diagram" xmlns:a="http://schemas.openxmlformats.org/drawingml/2006/main" uniqueId="urn:microsoft.com/office/officeart/2005/8/layout/arrow2">
+  <dgm:title val=""/>
+  <dgm:desc val=""/>
+  <dgm:catLst>
+    <dgm:cat type="process" pri="23000"/>
+  </dgm:catLst>
+  <dgm:sampData useDef="1">
+    <dgm:dataModel>
+      <dgm:ptLst/>
+      <dgm:bg/>
+      <dgm:whole/>
+    </dgm:dataModel>
+  </dgm:sampData>
+  <dgm:styleData>
+    <dgm:dataModel>
+      <dgm:ptLst>
+        <dgm:pt modelId="0" type="doc"/>
+        <dgm:pt modelId="1"/>
+        <dgm:pt modelId="2"/>
+      </dgm:ptLst>
+      <dgm:cxnLst>
+        <dgm:cxn modelId="3" srcId="0" destId="1" srcOrd="0" destOrd="0"/>
+        <dgm:cxn modelId="4" srcId="0" destId="2" srcOrd="1" destOrd="0"/>
+      </dgm:cxnLst>
+      <dgm:bg/>
+      <dgm:whole/>
+    </dgm:dataModel>
+  </dgm:styleData>
+  <dgm:clrData>
+    <dgm:dataModel>
+      <dgm:ptLst>
+        <dgm:pt modelId="0" type="doc"/>
+        <dgm:pt modelId="1"/>
+        <dgm:pt modelId="2"/>
+        <dgm:pt modelId="3"/>
+        <dgm:pt modelId="4"/>
+      </dgm:ptLst>
+      <dgm:cxnLst>
+        <dgm:cxn modelId="5" srcId="0" destId="1" srcOrd="0" destOrd="0"/>
+        <dgm:cxn modelId="6" srcId="0" destId="2" srcOrd="1" destOrd="0"/>
+        <dgm:cxn modelId="7" srcId="0" destId="3" srcOrd="2" destOrd="0"/>
+        <dgm:cxn modelId="8" srcId="0" destId="4" srcOrd="3" destOrd="0"/>
+      </dgm:cxnLst>
+      <dgm:bg/>
+      <dgm:whole/>
+    </dgm:dataModel>
+  </dgm:clrData>
+  <dgm:layoutNode name="arrowDiagram">
+    <dgm:varLst>
+      <dgm:chMax val="5"/>
+      <dgm:dir/>
+      <dgm:resizeHandles val="exact"/>
+    </dgm:varLst>
+    <dgm:alg type="composite">
+      <dgm:param type="ar" val="1.6"/>
+    </dgm:alg>
+    <dgm:shape xmlns:r="http://schemas.openxmlformats.org/officeDocument/2006/relationships" r:blip="">
+      <dgm:adjLst/>
+    </dgm:shape>
+    <dgm:presOf/>
+    <dgm:constrLst>
+      <dgm:constr type="l" for="ch" forName="arrow"/>
+      <dgm:constr type="t" for="ch" forName="arrow"/>
+      <dgm:constr type="w" for="ch" forName="arrow" refType="w"/>
+      <dgm:constr type="h" for="ch" forName="arrow" refType="h"/>
+      <dgm:constr type="ctrX" for="ch" forName="arrowDiagram1" refType="w" fact="0.5"/>
+      <dgm:constr type="ctrY" for="ch" forName="arrowDiagram1" refType="h" fact="0.5"/>
+      <dgm:constr type="w" for="ch" forName="arrowDiagram1" refType="w"/>
+      <dgm:constr type="h" for="ch" forName="arrowDiagram1" refType="h"/>
+      <dgm:constr type="ctrX" for="ch" forName="arrowDiagram2" refType="w" fact="0.5"/>
+      <dgm:constr type="ctrY" for="ch" forName="arrowDiagram2" refType="h" fact="0.5"/>
+      <dgm:constr type="w" for="ch" forName="arrowDiagram2" refType="w"/>
+      <dgm:constr type="h" for="ch" forName="arrowDiagram2" refType="h"/>
+      <dgm:constr type="ctrX" for="ch" forName="arrowDiagram3" refType="w" fact="0.5"/>
+      <dgm:constr type="ctrY" for="ch" forName="arrowDiagram3" refType="h" fact="0.5"/>
+      <dgm:constr type="w" for="ch" forName="arrowDiagram3" refType="w"/>
+      <dgm:constr type="h" for="ch" forName="arrowDiagram3" refType="h"/>
+      <dgm:constr type="ctrX" for="ch" forName="arrowDiagram4" refType="w" fact="0.5"/>
+      <dgm:constr type="ctrY" for="ch" forName="arrowDiagram4" refType="h" fact="0.5"/>
+      <dgm:constr type="w" for="ch" forName="arrowDiagram4" refType="w"/>
+      <dgm:constr type="h" for="ch" forName="arrowDiagram4" refType="h"/>
+      <dgm:constr type="ctrX" for="ch" forName="arrowDiagram5" refType="w" fact="0.5"/>
+      <dgm:constr type="ctrY" for="ch" forName="arrowDiagram5" refType="h" fact="0.5"/>
+      <dgm:constr type="w" for="ch" forName="arrowDiagram5" refType="w"/>
+      <dgm:constr type="h" for="ch" forName="arrowDiagram5" refType="h"/>
+    </dgm:constrLst>
+    <dgm:ruleLst/>
+    <dgm:choose name="Name0">
+      <dgm:if name="Name1" axis="ch" ptType="node" func="cnt" op="gte" val="1">
+        <dgm:layoutNode name="arrow" styleLbl="bgShp">
+          <dgm:alg type="sp"/>
+          <dgm:shape xmlns:r="http://schemas.openxmlformats.org/officeDocument/2006/relationships" type="swooshArrow" r:blip="">
+            <dgm:adjLst>
+              <dgm:adj idx="2" val="0.25"/>
+            </dgm:adjLst>
+          </dgm:shape>
+          <dgm:presOf/>
+          <dgm:constrLst/>
+          <dgm:ruleLst/>
+        </dgm:layoutNode>
+        <dgm:choose name="Name2">
+          <dgm:if name="Name3" axis="ch" ptType="node" func="cnt" op="lt" val="1"/>
+          <dgm:if name="Name4" axis="ch" ptType="node" func="cnt" op="equ" val="1">
+            <dgm:layoutNode name="arrowDiagram1">
+              <dgm:varLst>
+                <dgm:bulletEnabled val="1"/>
+              </dgm:varLst>
+              <dgm:alg type="composite">
+                <dgm:param type="vertAlign" val="none"/>
+                <dgm:param type="horzAlign" val="none"/>
+              </dgm:alg>
+              <dgm:shape xmlns:r="http://schemas.openxmlformats.org/officeDocument/2006/relationships" r:blip="">
+                <dgm:adjLst/>
+              </dgm:shape>
+              <dgm:presOf/>
+              <dgm:constrLst>
+                <dgm:constr type="ctrX" for="ch" forName="bullet1" refType="w" fact="0.8"/>
+                <dgm:constr type="ctrY" for="ch" forName="bullet1" refType="h" fact="0.262"/>
+                <dgm:constr type="w" for="ch" forName="bullet1" refType="w" fact="0.074"/>
+                <dgm:constr type="h" for="ch" forName="bullet1" refType="w" refFor="ch" refForName="bullet1"/>
+                <dgm:constr type="r" for="ch" forName="textBox1" refType="ctrX" refFor="ch" refForName="bullet1"/>
+                <dgm:constr type="t" for="ch" forName="textBox1" refType="ctrY" refFor="ch" refForName="bullet1"/>
+                <dgm:constr type="w" for="ch" forName="textBox1" refType="w" fact="0.4"/>
+                <dgm:constr type="h" for="ch" forName="textBox1" refType="h" fact="0.738"/>
+                <dgm:constr type="userA" refType="h" refFor="ch" refForName="bullet1" fact="0.53"/>
+                <dgm:constr type="rMarg" for="ch" forName="textBox1" refType="userA" fact="2.834"/>
+                <dgm:constr type="primFontSz" for="ch" ptType="node" op="equ" val="65"/>
+              </dgm:constrLst>
+              <dgm:ruleLst/>
+              <dgm:forEach name="Name5" axis="ch" ptType="node" cnt="1">
+                <dgm:layoutNode name="bullet1" styleLbl="node1">
+                  <dgm:alg type="sp"/>
+                  <dgm:shape xmlns:r="http://schemas.openxmlformats.org/officeDocument/2006/relationships" type="ellipse" r:blip="">
+                    <dgm:adjLst/>
+                  </dgm:shape>
+                  <dgm:presOf/>
+                  <dgm:constrLst/>
+                  <dgm:ruleLst/>
+                </dgm:layoutNode>
+                <dgm:layoutNode name="textBox1" styleLbl="revTx">
+                  <dgm:varLst>
+                    <dgm:bulletEnabled val="1"/>
+                  </dgm:varLst>
+                  <dgm:alg type="tx">
+                    <dgm:param type="txAnchorVert" val="t"/>
+                    <dgm:param type="parTxLTRAlign" val="r"/>
+                    <dgm:param type="parTxRTLAlign" val="r"/>
+                  </dgm:alg>
+                  <dgm:shape xmlns:r="http://schemas.openxmlformats.org/officeDocument/2006/relationships" type="round2DiagRect" r:blip="">
+                    <dgm:adjLst/>
+                  </dgm:shape>
+                  <dgm:presOf axis="desOrSelf" ptType="node"/>
+                  <dgm:constrLst>
+                    <dgm:constr type="lMarg"/>
+                    <dgm:constr type="tMarg"/>
+                    <dgm:constr type="bMarg"/>
+                  </dgm:constrLst>
+                  <dgm:ruleLst>
+                    <dgm:rule type="primFontSz" val="5" fact="NaN" max="NaN"/>
+                  </dgm:ruleLst>
+                </dgm:layoutNode>
+              </dgm:forEach>
+            </dgm:layoutNode>
+          </dgm:if>
+          <dgm:if name="Name6" axis="ch" ptType="node" func="cnt" op="equ" val="2">
+            <dgm:layoutNode name="arrowDiagram2">
+              <dgm:alg type="composite">
+                <dgm:param type="vertAlign" val="none"/>
+                <dgm:param type="horzAlign" val="none"/>
+              </dgm:alg>
+              <dgm:shape xmlns:r="http://schemas.openxmlformats.org/officeDocument/2006/relationships" r:blip="">
+                <dgm:adjLst/>
+              </dgm:shape>
+              <dgm:presOf/>
+              <dgm:choose name="Name7">
+                <dgm:if name="Name8" func="var" arg="dir" op="equ" val="norm">
+                  <dgm:constrLst>
+                    <dgm:constr type="ctrX" for="ch" forName="bullet2a" refType="w" fact="0.25"/>
+                    <dgm:constr type="ctrY" for="ch" forName="bullet2a" refType="h" fact="0.573"/>
+                    <dgm:constr type="w" for="ch" forName="bullet2a" refType="w" fact="0.035"/>
+                    <dgm:constr type="h" for="ch" forName="bullet2a" refType="w" refFor="ch" refForName="bullet2a"/>
+                    <dgm:constr type="l" for="ch" forName="textBox2a" refType="ctrX" refFor="ch" refForName="bullet2a"/>
+                    <dgm:constr type="t" for="ch" forName="textBox2a" refType="ctrY" refFor="ch" refForName="bullet2a"/>
+                    <dgm:constr type="w" for="ch" forName="textBox2a" refType="w" fact="0.325"/>
+                    <dgm:constr type="h" for="ch" forName="textBox2a" refType="h" fact="0.427"/>
+                    <dgm:constr type="userA" refType="h" refFor="ch" refForName="bullet2a" fact="0.53"/>
+                    <dgm:constr type="lMarg" for="ch" forName="textBox2a" refType="userA" fact="2.834"/>
+                    <dgm:constr type="ctrX" for="ch" forName="bullet2b" refType="w" fact="0.585"/>
+                    <dgm:constr type="ctrY" for="ch" forName="bullet2b" refType="h" fact="0.338"/>
+                    <dgm:constr type="w" for="ch" forName="bullet2b" refType="w" fact="0.06"/>
+                    <dgm:constr type="h" for="ch" forName="bullet2b" refType="w" refFor="ch" refForName="bullet2b"/>
+                    <dgm:constr type="l" for="ch" forName="textBox2b" refType="ctrX" refFor="ch" refForName="bullet2b"/>
+                    <dgm:constr type="t" for="ch" forName="textBox2b" refType="ctrY" refFor="ch" refForName="bullet2b"/>
+                    <dgm:constr type="w" for="ch" forName="textBox2b" refType="w" fact="0.325"/>
+                    <dgm:constr type="h" for="ch" forName="textBox2b" refType="h" fact="0.662"/>
+                    <dgm:constr type="userB" refType="h" refFor="ch" refForName="bullet2b" fact="0.53"/>
+                    <dgm:constr type="lMarg" for="ch" forName="textBox2b" refType="userB" fact="2.834"/>
+                    <dgm:constr type="primFontSz" for="ch" ptType="node" op="equ" val="65"/>
+                  </dgm:constrLst>
+                </dgm:if>
+                <dgm:else name="Name9">
+                  <dgm:constrLst>
+                    <dgm:constr type="ctrX" for="ch" forName="bullet2a" refType="w" fact="0.25"/>
+                    <dgm:constr type="ctrY" for="ch" forName="bullet2a" refType="h" fact="0.573"/>
+                    <dgm:constr type="w" for="ch" forName="bullet2a" refType="w" fact="0.035"/>
+                    <dgm:constr type="h" for="ch" forName="bullet2a" refType="w" refFor="ch" refForName="bullet2a"/>
+                    <dgm:constr type="r" for="ch" forName="textBox2a" refType="ctrX" refFor="ch" refForName="bullet2a"/>
+                    <dgm:constr type="b" for="ch" forName="textBox2a" refType="ctrY" refFor="ch" refForName="bullet2a"/>
+                    <dgm:constr type="w" for="ch" forName="textBox2a" refType="w" fact="0.25"/>
+                    <dgm:constr type="h" for="ch" forName="textBox2a" refType="h" fact="0.573"/>
+                    <dgm:constr type="userA" refType="h" refFor="ch" refForName="bullet2a" fact="0.53"/>
+                    <dgm:constr type="rMarg" for="ch" forName="textBox2a" refType="userA" fact="2.834"/>
+                    <dgm:constr type="ctrX" for="ch" forName="bullet2b" refType="w" fact="0.585"/>
+                    <dgm:constr type="ctrY" for="ch" forName="bullet2b" refType="h" fact="0.338"/>
+                    <dgm:constr type="w" for="ch" forName="bullet2b" refType="w" fact="0.06"/>
+                    <dgm:constr type="h" for="ch" forName="bullet2b" refType="w" refFor="ch" refForName="bullet2b"/>
+                    <dgm:constr type="r" for="ch" forName="textBox2b" refType="ctrX" refFor="ch" refForName="bullet2b"/>
+                    <dgm:constr type="b" for="ch" forName="textBox2b" refType="ctrY" refFor="ch" refForName="bullet2b"/>
+                    <dgm:constr type="w" for="ch" forName="textBox2b" refType="w" fact="0.28"/>
+                    <dgm:constr type="h" for="ch" forName="textBox2b" refType="h" fact="0.338"/>
+                    <dgm:constr type="userB" refType="h" refFor="ch" refForName="bullet2b" fact="0.53"/>
+                    <dgm:constr type="rMarg" for="ch" forName="textBox2b" refType="userB" fact="2.834"/>
+                    <dgm:constr type="primFontSz" for="ch" ptType="node" op="equ" val="65"/>
+                  </dgm:constrLst>
+                </dgm:else>
+              </dgm:choose>
+              <dgm:ruleLst/>
+              <dgm:forEach name="Name10" axis="ch" ptType="node" cnt="1">
+                <dgm:layoutNode name="bullet2a" styleLbl="node1">
+                  <dgm:alg type="sp"/>
+                  <dgm:shape xmlns:r="http://schemas.openxmlformats.org/officeDocument/2006/relationships" type="ellipse" r:blip="">
+                    <dgm:adjLst/>
+                  </dgm:shape>
+                  <dgm:presOf/>
+                  <dgm:constrLst/>
+                  <dgm:ruleLst/>
+                </dgm:layoutNode>
+                <dgm:layoutNode name="textBox2a" styleLbl="revTx">
+                  <dgm:varLst>
+                    <dgm:bulletEnabled val="1"/>
+                  </dgm:varLst>
+                  <dgm:choose name="Name11">
+                    <dgm:if name="Name12" func="var" arg="dir" op="equ" val="norm">
+                      <dgm:choose name="Name13">
+                        <dgm:if name="Name14" axis="root des" ptType="all node" func="maxDepth" op="gt" val="1">
+                          <dgm:alg type="tx">
+                            <dgm:param type="txAnchorVert" val="t"/>
+                            <dgm:param type="parTxLTRAlign" val="l"/>
+                            <dgm:param type="parTxRTLAlign" val="r"/>
+                          </dgm:alg>
+                        </dgm:if>
+                        <dgm:else name="Name15">
+                          <dgm:alg type="tx">
+                            <dgm:param type="txAnchorVert" val="t"/>
+                            <dgm:param type="parTxLTRAlign" val="l"/>
+                            <dgm:param type="parTxRTLAlign" val="l"/>
+                          </dgm:alg>
+                        </dgm:else>
+                      </dgm:choose>
+                    </dgm:if>
+                    <dgm:else name="Name16">
+                      <dgm:choose name="Name17">
+                        <dgm:if name="Name18" axis="root des" ptType="all node" func="maxDepth" op="gt" val="1">
+                          <dgm:alg type="tx">
+                            <dgm:param type="txAnchorVert" val="b"/>
+                            <dgm:param type="txAnchorVertCh" val="b"/>
+                            <dgm:param type="parTxLTRAlign" val="l"/>
+                            <dgm:param type="parTxRTLAlign" val="r"/>
+                          </dgm:alg>
+                        </dgm:if>
+                        <dgm:else name="Name19">
+                          <dgm:alg type="tx">
+                            <dgm:param type="txAnchorVert" val="b"/>
+                            <dgm:param type="parTxLTRAlign" val="r"/>
+                            <dgm:param type="parTxRTLAlign" val="r"/>
+                          </dgm:alg>
+                        </dgm:else>
+                      </dgm:choose>
+                    </dgm:else>
+                  </dgm:choose>
+                  <dgm:shape xmlns:r="http://schemas.openxmlformats.org/officeDocument/2006/relationships" type="rect" r:blip="">
+                    <dgm:adjLst/>
+                  </dgm:shape>
+                  <dgm:presOf axis="desOrSelf" ptType="node"/>
+                  <dgm:choose name="Name20">
+                    <dgm:if name="Name21" func="var" arg="dir" op="equ" val="norm">
+                      <dgm:constrLst>
+                        <dgm:constr type="rMarg"/>
+                        <dgm:constr type="tMarg"/>
+                        <dgm:constr type="bMarg"/>
+                      </dgm:constrLst>
+                    </dgm:if>
+                    <dgm:else name="Name22">
+                      <dgm:constrLst>
+                        <dgm:constr type="lMarg"/>
+                        <dgm:constr type="tMarg"/>
+                        <dgm:constr type="bMarg"/>
+                      </dgm:constrLst>
+                    </dgm:else>
+                  </dgm:choose>
+                  <dgm:ruleLst>
+                    <dgm:rule type="primFontSz" val="5" fact="NaN" max="NaN"/>
+                  </dgm:ruleLst>
+                </dgm:layoutNode>
+              </dgm:forEach>
+              <dgm:forEach name="Name23" axis="ch" ptType="node" st="2" cnt="1">
+                <dgm:layoutNode name="bullet2b" styleLbl="node1">
+                  <dgm:alg type="sp"/>
+                  <dgm:shape xmlns:r="http://schemas.openxmlformats.org/officeDocument/2006/relationships" type="ellipse" r:blip="">
+                    <dgm:adjLst/>
+                  </dgm:shape>
+                  <dgm:presOf/>
+                  <dgm:constrLst/>
+                  <dgm:ruleLst/>
+                </dgm:layoutNode>
+                <dgm:layoutNode name="textBox2b" styleLbl="revTx">
+                  <dgm:varLst>
+                    <dgm:bulletEnabled val="1"/>
+                  </dgm:varLst>
+                  <dgm:choose name="Name24">
+                    <dgm:if name="Name25" func="var" arg="dir" op="equ" val="norm">
+                      <dgm:choose name="Name26">
+                        <dgm:if name="Name27" axis="root des" ptType="all node" func="maxDepth" op="gt" val="1">
+                          <dgm:alg type="tx">
+                            <dgm:param type="txAnchorVert" val="t"/>
+                            <dgm:param type="parTxLTRAlign" val="l"/>
+                            <dgm:param type="parTxRTLAlign" val="r"/>
+                          </dgm:alg>
+                        </dgm:if>
+                        <dgm:else name="Name28">
+                          <dgm:alg type="tx">
+                            <dgm:param type="txAnchorVert" val="t"/>
+                            <dgm:param type="parTxLTRAlign" val="l"/>
+                            <dgm:param type="parTxRTLAlign" val="l"/>
+                          </dgm:alg>
+                        </dgm:else>
+                      </dgm:choose>
+                    </dgm:if>
+                    <dgm:else name="Name29">
+                      <dgm:choose name="Name30">
+                        <dgm:if name="Name31" axis="root des" ptType="all node" func="maxDepth" op="gt" val="1">
+                          <dgm:alg type="tx">
+                            <dgm:param type="txAnchorVert" val="b"/>
+                            <dgm:param type="txAnchorVertCh" val="b"/>
+                            <dgm:param type="parTxLTRAlign" val="l"/>
+                            <dgm:param type="parTxRTLAlign" val="r"/>
+                          </dgm:alg>
+                        </dgm:if>
+                        <dgm:else name="Name32">
+                          <dgm:alg type="tx">
+                            <dgm:param type="txAnchorVert" val="b"/>
+                            <dgm:param type="parTxLTRAlign" val="r"/>
+                            <dgm:param type="parTxRTLAlign" val="r"/>
+                          </dgm:alg>
+                        </dgm:else>
+                      </dgm:choose>
+                    </dgm:else>
+                  </dgm:choose>
+                  <dgm:shape xmlns:r="http://schemas.openxmlformats.org/officeDocument/2006/relationships" type="rect" r:blip="">
+                    <dgm:adjLst/>
+                  </dgm:shape>
+                  <dgm:presOf axis="desOrSelf" ptType="node"/>
+                  <dgm:choose name="Name33">
+                    <dgm:if name="Name34" func="var" arg="dir" op="equ" val="norm">
+                      <dgm:constrLst>
+                        <dgm:constr type="rMarg"/>
+                        <dgm:constr type="tMarg"/>
+                        <dgm:constr type="bMarg"/>
+                      </dgm:constrLst>
+                    </dgm:if>
+                    <dgm:else name="Name35">
+                      <dgm:constrLst>
+                        <dgm:constr type="lMarg"/>
+                        <dgm:constr type="tMarg"/>
+                        <dgm:constr type="bMarg"/>
+                      </dgm:constrLst>
+                    </dgm:else>
+                  </dgm:choose>
+                  <dgm:ruleLst>
+                    <dgm:rule type="primFontSz" val="5" fact="NaN" max="NaN"/>
+                  </dgm:ruleLst>
+                </dgm:layoutNode>
+              </dgm:forEach>
+            </dgm:layoutNode>
+          </dgm:if>
+          <dgm:if name="Name36" axis="ch" ptType="node" func="cnt" op="equ" val="3">
+            <dgm:layoutNode name="arrowDiagram3">
+              <dgm:alg type="composite">
+                <dgm:param type="vertAlign" val="none"/>
+                <dgm:param type="horzAlign" val="none"/>
+              </dgm:alg>
+              <dgm:shape xmlns:r="http://schemas.openxmlformats.org/officeDocument/2006/relationships" r:blip="">
+                <dgm:adjLst/>
+              </dgm:shape>
+              <dgm:presOf/>
+              <dgm:choose name="Name37">
+                <dgm:if name="Name38" func="var" arg="dir" op="equ" val="norm">
+                  <dgm:constrLst>
+                    <dgm:constr type="ctrX" for="ch" forName="bullet3a" refType="w" fact="0.14"/>
+                    <dgm:constr type="ctrY" for="ch" forName="bullet3a" refType="h" fact="0.711"/>
+                    <dgm:constr type="w" for="ch" forName="bullet3a" refType="w" fact="0.026"/>
+                    <dgm:constr type="h" for="ch" forName="bullet3a" refType="w" refFor="ch" refForName="bullet3a"/>
+                    <dgm:constr type="l" for="ch" forName="textBox3a" refType="ctrX" refFor="ch" refForName="bullet3a"/>
+                    <dgm:constr type="t" for="ch" forName="textBox3a" refType="ctrY" refFor="ch" refForName="bullet3a"/>
+                    <dgm:constr type="w" for="ch" forName="textBox3a" refType="w" fact="0.233"/>
+                    <dgm:constr type="h" for="ch" forName="textBox3a" refType="h" fact="0.289"/>
+                    <dgm:constr type="userA" refType="h" refFor="ch" refForName="bullet3a" fact="0.53"/>
+                    <dgm:constr type="lMarg" for="ch" forName="textBox3a" refType="userA" fact="2.834"/>
+                    <dgm:constr type="ctrX" for="ch" forName="bullet3b" refType="w" fact="0.38"/>
+                    <dgm:constr type="ctrY" for="ch" forName="bullet3b" refType="h" fact="0.456"/>
+                    <dgm:constr type="w" for="ch" forName="bullet3b" refType="w" fact="0.047"/>
+                    <dgm:constr type="h" for="ch" forName="bullet3b" refType="w" refFor="ch" refForName="bullet3b"/>
+                    <dgm:constr type="l" for="ch" forName="textBox3b" refType="ctrX" refFor="ch" refForName="bullet3b"/>
+                    <dgm:constr type="t" for="ch" forName="textBox3b" refType="ctrY" refFor="ch" refForName="bullet3b"/>
+                    <dgm:constr type="w" for="ch" forName="textBox3b" refType="w" fact="0.24"/>
+                    <dgm:constr type="h" for="ch" forName="textBox3b" refType="h" fact="0.544"/>
+                    <dgm:constr type="userB" refType="h" refFor="ch" refForName="bullet3b" fact="0.53"/>
+                    <dgm:constr type="lMarg" for="ch" forName="textBox3b" refType="userB" fact="2.834"/>
+                    <dgm:constr type="ctrX" for="ch" forName="bullet3c" refType="w" fact="0.665"/>
+                    <dgm:constr type="ctrY" for="ch" forName="bullet3c" refType="h" fact="0.305"/>
+                    <dgm:constr type="w" for="ch" forName="bullet3c" refType="w" fact="0.065"/>
+                    <dgm:constr type="h" for="ch" forName="bullet3c" refType="w" refFor="ch" refForName="bullet3c"/>
+                    <dgm:constr type="l" for="ch" forName="textBox3c" refType="ctrX" refFor="ch" refForName="bullet3c"/>
+                    <dgm:constr type="t" for="ch" forName="textBox3c" refType="ctrY" refFor="ch" refForName="bullet3c"/>
+                    <dgm:constr type="w" for="ch" forName="textBox3c" refType="w" fact="0.24"/>
+                    <dgm:constr type="h" for="ch" forName="textBox3c" refType="h" fact="0.695"/>
+                    <dgm:constr type="userC" refType="h" refFor="ch" refForName="bullet3c" fact="0.53"/>
+                    <dgm:constr type="lMarg" for="ch" forName="textBox3c" refType="userC" fact="2.834"/>
+                    <dgm:constr type="primFontSz" for="ch" ptType="node" op="equ" val="65"/>
+                  </dgm:constrLst>
+                </dgm:if>
+                <dgm:else name="Name39">
+                  <dgm:constrLst>
+                    <dgm:constr type="ctrX" for="ch" forName="bullet3a" refType="w" fact="0.14"/>
+                    <dgm:constr type="ctrY" for="ch" forName="bullet3a" refType="h" fact="0.711"/>
+                    <dgm:constr type="w" for="ch" forName="bullet3a" refType="w" fact="0.026"/>
+                    <dgm:constr type="h" for="ch" forName="bullet3a" refType="w" refFor="ch" refForName="bullet3a"/>
+                    <dgm:constr type="r" for="ch" forName="textBox3a" refType="ctrX" refFor="ch" refForName="bullet3a"/>
+                    <dgm:constr type="b" for="ch" forName="textBox3a" refType="ctrY" refFor="ch" refForName="bullet3a"/>
+                    <dgm:constr type="w" for="ch" forName="textBox3a" refType="w" fact="0.14"/>
+                    <dgm:constr type="h" for="ch" forName="textBox3a" refType="h" fact="0.711"/>
+                    <dgm:constr type="userA" refType="h" refFor="ch" refForName="bullet3a" fact="0.53"/>
+                    <dgm:constr type="rMarg" for="ch" forName="textBox3a" refType="userA" fact="2.834"/>
+                    <dgm:constr type="ctrX" for="ch" forName="bullet3b" refType="w" fact="0.38"/>
+                    <dgm:constr type="ctrY" for="ch" forName="bullet3b" refType="h" fact="0.456"/>
+                    <dgm:constr type="w" for="ch" forName="bullet3b" refType="w" fact="0.047"/>
+                    <dgm:constr type="h" for="ch" forName="bullet3b" refType="w" refFor="ch" refForName="bullet3b"/>
+                    <dgm:constr type="r" for="ch" forName="textBox3b" refType="ctrX" refFor="ch" refForName="bullet3b"/>
+                    <dgm:constr type="b" for="ch" forName="textBox3b" refType="ctrY" refFor="ch" refForName="bullet3b"/>
+                    <dgm:constr type="w" for="ch" forName="textBox3b" refType="w" fact="0.24"/>
+                    <dgm:constr type="h" for="ch" forName="textBox3b" refType="h" fact="0.456"/>
+                    <dgm:constr type="userB" refType="h" refFor="ch" refForName="bullet3b" fact="0.53"/>
+                    <dgm:constr type="rMarg" for="ch" forName="textBox3b" refType="userB" fact="2.834"/>
+                    <dgm:constr type="ctrX" for="ch" forName="bullet3c" refType="w" fact="0.665"/>
+                    <dgm:constr type="ctrY" for="ch" forName="bullet3c" refType="h" fact="0.305"/>
+                    <dgm:constr type="w" for="ch" forName="bullet3c" refType="w" fact="0.065"/>
+                    <dgm:constr type="h" for="ch" forName="bullet3c" refType="w" refFor="ch" refForName="bullet3c"/>
+                    <dgm:constr type="r" for="ch" forName="textBox3c" refType="ctrX" refFor="ch" refForName="bullet3c"/>
+                    <dgm:constr type="b" for="ch" forName="textBox3c" refType="ctrY" refFor="ch" refForName="bullet3c"/>
+                    <dgm:constr type="w" for="ch" forName="textBox3c" refType="w" fact="0.24"/>
+                    <dgm:constr type="h" for="ch" forName="textBox3c" refType="h" fact="0.305"/>
+                    <dgm:constr type="userC" refType="h" refFor="ch" refForName="bullet3c" fact="0.53"/>
+                    <dgm:constr type="rMarg" for="ch" forName="textBox3c" refType="userC" fact="2.834"/>
+                    <dgm:constr type="primFontSz" for="ch" ptType="node" op="equ" val="65"/>
+                  </dgm:constrLst>
+                </dgm:else>
+              </dgm:choose>
+              <dgm:ruleLst/>
+              <dgm:forEach name="Name40" axis="ch" ptType="node" cnt="1">
+                <dgm:layoutNode name="bullet3a" styleLbl="node1">
+                  <dgm:alg type="sp"/>
+                  <dgm:shape xmlns:r="http://schemas.openxmlformats.org/officeDocument/2006/relationships" type="ellipse" r:blip="">
+                    <dgm:adjLst/>
+                  </dgm:shape>
+                  <dgm:presOf/>
+                  <dgm:constrLst/>
+                  <dgm:ruleLst/>
+                </dgm:layoutNode>
+                <dgm:layoutNode name="textBox3a" styleLbl="revTx">
+                  <dgm:varLst>
+                    <dgm:bulletEnabled val="1"/>
+                  </dgm:varLst>
+                  <dgm:choose name="Name41">
+                    <dgm:if name="Name42" func="var" arg="dir" op="equ" val="norm">
+                      <dgm:choose name="Name43">
+                        <dgm:if name="Name44" axis="root des" ptType="all node" func="maxDepth" op="gt" val="1">
+                          <dgm:alg type="tx">
+                            <dgm:param type="txAnchorVert" val="t"/>
+                            <dgm:param type="parTxLTRAlign" val="l"/>
+                            <dgm:param type="parTxRTLAlign" val="r"/>
+                          </dgm:alg>
+                        </dgm:if>
+                        <dgm:else name="Name45">
+                          <dgm:alg type="tx">
+                            <dgm:param type="txAnchorVert" val="t"/>
+                            <dgm:param type="parTxLTRAlign" val="l"/>
+                            <dgm:param type="parTxRTLAlign" val="l"/>
+                          </dgm:alg>
+                        </dgm:else>
+                      </dgm:choose>
+                    </dgm:if>
+                    <dgm:else name="Name46">
+                      <dgm:choose name="Name47">
+                        <dgm:if name="Name48" axis="root des" ptType="all node" func="maxDepth" op="gt" val="1">
+                          <dgm:alg type="tx">
+                            <dgm:param type="txAnchorVert" val="b"/>
+                            <dgm:param type="txAnchorVertCh" val="b"/>
+                            <dgm:param type="parTxLTRAlign" val="l"/>
+                            <dgm:param type="parTxRTLAlign" val="r"/>
+                          </dgm:alg>
+                        </dgm:if>
+                        <dgm:else name="Name49">
+                          <dgm:alg type="tx">
+                            <dgm:param type="txAnchorVert" val="b"/>
+                            <dgm:param type="parTxLTRAlign" val="r"/>
+                            <dgm:param type="parTxRTLAlign" val="r"/>
+                          </dgm:alg>
+                        </dgm:else>
+                      </dgm:choose>
+                    </dgm:else>
+                  </dgm:choose>
+                  <dgm:shape xmlns:r="http://schemas.openxmlformats.org/officeDocument/2006/relationships" type="rect" r:blip="">
+                    <dgm:adjLst/>
+                  </dgm:shape>
+                  <dgm:presOf axis="desOrSelf" ptType="node"/>
+                  <dgm:choose name="Name50">
+                    <dgm:if name="Name51" func="var" arg="dir" op="equ" val="norm">
+                      <dgm:constrLst>
+                        <dgm:constr type="rMarg"/>
+                        <dgm:constr type="tMarg"/>
+                        <dgm:constr type="bMarg"/>
+                      </dgm:constrLst>
+                    </dgm:if>
+                    <dgm:else name="Name52">
+                      <dgm:constrLst>
+                        <dgm:constr type="lMarg"/>
+                        <dgm:constr type="tMarg"/>
+                        <dgm:constr type="bMarg"/>
+                      </dgm:constrLst>
+                    </dgm:else>
+                  </dgm:choose>
+                  <dgm:ruleLst>
+                    <dgm:rule type="primFontSz" val="5" fact="NaN" max="NaN"/>
+                  </dgm:ruleLst>
+                </dgm:layoutNode>
+              </dgm:forEach>
+              <dgm:forEach name="Name53" axis="ch" ptType="node" st="2" cnt="1">
+                <dgm:layoutNode name="bullet3b" styleLbl="node1">
+                  <dgm:alg type="sp"/>
+                  <dgm:shape xmlns:r="http://schemas.openxmlformats.org/officeDocument/2006/relationships" type="ellipse" r:blip="">
+                    <dgm:adjLst/>
+                  </dgm:shape>
+                  <dgm:presOf/>
+                  <dgm:constrLst/>
+                  <dgm:ruleLst/>
+                </dgm:layoutNode>
+                <dgm:layoutNode name="textBox3b" styleLbl="revTx">
+                  <dgm:varLst>
+                    <dgm:bulletEnabled val="1"/>
+                  </dgm:varLst>
+                  <dgm:choose name="Name54">
+                    <dgm:if name="Name55" func="var" arg="dir" op="equ" val="norm">
+                      <dgm:choose name="Name56">
+                        <dgm:if name="Name57" axis="root des" ptType="all node" func="maxDepth" op="gt" val="1">
+                          <dgm:alg type="tx">
+                            <dgm:param type="txAnchorVert" val="t"/>
+                            <dgm:param type="parTxLTRAlign" val="l"/>
+                            <dgm:param type="parTxRTLAlign" val="r"/>
+                          </dgm:alg>
+                        </dgm:if>
+                        <dgm:else name="Name58">
+                          <dgm:alg type="tx">
+                            <dgm:param type="txAnchorVert" val="t"/>
+                            <dgm:param type="parTxLTRAlign" val="l"/>
+                            <dgm:param type="parTxRTLAlign" val="l"/>
+                          </dgm:alg>
+                        </dgm:else>
+                      </dgm:choose>
+                    </dgm:if>
+                    <dgm:else name="Name59">
+                      <dgm:choose name="Name60">
+                        <dgm:if name="Name61" axis="root des" ptType="all node" func="maxDepth" op="gt" val="1">
+                          <dgm:alg type="tx">
+                            <dgm:param type="txAnchorVert" val="b"/>
+                            <dgm:param type="txAnchorVertCh" val="b"/>
+                            <dgm:param type="parTxLTRAlign" val="l"/>
+                            <dgm:param type="parTxRTLAlign" val="r"/>
+                          </dgm:alg>
+                        </dgm:if>
+                        <dgm:else name="Name62">
+                          <dgm:alg type="tx">
+                            <dgm:param type="txAnchorVert" val="b"/>
+                            <dgm:param type="parTxLTRAlign" val="r"/>
+                            <dgm:param type="parTxRTLAlign" val="r"/>
+                          </dgm:alg>
+                        </dgm:else>
+                      </dgm:choose>
+                    </dgm:else>
+                  </dgm:choose>
+                  <dgm:shape xmlns:r="http://schemas.openxmlformats.org/officeDocument/2006/relationships" type="rect" r:blip="">
+                    <dgm:adjLst/>
+                  </dgm:shape>
+                  <dgm:presOf axis="desOrSelf" ptType="node"/>
+                  <dgm:choose name="Name63">
+                    <dgm:if name="Name64" func="var" arg="dir" op="equ" val="norm">
+                      <dgm:constrLst>
+                        <dgm:constr type="rMarg"/>
+                        <dgm:constr type="tMarg"/>
+                        <dgm:constr type="bMarg"/>
+                      </dgm:constrLst>
+                    </dgm:if>
+                    <dgm:else name="Name65">
+                      <dgm:constrLst>
+                        <dgm:constr type="lMarg"/>
+                        <dgm:constr type="tMarg"/>
+                        <dgm:constr type="bMarg"/>
+                      </dgm:constrLst>
+                    </dgm:else>
+                  </dgm:choose>
+                  <dgm:ruleLst>
+                    <dgm:rule type="primFontSz" val="5" fact="NaN" max="NaN"/>
+                  </dgm:ruleLst>
+                </dgm:layoutNode>
+              </dgm:forEach>
+              <dgm:forEach name="Name66" axis="ch" ptType="node" st="3" cnt="1">
+                <dgm:layoutNode name="bullet3c" styleLbl="node1">
+                  <dgm:alg type="sp"/>
+                  <dgm:shape xmlns:r="http://schemas.openxmlformats.org/officeDocument/2006/relationships" type="ellipse" r:blip="">
+                    <dgm:adjLst/>
+                  </dgm:shape>
+                  <dgm:presOf/>
+                  <dgm:constrLst/>
+                  <dgm:ruleLst/>
+                </dgm:layoutNode>
+                <dgm:layoutNode name="textBox3c" styleLbl="revTx">
+                  <dgm:varLst>
+                    <dgm:bulletEnabled val="1"/>
+                  </dgm:varLst>
+                  <dgm:choose name="Name67">
+                    <dgm:if name="Name68" func="var" arg="dir" op="equ" val="norm">
+                      <dgm:choose name="Name69">
+                        <dgm:if name="Name70" axis="root des" ptType="all node" func="maxDepth" op="gt" val="1">
+                          <dgm:alg type="tx">
+                            <dgm:param type="txAnchorVert" val="t"/>
+                            <dgm:param type="parTxLTRAlign" val="l"/>
+                            <dgm:param type="parTxRTLAlign" val="r"/>
+                          </dgm:alg>
+                        </dgm:if>
+                        <dgm:else name="Name71">
+                          <dgm:alg type="tx">
+                            <dgm:param type="txAnchorVert" val="t"/>
+                            <dgm:param type="parTxLTRAlign" val="l"/>
+                            <dgm:param type="parTxRTLAlign" val="l"/>
+                          </dgm:alg>
+                        </dgm:else>
+                      </dgm:choose>
+                    </dgm:if>
+                    <dgm:else name="Name72">
+                      <dgm:choose name="Name73">
+                        <dgm:if name="Name74" axis="root des" ptType="all node" func="maxDepth" op="gt" val="1">
+                          <dgm:alg type="tx">
+                            <dgm:param type="txAnchorVert" val="b"/>
+                            <dgm:param type="txAnchorVertCh" val="b"/>
+                            <dgm:param type="parTxLTRAlign" val="l"/>
+                            <dgm:param type="parTxRTLAlign" val="r"/>
+                          </dgm:alg>
+                        </dgm:if>
+                        <dgm:else name="Name75">
+                          <dgm:alg type="tx">
+                            <dgm:param type="txAnchorVert" val="b"/>
+                            <dgm:param type="parTxLTRAlign" val="r"/>
+                            <dgm:param type="parTxRTLAlign" val="r"/>
+                          </dgm:alg>
+                        </dgm:else>
+                      </dgm:choose>
+                    </dgm:else>
+                  </dgm:choose>
+                  <dgm:shape xmlns:r="http://schemas.openxmlformats.org/officeDocument/2006/relationships" type="rect" r:blip="">
+                    <dgm:adjLst/>
+                  </dgm:shape>
+                  <dgm:presOf axis="desOrSelf" ptType="node"/>
+                  <dgm:choose name="Name76">
+                    <dgm:if name="Name77" func="var" arg="dir" op="equ" val="norm">
+                      <dgm:constrLst>
+                        <dgm:constr type="rMarg"/>
+                        <dgm:constr type="tMarg"/>
+                        <dgm:constr type="bMarg"/>
+                      </dgm:constrLst>
+                    </dgm:if>
+                    <dgm:else name="Name78">
+                      <dgm:constrLst>
+                        <dgm:constr type="lMarg"/>
+                        <dgm:constr type="tMarg"/>
+                        <dgm:constr type="bMarg"/>
+                      </dgm:constrLst>
+                    </dgm:else>
+                  </dgm:choose>
+                  <dgm:ruleLst>
+                    <dgm:rule type="primFontSz" val="5" fact="NaN" max="NaN"/>
+                  </dgm:ruleLst>
+                </dgm:layoutNode>
+              </dgm:forEach>
+            </dgm:layoutNode>
+          </dgm:if>
+          <dgm:if name="Name79" axis="ch" ptType="node" func="cnt" op="equ" val="4">
+            <dgm:layoutNode name="arrowDiagram4">
+              <dgm:alg type="composite">
+                <dgm:param type="vertAlign" val="none"/>
+                <dgm:param type="horzAlign" val="none"/>
+              </dgm:alg>
+              <dgm:shape xmlns:r="http://schemas.openxmlformats.org/officeDocument/2006/relationships" r:blip="">
+                <dgm:adjLst/>
+              </dgm:shape>
+              <dgm:presOf/>
+              <dgm:choose name="Name80">
+                <dgm:if name="Name81" func="var" arg="dir" op="equ" val="norm">
+                  <dgm:constrLst>
+                    <dgm:constr type="ctrX" for="ch" forName="bullet4a" refType="w" fact="0.11"/>
+                    <dgm:constr type="ctrY" for="ch" forName="bullet4a" refType="h" fact="0.762"/>
+                    <dgm:constr type="w" for="ch" forName="bullet4a" refType="w" fact="0.023"/>
+                    <dgm:constr type="h" for="ch" forName="bullet4a" refType="w" refFor="ch" refForName="bullet4a"/>
+                    <dgm:constr type="l" for="ch" forName="textBox4a" refType="ctrX" refFor="ch" refForName="bullet4a"/>
+                    <dgm:constr type="t" for="ch" forName="textBox4a" refType="ctrY" refFor="ch" refForName="bullet4a"/>
+                    <dgm:constr type="w" for="ch" forName="textBox4a" refType="w" fact="0.171"/>
+                    <dgm:constr type="h" for="ch" forName="textBox4a" refType="h" fact="0.238"/>
+                    <dgm:constr type="userA" refType="h" refFor="ch" refForName="bullet4a" fact="0.53"/>
+                    <dgm:constr type="lMarg" for="ch" forName="textBox4a" refType="userA" fact="2.834"/>
+                    <dgm:constr type="ctrX" for="ch" forName="bullet4b" refType="w" fact="0.281"/>
+                    <dgm:constr type="ctrY" for="ch" forName="bullet4b" refType="h" fact="0.543"/>
+                    <dgm:constr type="w" for="ch" forName="bullet4b" refType="w" fact="0.04"/>
+                    <dgm:constr type="h" for="ch" forName="bullet4b" refType="w" refFor="ch" refForName="bullet4b"/>
+                    <dgm:constr type="l" for="ch" forName="textBox4b" refType="ctrX" refFor="ch" refForName="bullet4b"/>
+                    <dgm:constr type="t" for="ch" forName="textBox4b" refType="ctrY" refFor="ch" refForName="bullet4b"/>
+                    <dgm:constr type="w" for="ch" forName="textBox4b" refType="w" fact="0.21"/>
+                    <dgm:constr type="h" for="ch" forName="textBox4b" refType="h" fact="0.457"/>
+                    <dgm:constr type="userB" refType="h" refFor="ch" refForName="bullet4b" fact="0.53"/>
+                    <dgm:constr type="lMarg" for="ch" forName="textBox4b" refType="userB" fact="2.834"/>
+                    <dgm:constr type="ctrX" for="ch" forName="bullet4c" refType="w" fact="0.495"/>
+                    <dgm:constr type="ctrY" for="ch" forName="bullet4c" refType="h" fact="0.382"/>
+                    <dgm:constr type="w" for="ch" forName="bullet4c" refType="w" fact="0.053"/>
+                    <dgm:constr type="h" for="ch" forName="bullet4c" refType="w" refFor="ch" refForName="bullet4c"/>
+                    <dgm:constr type="l" for="ch" forName="textBox4c" refType="ctrX" refFor="ch" refForName="bullet4c"/>
+                    <dgm:constr type="t" for="ch" forName="textBox4c" refType="ctrY" refFor="ch" refForName="bullet4c"/>
+                    <dgm:constr type="w" for="ch" forName="textBox4c" refType="w" fact="0.21"/>
+                    <dgm:constr type="h" for="ch" forName="textBox4c" refType="h" fact="0.618"/>
+                    <dgm:constr type="userC" refType="h" refFor="ch" refForName="bullet4c" fact="0.53"/>
+                    <dgm:constr type="lMarg" for="ch" forName="textBox4c" refType="userC" fact="2.834"/>
+                    <dgm:constr type="ctrX" for="ch" forName="bullet4d" refType="w" fact="0.73"/>
+                    <dgm:constr type="ctrY" for="ch" forName="bullet4d" refType="h" fact="0.283"/>
+                    <dgm:constr type="w" for="ch" forName="bullet4d" refType="w" fact="0.071"/>
+                    <dgm:constr type="h" for="ch" forName="bullet4d" refType="w" refFor="ch" refForName="bullet4d"/>
+                    <dgm:constr type="l" for="ch" forName="textBox4d" refType="ctrX" refFor="ch" refForName="bullet4d"/>
+                    <dgm:constr type="t" for="ch" forName="textBox4d" refType="ctrY" refFor="ch" refForName="bullet4d"/>
+                    <dgm:constr type="w" for="ch" forName="textBox4d" refType="w" fact="0.21"/>
+                    <dgm:constr type="h" for="ch" forName="textBox4d" refType="h" fact="0.717"/>
+                    <dgm:constr type="userD" refType="h" refFor="ch" refForName="bullet4d" fact="0.53"/>
+                    <dgm:constr type="lMarg" for="ch" forName="textBox4d" refType="userD" fact="2.834"/>
+                    <dgm:constr type="primFontSz" for="ch" ptType="node" op="equ" val="65"/>
+                  </dgm:constrLst>
+                </dgm:if>
+                <dgm:else name="Name82">
+                  <dgm:constrLst>
+                    <dgm:constr type="ctrX" for="ch" forName="bullet4a" refType="w" fact="0.11"/>
+                    <dgm:constr type="ctrY" for="ch" forName="bullet4a" refType="h" fact="0.762"/>
+                    <dgm:constr type="w" for="ch" forName="bullet4a" refType="w" fact="0.023"/>
+                    <dgm:constr type="h" for="ch" forName="bullet4a" refType="w" refFor="ch" refForName="bullet4a"/>
+                    <dgm:constr type="r" for="ch" forName="textBox4a" refType="ctrX" refFor="ch" refForName="bullet4a"/>
+                    <dgm:constr type="b" for="ch" forName="textBox4a" refType="ctrY" refFor="ch" refForName="bullet4a"/>
+                    <dgm:constr type="w" for="ch" forName="textBox4a" refType="w" fact="0.11"/>
+                    <dgm:constr type="h" for="ch" forName="textBox4a" refType="h" fact="0.762"/>
+                    <dgm:constr type="userA" refType="h" refFor="ch" refForName="bullet4a" fact="0.53"/>
+                    <dgm:constr type="rMarg" for="ch" forName="textBox4a" refType="userA" fact="2.834"/>
+                    <dgm:constr type="ctrX" for="ch" forName="bullet4b" refType="w" fact="0.281"/>
+                    <dgm:constr type="ctrY" for="ch" forName="bullet4b" refType="h" fact="0.543"/>
+                    <dgm:constr type="w" for="ch" forName="bullet4b" refType="w" fact="0.04"/>
+                    <dgm:constr type="h" for="ch" forName="bullet4b" refType="w" refFor="ch" refForName="bullet4b"/>
+                    <dgm:constr type="r" for="ch" forName="textBox4b" refType="ctrX" refFor="ch" refForName="bullet4b"/>
+                    <dgm:constr type="b" for="ch" forName="textBox4b" refType="ctrY" refFor="ch" refForName="bullet4b"/>
+                    <dgm:constr type="w" for="ch" forName="textBox4b" refType="w" fact="0.171"/>
+                    <dgm:constr type="h" for="ch" forName="textBox4b" refType="h" fact="0.543"/>
+                    <dgm:constr type="userB" refType="h" refFor="ch" refForName="bullet4b" fact="0.53"/>
+                    <dgm:constr type="rMarg" for="ch" forName="textBox4b" refType="userB" fact="2.834"/>
+                    <dgm:constr type="ctrX" for="ch" forName="bullet4c" refType="w" fact="0.495"/>
+                    <dgm:constr type="ctrY" for="ch" forName="bullet4c" refType="h" fact="0.382"/>
+                    <dgm:constr type="w" for="ch" forName="bullet4c" refType="w" fact="0.053"/>
+                    <dgm:constr type="h" for="ch" forName="bullet4c" refType="w" refFor="ch" refForName="bullet4c"/>
+                    <dgm:constr type="r" for="ch" forName="textBox4c" refType="ctrX" refFor="ch" refForName="bullet4c"/>
+                    <dgm:constr type="b" for="ch" forName="textBox4c" refType="ctrY" refFor="ch" refForName="bullet4c"/>
+                    <dgm:constr type="w" for="ch" forName="textBox4c" refType="w" fact="0.21"/>
+                    <dgm:constr type="h" for="ch" forName="textBox4c" refType="h" fact="0.382"/>
+                    <dgm:constr type="userC" refType="h" refFor="ch" refForName="bullet4c" fact="0.53"/>
+                    <dgm:constr type="rMarg" for="ch" forName="textBox4c" refType="userC" fact="2.834"/>
+                    <dgm:constr type="ctrX" for="ch" forName="bullet4d" refType="w" fact="0.73"/>
+                    <dgm:constr type="ctrY" for="ch" forName="bullet4d" refType="h" fact="0.283"/>
+                    <dgm:constr type="w" for="ch" forName="bullet4d" refType="w" fact="0.071"/>
+                    <dgm:constr type="h" for="ch" forName="bullet4d" refType="w" refFor="ch" refForName="bullet4d"/>
+                    <dgm:constr type="r" for="ch" forName="textBox4d" refType="ctrX" refFor="ch" refForName="bullet4d"/>
+                    <dgm:constr type="b" for="ch" forName="textBox4d" refType="ctrY" refFor="ch" refForName="bullet4d"/>
+                    <dgm:constr type="w" for="ch" forName="textBox4d" refType="w" fact="0.21"/>
+                    <dgm:constr type="h" for="ch" forName="textBox4d" refType="h" fact="0.283"/>
+                    <dgm:constr type="userD" refType="h" refFor="ch" refForName="bullet4d" fact="0.53"/>
+                    <dgm:constr type="rMarg" for="ch" forName="textBox4d" refType="userD" fact="2.834"/>
+                    <dgm:constr type="primFontSz" for="ch" ptType="node" op="equ" val="65"/>
+                  </dgm:constrLst>
+                </dgm:else>
+              </dgm:choose>
+              <dgm:ruleLst/>
+              <dgm:forEach name="Name83" axis="ch" ptType="node" cnt="1">
+                <dgm:layoutNode name="bullet4a" styleLbl="node1">
+                  <dgm:alg type="sp"/>
+                  <dgm:shape xmlns:r="http://schemas.openxmlformats.org/officeDocument/2006/relationships" type="ellipse" r:blip="">
+                    <dgm:adjLst/>
+                  </dgm:shape>
+                  <dgm:presOf/>
+                  <dgm:constrLst/>
+                  <dgm:ruleLst/>
+                </dgm:layoutNode>
+                <dgm:layoutNode name="textBox4a" styleLbl="revTx">
+                  <dgm:varLst>
+                    <dgm:bulletEnabled val="1"/>
+                  </dgm:varLst>
+                  <dgm:choose name="Name84">
+                    <dgm:if name="Name85" func="var" arg="dir" op="equ" val="norm">
+                      <dgm:choose name="Name86">
+                        <dgm:if name="Name87" axis="root des" ptType="all node" func="maxDepth" op="gt" val="1">
+                          <dgm:alg type="tx">
+                            <dgm:param type="txAnchorVert" val="t"/>
+                            <dgm:param type="parTxLTRAlign" val="l"/>
+                            <dgm:param type="parTxRTLAlign" val="r"/>
+                          </dgm:alg>
+                        </dgm:if>
+                        <dgm:else name="Name88">
+                          <dgm:alg type="tx">
+                            <dgm:param type="txAnchorVert" val="t"/>
+                            <dgm:param type="parTxLTRAlign" val="l"/>
+                            <dgm:param type="parTxRTLAlign" val="l"/>
+                          </dgm:alg>
+                        </dgm:else>
+                      </dgm:choose>
+                    </dgm:if>
+                    <dgm:else name="Name89">
+                      <dgm:choose name="Name90">
+                        <dgm:if name="Name91" axis="root des" ptType="all node" func="maxDepth" op="gt" val="1">
+                          <dgm:alg type="tx">
+                            <dgm:param type="txAnchorVert" val="b"/>
+                            <dgm:param type="txAnchorVertCh" val="b"/>
+                            <dgm:param type="parTxLTRAlign" val="l"/>
+                            <dgm:param type="parTxRTLAlign" val="r"/>
+                          </dgm:alg>
+                        </dgm:if>
+                        <dgm:else name="Name92">
+                          <dgm:alg type="tx">
+                            <dgm:param type="txAnchorVert" val="b"/>
+                            <dgm:param type="parTxLTRAlign" val="r"/>
+                            <dgm:param type="parTxRTLAlign" val="r"/>
+                          </dgm:alg>
+                        </dgm:else>
+                      </dgm:choose>
+                    </dgm:else>
+                  </dgm:choose>
+                  <dgm:shape xmlns:r="http://schemas.openxmlformats.org/officeDocument/2006/relationships" type="rect" r:blip="">
+                    <dgm:adjLst/>
+                  </dgm:shape>
+                  <dgm:presOf axis="desOrSelf" ptType="node"/>
+                  <dgm:choose name="Name93">
+                    <dgm:if name="Name94" func="var" arg="dir" op="equ" val="norm">
+                      <dgm:constrLst>
+                        <dgm:constr type="rMarg"/>
+                        <dgm:constr type="tMarg"/>
+                        <dgm:constr type="bMarg"/>
+                      </dgm:constrLst>
+                    </dgm:if>
+                    <dgm:else name="Name95">
+                      <dgm:constrLst>
+                        <dgm:constr type="lMarg"/>
+                        <dgm:constr type="tMarg"/>
+                        <dgm:constr type="bMarg"/>
+                      </dgm:constrLst>
+                    </dgm:else>
+                  </dgm:choose>
+                  <dgm:ruleLst>
+                    <dgm:rule type="primFontSz" val="5" fact="NaN" max="NaN"/>
+                  </dgm:ruleLst>
+                </dgm:layoutNode>
+              </dgm:forEach>
+              <dgm:forEach name="Name96" axis="ch" ptType="node" st="2" cnt="1">
+                <dgm:layoutNode name="bullet4b" styleLbl="node1">
+                  <dgm:alg type="sp"/>
+                  <dgm:shape xmlns:r="http://schemas.openxmlformats.org/officeDocument/2006/relationships" type="ellipse" r:blip="">
+                    <dgm:adjLst/>
+                  </dgm:shape>
+                  <dgm:presOf/>
+                  <dgm:constrLst/>
+                  <dgm:ruleLst/>
+                </dgm:layoutNode>
+                <dgm:layoutNode name="textBox4b" styleLbl="revTx">
+                  <dgm:varLst>
+                    <dgm:bulletEnabled val="1"/>
+                  </dgm:varLst>
+                  <dgm:choose name="Name97">
+                    <dgm:if name="Name98" func="var" arg="dir" op="equ" val="norm">
+                      <dgm:choose name="Name99">
+                        <dgm:if name="Name100" axis="root des" ptType="all node" func="maxDepth" op="gt" val="1">
+                          <dgm:alg type="tx">
+                            <dgm:param type="txAnchorVert" val="t"/>
+                            <dgm:param type="parTxLTRAlign" val="l"/>
+                            <dgm:param type="parTxRTLAlign" val="r"/>
+                          </dgm:alg>
+                        </dgm:if>
+                        <dgm:else name="Name101">
+                          <dgm:alg type="tx">
+                            <dgm:param type="txAnchorVert" val="t"/>
+                            <dgm:param type="parTxLTRAlign" val="l"/>
+                            <dgm:param type="parTxRTLAlign" val="l"/>
+                          </dgm:alg>
+                        </dgm:else>
+                      </dgm:choose>
+                    </dgm:if>
+                    <dgm:else name="Name102">
+                      <dgm:choose name="Name103">
+                        <dgm:if name="Name104" axis="root des" ptType="all node" func="maxDepth" op="gt" val="1">
+                          <dgm:alg type="tx">
+                            <dgm:param type="txAnchorVert" val="b"/>
+                            <dgm:param type="txAnchorVertCh" val="b"/>
+                            <dgm:param type="parTxLTRAlign" val="l"/>
+                            <dgm:param type="parTxRTLAlign" val="r"/>
+                          </dgm:alg>
+                        </dgm:if>
+                        <dgm:else name="Name105">
+                          <dgm:alg type="tx">
+                            <dgm:param type="txAnchorVert" val="b"/>
+                            <dgm:param type="parTxLTRAlign" val="r"/>
+                            <dgm:param type="parTxRTLAlign" val="r"/>
+                          </dgm:alg>
+                        </dgm:else>
+                      </dgm:choose>
+                    </dgm:else>
+                  </dgm:choose>
+                  <dgm:shape xmlns:r="http://schemas.openxmlformats.org/officeDocument/2006/relationships" type="rect" r:blip="">
+                    <dgm:adjLst/>
+                  </dgm:shape>
+                  <dgm:presOf axis="desOrSelf" ptType="node"/>
+                  <dgm:choose name="Name106">
+                    <dgm:if name="Name107" func="var" arg="dir" op="equ" val="norm">
+                      <dgm:constrLst>
+                        <dgm:constr type="rMarg"/>
+                        <dgm:constr type="tMarg"/>
+                        <dgm:constr type="bMarg"/>
+                      </dgm:constrLst>
+                    </dgm:if>
+                    <dgm:else name="Name108">
+                      <dgm:constrLst>
+                        <dgm:constr type="lMarg"/>
+                        <dgm:constr type="tMarg"/>
+                        <dgm:constr type="bMarg"/>
+                      </dgm:constrLst>
+                    </dgm:else>
+                  </dgm:choose>
+                  <dgm:ruleLst>
+                    <dgm:rule type="primFontSz" val="5" fact="NaN" max="NaN"/>
+                  </dgm:ruleLst>
+                </dgm:layoutNode>
+              </dgm:forEach>
+              <dgm:forEach name="Name109" axis="ch" ptType="node" st="3" cnt="1">
+                <dgm:layoutNode name="bullet4c" styleLbl="node1">
+                  <dgm:alg type="sp"/>
+                  <dgm:shape xmlns:r="http://schemas.openxmlformats.org/officeDocument/2006/relationships" type="ellipse" r:blip="">
+                    <dgm:adjLst/>
+                  </dgm:shape>
+                  <dgm:presOf/>
+                  <dgm:constrLst/>
+                  <dgm:ruleLst/>
+                </dgm:layoutNode>
+                <dgm:layoutNode name="textBox4c" styleLbl="revTx">
+                  <dgm:varLst>
+                    <dgm:bulletEnabled val="1"/>
+                  </dgm:varLst>
+                  <dgm:choose name="Name110">
+                    <dgm:if name="Name111" func="var" arg="dir" op="equ" val="norm">
+                      <dgm:choose name="Name112">
+                        <dgm:if name="Name113" axis="root des" ptType="all node" func="maxDepth" op="gt" val="1">
+                          <dgm:alg type="tx">
+                            <dgm:param type="txAnchorVert" val="t"/>
+                            <dgm:param type="parTxLTRAlign" val="l"/>
+                            <dgm:param type="parTxRTLAlign" val="r"/>
+                          </dgm:alg>
+                        </dgm:if>
+                        <dgm:else name="Name114">
+                          <dgm:alg type="tx">
+                            <dgm:param type="txAnchorVert" val="t"/>
+                            <dgm:param type="parTxLTRAlign" val="l"/>
+                            <dgm:param type="parTxRTLAlign" val="l"/>
+                          </dgm:alg>
+                        </dgm:else>
+                      </dgm:choose>
+                    </dgm:if>
+                    <dgm:else name="Name115">
+                      <dgm:choose name="Name116">
+                        <dgm:if name="Name117" axis="root des" ptType="all node" func="maxDepth" op="gt" val="1">
+                          <dgm:alg type="tx">
+                            <dgm:param type="txAnchorVert" val="b"/>
+                            <dgm:param type="txAnchorVertCh" val="b"/>
+                            <dgm:param type="parTxLTRAlign" val="l"/>
+                            <dgm:param type="parTxRTLAlign" val="r"/>
+                          </dgm:alg>
+                        </dgm:if>
+                        <dgm:else name="Name118">
+                          <dgm:alg type="tx">
+                            <dgm:param type="txAnchorVert" val="b"/>
+                            <dgm:param type="parTxLTRAlign" val="r"/>
+                            <dgm:param type="parTxRTLAlign" val="r"/>
+                          </dgm:alg>
+                        </dgm:else>
+                      </dgm:choose>
+                    </dgm:else>
+                  </dgm:choose>
+                  <dgm:shape xmlns:r="http://schemas.openxmlformats.org/officeDocument/2006/relationships" type="rect" r:blip="">
+                    <dgm:adjLst/>
+                  </dgm:shape>
+                  <dgm:presOf axis="desOrSelf" ptType="node"/>
+                  <dgm:choose name="Name119">
+                    <dgm:if name="Name120" func="var" arg="dir" op="equ" val="norm">
+                      <dgm:constrLst>
+                        <dgm:constr type="rMarg"/>
+                        <dgm:constr type="tMarg"/>
+                        <dgm:constr type="bMarg"/>
+                      </dgm:constrLst>
+                    </dgm:if>
+                    <dgm:else name="Name121">
+                      <dgm:constrLst>
+                        <dgm:constr type="lMarg"/>
+                        <dgm:constr type="tMarg"/>
+                        <dgm:constr type="bMarg"/>
+                      </dgm:constrLst>
+                    </dgm:else>
+                  </dgm:choose>
+                  <dgm:ruleLst>
+                    <dgm:rule type="primFontSz" val="5" fact="NaN" max="NaN"/>
+                  </dgm:ruleLst>
+                </dgm:layoutNode>
+              </dgm:forEach>
+              <dgm:forEach name="Name122" axis="ch" ptType="node" st="4" cnt="1">
+                <dgm:layoutNode name="bullet4d" styleLbl="node1">
+                  <dgm:alg type="sp"/>
+                  <dgm:shape xmlns:r="http://schemas.openxmlformats.org/officeDocument/2006/relationships" type="ellipse" r:blip="">
+                    <dgm:adjLst/>
+                  </dgm:shape>
+                  <dgm:presOf/>
+                  <dgm:constrLst/>
+                  <dgm:ruleLst/>
+                </dgm:layoutNode>
+                <dgm:layoutNode name="textBox4d" styleLbl="revTx">
+                  <dgm:varLst>
+                    <dgm:bulletEnabled val="1"/>
+                  </dgm:varLst>
+                  <dgm:choose name="Name123">
+                    <dgm:if name="Name124" func="var" arg="dir" op="equ" val="norm">
+                      <dgm:choose name="Name125">
+                        <dgm:if name="Name126" axis="root des" ptType="all node" func="maxDepth" op="gt" val="1">
+                          <dgm:alg type="tx">
+                            <dgm:param type="txAnchorVert" val="t"/>
+                            <dgm:param type="parTxLTRAlign" val="l"/>
+                            <dgm:param type="parTxRTLAlign" val="r"/>
+                          </dgm:alg>
+                        </dgm:if>
+                        <dgm:else name="Name127">
+                          <dgm:alg type="tx">
+                            <dgm:param type="txAnchorVert" val="t"/>
+                            <dgm:param type="parTxLTRAlign" val="l"/>
+                            <dgm:param type="parTxRTLAlign" val="l"/>
+                          </dgm:alg>
+                        </dgm:else>
+                      </dgm:choose>
+                    </dgm:if>
+                    <dgm:else name="Name128">
+                      <dgm:choose name="Name129">
+                        <dgm:if name="Name130" axis="root des" ptType="all node" func="maxDepth" op="gt" val="1">
+                          <dgm:alg type="tx">
+                            <dgm:param type="txAnchorVert" val="b"/>
+                            <dgm:param type="txAnchorVertCh" val="b"/>
+                            <dgm:param type="parTxLTRAlign" val="l"/>
+                            <dgm:param type="parTxRTLAlign" val="r"/>
+                          </dgm:alg>
+                        </dgm:if>
+                        <dgm:else name="Name131">
+                          <dgm:alg type="tx">
+                            <dgm:param type="txAnchorVert" val="b"/>
+                            <dgm:param type="parTxLTRAlign" val="r"/>
+                            <dgm:param type="parTxRTLAlign" val="r"/>
+                          </dgm:alg>
+                        </dgm:else>
+                      </dgm:choose>
+                    </dgm:else>
+                  </dgm:choose>
+                  <dgm:shape xmlns:r="http://schemas.openxmlformats.org/officeDocument/2006/relationships" type="rect" r:blip="">
+                    <dgm:adjLst/>
+                  </dgm:shape>
+                  <dgm:presOf axis="desOrSelf" ptType="node"/>
+                  <dgm:choose name="Name132">
+                    <dgm:if name="Name133" func="var" arg="dir" op="equ" val="norm">
+                      <dgm:constrLst>
+                        <dgm:constr type="rMarg"/>
+                        <dgm:constr type="tMarg"/>
+                        <dgm:constr type="bMarg"/>
+                      </dgm:constrLst>
+                    </dgm:if>
+                    <dgm:else name="Name134">
+                      <dgm:constrLst>
+                        <dgm:constr type="lMarg"/>
+                        <dgm:constr type="tMarg"/>
+                        <dgm:constr type="bMarg"/>
+                      </dgm:constrLst>
+                    </dgm:else>
+                  </dgm:choose>
+                  <dgm:ruleLst>
+                    <dgm:rule type="primFontSz" val="5" fact="NaN" max="NaN"/>
+                  </dgm:ruleLst>
+                </dgm:layoutNode>
+              </dgm:forEach>
+            </dgm:layoutNode>
+          </dgm:if>
+          <dgm:else name="Name135">
+            <dgm:layoutNode name="arrowDiagram5">
+              <dgm:alg type="composite">
+                <dgm:param type="vertAlign" val="none"/>
+                <dgm:param type="horzAlign" val="none"/>
+              </dgm:alg>
+              <dgm:shape xmlns:r="http://schemas.openxmlformats.org/officeDocument/2006/relationships" r:blip="">
+                <dgm:adjLst/>
+              </dgm:shape>
+              <dgm:presOf/>
+              <dgm:choose name="Name136">
+                <dgm:if name="Name137" func="var" arg="dir" op="equ" val="norm">
+                  <dgm:constrLst>
+                    <dgm:constr type="ctrX" for="ch" forName="bullet5a" refType="w" fact="0.11"/>
+                    <dgm:constr type="ctrY" for="ch" forName="bullet5a" refType="h" fact="0.762"/>
+                    <dgm:constr type="w" for="ch" forName="bullet5a" refType="w" fact="0.023"/>
+                    <dgm:constr type="h" for="ch" forName="bullet5a" refType="w" refFor="ch" refForName="bullet5a"/>
+                    <dgm:constr type="l" for="ch" forName="textBox5a" refType="ctrX" refFor="ch" refForName="bullet5a"/>
+                    <dgm:constr type="t" for="ch" forName="textBox5a" refType="ctrY" refFor="ch" refForName="bullet5a"/>
+                    <dgm:constr type="w" for="ch" forName="textBox5a" refType="w" fact="0.131"/>
+                    <dgm:constr type="h" for="ch" forName="textBox5a" refType="h" fact="0.238"/>
+                    <dgm:constr type="userA" refType="h" refFor="ch" refForName="bullet5a" fact="0.53"/>
+                    <dgm:constr type="lMarg" for="ch" forName="textBox5a" refType="userA" fact="2.834"/>
+                    <dgm:constr type="ctrX" for="ch" forName="bullet5b" refType="w" fact="0.241"/>
+                    <dgm:constr type="ctrY" for="ch" forName="bullet5b" refType="h" fact="0.581"/>
+                    <dgm:constr type="w" for="ch" forName="bullet5b" refType="w" fact="0.036"/>
+                    <dgm:constr type="h" for="ch" forName="bullet5b" refType="w" refFor="ch" refForName="bullet5b"/>
+                    <dgm:constr type="l" for="ch" forName="textBox5b" refType="ctrX" refFor="ch" refForName="bullet5b"/>
+                    <dgm:constr type="t" for="ch" forName="textBox5b" refType="ctrY" refFor="ch" refForName="bullet5b"/>
+                    <dgm:constr type="w" for="ch" forName="textBox5b" refType="w" fact="0.166"/>
+                    <dgm:constr type="h" for="ch" forName="textBox5b" refType="h" fact="0.419"/>
+                    <dgm:constr type="userB" refType="h" refFor="ch" refForName="bullet5b" fact="0.53"/>
+                    <dgm:constr type="lMarg" for="ch" forName="textBox5b" refType="userB" fact="2.834"/>
+                    <dgm:constr type="ctrX" for="ch" forName="bullet5c" refType="w" fact="0.407"/>
+                    <dgm:constr type="ctrY" for="ch" forName="bullet5c" refType="h" fact="0.438"/>
+                    <dgm:constr type="w" for="ch" forName="bullet5c" refType="w" fact="0.048"/>
+                    <dgm:constr type="h" for="ch" forName="bullet5c" refType="w" refFor="ch" refForName="bullet5c"/>
+                    <dgm:constr type="l" for="ch" forName="textBox5c" refType="ctrX" refFor="ch" refForName="bullet5c"/>
+                    <dgm:constr type="t" for="ch" forName="textBox5c" refType="ctrY" refFor="ch" refForName="bullet5c"/>
+                    <dgm:constr type="w" for="ch" forName="textBox5c" refType="w" fact="0.193"/>
+                    <dgm:constr type="h" for="ch" forName="textBox5c" refType="h" fact="0.562"/>
+                    <dgm:constr type="userC" refType="h" refFor="ch" refForName="bullet5c" fact="0.53"/>
+                    <dgm:constr type="lMarg" for="ch" forName="textBox5c" refType="userC" fact="2.834"/>
+                    <dgm:constr type="ctrX" for="ch" forName="bullet5d" refType="w" fact="0.6"/>
+                    <dgm:constr type="ctrY" for="ch" forName="bullet5d" refType="h" fact="0.33"/>
+                    <dgm:constr type="w" for="ch" forName="bullet5d" refType="w" fact="0.062"/>
+                    <dgm:constr type="h" for="ch" forName="bullet5d" refType="w" refFor="ch" refForName="bullet5d"/>
+                    <dgm:constr type="l" for="ch" forName="textBox5d" refType="ctrX" refFor="ch" refForName="bullet5d"/>
+                    <dgm:constr type="t" for="ch" forName="textBox5d" refType="ctrY" refFor="ch" refForName="bullet5d"/>
+                    <dgm:constr type="w" for="ch" forName="textBox5d" refType="w" fact="0.2"/>
+                    <dgm:constr type="h" for="ch" forName="textBox5d" refType="h" fact="0.67"/>
+                    <dgm:constr type="userD" refType="h" refFor="ch" refForName="bullet5d" fact="0.53"/>
+                    <dgm:constr type="lMarg" for="ch" forName="textBox5d" refType="userD" fact="2.834"/>
+                    <dgm:constr type="ctrX" for="ch" forName="bullet5e" refType="w" fact="0.8"/>
+                    <dgm:constr type="ctrY" for="ch" forName="bullet5e" refType="h" fact="0.264"/>
+                    <dgm:constr type="w" for="ch" forName="bullet5e" refType="w" fact="0.079"/>
+                    <dgm:constr type="h" for="ch" forName="bullet5e" refType="w" refFor="ch" refForName="bullet5e"/>
+                    <dgm:constr type="l" for="ch" forName="textBox5e" refType="ctrX" refFor="ch" refForName="bullet5e"/>
+                    <dgm:constr type="t" for="ch" forName="textBox5e" refType="ctrY" refFor="ch" refForName="bullet5e"/>
+                    <dgm:constr type="w" for="ch" forName="textBox5e" refType="w" fact="0.2"/>
+                    <dgm:constr type="h" for="ch" forName="textBox5e" refType="h" fact="0.736"/>
+                    <dgm:constr type="userE" refType="h" refFor="ch" refForName="bullet5e" fact="0.53"/>
+                    <dgm:constr type="lMarg" for="ch" forName="textBox5e" refType="userE" fact="2.834"/>
+                    <dgm:constr type="primFontSz" for="ch" ptType="node" op="equ" val="65"/>
+                  </dgm:constrLst>
+                </dgm:if>
+                <dgm:else name="Name138">
+                  <dgm:constrLst>
+                    <dgm:constr type="ctrX" for="ch" forName="bullet5a" refType="w" fact="0.11"/>
+                    <dgm:constr type="ctrY" for="ch" forName="bullet5a" refType="h" fact="0.762"/>
+                    <dgm:constr type="w" for="ch" forName="bullet5a" refType="w" fact="0.023"/>
+                    <dgm:constr type="h" for="ch" forName="bullet5a" refType="w" refFor="ch" refForName="bullet5a"/>
+                    <dgm:constr type="r" for="ch" forName="textBox5a" refType="ctrX" refFor="ch" refForName="bullet5a"/>
+                    <dgm:constr type="b" for="ch" forName="textBox5a" refType="ctrY" refFor="ch" refForName="bullet5a"/>
+                    <dgm:constr type="w" for="ch" forName="textBox5a" refType="w" fact="0.11"/>
+                    <dgm:constr type="h" for="ch" forName="textBox5a" refType="h" fact="0.762"/>
+                    <dgm:constr type="userA" refType="h" refFor="ch" refForName="bullet5a" fact="0.53"/>
+                    <dgm:constr type="rMarg" for="ch" forName="textBox5a" refType="userA" fact="2.834"/>
+                    <dgm:constr type="ctrX" for="ch" forName="bullet5b" refType="w" fact="0.241"/>
+                    <dgm:constr type="ctrY" for="ch" forName="bullet5b" refType="h" fact="0.581"/>
+                    <dgm:constr type="w" for="ch" forName="bullet5b" refType="w" fact="0.036"/>
+                    <dgm:constr type="h" for="ch" forName="bullet5b" refType="w" refFor="ch" refForName="bullet5b"/>
+                    <dgm:constr type="r" for="ch" forName="textBox5b" refType="ctrX" refFor="ch" refForName="bullet5b"/>
+                    <dgm:constr type="b" for="ch" forName="textBox5b" refType="ctrY" refFor="ch" refForName="bullet5b"/>
+                    <dgm:constr type="w" for="ch" forName="textBox5b" refType="w" fact="0.131"/>
+                    <dgm:constr type="h" for="ch" forName="textBox5b" refType="h" fact="0.581"/>
+                    <dgm:constr type="userB" refType="h" refFor="ch" refForName="bullet5b" fact="0.53"/>
+                    <dgm:constr type="rMarg" for="ch" forName="textBox5b" refType="userB" fact="2.834"/>
+                    <dgm:constr type="ctrX" for="ch" forName="bullet5c" refType="w" fact="0.407"/>
+                    <dgm:constr type="ctrY" for="ch" forName="bullet5c" refType="h" fact="0.438"/>
+                    <dgm:constr type="w" for="ch" forName="bullet5c" refType="w" fact="0.048"/>
+                    <dgm:constr type="h" for="ch" forName="bullet5c" refType="w" refFor="ch" refForName="bullet5c"/>
+                    <dgm:constr type="r" for="ch" forName="textBox5c" refType="ctrX" refFor="ch" refForName="bullet5c"/>
+                    <dgm:constr type="b" for="ch" forName="textBox5c" refType="ctrY" refFor="ch" refForName="bullet5c"/>
+                    <dgm:constr type="w" for="ch" forName="textBox5c" refType="w" fact="0.166"/>
+                    <dgm:constr type="h" for="ch" forName="textBox5c" refType="h" fact="0.438"/>
+                    <dgm:constr type="userC" refType="h" refFor="ch" refForName="bullet5c" fact="0.53"/>
+                    <dgm:constr type="rMarg" for="ch" forName="textBox5c" refType="userC" fact="2.834"/>
+                    <dgm:constr type="ctrX" for="ch" forName="bullet5d" refType="w" fact="0.6"/>
+                    <dgm:constr type="ctrY" for="ch" forName="bullet5d" refType="h" fact="0.33"/>
+                    <dgm:constr type="w" for="ch" forName="bullet5d" refType="w" fact="0.062"/>
+                    <dgm:constr type="h" for="ch" forName="bullet5d" refType="w" refFor="ch" refForName="bullet5d"/>
+                    <dgm:constr type="r" for="ch" forName="textBox5d" refType="ctrX" refFor="ch" refForName="bullet5d"/>
+                    <dgm:constr type="b" for="ch" forName="textBox5d" refType="ctrY" refFor="ch" refForName="bullet5d"/>
+                    <dgm:constr type="w" for="ch" forName="textBox5d" refType="w" fact="0.193"/>
+                    <dgm:constr type="h" for="ch" forName="textBox5d" refType="h" fact="0.33"/>
+                    <dgm:constr type="userD" refType="h" refFor="ch" refForName="bullet5d" fact="0.53"/>
+                    <dgm:constr type="rMarg" for="ch" forName="textBox5d" refType="userD" fact="2.834"/>
+                    <dgm:constr type="ctrX" for="ch" forName="bullet5e" refType="w" fact="0.8"/>
+                    <dgm:constr type="ctrY" for="ch" forName="bullet5e" refType="h" fact="0.264"/>
+                    <dgm:constr type="w" for="ch" forName="bullet5e" refType="w" fact="0.079"/>
+                    <dgm:constr type="h" for="ch" forName="bullet5e" refType="w" refFor="ch" refForName="bullet5e"/>
+                    <dgm:constr type="r" for="ch" forName="textBox5e" refType="ctrX" refFor="ch" refForName="bullet5e"/>
+                    <dgm:constr type="b" for="ch" forName="textBox5e" refType="ctrY" refFor="ch" refForName="bullet5e"/>
+                    <dgm:constr type="w" for="ch" forName="textBox5e" refType="w" fact="0.2"/>
+                    <dgm:constr type="h" for="ch" forName="textBox5e" refType="h" fact="0.264"/>
+                    <dgm:constr type="userE" refType="h" refFor="ch" refForName="bullet5e" fact="0.53"/>
+                    <dgm:constr type="rMarg" for="ch" forName="textBox5e" refType="userE" fact="2.834"/>
+                    <dgm:constr type="primFontSz" for="ch" ptType="node" op="equ" val="65"/>
+                  </dgm:constrLst>
+                </dgm:else>
+              </dgm:choose>
+              <dgm:ruleLst/>
+              <dgm:forEach name="Name139" axis="ch" ptType="node" cnt="1">
+                <dgm:layoutNode name="bullet5a" styleLbl="node1">
+                  <dgm:alg type="sp"/>
+                  <dgm:shape xmlns:r="http://schemas.openxmlformats.org/officeDocument/2006/relationships" type="ellipse" r:blip="">
+                    <dgm:adjLst/>
+                  </dgm:shape>
+                  <dgm:presOf/>
+                  <dgm:constrLst/>
+                  <dgm:ruleLst/>
+                </dgm:layoutNode>
+                <dgm:layoutNode name="textBox5a" styleLbl="revTx">
+                  <dgm:varLst>
+                    <dgm:bulletEnabled val="1"/>
+                  </dgm:varLst>
+                  <dgm:choose name="Name140">
+                    <dgm:if name="Name141" func="var" arg="dir" op="equ" val="norm">
+                      <dgm:choose name="Name142">
+                        <dgm:if name="Name143" axis="root des" ptType="all node" func="maxDepth" op="gt" val="1">
+                          <dgm:alg type="tx">
+                            <dgm:param type="txAnchorVert" val="t"/>
+                            <dgm:param type="parTxLTRAlign" val="l"/>
+                            <dgm:param type="parTxRTLAlign" val="r"/>
+                          </dgm:alg>
+                        </dgm:if>
+                        <dgm:else name="Name144">
+                          <dgm:alg type="tx">
+                            <dgm:param type="txAnchorVert" val="t"/>
+                            <dgm:param type="parTxLTRAlign" val="l"/>
+                            <dgm:param type="parTxRTLAlign" val="l"/>
+                          </dgm:alg>
+                        </dgm:else>
+                      </dgm:choose>
+                    </dgm:if>
+                    <dgm:else name="Name145">
+                      <dgm:choose name="Name146">
+                        <dgm:if name="Name147" axis="root des" ptType="all node" func="maxDepth" op="gt" val="1">
+                          <dgm:alg type="tx">
+                            <dgm:param type="txAnchorVert" val="b"/>
+                            <dgm:param type="txAnchorVertCh" val="b"/>
+                            <dgm:param type="parTxLTRAlign" val="l"/>
+                            <dgm:param type="parTxRTLAlign" val="r"/>
+                          </dgm:alg>
+                        </dgm:if>
+                        <dgm:else name="Name148">
+                          <dgm:alg type="tx">
+                            <dgm:param type="txAnchorVert" val="b"/>
+                            <dgm:param type="parTxLTRAlign" val="r"/>
+                            <dgm:param type="parTxRTLAlign" val="r"/>
+                          </dgm:alg>
+                        </dgm:else>
+                      </dgm:choose>
+                    </dgm:else>
+                  </dgm:choose>
+                  <dgm:shape xmlns:r="http://schemas.openxmlformats.org/officeDocument/2006/relationships" type="rect" r:blip="">
+                    <dgm:adjLst/>
+                  </dgm:shape>
+                  <dgm:presOf axis="desOrSelf" ptType="node"/>
+                  <dgm:choose name="Name149">
+                    <dgm:if name="Name150" func="var" arg="dir" op="equ" val="norm">
+                      <dgm:constrLst>
+                        <dgm:constr type="rMarg"/>
+                        <dgm:constr type="tMarg"/>
+                        <dgm:constr type="bMarg"/>
+                      </dgm:constrLst>
+                    </dgm:if>
+                    <dgm:else name="Name151">
+                      <dgm:constrLst>
+                        <dgm:constr type="lMarg"/>
+                        <dgm:constr type="tMarg"/>
+                        <dgm:constr type="bMarg"/>
+                      </dgm:constrLst>
+                    </dgm:else>
+                  </dgm:choose>
+                  <dgm:ruleLst>
+                    <dgm:rule type="primFontSz" val="5" fact="NaN" max="NaN"/>
+                  </dgm:ruleLst>
+                </dgm:layoutNode>
+              </dgm:forEach>
+              <dgm:forEach name="Name152" axis="ch" ptType="node" st="2" cnt="1">
+                <dgm:layoutNode name="bullet5b" styleLbl="node1">
+                  <dgm:alg type="sp"/>
+                  <dgm:shape xmlns:r="http://schemas.openxmlformats.org/officeDocument/2006/relationships" type="ellipse" r:blip="">
+                    <dgm:adjLst/>
+                  </dgm:shape>
+                  <dgm:presOf/>
+                  <dgm:constrLst/>
+                  <dgm:ruleLst/>
+                </dgm:layoutNode>
+                <dgm:layoutNode name="textBox5b" styleLbl="revTx">
+                  <dgm:varLst>
+                    <dgm:bulletEnabled val="1"/>
+                  </dgm:varLst>
+                  <dgm:choose name="Name153">
+                    <dgm:if name="Name154" func="var" arg="dir" op="equ" val="norm">
+                      <dgm:choose name="Name155">
+                        <dgm:if name="Name156" axis="root des" ptType="all node" func="maxDepth" op="gt" val="1">
+                          <dgm:alg type="tx">
+                            <dgm:param type="txAnchorVert" val="t"/>
+                            <dgm:param type="parTxLTRAlign" val="l"/>
+                            <dgm:param type="parTxRTLAlign" val="r"/>
+                          </dgm:alg>
+                        </dgm:if>
+                        <dgm:else name="Name157">
+                          <dgm:alg type="tx">
+                            <dgm:param type="txAnchorVert" val="t"/>
+                            <dgm:param type="parTxLTRAlign" val="l"/>
+                            <dgm:param type="parTxRTLAlign" val="l"/>
+                          </dgm:alg>
+                        </dgm:else>
+                      </dgm:choose>
+                    </dgm:if>
+                    <dgm:else name="Name158">
+                      <dgm:choose name="Name159">
+                        <dgm:if name="Name160" axis="root des" ptType="all node" func="maxDepth" op="gt" val="1">
+                          <dgm:alg type="tx">
+                            <dgm:param type="txAnchorVert" val="b"/>
+                            <dgm:param type="txAnchorVertCh" val="b"/>
+                            <dgm:param type="parTxLTRAlign" val="l"/>
+                            <dgm:param type="parTxRTLAlign" val="r"/>
+                          </dgm:alg>
+                        </dgm:if>
+                        <dgm:else name="Name161">
+                          <dgm:alg type="tx">
+                            <dgm:param type="txAnchorVert" val="b"/>
+                            <dgm:param type="parTxLTRAlign" val="r"/>
+                            <dgm:param type="parTxRTLAlign" val="r"/>
+                          </dgm:alg>
+                        </dgm:else>
+                      </dgm:choose>
+                    </dgm:else>
+                  </dgm:choose>
+                  <dgm:shape xmlns:r="http://schemas.openxmlformats.org/officeDocument/2006/relationships" type="rect" r:blip="">
+                    <dgm:adjLst/>
+                  </dgm:shape>
+                  <dgm:presOf axis="desOrSelf" ptType="node"/>
+                  <dgm:choose name="Name162">
+                    <dgm:if name="Name163" func="var" arg="dir" op="equ" val="norm">
+                      <dgm:constrLst>
+                        <dgm:constr type="rMarg"/>
+                        <dgm:constr type="tMarg"/>
+                        <dgm:constr type="bMarg"/>
+                      </dgm:constrLst>
+                    </dgm:if>
+                    <dgm:else name="Name164">
+                      <dgm:constrLst>
+                        <dgm:constr type="lMarg"/>
+                        <dgm:constr type="tMarg"/>
+                        <dgm:constr type="bMarg"/>
+                      </dgm:constrLst>
+                    </dgm:else>
+                  </dgm:choose>
+                  <dgm:ruleLst>
+                    <dgm:rule type="primFontSz" val="5" fact="NaN" max="NaN"/>
+                  </dgm:ruleLst>
+                </dgm:layoutNode>
+              </dgm:forEach>
+              <dgm:forEach name="Name165" axis="ch" ptType="node" st="3" cnt="1">
+                <dgm:layoutNode name="bullet5c" styleLbl="node1">
+                  <dgm:alg type="sp"/>
+                  <dgm:shape xmlns:r="http://schemas.openxmlformats.org/officeDocument/2006/relationships" type="ellipse" r:blip="">
+                    <dgm:adjLst/>
+                  </dgm:shape>
+                  <dgm:presOf/>
+                  <dgm:constrLst/>
+                  <dgm:ruleLst/>
+                </dgm:layoutNode>
+                <dgm:layoutNode name="textBox5c" styleLbl="revTx">
+                  <dgm:varLst>
+                    <dgm:bulletEnabled val="1"/>
+                  </dgm:varLst>
+                  <dgm:choose name="Name166">
+                    <dgm:if name="Name167" func="var" arg="dir" op="equ" val="norm">
+                      <dgm:choose name="Name168">
+                        <dgm:if name="Name169" axis="root des" ptType="all node" func="maxDepth" op="gt" val="1">
+                          <dgm:alg type="tx">
+                            <dgm:param type="txAnchorVert" val="t"/>
+                            <dgm:param type="parTxLTRAlign" val="l"/>
+                            <dgm:param type="parTxRTLAlign" val="r"/>
+                          </dgm:alg>
+                        </dgm:if>
+                        <dgm:else name="Name170">
+                          <dgm:alg type="tx">
+                            <dgm:param type="txAnchorVert" val="t"/>
+                            <dgm:param type="parTxLTRAlign" val="l"/>
+                            <dgm:param type="parTxRTLAlign" val="l"/>
+                          </dgm:alg>
+                        </dgm:else>
+                      </dgm:choose>
+                    </dgm:if>
+                    <dgm:else name="Name171">
+                      <dgm:choose name="Name172">
+                        <dgm:if name="Name173" axis="root des" ptType="all node" func="maxDepth" op="gt" val="1">
+                          <dgm:alg type="tx">
+                            <dgm:param type="txAnchorVert" val="b"/>
+                            <dgm:param type="txAnchorVertCh" val="b"/>
+                            <dgm:param type="parTxLTRAlign" val="l"/>
+                            <dgm:param type="parTxRTLAlign" val="r"/>
+                          </dgm:alg>
+                        </dgm:if>
+                        <dgm:else name="Name174">
+                          <dgm:alg type="tx">
+                            <dgm:param type="txAnchorVert" val="b"/>
+                            <dgm:param type="parTxLTRAlign" val="r"/>
+                            <dgm:param type="parTxRTLAlign" val="r"/>
+                          </dgm:alg>
+                        </dgm:else>
+                      </dgm:choose>
+                    </dgm:else>
+                  </dgm:choose>
+                  <dgm:shape xmlns:r="http://schemas.openxmlformats.org/officeDocument/2006/relationships" type="rect" r:blip="">
+                    <dgm:adjLst/>
+                  </dgm:shape>
+                  <dgm:presOf axis="desOrSelf" ptType="node"/>
+                  <dgm:choose name="Name175">
+                    <dgm:if name="Name176" func="var" arg="dir" op="equ" val="norm">
+                      <dgm:constrLst>
+                        <dgm:constr type="rMarg"/>
+                        <dgm:constr type="tMarg"/>
+                        <dgm:constr type="bMarg"/>
+                      </dgm:constrLst>
+                    </dgm:if>
+                    <dgm:else name="Name177">
+                      <dgm:constrLst>
+                        <dgm:constr type="lMarg"/>
+                        <dgm:constr type="tMarg"/>
+                        <dgm:constr type="bMarg"/>
+                      </dgm:constrLst>
+                    </dgm:else>
+                  </dgm:choose>
+                  <dgm:ruleLst>
+                    <dgm:rule type="primFontSz" val="5" fact="NaN" max="NaN"/>
+                  </dgm:ruleLst>
+                </dgm:layoutNode>
+              </dgm:forEach>
+              <dgm:forEach name="Name178" axis="ch" ptType="node" st="4" cnt="1">
+                <dgm:layoutNode name="bullet5d" styleLbl="node1">
+                  <dgm:alg type="sp"/>
+                  <dgm:shape xmlns:r="http://schemas.openxmlformats.org/officeDocument/2006/relationships" type="ellipse" r:blip="">
+                    <dgm:adjLst/>
+                  </dgm:shape>
+                  <dgm:presOf/>
+                  <dgm:constrLst/>
+                  <dgm:ruleLst/>
+                </dgm:layoutNode>
+                <dgm:layoutNode name="textBox5d" styleLbl="revTx">
+                  <dgm:varLst>
+                    <dgm:bulletEnabled val="1"/>
+                  </dgm:varLst>
+                  <dgm:choose name="Name179">
+                    <dgm:if name="Name180" func="var" arg="dir" op="equ" val="norm">
+                      <dgm:choose name="Name181">
+                        <dgm:if name="Name182" axis="root des" ptType="all node" func="maxDepth" op="gt" val="1">
+                          <dgm:alg type="tx">
+                            <dgm:param type="txAnchorVert" val="t"/>
+                            <dgm:param type="parTxLTRAlign" val="l"/>
+                            <dgm:param type="parTxRTLAlign" val="r"/>
+                          </dgm:alg>
+                        </dgm:if>
+                        <dgm:else name="Name183">
+                          <dgm:alg type="tx">
+                            <dgm:param type="txAnchorVert" val="t"/>
+                            <dgm:param type="parTxLTRAlign" val="l"/>
+                            <dgm:param type="parTxRTLAlign" val="l"/>
+                          </dgm:alg>
+                        </dgm:else>
+                      </dgm:choose>
+                    </dgm:if>
+                    <dgm:else name="Name184">
+                      <dgm:choose name="Name185">
+                        <dgm:if name="Name186" axis="root des" ptType="all node" func="maxDepth" op="gt" val="1">
+                          <dgm:alg type="tx">
+                            <dgm:param type="txAnchorVert" val="b"/>
+                            <dgm:param type="txAnchorVertCh" val="b"/>
+                            <dgm:param type="parTxLTRAlign" val="l"/>
+                            <dgm:param type="parTxRTLAlign" val="r"/>
+                          </dgm:alg>
+                        </dgm:if>
+                        <dgm:else name="Name187">
+                          <dgm:alg type="tx">
+                            <dgm:param type="txAnchorVert" val="b"/>
+                            <dgm:param type="parTxLTRAlign" val="r"/>
+                            <dgm:param type="parTxRTLAlign" val="r"/>
+                          </dgm:alg>
+                        </dgm:else>
+                      </dgm:choose>
+                    </dgm:else>
+                  </dgm:choose>
+                  <dgm:shape xmlns:r="http://schemas.openxmlformats.org/officeDocument/2006/relationships" type="rect" r:blip="">
+                    <dgm:adjLst/>
+                  </dgm:shape>
+                  <dgm:presOf axis="desOrSelf" ptType="node"/>
+                  <dgm:choose name="Name188">
+                    <dgm:if name="Name189" func="var" arg="dir" op="equ" val="norm">
+                      <dgm:constrLst>
+                        <dgm:constr type="rMarg"/>
+                        <dgm:constr type="tMarg"/>
+                        <dgm:constr type="bMarg"/>
+                      </dgm:constrLst>
+                    </dgm:if>
+                    <dgm:else name="Name190">
+                      <dgm:constrLst>
+                        <dgm:constr type="lMarg"/>
+                        <dgm:constr type="tMarg"/>
+                        <dgm:constr type="bMarg"/>
+                      </dgm:constrLst>
+                    </dgm:else>
+                  </dgm:choose>
+                  <dgm:ruleLst>
+                    <dgm:rule type="primFontSz" val="5" fact="NaN" max="NaN"/>
+                  </dgm:ruleLst>
+                </dgm:layoutNode>
+              </dgm:forEach>
+              <dgm:forEach name="Name191" axis="ch" ptType="node" st="5" cnt="1">
+                <dgm:layoutNode name="bullet5e" styleLbl="node1">
+                  <dgm:alg type="sp"/>
+                  <dgm:shape xmlns:r="http://schemas.openxmlformats.org/officeDocument/2006/relationships" type="ellipse" r:blip="">
+                    <dgm:adjLst/>
+                  </dgm:shape>
+                  <dgm:presOf/>
+                  <dgm:constrLst/>
+                  <dgm:ruleLst/>
+                </dgm:layoutNode>
+                <dgm:layoutNode name="textBox5e" styleLbl="revTx">
+                  <dgm:varLst>
+                    <dgm:bulletEnabled val="1"/>
+                  </dgm:varLst>
+                  <dgm:choose name="Name192">
+                    <dgm:if name="Name193" func="var" arg="dir" op="equ" val="norm">
+                      <dgm:choose name="Name194">
+                        <dgm:if name="Name195" axis="root des" ptType="all node" func="maxDepth" op="gt" val="1">
+                          <dgm:alg type="tx">
+                            <dgm:param type="txAnchorVert" val="t"/>
+                            <dgm:param type="parTxLTRAlign" val="l"/>
+                            <dgm:param type="parTxRTLAlign" val="r"/>
+                          </dgm:alg>
+                        </dgm:if>
+                        <dgm:else name="Name196">
+                          <dgm:alg type="tx">
+                            <dgm:param type="txAnchorVert" val="t"/>
+                            <dgm:param type="parTxLTRAlign" val="l"/>
+                            <dgm:param type="parTxRTLAlign" val="l"/>
+                          </dgm:alg>
+                        </dgm:else>
+                      </dgm:choose>
+                    </dgm:if>
+                    <dgm:else name="Name197">
+                      <dgm:choose name="Name198">
+                        <dgm:if name="Name199" axis="root des" ptType="all node" func="maxDepth" op="gt" val="1">
+                          <dgm:alg type="tx">
+                            <dgm:param type="txAnchorVert" val="b"/>
+                            <dgm:param type="txAnchorVertCh" val="b"/>
+                            <dgm:param type="parTxLTRAlign" val="l"/>
+                            <dgm:param type="parTxRTLAlign" val="r"/>
+                          </dgm:alg>
+                        </dgm:if>
+                        <dgm:else name="Name200">
+                          <dgm:alg type="tx">
+                            <dgm:param type="txAnchorVert" val="b"/>
+                            <dgm:param type="parTxLTRAlign" val="r"/>
+                            <dgm:param type="parTxRTLAlign" val="r"/>
+                          </dgm:alg>
+                        </dgm:else>
+                      </dgm:choose>
+                    </dgm:else>
+                  </dgm:choose>
+                  <dgm:shape xmlns:r="http://schemas.openxmlformats.org/officeDocument/2006/relationships" type="rect" r:blip="">
+                    <dgm:adjLst/>
+                  </dgm:shape>
+                  <dgm:presOf axis="desOrSelf" ptType="node"/>
+                  <dgm:choose name="Name201">
+                    <dgm:if name="Name202" func="var" arg="dir" op="equ" val="norm">
+                      <dgm:constrLst>
+                        <dgm:constr type="rMarg"/>
+                        <dgm:constr type="tMarg"/>
+                        <dgm:constr type="bMarg"/>
+                      </dgm:constrLst>
+                    </dgm:if>
+                    <dgm:else name="Name203">
+                      <dgm:constrLst>
+                        <dgm:constr type="lMarg"/>
+                        <dgm:constr type="tMarg"/>
+                        <dgm:constr type="bMarg"/>
+                      </dgm:constrLst>
+                    </dgm:else>
+                  </dgm:choose>
+                  <dgm:ruleLst>
+                    <dgm:rule type="primFontSz" val="5" fact="NaN" max="NaN"/>
+                  </dgm:ruleLst>
+                </dgm:layoutNode>
+              </dgm:forEach>
+            </dgm:layoutNode>
+          </dgm:else>
+        </dgm:choose>
+      </dgm:if>
+      <dgm:else name="Name204"/>
+    </dgm:choose>
+  </dgm:layoutNode>
+</dgm:layoutDef>
+</file>
+
+<file path=ppt/diagrams/layout3.xml><?xml version="1.0" encoding="utf-8"?>
 <dgm:layoutDef xmlns:dgm="http://schemas.openxmlformats.org/drawingml/2006/diagram" xmlns:a="http://schemas.openxmlformats.org/drawingml/2006/main" uniqueId="urn:microsoft.com/office/officeart/2005/8/layout/bProcess4">
   <dgm:title val=""/>
   <dgm:desc val=""/>
@@ -7177,6 +10663,1040 @@
 </file>
 
 <file path=ppt/diagrams/quickStyle2.xml><?xml version="1.0" encoding="utf-8"?>
+<dgm:styleDef xmlns:dgm="http://schemas.openxmlformats.org/drawingml/2006/diagram" xmlns:a="http://schemas.openxmlformats.org/drawingml/2006/main" uniqueId="urn:microsoft.com/office/officeart/2005/8/quickstyle/simple1">
+  <dgm:title val=""/>
+  <dgm:desc val=""/>
+  <dgm:catLst>
+    <dgm:cat type="simple" pri="10100"/>
+  </dgm:catLst>
+  <dgm:scene3d>
+    <a:camera prst="orthographicFront"/>
+    <a:lightRig rig="threePt" dir="t"/>
+  </dgm:scene3d>
+  <dgm:styleLbl name="node0">
+    <dgm:scene3d>
+      <a:camera prst="orthographicFront"/>
+      <a:lightRig rig="threePt" dir="t"/>
+    </dgm:scene3d>
+    <dgm:sp3d/>
+    <dgm:txPr/>
+    <dgm:style>
+      <a:lnRef idx="2">
+        <a:scrgbClr r="0" g="0" b="0"/>
+      </a:lnRef>
+      <a:fillRef idx="1">
+        <a:scrgbClr r="0" g="0" b="0"/>
+      </a:fillRef>
+      <a:effectRef idx="0">
+        <a:scrgbClr r="0" g="0" b="0"/>
+      </a:effectRef>
+      <a:fontRef idx="minor">
+        <a:schemeClr val="lt1"/>
+      </a:fontRef>
+    </dgm:style>
+  </dgm:styleLbl>
+  <dgm:styleLbl name="lnNode1">
+    <dgm:scene3d>
+      <a:camera prst="orthographicFront"/>
+      <a:lightRig rig="threePt" dir="t"/>
+    </dgm:scene3d>
+    <dgm:sp3d/>
+    <dgm:txPr/>
+    <dgm:style>
+      <a:lnRef idx="2">
+        <a:scrgbClr r="0" g="0" b="0"/>
+      </a:lnRef>
+      <a:fillRef idx="1">
+        <a:scrgbClr r="0" g="0" b="0"/>
+      </a:fillRef>
+      <a:effectRef idx="0">
+        <a:scrgbClr r="0" g="0" b="0"/>
+      </a:effectRef>
+      <a:fontRef idx="minor">
+        <a:schemeClr val="lt1"/>
+      </a:fontRef>
+    </dgm:style>
+  </dgm:styleLbl>
+  <dgm:styleLbl name="vennNode1">
+    <dgm:scene3d>
+      <a:camera prst="orthographicFront"/>
+      <a:lightRig rig="threePt" dir="t"/>
+    </dgm:scene3d>
+    <dgm:sp3d/>
+    <dgm:txPr/>
+    <dgm:style>
+      <a:lnRef idx="2">
+        <a:scrgbClr r="0" g="0" b="0"/>
+      </a:lnRef>
+      <a:fillRef idx="1">
+        <a:scrgbClr r="0" g="0" b="0"/>
+      </a:fillRef>
+      <a:effectRef idx="0">
+        <a:scrgbClr r="0" g="0" b="0"/>
+      </a:effectRef>
+      <a:fontRef idx="minor">
+        <a:schemeClr val="tx1"/>
+      </a:fontRef>
+    </dgm:style>
+  </dgm:styleLbl>
+  <dgm:styleLbl name="alignNode1">
+    <dgm:scene3d>
+      <a:camera prst="orthographicFront"/>
+      <a:lightRig rig="threePt" dir="t"/>
+    </dgm:scene3d>
+    <dgm:sp3d/>
+    <dgm:txPr/>
+    <dgm:style>
+      <a:lnRef idx="2">
+        <a:scrgbClr r="0" g="0" b="0"/>
+      </a:lnRef>
+      <a:fillRef idx="1">
+        <a:scrgbClr r="0" g="0" b="0"/>
+      </a:fillRef>
+      <a:effectRef idx="0">
+        <a:scrgbClr r="0" g="0" b="0"/>
+      </a:effectRef>
+      <a:fontRef idx="minor">
+        <a:schemeClr val="lt1"/>
+      </a:fontRef>
+    </dgm:style>
+  </dgm:styleLbl>
+  <dgm:styleLbl name="node1">
+    <dgm:scene3d>
+      <a:camera prst="orthographicFront"/>
+      <a:lightRig rig="threePt" dir="t"/>
+    </dgm:scene3d>
+    <dgm:sp3d/>
+    <dgm:txPr/>
+    <dgm:style>
+      <a:lnRef idx="2">
+        <a:scrgbClr r="0" g="0" b="0"/>
+      </a:lnRef>
+      <a:fillRef idx="1">
+        <a:scrgbClr r="0" g="0" b="0"/>
+      </a:fillRef>
+      <a:effectRef idx="0">
+        <a:scrgbClr r="0" g="0" b="0"/>
+      </a:effectRef>
+      <a:fontRef idx="minor">
+        <a:schemeClr val="lt1"/>
+      </a:fontRef>
+    </dgm:style>
+  </dgm:styleLbl>
+  <dgm:styleLbl name="node2">
+    <dgm:scene3d>
+      <a:camera prst="orthographicFront"/>
+      <a:lightRig rig="threePt" dir="t"/>
+    </dgm:scene3d>
+    <dgm:sp3d/>
+    <dgm:txPr/>
+    <dgm:style>
+      <a:lnRef idx="2">
+        <a:scrgbClr r="0" g="0" b="0"/>
+      </a:lnRef>
+      <a:fillRef idx="1">
+        <a:scrgbClr r="0" g="0" b="0"/>
+      </a:fillRef>
+      <a:effectRef idx="0">
+        <a:scrgbClr r="0" g="0" b="0"/>
+      </a:effectRef>
+      <a:fontRef idx="minor">
+        <a:schemeClr val="lt1"/>
+      </a:fontRef>
+    </dgm:style>
+  </dgm:styleLbl>
+  <dgm:styleLbl name="node3">
+    <dgm:scene3d>
+      <a:camera prst="orthographicFront"/>
+      <a:lightRig rig="threePt" dir="t"/>
+    </dgm:scene3d>
+    <dgm:sp3d/>
+    <dgm:txPr/>
+    <dgm:style>
+      <a:lnRef idx="2">
+        <a:scrgbClr r="0" g="0" b="0"/>
+      </a:lnRef>
+      <a:fillRef idx="1">
+        <a:scrgbClr r="0" g="0" b="0"/>
+      </a:fillRef>
+      <a:effectRef idx="0">
+        <a:scrgbClr r="0" g="0" b="0"/>
+      </a:effectRef>
+      <a:fontRef idx="minor">
+        <a:schemeClr val="lt1"/>
+      </a:fontRef>
+    </dgm:style>
+  </dgm:styleLbl>
+  <dgm:styleLbl name="node4">
+    <dgm:scene3d>
+      <a:camera prst="orthographicFront"/>
+      <a:lightRig rig="threePt" dir="t"/>
+    </dgm:scene3d>
+    <dgm:sp3d/>
+    <dgm:txPr/>
+    <dgm:style>
+      <a:lnRef idx="2">
+        <a:scrgbClr r="0" g="0" b="0"/>
+      </a:lnRef>
+      <a:fillRef idx="1">
+        <a:scrgbClr r="0" g="0" b="0"/>
+      </a:fillRef>
+      <a:effectRef idx="0">
+        <a:scrgbClr r="0" g="0" b="0"/>
+      </a:effectRef>
+      <a:fontRef idx="minor">
+        <a:schemeClr val="lt1"/>
+      </a:fontRef>
+    </dgm:style>
+  </dgm:styleLbl>
+  <dgm:styleLbl name="fgImgPlace1">
+    <dgm:scene3d>
+      <a:camera prst="orthographicFront"/>
+      <a:lightRig rig="threePt" dir="t"/>
+    </dgm:scene3d>
+    <dgm:sp3d/>
+    <dgm:txPr/>
+    <dgm:style>
+      <a:lnRef idx="2">
+        <a:scrgbClr r="0" g="0" b="0"/>
+      </a:lnRef>
+      <a:fillRef idx="1">
+        <a:scrgbClr r="0" g="0" b="0"/>
+      </a:fillRef>
+      <a:effectRef idx="0">
+        <a:scrgbClr r="0" g="0" b="0"/>
+      </a:effectRef>
+      <a:fontRef idx="minor"/>
+    </dgm:style>
+  </dgm:styleLbl>
+  <dgm:styleLbl name="alignImgPlace1">
+    <dgm:scene3d>
+      <a:camera prst="orthographicFront"/>
+      <a:lightRig rig="threePt" dir="t"/>
+    </dgm:scene3d>
+    <dgm:sp3d/>
+    <dgm:txPr/>
+    <dgm:style>
+      <a:lnRef idx="2">
+        <a:scrgbClr r="0" g="0" b="0"/>
+      </a:lnRef>
+      <a:fillRef idx="1">
+        <a:scrgbClr r="0" g="0" b="0"/>
+      </a:fillRef>
+      <a:effectRef idx="0">
+        <a:scrgbClr r="0" g="0" b="0"/>
+      </a:effectRef>
+      <a:fontRef idx="minor"/>
+    </dgm:style>
+  </dgm:styleLbl>
+  <dgm:styleLbl name="bgImgPlace1">
+    <dgm:scene3d>
+      <a:camera prst="orthographicFront"/>
+      <a:lightRig rig="threePt" dir="t"/>
+    </dgm:scene3d>
+    <dgm:sp3d/>
+    <dgm:txPr/>
+    <dgm:style>
+      <a:lnRef idx="2">
+        <a:scrgbClr r="0" g="0" b="0"/>
+      </a:lnRef>
+      <a:fillRef idx="1">
+        <a:scrgbClr r="0" g="0" b="0"/>
+      </a:fillRef>
+      <a:effectRef idx="0">
+        <a:scrgbClr r="0" g="0" b="0"/>
+      </a:effectRef>
+      <a:fontRef idx="minor"/>
+    </dgm:style>
+  </dgm:styleLbl>
+  <dgm:styleLbl name="sibTrans2D1">
+    <dgm:scene3d>
+      <a:camera prst="orthographicFront"/>
+      <a:lightRig rig="threePt" dir="t"/>
+    </dgm:scene3d>
+    <dgm:sp3d/>
+    <dgm:txPr/>
+    <dgm:style>
+      <a:lnRef idx="0">
+        <a:scrgbClr r="0" g="0" b="0"/>
+      </a:lnRef>
+      <a:fillRef idx="1">
+        <a:scrgbClr r="0" g="0" b="0"/>
+      </a:fillRef>
+      <a:effectRef idx="0">
+        <a:scrgbClr r="0" g="0" b="0"/>
+      </a:effectRef>
+      <a:fontRef idx="minor">
+        <a:schemeClr val="lt1"/>
+      </a:fontRef>
+    </dgm:style>
+  </dgm:styleLbl>
+  <dgm:styleLbl name="fgSibTrans2D1">
+    <dgm:scene3d>
+      <a:camera prst="orthographicFront"/>
+      <a:lightRig rig="threePt" dir="t"/>
+    </dgm:scene3d>
+    <dgm:sp3d/>
+    <dgm:txPr/>
+    <dgm:style>
+      <a:lnRef idx="0">
+        <a:scrgbClr r="0" g="0" b="0"/>
+      </a:lnRef>
+      <a:fillRef idx="1">
+        <a:scrgbClr r="0" g="0" b="0"/>
+      </a:fillRef>
+      <a:effectRef idx="0">
+        <a:scrgbClr r="0" g="0" b="0"/>
+      </a:effectRef>
+      <a:fontRef idx="minor">
+        <a:schemeClr val="lt1"/>
+      </a:fontRef>
+    </dgm:style>
+  </dgm:styleLbl>
+  <dgm:styleLbl name="bgSibTrans2D1">
+    <dgm:scene3d>
+      <a:camera prst="orthographicFront"/>
+      <a:lightRig rig="threePt" dir="t"/>
+    </dgm:scene3d>
+    <dgm:sp3d/>
+    <dgm:txPr/>
+    <dgm:style>
+      <a:lnRef idx="0">
+        <a:scrgbClr r="0" g="0" b="0"/>
+      </a:lnRef>
+      <a:fillRef idx="1">
+        <a:scrgbClr r="0" g="0" b="0"/>
+      </a:fillRef>
+      <a:effectRef idx="0">
+        <a:scrgbClr r="0" g="0" b="0"/>
+      </a:effectRef>
+      <a:fontRef idx="minor">
+        <a:schemeClr val="lt1"/>
+      </a:fontRef>
+    </dgm:style>
+  </dgm:styleLbl>
+  <dgm:styleLbl name="sibTrans1D1">
+    <dgm:scene3d>
+      <a:camera prst="orthographicFront"/>
+      <a:lightRig rig="threePt" dir="t"/>
+    </dgm:scene3d>
+    <dgm:sp3d/>
+    <dgm:txPr/>
+    <dgm:style>
+      <a:lnRef idx="1">
+        <a:scrgbClr r="0" g="0" b="0"/>
+      </a:lnRef>
+      <a:fillRef idx="0">
+        <a:scrgbClr r="0" g="0" b="0"/>
+      </a:fillRef>
+      <a:effectRef idx="0">
+        <a:scrgbClr r="0" g="0" b="0"/>
+      </a:effectRef>
+      <a:fontRef idx="minor"/>
+    </dgm:style>
+  </dgm:styleLbl>
+  <dgm:styleLbl name="callout">
+    <dgm:scene3d>
+      <a:camera prst="orthographicFront"/>
+      <a:lightRig rig="threePt" dir="t"/>
+    </dgm:scene3d>
+    <dgm:sp3d/>
+    <dgm:txPr/>
+    <dgm:style>
+      <a:lnRef idx="2">
+        <a:scrgbClr r="0" g="0" b="0"/>
+      </a:lnRef>
+      <a:fillRef idx="1">
+        <a:scrgbClr r="0" g="0" b="0"/>
+      </a:fillRef>
+      <a:effectRef idx="0">
+        <a:scrgbClr r="0" g="0" b="0"/>
+      </a:effectRef>
+      <a:fontRef idx="minor"/>
+    </dgm:style>
+  </dgm:styleLbl>
+  <dgm:styleLbl name="asst0">
+    <dgm:scene3d>
+      <a:camera prst="orthographicFront"/>
+      <a:lightRig rig="threePt" dir="t"/>
+    </dgm:scene3d>
+    <dgm:sp3d/>
+    <dgm:txPr/>
+    <dgm:style>
+      <a:lnRef idx="2">
+        <a:scrgbClr r="0" g="0" b="0"/>
+      </a:lnRef>
+      <a:fillRef idx="1">
+        <a:scrgbClr r="0" g="0" b="0"/>
+      </a:fillRef>
+      <a:effectRef idx="0">
+        <a:scrgbClr r="0" g="0" b="0"/>
+      </a:effectRef>
+      <a:fontRef idx="minor">
+        <a:schemeClr val="lt1"/>
+      </a:fontRef>
+    </dgm:style>
+  </dgm:styleLbl>
+  <dgm:styleLbl name="asst1">
+    <dgm:scene3d>
+      <a:camera prst="orthographicFront"/>
+      <a:lightRig rig="threePt" dir="t"/>
+    </dgm:scene3d>
+    <dgm:sp3d/>
+    <dgm:txPr/>
+    <dgm:style>
+      <a:lnRef idx="2">
+        <a:scrgbClr r="0" g="0" b="0"/>
+      </a:lnRef>
+      <a:fillRef idx="1">
+        <a:scrgbClr r="0" g="0" b="0"/>
+      </a:fillRef>
+      <a:effectRef idx="0">
+        <a:scrgbClr r="0" g="0" b="0"/>
+      </a:effectRef>
+      <a:fontRef idx="minor">
+        <a:schemeClr val="lt1"/>
+      </a:fontRef>
+    </dgm:style>
+  </dgm:styleLbl>
+  <dgm:styleLbl name="asst2">
+    <dgm:scene3d>
+      <a:camera prst="orthographicFront"/>
+      <a:lightRig rig="threePt" dir="t"/>
+    </dgm:scene3d>
+    <dgm:sp3d/>
+    <dgm:txPr/>
+    <dgm:style>
+      <a:lnRef idx="2">
+        <a:scrgbClr r="0" g="0" b="0"/>
+      </a:lnRef>
+      <a:fillRef idx="1">
+        <a:scrgbClr r="0" g="0" b="0"/>
+      </a:fillRef>
+      <a:effectRef idx="0">
+        <a:scrgbClr r="0" g="0" b="0"/>
+      </a:effectRef>
+      <a:fontRef idx="minor">
+        <a:schemeClr val="lt1"/>
+      </a:fontRef>
+    </dgm:style>
+  </dgm:styleLbl>
+  <dgm:styleLbl name="asst3">
+    <dgm:scene3d>
+      <a:camera prst="orthographicFront"/>
+      <a:lightRig rig="threePt" dir="t"/>
+    </dgm:scene3d>
+    <dgm:sp3d/>
+    <dgm:txPr/>
+    <dgm:style>
+      <a:lnRef idx="2">
+        <a:scrgbClr r="0" g="0" b="0"/>
+      </a:lnRef>
+      <a:fillRef idx="1">
+        <a:scrgbClr r="0" g="0" b="0"/>
+      </a:fillRef>
+      <a:effectRef idx="0">
+        <a:scrgbClr r="0" g="0" b="0"/>
+      </a:effectRef>
+      <a:fontRef idx="minor">
+        <a:schemeClr val="lt1"/>
+      </a:fontRef>
+    </dgm:style>
+  </dgm:styleLbl>
+  <dgm:styleLbl name="asst4">
+    <dgm:scene3d>
+      <a:camera prst="orthographicFront"/>
+      <a:lightRig rig="threePt" dir="t"/>
+    </dgm:scene3d>
+    <dgm:sp3d/>
+    <dgm:txPr/>
+    <dgm:style>
+      <a:lnRef idx="2">
+        <a:scrgbClr r="0" g="0" b="0"/>
+      </a:lnRef>
+      <a:fillRef idx="1">
+        <a:scrgbClr r="0" g="0" b="0"/>
+      </a:fillRef>
+      <a:effectRef idx="0">
+        <a:scrgbClr r="0" g="0" b="0"/>
+      </a:effectRef>
+      <a:fontRef idx="minor">
+        <a:schemeClr val="lt1"/>
+      </a:fontRef>
+    </dgm:style>
+  </dgm:styleLbl>
+  <dgm:styleLbl name="parChTrans2D1">
+    <dgm:scene3d>
+      <a:camera prst="orthographicFront"/>
+      <a:lightRig rig="threePt" dir="t"/>
+    </dgm:scene3d>
+    <dgm:sp3d/>
+    <dgm:txPr/>
+    <dgm:style>
+      <a:lnRef idx="2">
+        <a:scrgbClr r="0" g="0" b="0"/>
+      </a:lnRef>
+      <a:fillRef idx="1">
+        <a:scrgbClr r="0" g="0" b="0"/>
+      </a:fillRef>
+      <a:effectRef idx="0">
+        <a:scrgbClr r="0" g="0" b="0"/>
+      </a:effectRef>
+      <a:fontRef idx="minor">
+        <a:schemeClr val="lt1"/>
+      </a:fontRef>
+    </dgm:style>
+  </dgm:styleLbl>
+  <dgm:styleLbl name="parChTrans2D2">
+    <dgm:scene3d>
+      <a:camera prst="orthographicFront"/>
+      <a:lightRig rig="threePt" dir="t"/>
+    </dgm:scene3d>
+    <dgm:sp3d/>
+    <dgm:txPr/>
+    <dgm:style>
+      <a:lnRef idx="2">
+        <a:scrgbClr r="0" g="0" b="0"/>
+      </a:lnRef>
+      <a:fillRef idx="1">
+        <a:scrgbClr r="0" g="0" b="0"/>
+      </a:fillRef>
+      <a:effectRef idx="0">
+        <a:scrgbClr r="0" g="0" b="0"/>
+      </a:effectRef>
+      <a:fontRef idx="minor">
+        <a:schemeClr val="lt1"/>
+      </a:fontRef>
+    </dgm:style>
+  </dgm:styleLbl>
+  <dgm:styleLbl name="parChTrans2D3">
+    <dgm:scene3d>
+      <a:camera prst="orthographicFront"/>
+      <a:lightRig rig="threePt" dir="t"/>
+    </dgm:scene3d>
+    <dgm:sp3d/>
+    <dgm:txPr/>
+    <dgm:style>
+      <a:lnRef idx="2">
+        <a:scrgbClr r="0" g="0" b="0"/>
+      </a:lnRef>
+      <a:fillRef idx="1">
+        <a:scrgbClr r="0" g="0" b="0"/>
+      </a:fillRef>
+      <a:effectRef idx="0">
+        <a:scrgbClr r="0" g="0" b="0"/>
+      </a:effectRef>
+      <a:fontRef idx="minor">
+        <a:schemeClr val="lt1"/>
+      </a:fontRef>
+    </dgm:style>
+  </dgm:styleLbl>
+  <dgm:styleLbl name="parChTrans2D4">
+    <dgm:scene3d>
+      <a:camera prst="orthographicFront"/>
+      <a:lightRig rig="threePt" dir="t"/>
+    </dgm:scene3d>
+    <dgm:sp3d/>
+    <dgm:txPr/>
+    <dgm:style>
+      <a:lnRef idx="2">
+        <a:scrgbClr r="0" g="0" b="0"/>
+      </a:lnRef>
+      <a:fillRef idx="1">
+        <a:scrgbClr r="0" g="0" b="0"/>
+      </a:fillRef>
+      <a:effectRef idx="0">
+        <a:scrgbClr r="0" g="0" b="0"/>
+      </a:effectRef>
+      <a:fontRef idx="minor">
+        <a:schemeClr val="lt1"/>
+      </a:fontRef>
+    </dgm:style>
+  </dgm:styleLbl>
+  <dgm:styleLbl name="parChTrans1D1">
+    <dgm:scene3d>
+      <a:camera prst="orthographicFront"/>
+      <a:lightRig rig="threePt" dir="t"/>
+    </dgm:scene3d>
+    <dgm:sp3d/>
+    <dgm:txPr/>
+    <dgm:style>
+      <a:lnRef idx="2">
+        <a:scrgbClr r="0" g="0" b="0"/>
+      </a:lnRef>
+      <a:fillRef idx="0">
+        <a:scrgbClr r="0" g="0" b="0"/>
+      </a:fillRef>
+      <a:effectRef idx="0">
+        <a:scrgbClr r="0" g="0" b="0"/>
+      </a:effectRef>
+      <a:fontRef idx="minor"/>
+    </dgm:style>
+  </dgm:styleLbl>
+  <dgm:styleLbl name="parChTrans1D2">
+    <dgm:scene3d>
+      <a:camera prst="orthographicFront"/>
+      <a:lightRig rig="threePt" dir="t"/>
+    </dgm:scene3d>
+    <dgm:sp3d/>
+    <dgm:txPr/>
+    <dgm:style>
+      <a:lnRef idx="2">
+        <a:scrgbClr r="0" g="0" b="0"/>
+      </a:lnRef>
+      <a:fillRef idx="0">
+        <a:scrgbClr r="0" g="0" b="0"/>
+      </a:fillRef>
+      <a:effectRef idx="0">
+        <a:scrgbClr r="0" g="0" b="0"/>
+      </a:effectRef>
+      <a:fontRef idx="minor"/>
+    </dgm:style>
+  </dgm:styleLbl>
+  <dgm:styleLbl name="parChTrans1D3">
+    <dgm:scene3d>
+      <a:camera prst="orthographicFront"/>
+      <a:lightRig rig="threePt" dir="t"/>
+    </dgm:scene3d>
+    <dgm:sp3d/>
+    <dgm:txPr/>
+    <dgm:style>
+      <a:lnRef idx="2">
+        <a:scrgbClr r="0" g="0" b="0"/>
+      </a:lnRef>
+      <a:fillRef idx="0">
+        <a:scrgbClr r="0" g="0" b="0"/>
+      </a:fillRef>
+      <a:effectRef idx="0">
+        <a:scrgbClr r="0" g="0" b="0"/>
+      </a:effectRef>
+      <a:fontRef idx="minor"/>
+    </dgm:style>
+  </dgm:styleLbl>
+  <dgm:styleLbl name="parChTrans1D4">
+    <dgm:scene3d>
+      <a:camera prst="orthographicFront"/>
+      <a:lightRig rig="threePt" dir="t"/>
+    </dgm:scene3d>
+    <dgm:sp3d/>
+    <dgm:txPr/>
+    <dgm:style>
+      <a:lnRef idx="2">
+        <a:scrgbClr r="0" g="0" b="0"/>
+      </a:lnRef>
+      <a:fillRef idx="0">
+        <a:scrgbClr r="0" g="0" b="0"/>
+      </a:fillRef>
+      <a:effectRef idx="0">
+        <a:scrgbClr r="0" g="0" b="0"/>
+      </a:effectRef>
+      <a:fontRef idx="minor"/>
+    </dgm:style>
+  </dgm:styleLbl>
+  <dgm:styleLbl name="fgAcc1">
+    <dgm:scene3d>
+      <a:camera prst="orthographicFront"/>
+      <a:lightRig rig="threePt" dir="t"/>
+    </dgm:scene3d>
+    <dgm:sp3d/>
+    <dgm:txPr/>
+    <dgm:style>
+      <a:lnRef idx="2">
+        <a:scrgbClr r="0" g="0" b="0"/>
+      </a:lnRef>
+      <a:fillRef idx="1">
+        <a:scrgbClr r="0" g="0" b="0"/>
+      </a:fillRef>
+      <a:effectRef idx="0">
+        <a:scrgbClr r="0" g="0" b="0"/>
+      </a:effectRef>
+      <a:fontRef idx="minor"/>
+    </dgm:style>
+  </dgm:styleLbl>
+  <dgm:styleLbl name="conFgAcc1">
+    <dgm:scene3d>
+      <a:camera prst="orthographicFront"/>
+      <a:lightRig rig="threePt" dir="t"/>
+    </dgm:scene3d>
+    <dgm:sp3d/>
+    <dgm:txPr/>
+    <dgm:style>
+      <a:lnRef idx="2">
+        <a:scrgbClr r="0" g="0" b="0"/>
+      </a:lnRef>
+      <a:fillRef idx="1">
+        <a:scrgbClr r="0" g="0" b="0"/>
+      </a:fillRef>
+      <a:effectRef idx="0">
+        <a:scrgbClr r="0" g="0" b="0"/>
+      </a:effectRef>
+      <a:fontRef idx="minor"/>
+    </dgm:style>
+  </dgm:styleLbl>
+  <dgm:styleLbl name="alignAcc1">
+    <dgm:scene3d>
+      <a:camera prst="orthographicFront"/>
+      <a:lightRig rig="threePt" dir="t"/>
+    </dgm:scene3d>
+    <dgm:sp3d/>
+    <dgm:txPr/>
+    <dgm:style>
+      <a:lnRef idx="2">
+        <a:scrgbClr r="0" g="0" b="0"/>
+      </a:lnRef>
+      <a:fillRef idx="1">
+        <a:scrgbClr r="0" g="0" b="0"/>
+      </a:fillRef>
+      <a:effectRef idx="0">
+        <a:scrgbClr r="0" g="0" b="0"/>
+      </a:effectRef>
+      <a:fontRef idx="minor"/>
+    </dgm:style>
+  </dgm:styleLbl>
+  <dgm:styleLbl name="trAlignAcc1">
+    <dgm:scene3d>
+      <a:camera prst="orthographicFront"/>
+      <a:lightRig rig="threePt" dir="t"/>
+    </dgm:scene3d>
+    <dgm:sp3d/>
+    <dgm:txPr/>
+    <dgm:style>
+      <a:lnRef idx="1">
+        <a:scrgbClr r="0" g="0" b="0"/>
+      </a:lnRef>
+      <a:fillRef idx="1">
+        <a:scrgbClr r="0" g="0" b="0"/>
+      </a:fillRef>
+      <a:effectRef idx="0">
+        <a:scrgbClr r="0" g="0" b="0"/>
+      </a:effectRef>
+      <a:fontRef idx="minor"/>
+    </dgm:style>
+  </dgm:styleLbl>
+  <dgm:styleLbl name="bgAcc1">
+    <dgm:scene3d>
+      <a:camera prst="orthographicFront"/>
+      <a:lightRig rig="threePt" dir="t"/>
+    </dgm:scene3d>
+    <dgm:sp3d/>
+    <dgm:txPr/>
+    <dgm:style>
+      <a:lnRef idx="2">
+        <a:scrgbClr r="0" g="0" b="0"/>
+      </a:lnRef>
+      <a:fillRef idx="1">
+        <a:scrgbClr r="0" g="0" b="0"/>
+      </a:fillRef>
+      <a:effectRef idx="0">
+        <a:scrgbClr r="0" g="0" b="0"/>
+      </a:effectRef>
+      <a:fontRef idx="minor"/>
+    </dgm:style>
+  </dgm:styleLbl>
+  <dgm:styleLbl name="solidFgAcc1">
+    <dgm:scene3d>
+      <a:camera prst="orthographicFront"/>
+      <a:lightRig rig="threePt" dir="t"/>
+    </dgm:scene3d>
+    <dgm:sp3d/>
+    <dgm:txPr/>
+    <dgm:style>
+      <a:lnRef idx="2">
+        <a:scrgbClr r="0" g="0" b="0"/>
+      </a:lnRef>
+      <a:fillRef idx="1">
+        <a:scrgbClr r="0" g="0" b="0"/>
+      </a:fillRef>
+      <a:effectRef idx="0">
+        <a:scrgbClr r="0" g="0" b="0"/>
+      </a:effectRef>
+      <a:fontRef idx="minor"/>
+    </dgm:style>
+  </dgm:styleLbl>
+  <dgm:styleLbl name="solidAlignAcc1">
+    <dgm:scene3d>
+      <a:camera prst="orthographicFront"/>
+      <a:lightRig rig="threePt" dir="t"/>
+    </dgm:scene3d>
+    <dgm:sp3d/>
+    <dgm:txPr/>
+    <dgm:style>
+      <a:lnRef idx="2">
+        <a:scrgbClr r="0" g="0" b="0"/>
+      </a:lnRef>
+      <a:fillRef idx="1">
+        <a:scrgbClr r="0" g="0" b="0"/>
+      </a:fillRef>
+      <a:effectRef idx="0">
+        <a:scrgbClr r="0" g="0" b="0"/>
+      </a:effectRef>
+      <a:fontRef idx="minor"/>
+    </dgm:style>
+  </dgm:styleLbl>
+  <dgm:styleLbl name="solidBgAcc1">
+    <dgm:scene3d>
+      <a:camera prst="orthographicFront"/>
+      <a:lightRig rig="threePt" dir="t"/>
+    </dgm:scene3d>
+    <dgm:sp3d/>
+    <dgm:txPr/>
+    <dgm:style>
+      <a:lnRef idx="2">
+        <a:scrgbClr r="0" g="0" b="0"/>
+      </a:lnRef>
+      <a:fillRef idx="1">
+        <a:scrgbClr r="0" g="0" b="0"/>
+      </a:fillRef>
+      <a:effectRef idx="0">
+        <a:scrgbClr r="0" g="0" b="0"/>
+      </a:effectRef>
+      <a:fontRef idx="minor"/>
+    </dgm:style>
+  </dgm:styleLbl>
+  <dgm:styleLbl name="fgAccFollowNode1">
+    <dgm:scene3d>
+      <a:camera prst="orthographicFront"/>
+      <a:lightRig rig="threePt" dir="t"/>
+    </dgm:scene3d>
+    <dgm:sp3d/>
+    <dgm:txPr/>
+    <dgm:style>
+      <a:lnRef idx="2">
+        <a:scrgbClr r="0" g="0" b="0"/>
+      </a:lnRef>
+      <a:fillRef idx="1">
+        <a:scrgbClr r="0" g="0" b="0"/>
+      </a:fillRef>
+      <a:effectRef idx="0">
+        <a:scrgbClr r="0" g="0" b="0"/>
+      </a:effectRef>
+      <a:fontRef idx="minor"/>
+    </dgm:style>
+  </dgm:styleLbl>
+  <dgm:styleLbl name="alignAccFollowNode1">
+    <dgm:scene3d>
+      <a:camera prst="orthographicFront"/>
+      <a:lightRig rig="threePt" dir="t"/>
+    </dgm:scene3d>
+    <dgm:sp3d/>
+    <dgm:txPr/>
+    <dgm:style>
+      <a:lnRef idx="2">
+        <a:scrgbClr r="0" g="0" b="0"/>
+      </a:lnRef>
+      <a:fillRef idx="1">
+        <a:scrgbClr r="0" g="0" b="0"/>
+      </a:fillRef>
+      <a:effectRef idx="0">
+        <a:scrgbClr r="0" g="0" b="0"/>
+      </a:effectRef>
+      <a:fontRef idx="minor"/>
+    </dgm:style>
+  </dgm:styleLbl>
+  <dgm:styleLbl name="bgAccFollowNode1">
+    <dgm:scene3d>
+      <a:camera prst="orthographicFront"/>
+      <a:lightRig rig="threePt" dir="t"/>
+    </dgm:scene3d>
+    <dgm:sp3d/>
+    <dgm:txPr/>
+    <dgm:style>
+      <a:lnRef idx="2">
+        <a:scrgbClr r="0" g="0" b="0"/>
+      </a:lnRef>
+      <a:fillRef idx="1">
+        <a:scrgbClr r="0" g="0" b="0"/>
+      </a:fillRef>
+      <a:effectRef idx="0">
+        <a:scrgbClr r="0" g="0" b="0"/>
+      </a:effectRef>
+      <a:fontRef idx="minor"/>
+    </dgm:style>
+  </dgm:styleLbl>
+  <dgm:styleLbl name="fgAcc0">
+    <dgm:scene3d>
+      <a:camera prst="orthographicFront"/>
+      <a:lightRig rig="threePt" dir="t"/>
+    </dgm:scene3d>
+    <dgm:sp3d/>
+    <dgm:txPr/>
+    <dgm:style>
+      <a:lnRef idx="2">
+        <a:scrgbClr r="0" g="0" b="0"/>
+      </a:lnRef>
+      <a:fillRef idx="1">
+        <a:scrgbClr r="0" g="0" b="0"/>
+      </a:fillRef>
+      <a:effectRef idx="0">
+        <a:scrgbClr r="0" g="0" b="0"/>
+      </a:effectRef>
+      <a:fontRef idx="minor"/>
+    </dgm:style>
+  </dgm:styleLbl>
+  <dgm:styleLbl name="fgAcc2">
+    <dgm:scene3d>
+      <a:camera prst="orthographicFront"/>
+      <a:lightRig rig="threePt" dir="t"/>
+    </dgm:scene3d>
+    <dgm:sp3d/>
+    <dgm:txPr/>
+    <dgm:style>
+      <a:lnRef idx="2">
+        <a:scrgbClr r="0" g="0" b="0"/>
+      </a:lnRef>
+      <a:fillRef idx="1">
+        <a:scrgbClr r="0" g="0" b="0"/>
+      </a:fillRef>
+      <a:effectRef idx="0">
+        <a:scrgbClr r="0" g="0" b="0"/>
+      </a:effectRef>
+      <a:fontRef idx="minor"/>
+    </dgm:style>
+  </dgm:styleLbl>
+  <dgm:styleLbl name="fgAcc3">
+    <dgm:scene3d>
+      <a:camera prst="orthographicFront"/>
+      <a:lightRig rig="threePt" dir="t"/>
+    </dgm:scene3d>
+    <dgm:sp3d/>
+    <dgm:txPr/>
+    <dgm:style>
+      <a:lnRef idx="2">
+        <a:scrgbClr r="0" g="0" b="0"/>
+      </a:lnRef>
+      <a:fillRef idx="1">
+        <a:scrgbClr r="0" g="0" b="0"/>
+      </a:fillRef>
+      <a:effectRef idx="0">
+        <a:scrgbClr r="0" g="0" b="0"/>
+      </a:effectRef>
+      <a:fontRef idx="minor"/>
+    </dgm:style>
+  </dgm:styleLbl>
+  <dgm:styleLbl name="fgAcc4">
+    <dgm:scene3d>
+      <a:camera prst="orthographicFront"/>
+      <a:lightRig rig="threePt" dir="t"/>
+    </dgm:scene3d>
+    <dgm:sp3d/>
+    <dgm:txPr/>
+    <dgm:style>
+      <a:lnRef idx="2">
+        <a:scrgbClr r="0" g="0" b="0"/>
+      </a:lnRef>
+      <a:fillRef idx="1">
+        <a:scrgbClr r="0" g="0" b="0"/>
+      </a:fillRef>
+      <a:effectRef idx="0">
+        <a:scrgbClr r="0" g="0" b="0"/>
+      </a:effectRef>
+      <a:fontRef idx="minor"/>
+    </dgm:style>
+  </dgm:styleLbl>
+  <dgm:styleLbl name="bgShp">
+    <dgm:scene3d>
+      <a:camera prst="orthographicFront"/>
+      <a:lightRig rig="threePt" dir="t"/>
+    </dgm:scene3d>
+    <dgm:sp3d/>
+    <dgm:txPr/>
+    <dgm:style>
+      <a:lnRef idx="0">
+        <a:scrgbClr r="0" g="0" b="0"/>
+      </a:lnRef>
+      <a:fillRef idx="1">
+        <a:scrgbClr r="0" g="0" b="0"/>
+      </a:fillRef>
+      <a:effectRef idx="0">
+        <a:scrgbClr r="0" g="0" b="0"/>
+      </a:effectRef>
+      <a:fontRef idx="minor"/>
+    </dgm:style>
+  </dgm:styleLbl>
+  <dgm:styleLbl name="dkBgShp">
+    <dgm:scene3d>
+      <a:camera prst="orthographicFront"/>
+      <a:lightRig rig="threePt" dir="t"/>
+    </dgm:scene3d>
+    <dgm:sp3d/>
+    <dgm:txPr/>
+    <dgm:style>
+      <a:lnRef idx="0">
+        <a:scrgbClr r="0" g="0" b="0"/>
+      </a:lnRef>
+      <a:fillRef idx="1">
+        <a:scrgbClr r="0" g="0" b="0"/>
+      </a:fillRef>
+      <a:effectRef idx="0">
+        <a:scrgbClr r="0" g="0" b="0"/>
+      </a:effectRef>
+      <a:fontRef idx="minor"/>
+    </dgm:style>
+  </dgm:styleLbl>
+  <dgm:styleLbl name="trBgShp">
+    <dgm:scene3d>
+      <a:camera prst="orthographicFront"/>
+      <a:lightRig rig="threePt" dir="t"/>
+    </dgm:scene3d>
+    <dgm:sp3d/>
+    <dgm:txPr/>
+    <dgm:style>
+      <a:lnRef idx="0">
+        <a:scrgbClr r="0" g="0" b="0"/>
+      </a:lnRef>
+      <a:fillRef idx="1">
+        <a:scrgbClr r="0" g="0" b="0"/>
+      </a:fillRef>
+      <a:effectRef idx="0">
+        <a:scrgbClr r="0" g="0" b="0"/>
+      </a:effectRef>
+      <a:fontRef idx="minor"/>
+    </dgm:style>
+  </dgm:styleLbl>
+  <dgm:styleLbl name="fgShp">
+    <dgm:scene3d>
+      <a:camera prst="orthographicFront"/>
+      <a:lightRig rig="threePt" dir="t"/>
+    </dgm:scene3d>
+    <dgm:sp3d/>
+    <dgm:txPr/>
+    <dgm:style>
+      <a:lnRef idx="2">
+        <a:scrgbClr r="0" g="0" b="0"/>
+      </a:lnRef>
+      <a:fillRef idx="1">
+        <a:scrgbClr r="0" g="0" b="0"/>
+      </a:fillRef>
+      <a:effectRef idx="0">
+        <a:scrgbClr r="0" g="0" b="0"/>
+      </a:effectRef>
+      <a:fontRef idx="minor"/>
+    </dgm:style>
+  </dgm:styleLbl>
+  <dgm:styleLbl name="revTx">
+    <dgm:scene3d>
+      <a:camera prst="orthographicFront"/>
+      <a:lightRig rig="threePt" dir="t"/>
+    </dgm:scene3d>
+    <dgm:sp3d/>
+    <dgm:txPr/>
+    <dgm:style>
+      <a:lnRef idx="0">
+        <a:scrgbClr r="0" g="0" b="0"/>
+      </a:lnRef>
+      <a:fillRef idx="0">
+        <a:scrgbClr r="0" g="0" b="0"/>
+      </a:fillRef>
+      <a:effectRef idx="0">
+        <a:scrgbClr r="0" g="0" b="0"/>
+      </a:effectRef>
+      <a:fontRef idx="minor"/>
+    </dgm:style>
+  </dgm:styleLbl>
+</dgm:styleDef>
+</file>
+
+<file path=ppt/diagrams/quickStyle3.xml><?xml version="1.0" encoding="utf-8"?>
 <dgm:styleDef xmlns:dgm="http://schemas.openxmlformats.org/drawingml/2006/diagram" xmlns:a="http://schemas.openxmlformats.org/drawingml/2006/main" uniqueId="urn:microsoft.com/office/officeart/2005/8/quickstyle/3d3">
   <dgm:title val=""/>
   <dgm:desc val=""/>
@@ -8637,7 +13157,7 @@
           <a:p>
             <a:fld id="{C6EF87B8-80BA-41CA-A66B-02DDB3D8D168}" type="datetimeFigureOut">
               <a:rPr lang="en-IN" smtClean="0"/>
-              <a:t>07-10-2026</a:t>
+              <a:t>13-10-2026</a:t>
             </a:fld>
             <a:endParaRPr lang="en-IN"/>
           </a:p>
@@ -8802,7 +13322,7 @@
           <a:p>
             <a:fld id="{C6EF87B8-80BA-41CA-A66B-02DDB3D8D168}" type="datetimeFigureOut">
               <a:rPr lang="en-IN" smtClean="0"/>
-              <a:t>07-10-2026</a:t>
+              <a:t>13-10-2026</a:t>
             </a:fld>
             <a:endParaRPr lang="en-IN"/>
           </a:p>
@@ -8977,7 +13497,7 @@
           <a:p>
             <a:fld id="{C6EF87B8-80BA-41CA-A66B-02DDB3D8D168}" type="datetimeFigureOut">
               <a:rPr lang="en-IN" smtClean="0"/>
-              <a:t>07-10-2026</a:t>
+              <a:t>13-10-2026</a:t>
             </a:fld>
             <a:endParaRPr lang="en-IN"/>
           </a:p>
@@ -9142,7 +13662,7 @@
           <a:p>
             <a:fld id="{C6EF87B8-80BA-41CA-A66B-02DDB3D8D168}" type="datetimeFigureOut">
               <a:rPr lang="en-IN" smtClean="0"/>
-              <a:t>07-10-2026</a:t>
+              <a:t>13-10-2026</a:t>
             </a:fld>
             <a:endParaRPr lang="en-IN"/>
           </a:p>
@@ -9383,7 +13903,7 @@
           <a:p>
             <a:fld id="{C6EF87B8-80BA-41CA-A66B-02DDB3D8D168}" type="datetimeFigureOut">
               <a:rPr lang="en-IN" smtClean="0"/>
-              <a:t>07-10-2026</a:t>
+              <a:t>13-10-2026</a:t>
             </a:fld>
             <a:endParaRPr lang="en-IN"/>
           </a:p>
@@ -9610,7 +14130,7 @@
           <a:p>
             <a:fld id="{C6EF87B8-80BA-41CA-A66B-02DDB3D8D168}" type="datetimeFigureOut">
               <a:rPr lang="en-IN" smtClean="0"/>
-              <a:t>07-10-2026</a:t>
+              <a:t>13-10-2026</a:t>
             </a:fld>
             <a:endParaRPr lang="en-IN"/>
           </a:p>
@@ -9972,7 +14492,7 @@
           <a:p>
             <a:fld id="{C6EF87B8-80BA-41CA-A66B-02DDB3D8D168}" type="datetimeFigureOut">
               <a:rPr lang="en-IN" smtClean="0"/>
-              <a:t>07-10-2026</a:t>
+              <a:t>13-10-2026</a:t>
             </a:fld>
             <a:endParaRPr lang="en-IN"/>
           </a:p>
@@ -10085,7 +14605,7 @@
           <a:p>
             <a:fld id="{C6EF87B8-80BA-41CA-A66B-02DDB3D8D168}" type="datetimeFigureOut">
               <a:rPr lang="en-IN" smtClean="0"/>
-              <a:t>07-10-2026</a:t>
+              <a:t>13-10-2026</a:t>
             </a:fld>
             <a:endParaRPr lang="en-IN"/>
           </a:p>
@@ -10175,7 +14695,7 @@
           <a:p>
             <a:fld id="{C6EF87B8-80BA-41CA-A66B-02DDB3D8D168}" type="datetimeFigureOut">
               <a:rPr lang="en-IN" smtClean="0"/>
-              <a:t>07-10-2026</a:t>
+              <a:t>13-10-2026</a:t>
             </a:fld>
             <a:endParaRPr lang="en-IN"/>
           </a:p>
@@ -10447,7 +14967,7 @@
           <a:p>
             <a:fld id="{C6EF87B8-80BA-41CA-A66B-02DDB3D8D168}" type="datetimeFigureOut">
               <a:rPr lang="en-IN" smtClean="0"/>
-              <a:t>07-10-2026</a:t>
+              <a:t>13-10-2026</a:t>
             </a:fld>
             <a:endParaRPr lang="en-IN"/>
           </a:p>
@@ -10695,7 +15215,7 @@
           <a:p>
             <a:fld id="{C6EF87B8-80BA-41CA-A66B-02DDB3D8D168}" type="datetimeFigureOut">
               <a:rPr lang="en-IN" smtClean="0"/>
-              <a:t>07-10-2026</a:t>
+              <a:t>13-10-2026</a:t>
             </a:fld>
             <a:endParaRPr lang="en-IN"/>
           </a:p>
@@ -10903,7 +15423,7 @@
           <a:p>
             <a:fld id="{C6EF87B8-80BA-41CA-A66B-02DDB3D8D168}" type="datetimeFigureOut">
               <a:rPr lang="en-IN" smtClean="0"/>
-              <a:t>07-10-2026</a:t>
+              <a:t>13-10-2026</a:t>
             </a:fld>
             <a:endParaRPr lang="en-IN"/>
           </a:p>
@@ -11345,6 +15865,87 @@
               <a:t>AuraGen</a:t>
             </a:r>
             <a:endParaRPr lang="en-IN" dirty="0"/>
+          </a:p>
+        </p:txBody>
+      </p:sp>
+      <p:sp>
+        <p:nvSpPr>
+          <p:cNvPr id="5" name="TextBox 4">
+            <a:extLst>
+              <a:ext uri="{FF2B5EF4-FFF2-40B4-BE49-F238E27FC236}">
+                <a16:creationId xmlns:a16="http://schemas.microsoft.com/office/drawing/2014/main" id="{9AD2FC6D-A169-7464-3A3A-C6FF23BC907F}"/>
+              </a:ext>
+            </a:extLst>
+          </p:cNvPr>
+          <p:cNvSpPr txBox="1"/>
+          <p:nvPr/>
+        </p:nvSpPr>
+        <p:spPr>
+          <a:xfrm>
+            <a:off x="6216361" y="4599928"/>
+            <a:ext cx="4631748" cy="923330"/>
+          </a:xfrm>
+          <a:prstGeom prst="rect">
+            <a:avLst/>
+          </a:prstGeom>
+          <a:noFill/>
+        </p:spPr>
+        <p:txBody>
+          <a:bodyPr wrap="square">
+            <a:spAutoFit/>
+          </a:bodyPr>
+          <a:lstStyle/>
+          <a:p>
+            <a:pPr marL="0" marR="0" indent="0" algn="l">
+              <a:buNone/>
+            </a:pPr>
+            <a:r>
+              <a:rPr lang="en-IN" sz="1800" b="1" i="0" dirty="0">
+                <a:solidFill>
+                  <a:schemeClr val="tx1"/>
+                </a:solidFill>
+                <a:effectLst/>
+                <a:latin typeface="+mn-lt"/>
+              </a:rPr>
+              <a:t>Sriram Gandhi Prabha V</a:t>
+            </a:r>
+          </a:p>
+          <a:p>
+            <a:pPr marL="0" marR="0" indent="0" algn="l">
+              <a:buNone/>
+            </a:pPr>
+            <a:r>
+              <a:rPr lang="en-IN" b="1" i="0" dirty="0">
+                <a:solidFill>
+                  <a:schemeClr val="tx1"/>
+                </a:solidFill>
+                <a:effectLst/>
+                <a:latin typeface="+mn-lt"/>
+              </a:rPr>
+              <a:t>prabhasrivel1311@gmail.com</a:t>
+            </a:r>
+          </a:p>
+          <a:p>
+            <a:pPr marL="0" marR="0" indent="0" algn="l">
+              <a:buNone/>
+            </a:pPr>
+            <a:r>
+              <a:rPr lang="en-IN" sz="1800" b="1" i="0" dirty="0">
+                <a:solidFill>
+                  <a:schemeClr val="tx1"/>
+                </a:solidFill>
+                <a:effectLst/>
+                <a:latin typeface="+mn-lt"/>
+              </a:rPr>
+              <a:t>dd7a2bc00106</a:t>
+            </a:r>
+            <a:endParaRPr lang="en-IN" sz="825" b="1" i="0" dirty="0">
+              <a:solidFill>
+                <a:srgbClr val="64748B"/>
+              </a:solidFill>
+              <a:effectLst/>
+              <a:latin typeface="ui-sans-serif"/>
+            </a:endParaRPr>
           </a:p>
         </p:txBody>
       </p:sp>
@@ -13475,18 +18076,46 @@
           <p:nvPr>
             <p:extLst>
               <p:ext uri="{D42A27DB-BD31-4B8C-83A1-F6EECF244321}">
-                <p14:modId xmlns:p14="http://schemas.microsoft.com/office/powerpoint/2010/main" val="1759750845"/>
+                <p14:modId xmlns:p14="http://schemas.microsoft.com/office/powerpoint/2010/main" val="3886936969"/>
               </p:ext>
             </p:extLst>
           </p:nvPr>
         </p:nvGraphicFramePr>
         <p:xfrm>
           <a:off x="413871" y="1524000"/>
-          <a:ext cx="10939929" cy="4177553"/>
+          <a:ext cx="6856505" cy="4177553"/>
         </p:xfrm>
         <a:graphic>
           <a:graphicData uri="http://schemas.openxmlformats.org/drawingml/2006/diagram">
             <dgm:relIds xmlns:dgm="http://schemas.openxmlformats.org/drawingml/2006/diagram" xmlns:r="http://schemas.openxmlformats.org/officeDocument/2006/relationships" r:dm="rId2" r:lo="rId3" r:qs="rId4" r:cs="rId5"/>
+          </a:graphicData>
+        </a:graphic>
+      </p:graphicFrame>
+      <p:graphicFrame>
+        <p:nvGraphicFramePr>
+          <p:cNvPr id="3" name="Diagram 2">
+            <a:extLst>
+              <a:ext uri="{FF2B5EF4-FFF2-40B4-BE49-F238E27FC236}">
+                <a16:creationId xmlns:a16="http://schemas.microsoft.com/office/drawing/2014/main" id="{9A8A1D9B-4F94-D661-99DA-ECC762A3C12F}"/>
+              </a:ext>
+            </a:extLst>
+          </p:cNvPr>
+          <p:cNvGraphicFramePr/>
+          <p:nvPr>
+            <p:extLst>
+              <p:ext uri="{D42A27DB-BD31-4B8C-83A1-F6EECF244321}">
+                <p14:modId xmlns:p14="http://schemas.microsoft.com/office/powerpoint/2010/main" val="1036484473"/>
+              </p:ext>
+            </p:extLst>
+          </p:nvPr>
+        </p:nvGraphicFramePr>
+        <p:xfrm>
+          <a:off x="6819153" y="1562349"/>
+          <a:ext cx="4834965" cy="4177553"/>
+        </p:xfrm>
+        <a:graphic>
+          <a:graphicData uri="http://schemas.openxmlformats.org/drawingml/2006/diagram">
+            <dgm:relIds xmlns:dgm="http://schemas.openxmlformats.org/drawingml/2006/diagram" xmlns:r="http://schemas.openxmlformats.org/officeDocument/2006/relationships" r:dm="rId7" r:lo="rId8" r:qs="rId9" r:cs="rId10"/>
           </a:graphicData>
         </a:graphic>
       </p:graphicFrame>

--- a/REVIEW PART.pptx
+++ b/REVIEW PART.pptx
@@ -6,13 +6,16 @@
   </p:sldMasterIdLst>
   <p:sldIdLst>
     <p:sldId id="256" r:id="rId2"/>
-    <p:sldId id="257" r:id="rId3"/>
-    <p:sldId id="258" r:id="rId4"/>
-    <p:sldId id="259" r:id="rId5"/>
-    <p:sldId id="260" r:id="rId6"/>
-    <p:sldId id="261" r:id="rId7"/>
-    <p:sldId id="262" r:id="rId8"/>
-    <p:sldId id="263" r:id="rId9"/>
+    <p:sldId id="264" r:id="rId3"/>
+    <p:sldId id="265" r:id="rId4"/>
+    <p:sldId id="266" r:id="rId5"/>
+    <p:sldId id="258" r:id="rId6"/>
+    <p:sldId id="259" r:id="rId7"/>
+    <p:sldId id="260" r:id="rId8"/>
+    <p:sldId id="261" r:id="rId9"/>
+    <p:sldId id="262" r:id="rId10"/>
+    <p:sldId id="267" r:id="rId11"/>
+    <p:sldId id="268" r:id="rId12"/>
   </p:sldIdLst>
   <p:sldSz cx="12192000" cy="6858000"/>
   <p:notesSz cx="6858000" cy="9144000"/>
@@ -123,19 +126,19 @@
 <pc:chgInfo xmlns:a="http://schemas.openxmlformats.org/drawingml/2006/main" xmlns:r="http://schemas.openxmlformats.org/officeDocument/2006/relationships" xmlns:ac="http://schemas.microsoft.com/office/drawing/2013/main/command" xmlns:pc="http://schemas.microsoft.com/office/powerpoint/2013/main/command">
   <pc:docChgLst>
     <pc:chgData name="Prabha Vel Durai" userId="bed1108984a0dc02" providerId="LiveId" clId="{19C086CD-C07F-40BB-AFEC-D555B075BCB6}"/>
-    <pc:docChg chg="undo custSel modSld">
-      <pc:chgData name="Prabha Vel Durai" userId="bed1108984a0dc02" providerId="LiveId" clId="{19C086CD-C07F-40BB-AFEC-D555B075BCB6}" dt="2026-10-13T05:11:55.603" v="350" actId="14100"/>
+    <pc:docChg chg="undo custSel addSld delSld modSld sldOrd">
+      <pc:chgData name="Prabha Vel Durai" userId="bed1108984a0dc02" providerId="LiveId" clId="{19C086CD-C07F-40BB-AFEC-D555B075BCB6}" dt="2026-10-13T07:48:36.631" v="443" actId="14100"/>
       <pc:docMkLst>
         <pc:docMk/>
       </pc:docMkLst>
       <pc:sldChg chg="addSp modSp mod">
-        <pc:chgData name="Prabha Vel Durai" userId="bed1108984a0dc02" providerId="LiveId" clId="{19C086CD-C07F-40BB-AFEC-D555B075BCB6}" dt="2026-10-13T05:11:55.603" v="350" actId="14100"/>
+        <pc:chgData name="Prabha Vel Durai" userId="bed1108984a0dc02" providerId="LiveId" clId="{19C086CD-C07F-40BB-AFEC-D555B075BCB6}" dt="2026-10-13T07:43:10.021" v="370" actId="1076"/>
         <pc:sldMkLst>
           <pc:docMk/>
           <pc:sldMk cId="0" sldId="256"/>
         </pc:sldMkLst>
         <pc:spChg chg="add mod">
-          <ac:chgData name="Prabha Vel Durai" userId="bed1108984a0dc02" providerId="LiveId" clId="{19C086CD-C07F-40BB-AFEC-D555B075BCB6}" dt="2026-10-13T05:11:55.603" v="350" actId="14100"/>
+          <ac:chgData name="Prabha Vel Durai" userId="bed1108984a0dc02" providerId="LiveId" clId="{19C086CD-C07F-40BB-AFEC-D555B075BCB6}" dt="2026-10-13T07:43:10.021" v="370" actId="1076"/>
           <ac:spMkLst>
             <pc:docMk/>
             <pc:sldMk cId="0" sldId="256"/>
@@ -143,12 +146,27 @@
           </ac:spMkLst>
         </pc:spChg>
       </pc:sldChg>
+      <pc:sldChg chg="del">
+        <pc:chgData name="Prabha Vel Durai" userId="bed1108984a0dc02" providerId="LiveId" clId="{19C086CD-C07F-40BB-AFEC-D555B075BCB6}" dt="2026-10-13T07:43:03.172" v="369" actId="47"/>
+        <pc:sldMkLst>
+          <pc:docMk/>
+          <pc:sldMk cId="0" sldId="257"/>
+        </pc:sldMkLst>
+      </pc:sldChg>
       <pc:sldChg chg="addSp delSp modSp mod">
-        <pc:chgData name="Prabha Vel Durai" userId="bed1108984a0dc02" providerId="LiveId" clId="{19C086CD-C07F-40BB-AFEC-D555B075BCB6}" dt="2026-10-07T10:03:29.743" v="324" actId="1076"/>
+        <pc:chgData name="Prabha Vel Durai" userId="bed1108984a0dc02" providerId="LiveId" clId="{19C086CD-C07F-40BB-AFEC-D555B075BCB6}" dt="2026-10-13T05:20:57.909" v="353" actId="14100"/>
         <pc:sldMkLst>
           <pc:docMk/>
           <pc:sldMk cId="0" sldId="258"/>
         </pc:sldMkLst>
+        <pc:spChg chg="add mod">
+          <ac:chgData name="Prabha Vel Durai" userId="bed1108984a0dc02" providerId="LiveId" clId="{19C086CD-C07F-40BB-AFEC-D555B075BCB6}" dt="2026-10-13T05:20:57.909" v="353" actId="14100"/>
+          <ac:spMkLst>
+            <pc:docMk/>
+            <pc:sldMk cId="0" sldId="258"/>
+            <ac:spMk id="5" creationId="{3375CD09-6CEA-6FB0-9D88-66A8A6774AA7}"/>
+          </ac:spMkLst>
+        </pc:spChg>
         <pc:spChg chg="mod">
           <ac:chgData name="Prabha Vel Durai" userId="bed1108984a0dc02" providerId="LiveId" clId="{19C086CD-C07F-40BB-AFEC-D555B075BCB6}" dt="2026-10-07T10:03:13.958" v="319" actId="113"/>
           <ac:spMkLst>
@@ -167,13 +185,21 @@
         </pc:graphicFrameChg>
       </pc:sldChg>
       <pc:sldChg chg="addSp delSp modSp mod">
-        <pc:chgData name="Prabha Vel Durai" userId="bed1108984a0dc02" providerId="LiveId" clId="{19C086CD-C07F-40BB-AFEC-D555B075BCB6}" dt="2026-10-07T09:57:56.972" v="20" actId="12269"/>
+        <pc:chgData name="Prabha Vel Durai" userId="bed1108984a0dc02" providerId="LiveId" clId="{19C086CD-C07F-40BB-AFEC-D555B075BCB6}" dt="2026-10-13T05:21:06.731" v="356" actId="1076"/>
         <pc:sldMkLst>
           <pc:docMk/>
           <pc:sldMk cId="0" sldId="259"/>
         </pc:sldMkLst>
+        <pc:spChg chg="add mod">
+          <ac:chgData name="Prabha Vel Durai" userId="bed1108984a0dc02" providerId="LiveId" clId="{19C086CD-C07F-40BB-AFEC-D555B075BCB6}" dt="2026-10-13T05:21:06.731" v="356" actId="1076"/>
+          <ac:spMkLst>
+            <pc:docMk/>
+            <pc:sldMk cId="0" sldId="259"/>
+            <ac:spMk id="5" creationId="{B5BE9F4A-7839-E0B8-551F-1941F8832C11}"/>
+          </ac:spMkLst>
+        </pc:spChg>
         <pc:graphicFrameChg chg="add mod modGraphic">
-          <ac:chgData name="Prabha Vel Durai" userId="bed1108984a0dc02" providerId="LiveId" clId="{19C086CD-C07F-40BB-AFEC-D555B075BCB6}" dt="2026-10-07T09:57:56.972" v="20" actId="12269"/>
+          <ac:chgData name="Prabha Vel Durai" userId="bed1108984a0dc02" providerId="LiveId" clId="{19C086CD-C07F-40BB-AFEC-D555B075BCB6}" dt="2026-10-13T05:21:03.333" v="354"/>
           <ac:graphicFrameMkLst>
             <pc:docMk/>
             <pc:sldMk cId="0" sldId="259"/>
@@ -181,8 +207,8 @@
           </ac:graphicFrameMkLst>
         </pc:graphicFrameChg>
       </pc:sldChg>
-      <pc:sldChg chg="modSp mod">
-        <pc:chgData name="Prabha Vel Durai" userId="bed1108984a0dc02" providerId="LiveId" clId="{19C086CD-C07F-40BB-AFEC-D555B075BCB6}" dt="2026-10-07T09:59:07.020" v="61"/>
+      <pc:sldChg chg="addSp modSp mod">
+        <pc:chgData name="Prabha Vel Durai" userId="bed1108984a0dc02" providerId="LiveId" clId="{19C086CD-C07F-40BB-AFEC-D555B075BCB6}" dt="2026-10-13T05:21:21.483" v="360" actId="1076"/>
         <pc:sldMkLst>
           <pc:docMk/>
           <pc:sldMk cId="0" sldId="260"/>
@@ -195,6 +221,14 @@
             <ac:spMk id="2" creationId="{00000000-0000-0000-0000-000000000000}"/>
           </ac:spMkLst>
         </pc:spChg>
+        <pc:spChg chg="add mod">
+          <ac:chgData name="Prabha Vel Durai" userId="bed1108984a0dc02" providerId="LiveId" clId="{19C086CD-C07F-40BB-AFEC-D555B075BCB6}" dt="2026-10-13T05:21:21.483" v="360" actId="1076"/>
+          <ac:spMkLst>
+            <pc:docMk/>
+            <pc:sldMk cId="0" sldId="260"/>
+            <ac:spMk id="5" creationId="{FE98495B-EF4F-D99A-6F2D-95C602784019}"/>
+          </ac:spMkLst>
+        </pc:spChg>
         <pc:graphicFrameChg chg="mod modGraphic">
           <ac:chgData name="Prabha Vel Durai" userId="bed1108984a0dc02" providerId="LiveId" clId="{19C086CD-C07F-40BB-AFEC-D555B075BCB6}" dt="2026-10-07T09:59:07.020" v="61"/>
           <ac:graphicFrameMkLst>
@@ -205,7 +239,7 @@
         </pc:graphicFrameChg>
       </pc:sldChg>
       <pc:sldChg chg="addSp modSp mod">
-        <pc:chgData name="Prabha Vel Durai" userId="bed1108984a0dc02" providerId="LiveId" clId="{19C086CD-C07F-40BB-AFEC-D555B075BCB6}" dt="2026-10-07T10:04:42.608" v="347" actId="20577"/>
+        <pc:chgData name="Prabha Vel Durai" userId="bed1108984a0dc02" providerId="LiveId" clId="{19C086CD-C07F-40BB-AFEC-D555B075BCB6}" dt="2026-10-13T05:21:14.987" v="358" actId="1076"/>
         <pc:sldMkLst>
           <pc:docMk/>
           <pc:sldMk cId="0" sldId="261"/>
@@ -218,6 +252,14 @@
             <ac:spMk id="2" creationId="{74EE03E5-F31C-9E5C-AAC2-F8443DC79C5B}"/>
           </ac:spMkLst>
         </pc:spChg>
+        <pc:spChg chg="add mod">
+          <ac:chgData name="Prabha Vel Durai" userId="bed1108984a0dc02" providerId="LiveId" clId="{19C086CD-C07F-40BB-AFEC-D555B075BCB6}" dt="2026-10-13T05:21:14.987" v="358" actId="1076"/>
+          <ac:spMkLst>
+            <pc:docMk/>
+            <pc:sldMk cId="0" sldId="261"/>
+            <ac:spMk id="4" creationId="{012BCFCC-6CD5-AF29-C200-9FFCA7F00DF3}"/>
+          </ac:spMkLst>
+        </pc:spChg>
         <pc:graphicFrameChg chg="mod modGraphic">
           <ac:chgData name="Prabha Vel Durai" userId="bed1108984a0dc02" providerId="LiveId" clId="{19C086CD-C07F-40BB-AFEC-D555B075BCB6}" dt="2026-10-07T09:59:32.857" v="65" actId="1076"/>
           <ac:graphicFrameMkLst>
@@ -226,6 +268,160 @@
             <ac:graphicFrameMk id="6" creationId="{00000000-0000-0000-0000-000000000000}"/>
           </ac:graphicFrameMkLst>
         </pc:graphicFrameChg>
+      </pc:sldChg>
+      <pc:sldChg chg="del">
+        <pc:chgData name="Prabha Vel Durai" userId="bed1108984a0dc02" providerId="LiveId" clId="{19C086CD-C07F-40BB-AFEC-D555B075BCB6}" dt="2026-10-13T07:47:01.637" v="433" actId="47"/>
+        <pc:sldMkLst>
+          <pc:docMk/>
+          <pc:sldMk cId="0" sldId="263"/>
+        </pc:sldMkLst>
+      </pc:sldChg>
+      <pc:sldChg chg="addSp modSp new mod ord">
+        <pc:chgData name="Prabha Vel Durai" userId="bed1108984a0dc02" providerId="LiveId" clId="{19C086CD-C07F-40BB-AFEC-D555B075BCB6}" dt="2026-10-13T07:43:15.849" v="372" actId="1076"/>
+        <pc:sldMkLst>
+          <pc:docMk/>
+          <pc:sldMk cId="3456247258" sldId="264"/>
+        </pc:sldMkLst>
+        <pc:spChg chg="mod">
+          <ac:chgData name="Prabha Vel Durai" userId="bed1108984a0dc02" providerId="LiveId" clId="{19C086CD-C07F-40BB-AFEC-D555B075BCB6}" dt="2026-10-13T07:42:45.709" v="365" actId="20577"/>
+          <ac:spMkLst>
+            <pc:docMk/>
+            <pc:sldMk cId="3456247258" sldId="264"/>
+            <ac:spMk id="2" creationId="{3755654D-2069-8BFC-2C74-C79CE2F851FB}"/>
+          </ac:spMkLst>
+        </pc:spChg>
+        <pc:spChg chg="mod">
+          <ac:chgData name="Prabha Vel Durai" userId="bed1108984a0dc02" providerId="LiveId" clId="{19C086CD-C07F-40BB-AFEC-D555B075BCB6}" dt="2026-10-13T07:42:58.023" v="368" actId="123"/>
+          <ac:spMkLst>
+            <pc:docMk/>
+            <pc:sldMk cId="3456247258" sldId="264"/>
+            <ac:spMk id="3" creationId="{19D18BC4-5983-AD4B-1967-75E6DB406D08}"/>
+          </ac:spMkLst>
+        </pc:spChg>
+        <pc:spChg chg="add mod">
+          <ac:chgData name="Prabha Vel Durai" userId="bed1108984a0dc02" providerId="LiveId" clId="{19C086CD-C07F-40BB-AFEC-D555B075BCB6}" dt="2026-10-13T07:43:15.849" v="372" actId="1076"/>
+          <ac:spMkLst>
+            <pc:docMk/>
+            <pc:sldMk cId="3456247258" sldId="264"/>
+            <ac:spMk id="5" creationId="{6A0350D2-3AE4-2F23-C91F-462817898DFD}"/>
+          </ac:spMkLst>
+        </pc:spChg>
+      </pc:sldChg>
+      <pc:sldChg chg="modSp new mod">
+        <pc:chgData name="Prabha Vel Durai" userId="bed1108984a0dc02" providerId="LiveId" clId="{19C086CD-C07F-40BB-AFEC-D555B075BCB6}" dt="2026-10-13T07:43:52.504" v="377" actId="123"/>
+        <pc:sldMkLst>
+          <pc:docMk/>
+          <pc:sldMk cId="1513830375" sldId="265"/>
+        </pc:sldMkLst>
+        <pc:spChg chg="mod">
+          <ac:chgData name="Prabha Vel Durai" userId="bed1108984a0dc02" providerId="LiveId" clId="{19C086CD-C07F-40BB-AFEC-D555B075BCB6}" dt="2026-10-13T07:43:43.501" v="375" actId="20577"/>
+          <ac:spMkLst>
+            <pc:docMk/>
+            <pc:sldMk cId="1513830375" sldId="265"/>
+            <ac:spMk id="2" creationId="{365F3BC9-ED97-CEBE-0261-BC3ADE6FD9F8}"/>
+          </ac:spMkLst>
+        </pc:spChg>
+        <pc:spChg chg="mod">
+          <ac:chgData name="Prabha Vel Durai" userId="bed1108984a0dc02" providerId="LiveId" clId="{19C086CD-C07F-40BB-AFEC-D555B075BCB6}" dt="2026-10-13T07:43:52.504" v="377" actId="123"/>
+          <ac:spMkLst>
+            <pc:docMk/>
+            <pc:sldMk cId="1513830375" sldId="265"/>
+            <ac:spMk id="3" creationId="{66A76D54-2522-454C-8C1B-4A0CAE1748C0}"/>
+          </ac:spMkLst>
+        </pc:spChg>
+      </pc:sldChg>
+      <pc:sldChg chg="addSp delSp modSp new mod ord">
+        <pc:chgData name="Prabha Vel Durai" userId="bed1108984a0dc02" providerId="LiveId" clId="{19C086CD-C07F-40BB-AFEC-D555B075BCB6}" dt="2026-10-13T07:46:39.928" v="432" actId="14100"/>
+        <pc:sldMkLst>
+          <pc:docMk/>
+          <pc:sldMk cId="3881198412" sldId="266"/>
+        </pc:sldMkLst>
+        <pc:spChg chg="mod">
+          <ac:chgData name="Prabha Vel Durai" userId="bed1108984a0dc02" providerId="LiveId" clId="{19C086CD-C07F-40BB-AFEC-D555B075BCB6}" dt="2026-10-13T07:44:28.402" v="384" actId="20577"/>
+          <ac:spMkLst>
+            <pc:docMk/>
+            <pc:sldMk cId="3881198412" sldId="266"/>
+            <ac:spMk id="2" creationId="{82B3B557-549A-D4D8-BFCF-E4A4B921CE5B}"/>
+          </ac:spMkLst>
+        </pc:spChg>
+        <pc:spChg chg="del">
+          <ac:chgData name="Prabha Vel Durai" userId="bed1108984a0dc02" providerId="LiveId" clId="{19C086CD-C07F-40BB-AFEC-D555B075BCB6}" dt="2026-10-13T07:44:31.246" v="385" actId="478"/>
+          <ac:spMkLst>
+            <pc:docMk/>
+            <pc:sldMk cId="3881198412" sldId="266"/>
+            <ac:spMk id="3" creationId="{54D4E14B-6C62-97ED-9F13-075C14D9EB2E}"/>
+          </ac:spMkLst>
+        </pc:spChg>
+        <pc:graphicFrameChg chg="add mod modGraphic">
+          <ac:chgData name="Prabha Vel Durai" userId="bed1108984a0dc02" providerId="LiveId" clId="{19C086CD-C07F-40BB-AFEC-D555B075BCB6}" dt="2026-10-13T07:46:39.928" v="432" actId="14100"/>
+          <ac:graphicFrameMkLst>
+            <pc:docMk/>
+            <pc:sldMk cId="3881198412" sldId="266"/>
+            <ac:graphicFrameMk id="4" creationId="{BB9E55C0-DF7A-828C-6EAE-2344A3285A5A}"/>
+          </ac:graphicFrameMkLst>
+        </pc:graphicFrameChg>
+      </pc:sldChg>
+      <pc:sldChg chg="addSp delSp new mod">
+        <pc:chgData name="Prabha Vel Durai" userId="bed1108984a0dc02" providerId="LiveId" clId="{19C086CD-C07F-40BB-AFEC-D555B075BCB6}" dt="2026-10-13T07:47:51.870" v="440" actId="22"/>
+        <pc:sldMkLst>
+          <pc:docMk/>
+          <pc:sldMk cId="3900635256" sldId="267"/>
+        </pc:sldMkLst>
+        <pc:spChg chg="del">
+          <ac:chgData name="Prabha Vel Durai" userId="bed1108984a0dc02" providerId="LiveId" clId="{19C086CD-C07F-40BB-AFEC-D555B075BCB6}" dt="2026-10-13T07:47:13.445" v="436" actId="478"/>
+          <ac:spMkLst>
+            <pc:docMk/>
+            <pc:sldMk cId="3900635256" sldId="267"/>
+            <ac:spMk id="2" creationId="{420D95E7-BF7B-0B82-C282-14547FB2929A}"/>
+          </ac:spMkLst>
+        </pc:spChg>
+        <pc:spChg chg="del">
+          <ac:chgData name="Prabha Vel Durai" userId="bed1108984a0dc02" providerId="LiveId" clId="{19C086CD-C07F-40BB-AFEC-D555B075BCB6}" dt="2026-10-13T07:47:12.238" v="435" actId="478"/>
+          <ac:spMkLst>
+            <pc:docMk/>
+            <pc:sldMk cId="3900635256" sldId="267"/>
+            <ac:spMk id="3" creationId="{C0115DE1-0666-C26B-84CC-0332DB00D9D5}"/>
+          </ac:spMkLst>
+        </pc:spChg>
+        <pc:picChg chg="add">
+          <ac:chgData name="Prabha Vel Durai" userId="bed1108984a0dc02" providerId="LiveId" clId="{19C086CD-C07F-40BB-AFEC-D555B075BCB6}" dt="2026-10-13T07:47:51.870" v="440" actId="22"/>
+          <ac:picMkLst>
+            <pc:docMk/>
+            <pc:sldMk cId="3900635256" sldId="267"/>
+            <ac:picMk id="5" creationId="{1FCC6963-1950-D11E-85C3-12DAA51AA8A9}"/>
+          </ac:picMkLst>
+        </pc:picChg>
+      </pc:sldChg>
+      <pc:sldChg chg="addSp delSp modSp new mod">
+        <pc:chgData name="Prabha Vel Durai" userId="bed1108984a0dc02" providerId="LiveId" clId="{19C086CD-C07F-40BB-AFEC-D555B075BCB6}" dt="2026-10-13T07:48:36.631" v="443" actId="14100"/>
+        <pc:sldMkLst>
+          <pc:docMk/>
+          <pc:sldMk cId="2686429102" sldId="268"/>
+        </pc:sldMkLst>
+        <pc:spChg chg="del">
+          <ac:chgData name="Prabha Vel Durai" userId="bed1108984a0dc02" providerId="LiveId" clId="{19C086CD-C07F-40BB-AFEC-D555B075BCB6}" dt="2026-10-13T07:47:22.689" v="439" actId="478"/>
+          <ac:spMkLst>
+            <pc:docMk/>
+            <pc:sldMk cId="2686429102" sldId="268"/>
+            <ac:spMk id="2" creationId="{9EFE2194-DB2F-1285-EFC6-4A4020860280}"/>
+          </ac:spMkLst>
+        </pc:spChg>
+        <pc:spChg chg="del">
+          <ac:chgData name="Prabha Vel Durai" userId="bed1108984a0dc02" providerId="LiveId" clId="{19C086CD-C07F-40BB-AFEC-D555B075BCB6}" dt="2026-10-13T07:47:20.831" v="438" actId="478"/>
+          <ac:spMkLst>
+            <pc:docMk/>
+            <pc:sldMk cId="2686429102" sldId="268"/>
+            <ac:spMk id="3" creationId="{C01B3931-6A65-61DA-545D-AECFD3E5DA69}"/>
+          </ac:spMkLst>
+        </pc:spChg>
+        <pc:picChg chg="add mod">
+          <ac:chgData name="Prabha Vel Durai" userId="bed1108984a0dc02" providerId="LiveId" clId="{19C086CD-C07F-40BB-AFEC-D555B075BCB6}" dt="2026-10-13T07:48:36.631" v="443" actId="14100"/>
+          <ac:picMkLst>
+            <pc:docMk/>
+            <pc:sldMk cId="2686429102" sldId="268"/>
+            <ac:picMk id="5" creationId="{B7BB1E34-0D6B-C7D9-DC07-757E4A2AB977}"/>
+          </ac:picMkLst>
+        </pc:picChg>
       </pc:sldChg>
     </pc:docChg>
   </pc:docChgLst>
@@ -4339,10 +4535,9 @@
         <a:lstStyle/>
         <a:p>
           <a:r>
-            <a:rPr lang="en-IN"/>
+            <a:rPr lang="en-IN" dirty="0"/>
             <a:t>Self-Healing UI</a:t>
           </a:r>
-          <a:endParaRPr lang="en-IN" dirty="0"/>
         </a:p>
       </dgm:t>
     </dgm:pt>
@@ -4446,7 +4641,7 @@
       <dgm:spPr/>
     </dgm:pt>
     <dgm:pt modelId="{92FFDA34-906D-4A2F-85A7-09BB78C025D8}" type="pres">
-      <dgm:prSet presAssocID="{D920099B-C4F1-47B9-8718-FFE6AE54DF91}" presName="node" presStyleLbl="node1" presStyleIdx="3" presStyleCnt="7">
+      <dgm:prSet presAssocID="{D920099B-C4F1-47B9-8718-FFE6AE54DF91}" presName="node" presStyleLbl="node1" presStyleIdx="3" presStyleCnt="7" custLinFactNeighborX="1717" custLinFactNeighborY="91">
         <dgm:presLayoutVars>
           <dgm:bulletEnabled val="1"/>
         </dgm:presLayoutVars>
@@ -6901,9 +7096,9 @@
         <dsp:cNvSpPr/>
       </dsp:nvSpPr>
       <dsp:spPr>
-        <a:xfrm>
-          <a:off x="1010627" y="3878314"/>
-          <a:ext cx="3210285" cy="217833"/>
+        <a:xfrm rot="1395">
+          <a:off x="1010627" y="3878974"/>
+          <a:ext cx="3251843" cy="217833"/>
         </a:xfrm>
         <a:prstGeom prst="rect">
           <a:avLst/>
@@ -7035,9 +7230,9 @@
         <dsp:cNvSpPr/>
       </dsp:nvSpPr>
       <dsp:spPr>
-        <a:xfrm rot="16200000">
-          <a:off x="3322080" y="2970676"/>
-          <a:ext cx="1806470" cy="217833"/>
+        <a:xfrm rot="16120986">
+          <a:off x="3341961" y="2971335"/>
+          <a:ext cx="1808267" cy="217833"/>
         </a:xfrm>
         <a:prstGeom prst="rect">
           <a:avLst/>
@@ -7087,7 +7282,7 @@
       </dsp:nvSpPr>
       <dsp:spPr>
         <a:xfrm>
-          <a:off x="3736838" y="3631874"/>
+          <a:off x="3778396" y="3633193"/>
           <a:ext cx="2420370" cy="1452222"/>
         </a:xfrm>
         <a:prstGeom prst="roundRect">
@@ -7159,7 +7354,7 @@
         </a:p>
       </dsp:txBody>
       <dsp:txXfrm>
-        <a:off x="3779372" y="3674408"/>
+        <a:off x="3820930" y="3675727"/>
         <a:ext cx="2335302" cy="1367154"/>
       </dsp:txXfrm>
     </dsp:sp>
@@ -7504,10 +7699,9 @@
             <a:buNone/>
           </a:pPr>
           <a:r>
-            <a:rPr lang="en-IN" sz="3800" kern="1200"/>
+            <a:rPr lang="en-IN" sz="3800" kern="1200" dirty="0"/>
             <a:t>Self-Healing UI</a:t>
           </a:r>
-          <a:endParaRPr lang="en-IN" sz="3800" kern="1200" dirty="0"/>
         </a:p>
       </dsp:txBody>
       <dsp:txXfrm>
@@ -15882,7 +16076,7 @@
         </p:nvSpPr>
         <p:spPr>
           <a:xfrm>
-            <a:off x="6216361" y="4599928"/>
+            <a:off x="7161934" y="5005173"/>
             <a:ext cx="4631748" cy="923330"/>
           </a:xfrm>
           <a:prstGeom prst="rect">
@@ -15957,6 +16151,126 @@
 </p:sld>
 </file>
 
+<file path=ppt/slides/slide10.xml><?xml version="1.0" encoding="utf-8"?>
+<p:sld xmlns:a="http://schemas.openxmlformats.org/drawingml/2006/main" xmlns:r="http://schemas.openxmlformats.org/officeDocument/2006/relationships" xmlns:p="http://schemas.openxmlformats.org/presentationml/2006/main">
+  <p:cSld>
+    <p:spTree>
+      <p:nvGrpSpPr>
+        <p:cNvPr id="1" name=""/>
+        <p:cNvGrpSpPr/>
+        <p:nvPr/>
+      </p:nvGrpSpPr>
+      <p:grpSpPr>
+        <a:xfrm>
+          <a:off x="0" y="0"/>
+          <a:ext cx="0" cy="0"/>
+          <a:chOff x="0" y="0"/>
+          <a:chExt cx="0" cy="0"/>
+        </a:xfrm>
+      </p:grpSpPr>
+      <p:pic>
+        <p:nvPicPr>
+          <p:cNvPr id="5" name="Picture 4">
+            <a:extLst>
+              <a:ext uri="{FF2B5EF4-FFF2-40B4-BE49-F238E27FC236}">
+                <a16:creationId xmlns:a16="http://schemas.microsoft.com/office/drawing/2014/main" id="{1FCC6963-1950-D11E-85C3-12DAA51AA8A9}"/>
+              </a:ext>
+            </a:extLst>
+          </p:cNvPr>
+          <p:cNvPicPr>
+            <a:picLocks noChangeAspect="1"/>
+          </p:cNvPicPr>
+          <p:nvPr/>
+        </p:nvPicPr>
+        <p:blipFill>
+          <a:blip r:embed="rId2"/>
+          <a:stretch>
+            <a:fillRect/>
+          </a:stretch>
+        </p:blipFill>
+        <p:spPr>
+          <a:xfrm>
+            <a:off x="0" y="122190"/>
+            <a:ext cx="12192000" cy="6613620"/>
+          </a:xfrm>
+          <a:prstGeom prst="rect">
+            <a:avLst/>
+          </a:prstGeom>
+        </p:spPr>
+      </p:pic>
+    </p:spTree>
+    <p:extLst>
+      <p:ext uri="{BB962C8B-B14F-4D97-AF65-F5344CB8AC3E}">
+        <p14:creationId xmlns:p14="http://schemas.microsoft.com/office/powerpoint/2010/main" val="3900635256"/>
+      </p:ext>
+    </p:extLst>
+  </p:cSld>
+  <p:clrMapOvr>
+    <a:masterClrMapping/>
+  </p:clrMapOvr>
+</p:sld>
+</file>
+
+<file path=ppt/slides/slide11.xml><?xml version="1.0" encoding="utf-8"?>
+<p:sld xmlns:a="http://schemas.openxmlformats.org/drawingml/2006/main" xmlns:r="http://schemas.openxmlformats.org/officeDocument/2006/relationships" xmlns:p="http://schemas.openxmlformats.org/presentationml/2006/main">
+  <p:cSld>
+    <p:spTree>
+      <p:nvGrpSpPr>
+        <p:cNvPr id="1" name=""/>
+        <p:cNvGrpSpPr/>
+        <p:nvPr/>
+      </p:nvGrpSpPr>
+      <p:grpSpPr>
+        <a:xfrm>
+          <a:off x="0" y="0"/>
+          <a:ext cx="0" cy="0"/>
+          <a:chOff x="0" y="0"/>
+          <a:chExt cx="0" cy="0"/>
+        </a:xfrm>
+      </p:grpSpPr>
+      <p:pic>
+        <p:nvPicPr>
+          <p:cNvPr id="5" name="Picture 4">
+            <a:extLst>
+              <a:ext uri="{FF2B5EF4-FFF2-40B4-BE49-F238E27FC236}">
+                <a16:creationId xmlns:a16="http://schemas.microsoft.com/office/drawing/2014/main" id="{B7BB1E34-0D6B-C7D9-DC07-757E4A2AB977}"/>
+              </a:ext>
+            </a:extLst>
+          </p:cNvPr>
+          <p:cNvPicPr>
+            <a:picLocks noChangeAspect="1"/>
+          </p:cNvPicPr>
+          <p:nvPr/>
+        </p:nvPicPr>
+        <p:blipFill>
+          <a:blip r:embed="rId2"/>
+          <a:stretch>
+            <a:fillRect/>
+          </a:stretch>
+        </p:blipFill>
+        <p:spPr>
+          <a:xfrm>
+            <a:off x="0" y="-1"/>
+            <a:ext cx="12192000" cy="6712527"/>
+          </a:xfrm>
+          <a:prstGeom prst="rect">
+            <a:avLst/>
+          </a:prstGeom>
+        </p:spPr>
+      </p:pic>
+    </p:spTree>
+    <p:extLst>
+      <p:ext uri="{BB962C8B-B14F-4D97-AF65-F5344CB8AC3E}">
+        <p14:creationId xmlns:p14="http://schemas.microsoft.com/office/powerpoint/2010/main" val="2686429102"/>
+      </p:ext>
+    </p:extLst>
+  </p:cSld>
+  <p:clrMapOvr>
+    <a:masterClrMapping/>
+  </p:clrMapOvr>
+</p:sld>
+</file>
+
 <file path=ppt/slides/slide2.xml><?xml version="1.0" encoding="utf-8"?>
 <p:sld xmlns:a="http://schemas.openxmlformats.org/drawingml/2006/main" xmlns:r="http://schemas.openxmlformats.org/officeDocument/2006/relationships" xmlns:p="http://schemas.openxmlformats.org/presentationml/2006/main">
   <p:cSld>
@@ -15976,7 +16290,13 @@
       </p:grpSpPr>
       <p:sp>
         <p:nvSpPr>
-          <p:cNvPr id="2" name="Title 1"/>
+          <p:cNvPr id="2" name="Title 1">
+            <a:extLst>
+              <a:ext uri="{FF2B5EF4-FFF2-40B4-BE49-F238E27FC236}">
+                <a16:creationId xmlns:a16="http://schemas.microsoft.com/office/drawing/2014/main" id="{3755654D-2069-8BFC-2C74-C79CE2F851FB}"/>
+              </a:ext>
+            </a:extLst>
+          </p:cNvPr>
           <p:cNvSpPr>
             <a:spLocks noGrp="1"/>
           </p:cNvSpPr>
@@ -15986,73 +16306,380 @@
         </p:nvSpPr>
         <p:spPr/>
         <p:txBody>
-          <a:bodyPr>
-            <a:normAutofit/>
+          <a:bodyPr/>
+          <a:lstStyle/>
+          <a:p>
+            <a:r>
+              <a:rPr lang="en-IN" b="1" dirty="0"/>
+              <a:t>Problem statement</a:t>
+            </a:r>
+            <a:endParaRPr lang="en-IN" dirty="0"/>
+          </a:p>
+        </p:txBody>
+      </p:sp>
+      <p:sp>
+        <p:nvSpPr>
+          <p:cNvPr id="3" name="Content Placeholder 2">
+            <a:extLst>
+              <a:ext uri="{FF2B5EF4-FFF2-40B4-BE49-F238E27FC236}">
+                <a16:creationId xmlns:a16="http://schemas.microsoft.com/office/drawing/2014/main" id="{19D18BC4-5983-AD4B-1967-75E6DB406D08}"/>
+              </a:ext>
+            </a:extLst>
+          </p:cNvPr>
+          <p:cNvSpPr>
+            <a:spLocks noGrp="1"/>
+          </p:cNvSpPr>
+          <p:nvPr>
+            <p:ph idx="1"/>
+          </p:nvPr>
+        </p:nvSpPr>
+        <p:spPr/>
+        <p:txBody>
+          <a:bodyPr/>
+          <a:lstStyle/>
+          <a:p>
+            <a:pPr algn="just"/>
+            <a:r>
+              <a:rPr lang="en-IN" dirty="0"/>
+              <a:t>Sometimes, users find it difficult to fill out long and complex forms.</a:t>
+            </a:r>
+          </a:p>
+          <a:p>
+            <a:pPr algn="just"/>
+            <a:r>
+              <a:rPr lang="en-IN" dirty="0"/>
+              <a:t>They may get confused, make mistakes, or take more time to complete the form.</a:t>
+            </a:r>
+          </a:p>
+          <a:p>
+            <a:pPr algn="just"/>
+            <a:r>
+              <a:rPr lang="en-IN" dirty="0"/>
+              <a:t>Normal websites do not change automatically when users face these problems.</a:t>
+            </a:r>
+          </a:p>
+          <a:p>
+            <a:pPr algn="just"/>
+            <a:r>
+              <a:rPr lang="en-IN" dirty="0"/>
+              <a:t>My project aims to make the user interface simpler and easier to use.</a:t>
+            </a:r>
+          </a:p>
+          <a:p>
+            <a:pPr marL="0" indent="0">
+              <a:buNone/>
+            </a:pPr>
+            <a:endParaRPr lang="en-IN" dirty="0"/>
+          </a:p>
+        </p:txBody>
+      </p:sp>
+      <p:sp>
+        <p:nvSpPr>
+          <p:cNvPr id="5" name="TextBox 4">
+            <a:extLst>
+              <a:ext uri="{FF2B5EF4-FFF2-40B4-BE49-F238E27FC236}">
+                <a16:creationId xmlns:a16="http://schemas.microsoft.com/office/drawing/2014/main" id="{6A0350D2-3AE4-2F23-C91F-462817898DFD}"/>
+              </a:ext>
+            </a:extLst>
+          </p:cNvPr>
+          <p:cNvSpPr txBox="1"/>
+          <p:nvPr/>
+        </p:nvSpPr>
+        <p:spPr>
+          <a:xfrm>
+            <a:off x="7951643" y="5715298"/>
+            <a:ext cx="4631748" cy="923330"/>
+          </a:xfrm>
+          <a:prstGeom prst="rect">
+            <a:avLst/>
+          </a:prstGeom>
+          <a:noFill/>
+        </p:spPr>
+        <p:txBody>
+          <a:bodyPr wrap="square">
+            <a:spAutoFit/>
           </a:bodyPr>
           <a:lstStyle/>
           <a:p>
-            <a:pPr algn="ctr"/>
+            <a:pPr marL="0" marR="0" indent="0" algn="l">
+              <a:buNone/>
+            </a:pPr>
             <a:r>
-              <a:rPr lang="en-US" b="1" dirty="0" err="1"/>
+              <a:rPr lang="en-IN" sz="1800" b="1" i="0" dirty="0">
+                <a:solidFill>
+                  <a:schemeClr val="tx1"/>
+                </a:solidFill>
+                <a:effectLst/>
+                <a:latin typeface="+mn-lt"/>
+              </a:rPr>
+              <a:t>Sriram Gandhi Prabha V</a:t>
+            </a:r>
+          </a:p>
+          <a:p>
+            <a:pPr marL="0" marR="0" indent="0" algn="l">
+              <a:buNone/>
+            </a:pPr>
+            <a:r>
+              <a:rPr lang="en-IN" b="1" i="0" dirty="0">
+                <a:solidFill>
+                  <a:schemeClr val="tx1"/>
+                </a:solidFill>
+                <a:effectLst/>
+                <a:latin typeface="+mn-lt"/>
+              </a:rPr>
+              <a:t>prabhasrivel1311@gmail.com</a:t>
+            </a:r>
+          </a:p>
+          <a:p>
+            <a:pPr marL="0" marR="0" indent="0" algn="l">
+              <a:buNone/>
+            </a:pPr>
+            <a:r>
+              <a:rPr lang="en-IN" sz="1800" b="1" i="0" dirty="0">
+                <a:solidFill>
+                  <a:schemeClr val="tx1"/>
+                </a:solidFill>
+                <a:effectLst/>
+                <a:latin typeface="+mn-lt"/>
+              </a:rPr>
+              <a:t>dd7a2bc00106</a:t>
+            </a:r>
+            <a:endParaRPr lang="en-IN" sz="825" b="1" i="0" dirty="0">
+              <a:solidFill>
+                <a:srgbClr val="64748B"/>
+              </a:solidFill>
+              <a:effectLst/>
+              <a:latin typeface="ui-sans-serif"/>
+            </a:endParaRPr>
+          </a:p>
+        </p:txBody>
+      </p:sp>
+    </p:spTree>
+    <p:extLst>
+      <p:ext uri="{BB962C8B-B14F-4D97-AF65-F5344CB8AC3E}">
+        <p14:creationId xmlns:p14="http://schemas.microsoft.com/office/powerpoint/2010/main" val="3456247258"/>
+      </p:ext>
+    </p:extLst>
+  </p:cSld>
+  <p:clrMapOvr>
+    <a:masterClrMapping/>
+  </p:clrMapOvr>
+</p:sld>
+</file>
+
+<file path=ppt/slides/slide3.xml><?xml version="1.0" encoding="utf-8"?>
+<p:sld xmlns:a="http://schemas.openxmlformats.org/drawingml/2006/main" xmlns:r="http://schemas.openxmlformats.org/officeDocument/2006/relationships" xmlns:p="http://schemas.openxmlformats.org/presentationml/2006/main">
+  <p:cSld>
+    <p:spTree>
+      <p:nvGrpSpPr>
+        <p:cNvPr id="1" name=""/>
+        <p:cNvGrpSpPr/>
+        <p:nvPr/>
+      </p:nvGrpSpPr>
+      <p:grpSpPr>
+        <a:xfrm>
+          <a:off x="0" y="0"/>
+          <a:ext cx="0" cy="0"/>
+          <a:chOff x="0" y="0"/>
+          <a:chExt cx="0" cy="0"/>
+        </a:xfrm>
+      </p:grpSpPr>
+      <p:sp>
+        <p:nvSpPr>
+          <p:cNvPr id="2" name="Title 1">
+            <a:extLst>
+              <a:ext uri="{FF2B5EF4-FFF2-40B4-BE49-F238E27FC236}">
+                <a16:creationId xmlns:a16="http://schemas.microsoft.com/office/drawing/2014/main" id="{365F3BC9-ED97-CEBE-0261-BC3ADE6FD9F8}"/>
+              </a:ext>
+            </a:extLst>
+          </p:cNvPr>
+          <p:cNvSpPr>
+            <a:spLocks noGrp="1"/>
+          </p:cNvSpPr>
+          <p:nvPr>
+            <p:ph type="title"/>
+          </p:nvPr>
+        </p:nvSpPr>
+        <p:spPr/>
+        <p:txBody>
+          <a:bodyPr/>
+          <a:lstStyle/>
+          <a:p>
+            <a:r>
+              <a:rPr lang="en-IN" b="1" dirty="0"/>
+              <a:t>Project objective</a:t>
+            </a:r>
+            <a:endParaRPr lang="en-IN" dirty="0"/>
+          </a:p>
+        </p:txBody>
+      </p:sp>
+      <p:sp>
+        <p:nvSpPr>
+          <p:cNvPr id="3" name="Content Placeholder 2">
+            <a:extLst>
+              <a:ext uri="{FF2B5EF4-FFF2-40B4-BE49-F238E27FC236}">
+                <a16:creationId xmlns:a16="http://schemas.microsoft.com/office/drawing/2014/main" id="{66A76D54-2522-454C-8C1B-4A0CAE1748C0}"/>
+              </a:ext>
+            </a:extLst>
+          </p:cNvPr>
+          <p:cNvSpPr>
+            <a:spLocks noGrp="1"/>
+          </p:cNvSpPr>
+          <p:nvPr>
+            <p:ph idx="1"/>
+          </p:nvPr>
+        </p:nvSpPr>
+        <p:spPr/>
+        <p:txBody>
+          <a:bodyPr/>
+          <a:lstStyle/>
+          <a:p>
+            <a:pPr algn="just"/>
+            <a:r>
+              <a:rPr lang="en-IN" dirty="0"/>
+              <a:t>The main goal of </a:t>
+            </a:r>
+            <a:r>
+              <a:rPr lang="en-IN" dirty="0" err="1"/>
               <a:t>AuraGen</a:t>
             </a:r>
             <a:r>
-              <a:rPr lang="en-US" b="1" dirty="0"/>
-              <a:t> — Where We Are Now</a:t>
+              <a:rPr lang="en-IN" dirty="0"/>
+              <a:t> is to help users complete forms more easily.</a:t>
             </a:r>
-            <a:br>
-              <a:rPr lang="en-US" b="1" dirty="0"/>
-            </a:br>
+          </a:p>
+          <a:p>
+            <a:pPr algn="just"/>
             <a:r>
-              <a:rPr lang="en-US" sz="2000" b="1" dirty="0"/>
-              <a:t>Phase 1 → Phase 2 → Phase 3 → Phase 4 → Phase 5</a:t>
+              <a:rPr lang="en-IN" dirty="0"/>
+              <a:t>The system checks user actions, such as mouse movements, clicks, and the time spent on a form field.</a:t>
             </a:r>
-            <a:endParaRPr lang="en-IN" sz="2000" b="1" dirty="0"/>
+          </a:p>
+          <a:p>
+            <a:pPr algn="just"/>
+            <a:r>
+              <a:rPr lang="en-IN" dirty="0"/>
+              <a:t>Using these details, it estimates whether the user may be facing difficulty.</a:t>
+            </a:r>
+          </a:p>
+          <a:p>
+            <a:pPr algn="just"/>
+            <a:r>
+              <a:rPr lang="en-IN" dirty="0"/>
+              <a:t>Based on this information, the system can provide helpful guidance or simplify the form.</a:t>
+            </a:r>
+          </a:p>
+          <a:p>
+            <a:endParaRPr lang="en-IN" dirty="0"/>
+          </a:p>
+        </p:txBody>
+      </p:sp>
+    </p:spTree>
+    <p:extLst>
+      <p:ext uri="{BB962C8B-B14F-4D97-AF65-F5344CB8AC3E}">
+        <p14:creationId xmlns:p14="http://schemas.microsoft.com/office/powerpoint/2010/main" val="1513830375"/>
+      </p:ext>
+    </p:extLst>
+  </p:cSld>
+  <p:clrMapOvr>
+    <a:masterClrMapping/>
+  </p:clrMapOvr>
+</p:sld>
+</file>
+
+<file path=ppt/slides/slide4.xml><?xml version="1.0" encoding="utf-8"?>
+<p:sld xmlns:a="http://schemas.openxmlformats.org/drawingml/2006/main" xmlns:r="http://schemas.openxmlformats.org/officeDocument/2006/relationships" xmlns:p="http://schemas.openxmlformats.org/presentationml/2006/main">
+  <p:cSld>
+    <p:spTree>
+      <p:nvGrpSpPr>
+        <p:cNvPr id="1" name=""/>
+        <p:cNvGrpSpPr/>
+        <p:nvPr/>
+      </p:nvGrpSpPr>
+      <p:grpSpPr>
+        <a:xfrm>
+          <a:off x="0" y="0"/>
+          <a:ext cx="0" cy="0"/>
+          <a:chOff x="0" y="0"/>
+          <a:chExt cx="0" cy="0"/>
+        </a:xfrm>
+      </p:grpSpPr>
+      <p:sp>
+        <p:nvSpPr>
+          <p:cNvPr id="2" name="Title 1">
+            <a:extLst>
+              <a:ext uri="{FF2B5EF4-FFF2-40B4-BE49-F238E27FC236}">
+                <a16:creationId xmlns:a16="http://schemas.microsoft.com/office/drawing/2014/main" id="{82B3B557-549A-D4D8-BFCF-E4A4B921CE5B}"/>
+              </a:ext>
+            </a:extLst>
+          </p:cNvPr>
+          <p:cNvSpPr>
+            <a:spLocks noGrp="1"/>
+          </p:cNvSpPr>
+          <p:nvPr>
+            <p:ph type="title"/>
+          </p:nvPr>
+        </p:nvSpPr>
+        <p:spPr/>
+        <p:txBody>
+          <a:bodyPr/>
+          <a:lstStyle/>
+          <a:p>
+            <a:r>
+              <a:rPr lang="en-IN" b="1" dirty="0"/>
+              <a:t>Technologies used</a:t>
+            </a:r>
+            <a:endParaRPr lang="en-IN" dirty="0"/>
           </a:p>
         </p:txBody>
       </p:sp>
       <p:graphicFrame>
         <p:nvGraphicFramePr>
-          <p:cNvPr id="4" name="Table 3"/>
+          <p:cNvPr id="4" name="Table 3">
+            <a:extLst>
+              <a:ext uri="{FF2B5EF4-FFF2-40B4-BE49-F238E27FC236}">
+                <a16:creationId xmlns:a16="http://schemas.microsoft.com/office/drawing/2014/main" id="{BB9E55C0-DF7A-828C-6EAE-2344A3285A5A}"/>
+              </a:ext>
+            </a:extLst>
+          </p:cNvPr>
           <p:cNvGraphicFramePr>
             <a:graphicFrameLocks noGrp="1"/>
           </p:cNvGraphicFramePr>
-          <p:nvPr/>
+          <p:nvPr>
+            <p:extLst>
+              <p:ext uri="{D42A27DB-BD31-4B8C-83A1-F6EECF244321}">
+                <p14:modId xmlns:p14="http://schemas.microsoft.com/office/powerpoint/2010/main" val="3797398315"/>
+              </p:ext>
+            </p:extLst>
+          </p:nvPr>
         </p:nvGraphicFramePr>
         <p:xfrm>
-          <a:off x="1628109" y="1825625"/>
-          <a:ext cx="8935782" cy="4351338"/>
+          <a:off x="1605973" y="1361209"/>
+          <a:ext cx="9470736" cy="4759036"/>
         </p:xfrm>
         <a:graphic>
           <a:graphicData uri="http://schemas.openxmlformats.org/drawingml/2006/table">
             <a:tbl>
-              <a:tblPr>
-                <a:tableStyleId>{284E427A-3D55-4303-BF80-6455036E1DE7}</a:tableStyleId>
+              <a:tblPr firstRow="1" bandRow="1">
+                <a:tableStyleId>{5C22544A-7EE6-4342-B048-85BDC9FD1C3A}</a:tableStyleId>
               </a:tblPr>
               <a:tblGrid>
-                <a:gridCol w="1106465">
+                <a:gridCol w="4735368">
                   <a:extLst>
                     <a:ext uri="{9D8B030D-6E8A-4147-A177-3AD203B41FA5}">
-                      <a16:colId xmlns:a16="http://schemas.microsoft.com/office/drawing/2014/main" val="20000"/>
+                      <a16:colId xmlns:a16="http://schemas.microsoft.com/office/drawing/2014/main" val="4068204104"/>
                     </a:ext>
                   </a:extLst>
                 </a:gridCol>
-                <a:gridCol w="3985403">
+                <a:gridCol w="4735368">
                   <a:extLst>
                     <a:ext uri="{9D8B030D-6E8A-4147-A177-3AD203B41FA5}">
-                      <a16:colId xmlns:a16="http://schemas.microsoft.com/office/drawing/2014/main" val="20001"/>
-                    </a:ext>
-                  </a:extLst>
-                </a:gridCol>
-                <a:gridCol w="3843914">
-                  <a:extLst>
-                    <a:ext uri="{9D8B030D-6E8A-4147-A177-3AD203B41FA5}">
-                      <a16:colId xmlns:a16="http://schemas.microsoft.com/office/drawing/2014/main" val="20002"/>
+                      <a16:colId xmlns:a16="http://schemas.microsoft.com/office/drawing/2014/main" val="3755528911"/>
                     </a:ext>
                   </a:extLst>
                 </a:gridCol>
               </a:tblGrid>
-              <a:tr h="310810">
+              <a:tr h="872888">
                 <a:tc>
                   <a:txBody>
                     <a:bodyPr/>
@@ -16060,53 +16687,13 @@
                     <a:p>
                       <a:pPr algn="ctr"/>
                       <a:r>
-                        <a:rPr lang="en-IN" sz="1500" b="1" dirty="0"/>
-                        <a:t>Phase</a:t>
+                        <a:rPr lang="en-US" sz="2400" dirty="0"/>
+                        <a:t>Technology</a:t>
                       </a:r>
+                      <a:endParaRPr lang="en-IN" sz="2400" dirty="0"/>
                     </a:p>
                   </a:txBody>
-                  <a:tcPr marL="77702" marR="77702" marT="38851" marB="38851" anchor="ctr">
-                    <a:lnL w="12700" cap="flat" cmpd="sng" algn="ctr">
-                      <a:solidFill>
-                        <a:schemeClr val="tx1"/>
-                      </a:solidFill>
-                      <a:prstDash val="solid"/>
-                      <a:round/>
-                      <a:headEnd type="none" w="med" len="med"/>
-                      <a:tailEnd type="none" w="med" len="med"/>
-                    </a:lnL>
-                    <a:lnR w="12700" cap="flat" cmpd="sng" algn="ctr">
-                      <a:solidFill>
-                        <a:schemeClr val="tx1"/>
-                      </a:solidFill>
-                      <a:prstDash val="solid"/>
-                      <a:round/>
-                      <a:headEnd type="none" w="med" len="med"/>
-                      <a:tailEnd type="none" w="med" len="med"/>
-                    </a:lnR>
-                    <a:lnT w="12700" cap="flat" cmpd="sng" algn="ctr">
-                      <a:solidFill>
-                        <a:schemeClr val="tx1"/>
-                      </a:solidFill>
-                      <a:prstDash val="solid"/>
-                      <a:round/>
-                      <a:headEnd type="none" w="med" len="med"/>
-                      <a:tailEnd type="none" w="med" len="med"/>
-                    </a:lnT>
-                    <a:lnB w="12700" cap="flat" cmpd="sng" algn="ctr">
-                      <a:solidFill>
-                        <a:schemeClr val="tx1"/>
-                      </a:solidFill>
-                      <a:prstDash val="solid"/>
-                      <a:round/>
-                      <a:headEnd type="none" w="med" len="med"/>
-                      <a:tailEnd type="none" w="med" len="med"/>
-                    </a:lnB>
-                    <a:cell3D prstMaterial="dkEdge">
-                      <a:bevel w="25400" h="25400" prst="angle"/>
-                      <a:lightRig rig="flood" dir="t"/>
-                    </a:cell3D>
-                  </a:tcPr>
+                  <a:tcPr/>
                 </a:tc>
                 <a:tc>
                   <a:txBody>
@@ -16115,1893 +16702,218 @@
                     <a:p>
                       <a:pPr algn="ctr"/>
                       <a:r>
-                        <a:rPr lang="en-IN" sz="1500" b="1" dirty="0"/>
-                        <a:t>Work</a:t>
+                        <a:rPr lang="en-US" sz="2400" dirty="0"/>
+                        <a:t>Purpose</a:t>
+                      </a:r>
+                      <a:endParaRPr lang="en-IN" sz="2400" dirty="0"/>
+                    </a:p>
+                  </a:txBody>
+                  <a:tcPr/>
+                </a:tc>
+                <a:extLst>
+                  <a:ext uri="{0D108BD9-81ED-4DB2-BD59-A6C34878D82A}">
+                    <a16:rowId xmlns:a16="http://schemas.microsoft.com/office/drawing/2014/main" val="271335426"/>
+                  </a:ext>
+                </a:extLst>
+              </a:tr>
+              <a:tr h="872888">
+                <a:tc>
+                  <a:txBody>
+                    <a:bodyPr/>
+                    <a:lstStyle/>
+                    <a:p>
+                      <a:pPr marL="0" marR="0" lvl="0" indent="0" algn="l" defTabSz="914400" rtl="0" eaLnBrk="1" fontAlgn="auto" latinLnBrk="0" hangingPunct="1">
+                        <a:lnSpc>
+                          <a:spcPct val="100000"/>
+                        </a:lnSpc>
+                        <a:spcBef>
+                          <a:spcPts val="0"/>
+                        </a:spcBef>
+                        <a:spcAft>
+                          <a:spcPts val="0"/>
+                        </a:spcAft>
+                        <a:buClrTx/>
+                        <a:buSzTx/>
+                        <a:buFontTx/>
+                        <a:buNone/>
+                        <a:tabLst/>
+                        <a:defRPr/>
+                      </a:pPr>
+                      <a:r>
+                        <a:rPr lang="en-IN" sz="2400" dirty="0"/>
+                        <a:t>Next.js, React, TypeScript, and Node.js</a:t>
                       </a:r>
                     </a:p>
                   </a:txBody>
-                  <a:tcPr marL="77702" marR="77702" marT="38851" marB="38851" anchor="ctr">
-                    <a:lnL w="12700" cap="flat" cmpd="sng" algn="ctr">
-                      <a:solidFill>
-                        <a:schemeClr val="tx1"/>
-                      </a:solidFill>
-                      <a:prstDash val="solid"/>
-                      <a:round/>
-                      <a:headEnd type="none" w="med" len="med"/>
-                      <a:tailEnd type="none" w="med" len="med"/>
-                    </a:lnL>
-                    <a:lnR w="12700" cap="flat" cmpd="sng" algn="ctr">
-                      <a:solidFill>
-                        <a:schemeClr val="tx1"/>
-                      </a:solidFill>
-                      <a:prstDash val="solid"/>
-                      <a:round/>
-                      <a:headEnd type="none" w="med" len="med"/>
-                      <a:tailEnd type="none" w="med" len="med"/>
-                    </a:lnR>
-                    <a:lnT w="12700" cap="flat" cmpd="sng" algn="ctr">
-                      <a:solidFill>
-                        <a:schemeClr val="tx1"/>
-                      </a:solidFill>
-                      <a:prstDash val="solid"/>
-                      <a:round/>
-                      <a:headEnd type="none" w="med" len="med"/>
-                      <a:tailEnd type="none" w="med" len="med"/>
-                    </a:lnT>
-                    <a:lnB w="12700" cap="flat" cmpd="sng" algn="ctr">
-                      <a:solidFill>
-                        <a:schemeClr val="tx1"/>
-                      </a:solidFill>
-                      <a:prstDash val="solid"/>
-                      <a:round/>
-                      <a:headEnd type="none" w="med" len="med"/>
-                      <a:tailEnd type="none" w="med" len="med"/>
-                    </a:lnB>
-                    <a:cell3D prstMaterial="dkEdge">
-                      <a:bevel w="25400" h="25400" prst="angle"/>
-                      <a:lightRig rig="flood" dir="t"/>
-                    </a:cell3D>
-                  </a:tcPr>
+                  <a:tcPr/>
                 </a:tc>
                 <a:tc>
                   <a:txBody>
                     <a:bodyPr/>
                     <a:lstStyle/>
                     <a:p>
-                      <a:pPr algn="ctr"/>
+                      <a:pPr marL="0" marR="0" lvl="0" indent="0" algn="l" defTabSz="914400" rtl="0" eaLnBrk="1" fontAlgn="auto" latinLnBrk="0" hangingPunct="1">
+                        <a:lnSpc>
+                          <a:spcPct val="100000"/>
+                        </a:lnSpc>
+                        <a:spcBef>
+                          <a:spcPts val="0"/>
+                        </a:spcBef>
+                        <a:spcAft>
+                          <a:spcPts val="0"/>
+                        </a:spcAft>
+                        <a:buClrTx/>
+                        <a:buSzTx/>
+                        <a:buFontTx/>
+                        <a:buNone/>
+                        <a:tabLst/>
+                        <a:defRPr/>
+                      </a:pPr>
                       <a:r>
-                        <a:rPr lang="en-IN" sz="1500" b="1" dirty="0"/>
-                        <a:t>Status</a:t>
+                        <a:rPr lang="en-IN" sz="2400" dirty="0"/>
+                        <a:t>develop this project.</a:t>
                       </a:r>
                     </a:p>
                   </a:txBody>
-                  <a:tcPr marL="77702" marR="77702" marT="38851" marB="38851" anchor="ctr">
-                    <a:lnL w="12700" cap="flat" cmpd="sng" algn="ctr">
-                      <a:solidFill>
-                        <a:schemeClr val="tx1"/>
-                      </a:solidFill>
-                      <a:prstDash val="solid"/>
-                      <a:round/>
-                      <a:headEnd type="none" w="med" len="med"/>
-                      <a:tailEnd type="none" w="med" len="med"/>
-                    </a:lnL>
-                    <a:lnR w="12700" cap="flat" cmpd="sng" algn="ctr">
-                      <a:solidFill>
-                        <a:schemeClr val="tx1"/>
-                      </a:solidFill>
-                      <a:prstDash val="solid"/>
-                      <a:round/>
-                      <a:headEnd type="none" w="med" len="med"/>
-                      <a:tailEnd type="none" w="med" len="med"/>
-                    </a:lnR>
-                    <a:lnT w="12700" cap="flat" cmpd="sng" algn="ctr">
-                      <a:solidFill>
-                        <a:schemeClr val="tx1"/>
-                      </a:solidFill>
-                      <a:prstDash val="solid"/>
-                      <a:round/>
-                      <a:headEnd type="none" w="med" len="med"/>
-                      <a:tailEnd type="none" w="med" len="med"/>
-                    </a:lnT>
-                    <a:lnB w="12700" cap="flat" cmpd="sng" algn="ctr">
-                      <a:solidFill>
-                        <a:schemeClr val="tx1"/>
-                      </a:solidFill>
-                      <a:prstDash val="solid"/>
-                      <a:round/>
-                      <a:headEnd type="none" w="med" len="med"/>
-                      <a:tailEnd type="none" w="med" len="med"/>
-                    </a:lnB>
-                    <a:cell3D prstMaterial="dkEdge">
-                      <a:bevel w="25400" h="25400" prst="angle"/>
-                      <a:lightRig rig="flood" dir="t"/>
-                    </a:cell3D>
-                  </a:tcPr>
+                  <a:tcPr/>
                 </a:tc>
                 <a:extLst>
                   <a:ext uri="{0D108BD9-81ED-4DB2-BD59-A6C34878D82A}">
-                    <a16:rowId xmlns:a16="http://schemas.microsoft.com/office/drawing/2014/main" val="10000"/>
+                    <a16:rowId xmlns:a16="http://schemas.microsoft.com/office/drawing/2014/main" val="2546014182"/>
                   </a:ext>
                 </a:extLst>
               </a:tr>
-              <a:tr h="543917">
+              <a:tr h="1506630">
                 <a:tc>
                   <a:txBody>
                     <a:bodyPr/>
                     <a:lstStyle/>
                     <a:p>
+                      <a:pPr marL="0" marR="0" lvl="0" indent="0" algn="l" defTabSz="914400" rtl="0" eaLnBrk="1" fontAlgn="auto" latinLnBrk="0" hangingPunct="1">
+                        <a:lnSpc>
+                          <a:spcPct val="100000"/>
+                        </a:lnSpc>
+                        <a:spcBef>
+                          <a:spcPts val="0"/>
+                        </a:spcBef>
+                        <a:spcAft>
+                          <a:spcPts val="0"/>
+                        </a:spcAft>
+                        <a:buClrTx/>
+                        <a:buSzTx/>
+                        <a:buFontTx/>
+                        <a:buNone/>
+                        <a:tabLst/>
+                        <a:defRPr/>
+                      </a:pPr>
                       <a:r>
-                        <a:rPr lang="en-IN" sz="1500"/>
-                        <a:t>1</a:t>
+                        <a:rPr lang="en-IN" sz="2400" dirty="0"/>
+                        <a:t>WebSocket</a:t>
                       </a:r>
                     </a:p>
                   </a:txBody>
-                  <a:tcPr marL="77702" marR="77702" marT="38851" marB="38851" anchor="ctr">
-                    <a:lnL w="12700" cap="flat" cmpd="sng" algn="ctr">
-                      <a:solidFill>
-                        <a:schemeClr val="tx1"/>
-                      </a:solidFill>
-                      <a:prstDash val="solid"/>
-                      <a:round/>
-                      <a:headEnd type="none" w="med" len="med"/>
-                      <a:tailEnd type="none" w="med" len="med"/>
-                    </a:lnL>
-                    <a:lnR w="12700" cap="flat" cmpd="sng" algn="ctr">
-                      <a:solidFill>
-                        <a:schemeClr val="tx1"/>
-                      </a:solidFill>
-                      <a:prstDash val="solid"/>
-                      <a:round/>
-                      <a:headEnd type="none" w="med" len="med"/>
-                      <a:tailEnd type="none" w="med" len="med"/>
-                    </a:lnR>
-                    <a:lnT w="12700" cap="flat" cmpd="sng" algn="ctr">
-                      <a:solidFill>
-                        <a:schemeClr val="tx1"/>
-                      </a:solidFill>
-                      <a:prstDash val="solid"/>
-                      <a:round/>
-                      <a:headEnd type="none" w="med" len="med"/>
-                      <a:tailEnd type="none" w="med" len="med"/>
-                    </a:lnT>
-                    <a:lnB w="12700" cap="flat" cmpd="sng" algn="ctr">
-                      <a:solidFill>
-                        <a:schemeClr val="tx1"/>
-                      </a:solidFill>
-                      <a:prstDash val="solid"/>
-                      <a:round/>
-                      <a:headEnd type="none" w="med" len="med"/>
-                      <a:tailEnd type="none" w="med" len="med"/>
-                    </a:lnB>
-                    <a:cell3D prstMaterial="dkEdge">
-                      <a:bevel w="25400" h="25400" prst="angle"/>
-                      <a:lightRig rig="flood" dir="t"/>
-                    </a:cell3D>
-                  </a:tcPr>
+                  <a:tcPr/>
                 </a:tc>
                 <a:tc>
                   <a:txBody>
                     <a:bodyPr/>
                     <a:lstStyle/>
                     <a:p>
-                      <a:pPr algn="r"/>
+                      <a:pPr marL="0" marR="0" lvl="0" indent="0" algn="l" defTabSz="914400" rtl="0" eaLnBrk="1" fontAlgn="auto" latinLnBrk="0" hangingPunct="1">
+                        <a:lnSpc>
+                          <a:spcPct val="100000"/>
+                        </a:lnSpc>
+                        <a:spcBef>
+                          <a:spcPts val="0"/>
+                        </a:spcBef>
+                        <a:spcAft>
+                          <a:spcPts val="0"/>
+                        </a:spcAft>
+                        <a:buClrTx/>
+                        <a:buSzTx/>
+                        <a:buFontTx/>
+                        <a:buNone/>
+                        <a:tabLst/>
+                        <a:defRPr/>
+                      </a:pPr>
                       <a:r>
-                        <a:rPr lang="en-IN" sz="1500" dirty="0">
-                          <a:latin typeface="Times New Roman" panose="02020603050405020304" pitchFamily="18" charset="0"/>
-                          <a:cs typeface="Times New Roman" panose="02020603050405020304" pitchFamily="18" charset="0"/>
-                        </a:rPr>
-                        <a:t>Problem understanding &amp; project planning</a:t>
+                        <a:rPr lang="en-IN" sz="2400" dirty="0"/>
+                        <a:t>Real-time communication between the frontend and backend</a:t>
                       </a:r>
                     </a:p>
                   </a:txBody>
-                  <a:tcPr marL="77702" marR="77702" marT="38851" marB="38851" anchor="ctr">
-                    <a:lnL w="12700" cap="flat" cmpd="sng" algn="ctr">
-                      <a:solidFill>
-                        <a:schemeClr val="tx1"/>
-                      </a:solidFill>
-                      <a:prstDash val="solid"/>
-                      <a:round/>
-                      <a:headEnd type="none" w="med" len="med"/>
-                      <a:tailEnd type="none" w="med" len="med"/>
-                    </a:lnL>
-                    <a:lnR w="12700" cap="flat" cmpd="sng" algn="ctr">
-                      <a:solidFill>
-                        <a:schemeClr val="tx1"/>
-                      </a:solidFill>
-                      <a:prstDash val="solid"/>
-                      <a:round/>
-                      <a:headEnd type="none" w="med" len="med"/>
-                      <a:tailEnd type="none" w="med" len="med"/>
-                    </a:lnR>
-                    <a:lnT w="12700" cap="flat" cmpd="sng" algn="ctr">
-                      <a:solidFill>
-                        <a:schemeClr val="tx1"/>
-                      </a:solidFill>
-                      <a:prstDash val="solid"/>
-                      <a:round/>
-                      <a:headEnd type="none" w="med" len="med"/>
-                      <a:tailEnd type="none" w="med" len="med"/>
-                    </a:lnT>
-                    <a:lnB w="12700" cap="flat" cmpd="sng" algn="ctr">
-                      <a:solidFill>
-                        <a:schemeClr val="tx1"/>
-                      </a:solidFill>
-                      <a:prstDash val="solid"/>
-                      <a:round/>
-                      <a:headEnd type="none" w="med" len="med"/>
-                      <a:tailEnd type="none" w="med" len="med"/>
-                    </a:lnB>
-                    <a:cell3D prstMaterial="dkEdge">
-                      <a:bevel w="25400" h="25400" prst="angle"/>
-                      <a:lightRig rig="flood" dir="t"/>
-                    </a:cell3D>
-                  </a:tcPr>
+                  <a:tcPr/>
+                </a:tc>
+                <a:extLst>
+                  <a:ext uri="{0D108BD9-81ED-4DB2-BD59-A6C34878D82A}">
+                    <a16:rowId xmlns:a16="http://schemas.microsoft.com/office/drawing/2014/main" val="1898709910"/>
+                  </a:ext>
+                </a:extLst>
+              </a:tr>
+              <a:tr h="1506630">
+                <a:tc>
+                  <a:txBody>
+                    <a:bodyPr/>
+                    <a:lstStyle/>
+                    <a:p>
+                      <a:pPr marL="0" marR="0" lvl="0" indent="0" algn="l" defTabSz="914400" rtl="0" eaLnBrk="1" fontAlgn="auto" latinLnBrk="0" hangingPunct="1">
+                        <a:lnSpc>
+                          <a:spcPct val="100000"/>
+                        </a:lnSpc>
+                        <a:spcBef>
+                          <a:spcPts val="0"/>
+                        </a:spcBef>
+                        <a:spcAft>
+                          <a:spcPts val="0"/>
+                        </a:spcAft>
+                        <a:buClrTx/>
+                        <a:buSzTx/>
+                        <a:buFontTx/>
+                        <a:buNone/>
+                        <a:tabLst/>
+                        <a:defRPr/>
+                      </a:pPr>
+                      <a:r>
+                        <a:rPr lang="en-IN" sz="2400" dirty="0"/>
+                        <a:t>Generative AI</a:t>
+                      </a:r>
+                    </a:p>
+                  </a:txBody>
+                  <a:tcPr/>
                 </a:tc>
                 <a:tc>
                   <a:txBody>
                     <a:bodyPr/>
                     <a:lstStyle/>
                     <a:p>
+                      <a:pPr marL="0" marR="0" lvl="0" indent="0" algn="l" defTabSz="914400" rtl="0" eaLnBrk="1" fontAlgn="auto" latinLnBrk="0" hangingPunct="1">
+                        <a:lnSpc>
+                          <a:spcPct val="100000"/>
+                        </a:lnSpc>
+                        <a:spcBef>
+                          <a:spcPts val="0"/>
+                        </a:spcBef>
+                        <a:spcAft>
+                          <a:spcPts val="0"/>
+                        </a:spcAft>
+                        <a:buClrTx/>
+                        <a:buSzTx/>
+                        <a:buFontTx/>
+                        <a:buNone/>
+                        <a:tabLst/>
+                        <a:defRPr/>
+                      </a:pPr>
                       <a:r>
-                        <a:rPr lang="en-IN" sz="1500" dirty="0">
-                          <a:latin typeface="Times New Roman" panose="02020603050405020304" pitchFamily="18" charset="0"/>
-                          <a:cs typeface="Times New Roman" panose="02020603050405020304" pitchFamily="18" charset="0"/>
-                        </a:rPr>
-                        <a:t>✅ Completed</a:t>
+                        <a:rPr lang="en-IN" sz="2400" dirty="0"/>
+                        <a:t>prepare a plan for changing the user interface</a:t>
                       </a:r>
                     </a:p>
                   </a:txBody>
-                  <a:tcPr marL="77702" marR="77702" marT="38851" marB="38851" anchor="ctr">
-                    <a:lnL w="12700" cap="flat" cmpd="sng" algn="ctr">
-                      <a:solidFill>
-                        <a:schemeClr val="tx1"/>
-                      </a:solidFill>
-                      <a:prstDash val="solid"/>
-                      <a:round/>
-                      <a:headEnd type="none" w="med" len="med"/>
-                      <a:tailEnd type="none" w="med" len="med"/>
-                    </a:lnL>
-                    <a:lnR w="12700" cap="flat" cmpd="sng" algn="ctr">
-                      <a:solidFill>
-                        <a:schemeClr val="tx1"/>
-                      </a:solidFill>
-                      <a:prstDash val="solid"/>
-                      <a:round/>
-                      <a:headEnd type="none" w="med" len="med"/>
-                      <a:tailEnd type="none" w="med" len="med"/>
-                    </a:lnR>
-                    <a:lnT w="12700" cap="flat" cmpd="sng" algn="ctr">
-                      <a:solidFill>
-                        <a:schemeClr val="tx1"/>
-                      </a:solidFill>
-                      <a:prstDash val="solid"/>
-                      <a:round/>
-                      <a:headEnd type="none" w="med" len="med"/>
-                      <a:tailEnd type="none" w="med" len="med"/>
-                    </a:lnT>
-                    <a:lnB w="12700" cap="flat" cmpd="sng" algn="ctr">
-                      <a:solidFill>
-                        <a:schemeClr val="tx1"/>
-                      </a:solidFill>
-                      <a:prstDash val="solid"/>
-                      <a:round/>
-                      <a:headEnd type="none" w="med" len="med"/>
-                      <a:tailEnd type="none" w="med" len="med"/>
-                    </a:lnB>
-                    <a:cell3D prstMaterial="dkEdge">
-                      <a:bevel w="25400" h="25400" prst="angle"/>
-                      <a:lightRig rig="flood" dir="t"/>
-                    </a:cell3D>
-                  </a:tcPr>
+                  <a:tcPr/>
                 </a:tc>
                 <a:extLst>
                   <a:ext uri="{0D108BD9-81ED-4DB2-BD59-A6C34878D82A}">
-                    <a16:rowId xmlns:a16="http://schemas.microsoft.com/office/drawing/2014/main" val="10001"/>
-                  </a:ext>
-                </a:extLst>
-              </a:tr>
-              <a:tr h="310810">
-                <a:tc>
-                  <a:txBody>
-                    <a:bodyPr/>
-                    <a:lstStyle/>
-                    <a:p>
-                      <a:r>
-                        <a:rPr lang="en-IN" sz="1500"/>
-                        <a:t>2</a:t>
-                      </a:r>
-                    </a:p>
-                  </a:txBody>
-                  <a:tcPr marL="77702" marR="77702" marT="38851" marB="38851" anchor="ctr">
-                    <a:lnL w="12700" cap="flat" cmpd="sng" algn="ctr">
-                      <a:solidFill>
-                        <a:schemeClr val="tx1"/>
-                      </a:solidFill>
-                      <a:prstDash val="solid"/>
-                      <a:round/>
-                      <a:headEnd type="none" w="med" len="med"/>
-                      <a:tailEnd type="none" w="med" len="med"/>
-                    </a:lnL>
-                    <a:lnR w="12700" cap="flat" cmpd="sng" algn="ctr">
-                      <a:solidFill>
-                        <a:schemeClr val="tx1"/>
-                      </a:solidFill>
-                      <a:prstDash val="solid"/>
-                      <a:round/>
-                      <a:headEnd type="none" w="med" len="med"/>
-                      <a:tailEnd type="none" w="med" len="med"/>
-                    </a:lnR>
-                    <a:lnT w="12700" cap="flat" cmpd="sng" algn="ctr">
-                      <a:solidFill>
-                        <a:schemeClr val="tx1"/>
-                      </a:solidFill>
-                      <a:prstDash val="solid"/>
-                      <a:round/>
-                      <a:headEnd type="none" w="med" len="med"/>
-                      <a:tailEnd type="none" w="med" len="med"/>
-                    </a:lnT>
-                    <a:lnB w="12700" cap="flat" cmpd="sng" algn="ctr">
-                      <a:solidFill>
-                        <a:schemeClr val="tx1"/>
-                      </a:solidFill>
-                      <a:prstDash val="solid"/>
-                      <a:round/>
-                      <a:headEnd type="none" w="med" len="med"/>
-                      <a:tailEnd type="none" w="med" len="med"/>
-                    </a:lnB>
-                    <a:cell3D prstMaterial="dkEdge">
-                      <a:bevel w="25400" h="25400" prst="angle"/>
-                      <a:lightRig rig="flood" dir="t"/>
-                    </a:cell3D>
-                  </a:tcPr>
-                </a:tc>
-                <a:tc>
-                  <a:txBody>
-                    <a:bodyPr/>
-                    <a:lstStyle/>
-                    <a:p>
-                      <a:pPr algn="r"/>
-                      <a:r>
-                        <a:rPr lang="en-IN" sz="1500">
-                          <a:latin typeface="Times New Roman" panose="02020603050405020304" pitchFamily="18" charset="0"/>
-                          <a:cs typeface="Times New Roman" panose="02020603050405020304" pitchFamily="18" charset="0"/>
-                        </a:rPr>
-                        <a:t>Next.js/React setup + UI foundation</a:t>
-                      </a:r>
-                    </a:p>
-                  </a:txBody>
-                  <a:tcPr marL="77702" marR="77702" marT="38851" marB="38851" anchor="ctr">
-                    <a:lnL w="12700" cap="flat" cmpd="sng" algn="ctr">
-                      <a:solidFill>
-                        <a:schemeClr val="tx1"/>
-                      </a:solidFill>
-                      <a:prstDash val="solid"/>
-                      <a:round/>
-                      <a:headEnd type="none" w="med" len="med"/>
-                      <a:tailEnd type="none" w="med" len="med"/>
-                    </a:lnL>
-                    <a:lnR w="12700" cap="flat" cmpd="sng" algn="ctr">
-                      <a:solidFill>
-                        <a:schemeClr val="tx1"/>
-                      </a:solidFill>
-                      <a:prstDash val="solid"/>
-                      <a:round/>
-                      <a:headEnd type="none" w="med" len="med"/>
-                      <a:tailEnd type="none" w="med" len="med"/>
-                    </a:lnR>
-                    <a:lnT w="12700" cap="flat" cmpd="sng" algn="ctr">
-                      <a:solidFill>
-                        <a:schemeClr val="tx1"/>
-                      </a:solidFill>
-                      <a:prstDash val="solid"/>
-                      <a:round/>
-                      <a:headEnd type="none" w="med" len="med"/>
-                      <a:tailEnd type="none" w="med" len="med"/>
-                    </a:lnT>
-                    <a:lnB w="12700" cap="flat" cmpd="sng" algn="ctr">
-                      <a:solidFill>
-                        <a:schemeClr val="tx1"/>
-                      </a:solidFill>
-                      <a:prstDash val="solid"/>
-                      <a:round/>
-                      <a:headEnd type="none" w="med" len="med"/>
-                      <a:tailEnd type="none" w="med" len="med"/>
-                    </a:lnB>
-                    <a:cell3D prstMaterial="dkEdge">
-                      <a:bevel w="25400" h="25400" prst="angle"/>
-                      <a:lightRig rig="flood" dir="t"/>
-                    </a:cell3D>
-                  </a:tcPr>
-                </a:tc>
-                <a:tc>
-                  <a:txBody>
-                    <a:bodyPr/>
-                    <a:lstStyle/>
-                    <a:p>
-                      <a:r>
-                        <a:rPr lang="en-IN" sz="1500" dirty="0">
-                          <a:latin typeface="Times New Roman" panose="02020603050405020304" pitchFamily="18" charset="0"/>
-                          <a:cs typeface="Times New Roman" panose="02020603050405020304" pitchFamily="18" charset="0"/>
-                        </a:rPr>
-                        <a:t>✅ Completed</a:t>
-                      </a:r>
-                    </a:p>
-                  </a:txBody>
-                  <a:tcPr marL="77702" marR="77702" marT="38851" marB="38851" anchor="ctr">
-                    <a:lnL w="12700" cap="flat" cmpd="sng" algn="ctr">
-                      <a:solidFill>
-                        <a:schemeClr val="tx1"/>
-                      </a:solidFill>
-                      <a:prstDash val="solid"/>
-                      <a:round/>
-                      <a:headEnd type="none" w="med" len="med"/>
-                      <a:tailEnd type="none" w="med" len="med"/>
-                    </a:lnL>
-                    <a:lnR w="12700" cap="flat" cmpd="sng" algn="ctr">
-                      <a:solidFill>
-                        <a:schemeClr val="tx1"/>
-                      </a:solidFill>
-                      <a:prstDash val="solid"/>
-                      <a:round/>
-                      <a:headEnd type="none" w="med" len="med"/>
-                      <a:tailEnd type="none" w="med" len="med"/>
-                    </a:lnR>
-                    <a:lnT w="12700" cap="flat" cmpd="sng" algn="ctr">
-                      <a:solidFill>
-                        <a:schemeClr val="tx1"/>
-                      </a:solidFill>
-                      <a:prstDash val="solid"/>
-                      <a:round/>
-                      <a:headEnd type="none" w="med" len="med"/>
-                      <a:tailEnd type="none" w="med" len="med"/>
-                    </a:lnT>
-                    <a:lnB w="12700" cap="flat" cmpd="sng" algn="ctr">
-                      <a:solidFill>
-                        <a:schemeClr val="tx1"/>
-                      </a:solidFill>
-                      <a:prstDash val="solid"/>
-                      <a:round/>
-                      <a:headEnd type="none" w="med" len="med"/>
-                      <a:tailEnd type="none" w="med" len="med"/>
-                    </a:lnB>
-                    <a:cell3D prstMaterial="dkEdge">
-                      <a:bevel w="25400" h="25400" prst="angle"/>
-                      <a:lightRig rig="flood" dir="t"/>
-                    </a:cell3D>
-                  </a:tcPr>
-                </a:tc>
-                <a:extLst>
-                  <a:ext uri="{0D108BD9-81ED-4DB2-BD59-A6C34878D82A}">
-                    <a16:rowId xmlns:a16="http://schemas.microsoft.com/office/drawing/2014/main" val="10002"/>
-                  </a:ext>
-                </a:extLst>
-              </a:tr>
-              <a:tr h="543917">
-                <a:tc>
-                  <a:txBody>
-                    <a:bodyPr/>
-                    <a:lstStyle/>
-                    <a:p>
-                      <a:r>
-                        <a:rPr lang="en-IN" sz="1500" dirty="0"/>
-                        <a:t>3</a:t>
-                      </a:r>
-                    </a:p>
-                  </a:txBody>
-                  <a:tcPr marL="77702" marR="77702" marT="38851" marB="38851" anchor="ctr">
-                    <a:lnL w="12700" cap="flat" cmpd="sng" algn="ctr">
-                      <a:solidFill>
-                        <a:schemeClr val="tx1"/>
-                      </a:solidFill>
-                      <a:prstDash val="solid"/>
-                      <a:round/>
-                      <a:headEnd type="none" w="med" len="med"/>
-                      <a:tailEnd type="none" w="med" len="med"/>
-                    </a:lnL>
-                    <a:lnR w="12700" cap="flat" cmpd="sng" algn="ctr">
-                      <a:solidFill>
-                        <a:schemeClr val="tx1"/>
-                      </a:solidFill>
-                      <a:prstDash val="solid"/>
-                      <a:round/>
-                      <a:headEnd type="none" w="med" len="med"/>
-                      <a:tailEnd type="none" w="med" len="med"/>
-                    </a:lnR>
-                    <a:lnT w="12700" cap="flat" cmpd="sng" algn="ctr">
-                      <a:solidFill>
-                        <a:schemeClr val="tx1"/>
-                      </a:solidFill>
-                      <a:prstDash val="solid"/>
-                      <a:round/>
-                      <a:headEnd type="none" w="med" len="med"/>
-                      <a:tailEnd type="none" w="med" len="med"/>
-                    </a:lnT>
-                    <a:lnB w="12700" cap="flat" cmpd="sng" algn="ctr">
-                      <a:solidFill>
-                        <a:schemeClr val="tx1"/>
-                      </a:solidFill>
-                      <a:prstDash val="solid"/>
-                      <a:round/>
-                      <a:headEnd type="none" w="med" len="med"/>
-                      <a:tailEnd type="none" w="med" len="med"/>
-                    </a:lnB>
-                    <a:cell3D prstMaterial="dkEdge">
-                      <a:bevel w="25400" h="25400" prst="angle"/>
-                      <a:lightRig rig="flood" dir="t"/>
-                    </a:cell3D>
-                  </a:tcPr>
-                </a:tc>
-                <a:tc>
-                  <a:txBody>
-                    <a:bodyPr/>
-                    <a:lstStyle/>
-                    <a:p>
-                      <a:pPr algn="r"/>
-                      <a:r>
-                        <a:rPr lang="en-IN" sz="1500" dirty="0">
-                          <a:latin typeface="Times New Roman" panose="02020603050405020304" pitchFamily="18" charset="0"/>
-                          <a:cs typeface="Times New Roman" panose="02020603050405020304" pitchFamily="18" charset="0"/>
-                        </a:rPr>
-                        <a:t>Mouse telemetry + movement analysis</a:t>
-                      </a:r>
-                    </a:p>
-                  </a:txBody>
-                  <a:tcPr marL="77702" marR="77702" marT="38851" marB="38851" anchor="ctr">
-                    <a:lnL w="12700" cap="flat" cmpd="sng" algn="ctr">
-                      <a:solidFill>
-                        <a:schemeClr val="tx1"/>
-                      </a:solidFill>
-                      <a:prstDash val="solid"/>
-                      <a:round/>
-                      <a:headEnd type="none" w="med" len="med"/>
-                      <a:tailEnd type="none" w="med" len="med"/>
-                    </a:lnL>
-                    <a:lnR w="12700" cap="flat" cmpd="sng" algn="ctr">
-                      <a:solidFill>
-                        <a:schemeClr val="tx1"/>
-                      </a:solidFill>
-                      <a:prstDash val="solid"/>
-                      <a:round/>
-                      <a:headEnd type="none" w="med" len="med"/>
-                      <a:tailEnd type="none" w="med" len="med"/>
-                    </a:lnR>
-                    <a:lnT w="12700" cap="flat" cmpd="sng" algn="ctr">
-                      <a:solidFill>
-                        <a:schemeClr val="tx1"/>
-                      </a:solidFill>
-                      <a:prstDash val="solid"/>
-                      <a:round/>
-                      <a:headEnd type="none" w="med" len="med"/>
-                      <a:tailEnd type="none" w="med" len="med"/>
-                    </a:lnT>
-                    <a:lnB w="12700" cap="flat" cmpd="sng" algn="ctr">
-                      <a:solidFill>
-                        <a:schemeClr val="tx1"/>
-                      </a:solidFill>
-                      <a:prstDash val="solid"/>
-                      <a:round/>
-                      <a:headEnd type="none" w="med" len="med"/>
-                      <a:tailEnd type="none" w="med" len="med"/>
-                    </a:lnB>
-                    <a:cell3D prstMaterial="dkEdge">
-                      <a:bevel w="25400" h="25400" prst="angle"/>
-                      <a:lightRig rig="flood" dir="t"/>
-                    </a:cell3D>
-                  </a:tcPr>
-                </a:tc>
-                <a:tc>
-                  <a:txBody>
-                    <a:bodyPr/>
-                    <a:lstStyle/>
-                    <a:p>
-                      <a:r>
-                        <a:rPr lang="en-IN" sz="1500" dirty="0">
-                          <a:latin typeface="Times New Roman" panose="02020603050405020304" pitchFamily="18" charset="0"/>
-                          <a:cs typeface="Times New Roman" panose="02020603050405020304" pitchFamily="18" charset="0"/>
-                        </a:rPr>
-                        <a:t>✅ Completed</a:t>
-                      </a:r>
-                    </a:p>
-                  </a:txBody>
-                  <a:tcPr marL="77702" marR="77702" marT="38851" marB="38851" anchor="ctr">
-                    <a:lnL w="12700" cap="flat" cmpd="sng" algn="ctr">
-                      <a:solidFill>
-                        <a:schemeClr val="tx1"/>
-                      </a:solidFill>
-                      <a:prstDash val="solid"/>
-                      <a:round/>
-                      <a:headEnd type="none" w="med" len="med"/>
-                      <a:tailEnd type="none" w="med" len="med"/>
-                    </a:lnL>
-                    <a:lnR w="12700" cap="flat" cmpd="sng" algn="ctr">
-                      <a:solidFill>
-                        <a:schemeClr val="tx1"/>
-                      </a:solidFill>
-                      <a:prstDash val="solid"/>
-                      <a:round/>
-                      <a:headEnd type="none" w="med" len="med"/>
-                      <a:tailEnd type="none" w="med" len="med"/>
-                    </a:lnR>
-                    <a:lnT w="12700" cap="flat" cmpd="sng" algn="ctr">
-                      <a:solidFill>
-                        <a:schemeClr val="tx1"/>
-                      </a:solidFill>
-                      <a:prstDash val="solid"/>
-                      <a:round/>
-                      <a:headEnd type="none" w="med" len="med"/>
-                      <a:tailEnd type="none" w="med" len="med"/>
-                    </a:lnT>
-                    <a:lnB w="12700" cap="flat" cmpd="sng" algn="ctr">
-                      <a:solidFill>
-                        <a:schemeClr val="tx1"/>
-                      </a:solidFill>
-                      <a:prstDash val="solid"/>
-                      <a:round/>
-                      <a:headEnd type="none" w="med" len="med"/>
-                      <a:tailEnd type="none" w="med" len="med"/>
-                    </a:lnB>
-                    <a:cell3D prstMaterial="dkEdge">
-                      <a:bevel w="25400" h="25400" prst="angle"/>
-                      <a:lightRig rig="flood" dir="t"/>
-                    </a:cell3D>
-                  </a:tcPr>
-                </a:tc>
-                <a:extLst>
-                  <a:ext uri="{0D108BD9-81ED-4DB2-BD59-A6C34878D82A}">
-                    <a16:rowId xmlns:a16="http://schemas.microsoft.com/office/drawing/2014/main" val="10003"/>
-                  </a:ext>
-                </a:extLst>
-              </a:tr>
-              <a:tr h="543917">
-                <a:tc>
-                  <a:txBody>
-                    <a:bodyPr/>
-                    <a:lstStyle/>
-                    <a:p>
-                      <a:r>
-                        <a:rPr lang="en-IN" sz="1500"/>
-                        <a:t>4</a:t>
-                      </a:r>
-                    </a:p>
-                  </a:txBody>
-                  <a:tcPr marL="77702" marR="77702" marT="38851" marB="38851" anchor="ctr">
-                    <a:lnL w="12700" cap="flat" cmpd="sng" algn="ctr">
-                      <a:solidFill>
-                        <a:schemeClr val="tx1"/>
-                      </a:solidFill>
-                      <a:prstDash val="solid"/>
-                      <a:round/>
-                      <a:headEnd type="none" w="med" len="med"/>
-                      <a:tailEnd type="none" w="med" len="med"/>
-                    </a:lnL>
-                    <a:lnR w="12700" cap="flat" cmpd="sng" algn="ctr">
-                      <a:solidFill>
-                        <a:schemeClr val="tx1"/>
-                      </a:solidFill>
-                      <a:prstDash val="solid"/>
-                      <a:round/>
-                      <a:headEnd type="none" w="med" len="med"/>
-                      <a:tailEnd type="none" w="med" len="med"/>
-                    </a:lnR>
-                    <a:lnT w="12700" cap="flat" cmpd="sng" algn="ctr">
-                      <a:solidFill>
-                        <a:schemeClr val="tx1"/>
-                      </a:solidFill>
-                      <a:prstDash val="solid"/>
-                      <a:round/>
-                      <a:headEnd type="none" w="med" len="med"/>
-                      <a:tailEnd type="none" w="med" len="med"/>
-                    </a:lnT>
-                    <a:lnB w="12700" cap="flat" cmpd="sng" algn="ctr">
-                      <a:solidFill>
-                        <a:schemeClr val="tx1"/>
-                      </a:solidFill>
-                      <a:prstDash val="solid"/>
-                      <a:round/>
-                      <a:headEnd type="none" w="med" len="med"/>
-                      <a:tailEnd type="none" w="med" len="med"/>
-                    </a:lnB>
-                    <a:cell3D prstMaterial="dkEdge">
-                      <a:bevel w="25400" h="25400" prst="angle"/>
-                      <a:lightRig rig="flood" dir="t"/>
-                    </a:cell3D>
-                  </a:tcPr>
-                </a:tc>
-                <a:tc>
-                  <a:txBody>
-                    <a:bodyPr/>
-                    <a:lstStyle/>
-                    <a:p>
-                      <a:pPr algn="r"/>
-                      <a:r>
-                        <a:rPr lang="en-IN" sz="1500" dirty="0">
-                          <a:latin typeface="Times New Roman" panose="02020603050405020304" pitchFamily="18" charset="0"/>
-                          <a:cs typeface="Times New Roman" panose="02020603050405020304" pitchFamily="18" charset="0"/>
-                        </a:rPr>
-                        <a:t>Friction/Cognitive Load Score</a:t>
-                      </a:r>
-                    </a:p>
-                  </a:txBody>
-                  <a:tcPr marL="77702" marR="77702" marT="38851" marB="38851" anchor="ctr">
-                    <a:lnL w="12700" cap="flat" cmpd="sng" algn="ctr">
-                      <a:solidFill>
-                        <a:schemeClr val="tx1"/>
-                      </a:solidFill>
-                      <a:prstDash val="solid"/>
-                      <a:round/>
-                      <a:headEnd type="none" w="med" len="med"/>
-                      <a:tailEnd type="none" w="med" len="med"/>
-                    </a:lnL>
-                    <a:lnR w="12700" cap="flat" cmpd="sng" algn="ctr">
-                      <a:solidFill>
-                        <a:schemeClr val="tx1"/>
-                      </a:solidFill>
-                      <a:prstDash val="solid"/>
-                      <a:round/>
-                      <a:headEnd type="none" w="med" len="med"/>
-                      <a:tailEnd type="none" w="med" len="med"/>
-                    </a:lnR>
-                    <a:lnT w="12700" cap="flat" cmpd="sng" algn="ctr">
-                      <a:solidFill>
-                        <a:schemeClr val="tx1"/>
-                      </a:solidFill>
-                      <a:prstDash val="solid"/>
-                      <a:round/>
-                      <a:headEnd type="none" w="med" len="med"/>
-                      <a:tailEnd type="none" w="med" len="med"/>
-                    </a:lnT>
-                    <a:lnB w="12700" cap="flat" cmpd="sng" algn="ctr">
-                      <a:solidFill>
-                        <a:schemeClr val="tx1"/>
-                      </a:solidFill>
-                      <a:prstDash val="solid"/>
-                      <a:round/>
-                      <a:headEnd type="none" w="med" len="med"/>
-                      <a:tailEnd type="none" w="med" len="med"/>
-                    </a:lnB>
-                    <a:cell3D prstMaterial="dkEdge">
-                      <a:bevel w="25400" h="25400" prst="angle"/>
-                      <a:lightRig rig="flood" dir="t"/>
-                    </a:cell3D>
-                  </a:tcPr>
-                </a:tc>
-                <a:tc>
-                  <a:txBody>
-                    <a:bodyPr/>
-                    <a:lstStyle/>
-                    <a:p>
-                      <a:r>
-                        <a:rPr lang="en-IN" sz="1500" dirty="0">
-                          <a:latin typeface="Times New Roman" panose="02020603050405020304" pitchFamily="18" charset="0"/>
-                          <a:cs typeface="Times New Roman" panose="02020603050405020304" pitchFamily="18" charset="0"/>
-                        </a:rPr>
-                        <a:t>✅ Initial implementation completed</a:t>
-                      </a:r>
-                    </a:p>
-                  </a:txBody>
-                  <a:tcPr marL="77702" marR="77702" marT="38851" marB="38851" anchor="ctr">
-                    <a:lnL w="12700" cap="flat" cmpd="sng" algn="ctr">
-                      <a:solidFill>
-                        <a:schemeClr val="tx1"/>
-                      </a:solidFill>
-                      <a:prstDash val="solid"/>
-                      <a:round/>
-                      <a:headEnd type="none" w="med" len="med"/>
-                      <a:tailEnd type="none" w="med" len="med"/>
-                    </a:lnL>
-                    <a:lnR w="12700" cap="flat" cmpd="sng" algn="ctr">
-                      <a:solidFill>
-                        <a:schemeClr val="tx1"/>
-                      </a:solidFill>
-                      <a:prstDash val="solid"/>
-                      <a:round/>
-                      <a:headEnd type="none" w="med" len="med"/>
-                      <a:tailEnd type="none" w="med" len="med"/>
-                    </a:lnR>
-                    <a:lnT w="12700" cap="flat" cmpd="sng" algn="ctr">
-                      <a:solidFill>
-                        <a:schemeClr val="tx1"/>
-                      </a:solidFill>
-                      <a:prstDash val="solid"/>
-                      <a:round/>
-                      <a:headEnd type="none" w="med" len="med"/>
-                      <a:tailEnd type="none" w="med" len="med"/>
-                    </a:lnT>
-                    <a:lnB w="12700" cap="flat" cmpd="sng" algn="ctr">
-                      <a:solidFill>
-                        <a:schemeClr val="tx1"/>
-                      </a:solidFill>
-                      <a:prstDash val="solid"/>
-                      <a:round/>
-                      <a:headEnd type="none" w="med" len="med"/>
-                      <a:tailEnd type="none" w="med" len="med"/>
-                    </a:lnB>
-                    <a:cell3D prstMaterial="dkEdge">
-                      <a:bevel w="25400" h="25400" prst="angle"/>
-                      <a:lightRig rig="flood" dir="t"/>
-                    </a:cell3D>
-                  </a:tcPr>
-                </a:tc>
-                <a:extLst>
-                  <a:ext uri="{0D108BD9-81ED-4DB2-BD59-A6C34878D82A}">
-                    <a16:rowId xmlns:a16="http://schemas.microsoft.com/office/drawing/2014/main" val="10004"/>
-                  </a:ext>
-                </a:extLst>
-              </a:tr>
-              <a:tr h="543917">
-                <a:tc>
-                  <a:txBody>
-                    <a:bodyPr/>
-                    <a:lstStyle/>
-                    <a:p>
-                      <a:r>
-                        <a:rPr lang="en-IN" sz="1500"/>
-                        <a:t>5</a:t>
-                      </a:r>
-                    </a:p>
-                  </a:txBody>
-                  <a:tcPr marL="77702" marR="77702" marT="38851" marB="38851" anchor="ctr">
-                    <a:lnL w="12700" cap="flat" cmpd="sng" algn="ctr">
-                      <a:solidFill>
-                        <a:schemeClr val="tx1"/>
-                      </a:solidFill>
-                      <a:prstDash val="solid"/>
-                      <a:round/>
-                      <a:headEnd type="none" w="med" len="med"/>
-                      <a:tailEnd type="none" w="med" len="med"/>
-                    </a:lnL>
-                    <a:lnR w="12700" cap="flat" cmpd="sng" algn="ctr">
-                      <a:solidFill>
-                        <a:schemeClr val="tx1"/>
-                      </a:solidFill>
-                      <a:prstDash val="solid"/>
-                      <a:round/>
-                      <a:headEnd type="none" w="med" len="med"/>
-                      <a:tailEnd type="none" w="med" len="med"/>
-                    </a:lnR>
-                    <a:lnT w="12700" cap="flat" cmpd="sng" algn="ctr">
-                      <a:solidFill>
-                        <a:schemeClr val="tx1"/>
-                      </a:solidFill>
-                      <a:prstDash val="solid"/>
-                      <a:round/>
-                      <a:headEnd type="none" w="med" len="med"/>
-                      <a:tailEnd type="none" w="med" len="med"/>
-                    </a:lnT>
-                    <a:lnB w="12700" cap="flat" cmpd="sng" algn="ctr">
-                      <a:solidFill>
-                        <a:schemeClr val="tx1"/>
-                      </a:solidFill>
-                      <a:prstDash val="solid"/>
-                      <a:round/>
-                      <a:headEnd type="none" w="med" len="med"/>
-                      <a:tailEnd type="none" w="med" len="med"/>
-                    </a:lnB>
-                    <a:cell3D prstMaterial="dkEdge">
-                      <a:bevel w="25400" h="25400" prst="angle"/>
-                      <a:lightRig rig="flood" dir="t"/>
-                    </a:cell3D>
-                  </a:tcPr>
-                </a:tc>
-                <a:tc>
-                  <a:txBody>
-                    <a:bodyPr/>
-                    <a:lstStyle/>
-                    <a:p>
-                      <a:pPr algn="r"/>
-                      <a:r>
-                        <a:rPr lang="en-IN" sz="1500" dirty="0">
-                          <a:latin typeface="Times New Roman" panose="02020603050405020304" pitchFamily="18" charset="0"/>
-                          <a:cs typeface="Times New Roman" panose="02020603050405020304" pitchFamily="18" charset="0"/>
-                        </a:rPr>
-                        <a:t>Real-time </a:t>
-                      </a:r>
-                      <a:r>
-                        <a:rPr lang="en-IN" sz="1500" dirty="0" err="1">
-                          <a:latin typeface="Times New Roman" panose="02020603050405020304" pitchFamily="18" charset="0"/>
-                          <a:cs typeface="Times New Roman" panose="02020603050405020304" pitchFamily="18" charset="0"/>
-                        </a:rPr>
-                        <a:t>WebSocket</a:t>
-                      </a:r>
-                      <a:r>
-                        <a:rPr lang="en-IN" sz="1500" dirty="0">
-                          <a:latin typeface="Times New Roman" panose="02020603050405020304" pitchFamily="18" charset="0"/>
-                          <a:cs typeface="Times New Roman" panose="02020603050405020304" pitchFamily="18" charset="0"/>
-                        </a:rPr>
-                        <a:t> communication</a:t>
-                      </a:r>
-                    </a:p>
-                  </a:txBody>
-                  <a:tcPr marL="77702" marR="77702" marT="38851" marB="38851" anchor="ctr">
-                    <a:lnL w="12700" cap="flat" cmpd="sng" algn="ctr">
-                      <a:solidFill>
-                        <a:schemeClr val="tx1"/>
-                      </a:solidFill>
-                      <a:prstDash val="solid"/>
-                      <a:round/>
-                      <a:headEnd type="none" w="med" len="med"/>
-                      <a:tailEnd type="none" w="med" len="med"/>
-                    </a:lnL>
-                    <a:lnR w="12700" cap="flat" cmpd="sng" algn="ctr">
-                      <a:solidFill>
-                        <a:schemeClr val="tx1"/>
-                      </a:solidFill>
-                      <a:prstDash val="solid"/>
-                      <a:round/>
-                      <a:headEnd type="none" w="med" len="med"/>
-                      <a:tailEnd type="none" w="med" len="med"/>
-                    </a:lnR>
-                    <a:lnT w="12700" cap="flat" cmpd="sng" algn="ctr">
-                      <a:solidFill>
-                        <a:schemeClr val="tx1"/>
-                      </a:solidFill>
-                      <a:prstDash val="solid"/>
-                      <a:round/>
-                      <a:headEnd type="none" w="med" len="med"/>
-                      <a:tailEnd type="none" w="med" len="med"/>
-                    </a:lnT>
-                    <a:lnB w="12700" cap="flat" cmpd="sng" algn="ctr">
-                      <a:solidFill>
-                        <a:schemeClr val="tx1"/>
-                      </a:solidFill>
-                      <a:prstDash val="solid"/>
-                      <a:round/>
-                      <a:headEnd type="none" w="med" len="med"/>
-                      <a:tailEnd type="none" w="med" len="med"/>
-                    </a:lnB>
-                    <a:cell3D prstMaterial="dkEdge">
-                      <a:bevel w="25400" h="25400" prst="angle"/>
-                      <a:lightRig rig="flood" dir="t"/>
-                    </a:cell3D>
-                  </a:tcPr>
-                </a:tc>
-                <a:tc>
-                  <a:txBody>
-                    <a:bodyPr/>
-                    <a:lstStyle/>
-                    <a:p>
-                      <a:r>
-                        <a:rPr lang="en-IN" sz="1500" dirty="0">
-                          <a:latin typeface="Times New Roman" panose="02020603050405020304" pitchFamily="18" charset="0"/>
-                          <a:cs typeface="Times New Roman" panose="02020603050405020304" pitchFamily="18" charset="0"/>
-                        </a:rPr>
-                        <a:t>🔄 Next</a:t>
-                      </a:r>
-                    </a:p>
-                  </a:txBody>
-                  <a:tcPr marL="77702" marR="77702" marT="38851" marB="38851" anchor="ctr">
-                    <a:lnL w="12700" cap="flat" cmpd="sng" algn="ctr">
-                      <a:solidFill>
-                        <a:schemeClr val="tx1"/>
-                      </a:solidFill>
-                      <a:prstDash val="solid"/>
-                      <a:round/>
-                      <a:headEnd type="none" w="med" len="med"/>
-                      <a:tailEnd type="none" w="med" len="med"/>
-                    </a:lnL>
-                    <a:lnR w="12700" cap="flat" cmpd="sng" algn="ctr">
-                      <a:solidFill>
-                        <a:schemeClr val="tx1"/>
-                      </a:solidFill>
-                      <a:prstDash val="solid"/>
-                      <a:round/>
-                      <a:headEnd type="none" w="med" len="med"/>
-                      <a:tailEnd type="none" w="med" len="med"/>
-                    </a:lnR>
-                    <a:lnT w="12700" cap="flat" cmpd="sng" algn="ctr">
-                      <a:solidFill>
-                        <a:schemeClr val="tx1"/>
-                      </a:solidFill>
-                      <a:prstDash val="solid"/>
-                      <a:round/>
-                      <a:headEnd type="none" w="med" len="med"/>
-                      <a:tailEnd type="none" w="med" len="med"/>
-                    </a:lnT>
-                    <a:lnB w="12700" cap="flat" cmpd="sng" algn="ctr">
-                      <a:solidFill>
-                        <a:schemeClr val="tx1"/>
-                      </a:solidFill>
-                      <a:prstDash val="solid"/>
-                      <a:round/>
-                      <a:headEnd type="none" w="med" len="med"/>
-                      <a:tailEnd type="none" w="med" len="med"/>
-                    </a:lnB>
-                    <a:cell3D prstMaterial="dkEdge">
-                      <a:bevel w="25400" h="25400" prst="angle"/>
-                      <a:lightRig rig="flood" dir="t"/>
-                    </a:cell3D>
-                  </a:tcPr>
-                </a:tc>
-                <a:extLst>
-                  <a:ext uri="{0D108BD9-81ED-4DB2-BD59-A6C34878D82A}">
-                    <a16:rowId xmlns:a16="http://schemas.microsoft.com/office/drawing/2014/main" val="10005"/>
-                  </a:ext>
-                </a:extLst>
-              </a:tr>
-              <a:tr h="310810">
-                <a:tc>
-                  <a:txBody>
-                    <a:bodyPr/>
-                    <a:lstStyle/>
-                    <a:p>
-                      <a:r>
-                        <a:rPr lang="en-IN" sz="1500"/>
-                        <a:t>6</a:t>
-                      </a:r>
-                    </a:p>
-                  </a:txBody>
-                  <a:tcPr marL="77702" marR="77702" marT="38851" marB="38851" anchor="ctr">
-                    <a:lnL w="12700" cap="flat" cmpd="sng" algn="ctr">
-                      <a:solidFill>
-                        <a:schemeClr val="tx1"/>
-                      </a:solidFill>
-                      <a:prstDash val="solid"/>
-                      <a:round/>
-                      <a:headEnd type="none" w="med" len="med"/>
-                      <a:tailEnd type="none" w="med" len="med"/>
-                    </a:lnL>
-                    <a:lnR w="12700" cap="flat" cmpd="sng" algn="ctr">
-                      <a:solidFill>
-                        <a:schemeClr val="tx1"/>
-                      </a:solidFill>
-                      <a:prstDash val="solid"/>
-                      <a:round/>
-                      <a:headEnd type="none" w="med" len="med"/>
-                      <a:tailEnd type="none" w="med" len="med"/>
-                    </a:lnR>
-                    <a:lnT w="12700" cap="flat" cmpd="sng" algn="ctr">
-                      <a:solidFill>
-                        <a:schemeClr val="tx1"/>
-                      </a:solidFill>
-                      <a:prstDash val="solid"/>
-                      <a:round/>
-                      <a:headEnd type="none" w="med" len="med"/>
-                      <a:tailEnd type="none" w="med" len="med"/>
-                    </a:lnT>
-                    <a:lnB w="12700" cap="flat" cmpd="sng" algn="ctr">
-                      <a:solidFill>
-                        <a:schemeClr val="tx1"/>
-                      </a:solidFill>
-                      <a:prstDash val="solid"/>
-                      <a:round/>
-                      <a:headEnd type="none" w="med" len="med"/>
-                      <a:tailEnd type="none" w="med" len="med"/>
-                    </a:lnB>
-                    <a:cell3D prstMaterial="dkEdge">
-                      <a:bevel w="25400" h="25400" prst="angle"/>
-                      <a:lightRig rig="flood" dir="t"/>
-                    </a:cell3D>
-                  </a:tcPr>
-                </a:tc>
-                <a:tc>
-                  <a:txBody>
-                    <a:bodyPr/>
-                    <a:lstStyle/>
-                    <a:p>
-                      <a:pPr algn="r"/>
-                      <a:r>
-                        <a:rPr lang="en-IN" sz="1500" dirty="0" err="1">
-                          <a:latin typeface="Times New Roman" panose="02020603050405020304" pitchFamily="18" charset="0"/>
-                          <a:cs typeface="Times New Roman" panose="02020603050405020304" pitchFamily="18" charset="0"/>
-                        </a:rPr>
-                        <a:t>LangChain</a:t>
-                      </a:r>
-                      <a:r>
-                        <a:rPr lang="en-IN" sz="1500" dirty="0">
-                          <a:latin typeface="Times New Roman" panose="02020603050405020304" pitchFamily="18" charset="0"/>
-                          <a:cs typeface="Times New Roman" panose="02020603050405020304" pitchFamily="18" charset="0"/>
-                        </a:rPr>
-                        <a:t> + GPT integration</a:t>
-                      </a:r>
-                    </a:p>
-                  </a:txBody>
-                  <a:tcPr marL="77702" marR="77702" marT="38851" marB="38851" anchor="ctr">
-                    <a:lnL w="12700" cap="flat" cmpd="sng" algn="ctr">
-                      <a:solidFill>
-                        <a:schemeClr val="tx1"/>
-                      </a:solidFill>
-                      <a:prstDash val="solid"/>
-                      <a:round/>
-                      <a:headEnd type="none" w="med" len="med"/>
-                      <a:tailEnd type="none" w="med" len="med"/>
-                    </a:lnL>
-                    <a:lnR w="12700" cap="flat" cmpd="sng" algn="ctr">
-                      <a:solidFill>
-                        <a:schemeClr val="tx1"/>
-                      </a:solidFill>
-                      <a:prstDash val="solid"/>
-                      <a:round/>
-                      <a:headEnd type="none" w="med" len="med"/>
-                      <a:tailEnd type="none" w="med" len="med"/>
-                    </a:lnR>
-                    <a:lnT w="12700" cap="flat" cmpd="sng" algn="ctr">
-                      <a:solidFill>
-                        <a:schemeClr val="tx1"/>
-                      </a:solidFill>
-                      <a:prstDash val="solid"/>
-                      <a:round/>
-                      <a:headEnd type="none" w="med" len="med"/>
-                      <a:tailEnd type="none" w="med" len="med"/>
-                    </a:lnT>
-                    <a:lnB w="12700" cap="flat" cmpd="sng" algn="ctr">
-                      <a:solidFill>
-                        <a:schemeClr val="tx1"/>
-                      </a:solidFill>
-                      <a:prstDash val="solid"/>
-                      <a:round/>
-                      <a:headEnd type="none" w="med" len="med"/>
-                      <a:tailEnd type="none" w="med" len="med"/>
-                    </a:lnB>
-                    <a:cell3D prstMaterial="dkEdge">
-                      <a:bevel w="25400" h="25400" prst="angle"/>
-                      <a:lightRig rig="flood" dir="t"/>
-                    </a:cell3D>
-                  </a:tcPr>
-                </a:tc>
-                <a:tc>
-                  <a:txBody>
-                    <a:bodyPr/>
-                    <a:lstStyle/>
-                    <a:p>
-                      <a:r>
-                        <a:rPr lang="en-IN" sz="1500" dirty="0">
-                          <a:latin typeface="Times New Roman" panose="02020603050405020304" pitchFamily="18" charset="0"/>
-                          <a:cs typeface="Times New Roman" panose="02020603050405020304" pitchFamily="18" charset="0"/>
-                        </a:rPr>
-                        <a:t>🔄 Next</a:t>
-                      </a:r>
-                    </a:p>
-                  </a:txBody>
-                  <a:tcPr marL="77702" marR="77702" marT="38851" marB="38851" anchor="ctr">
-                    <a:lnL w="12700" cap="flat" cmpd="sng" algn="ctr">
-                      <a:solidFill>
-                        <a:schemeClr val="tx1"/>
-                      </a:solidFill>
-                      <a:prstDash val="solid"/>
-                      <a:round/>
-                      <a:headEnd type="none" w="med" len="med"/>
-                      <a:tailEnd type="none" w="med" len="med"/>
-                    </a:lnL>
-                    <a:lnR w="12700" cap="flat" cmpd="sng" algn="ctr">
-                      <a:solidFill>
-                        <a:schemeClr val="tx1"/>
-                      </a:solidFill>
-                      <a:prstDash val="solid"/>
-                      <a:round/>
-                      <a:headEnd type="none" w="med" len="med"/>
-                      <a:tailEnd type="none" w="med" len="med"/>
-                    </a:lnR>
-                    <a:lnT w="12700" cap="flat" cmpd="sng" algn="ctr">
-                      <a:solidFill>
-                        <a:schemeClr val="tx1"/>
-                      </a:solidFill>
-                      <a:prstDash val="solid"/>
-                      <a:round/>
-                      <a:headEnd type="none" w="med" len="med"/>
-                      <a:tailEnd type="none" w="med" len="med"/>
-                    </a:lnT>
-                    <a:lnB w="12700" cap="flat" cmpd="sng" algn="ctr">
-                      <a:solidFill>
-                        <a:schemeClr val="tx1"/>
-                      </a:solidFill>
-                      <a:prstDash val="solid"/>
-                      <a:round/>
-                      <a:headEnd type="none" w="med" len="med"/>
-                      <a:tailEnd type="none" w="med" len="med"/>
-                    </a:lnB>
-                    <a:cell3D prstMaterial="dkEdge">
-                      <a:bevel w="25400" h="25400" prst="angle"/>
-                      <a:lightRig rig="flood" dir="t"/>
-                    </a:cell3D>
-                  </a:tcPr>
-                </a:tc>
-                <a:extLst>
-                  <a:ext uri="{0D108BD9-81ED-4DB2-BD59-A6C34878D82A}">
-                    <a16:rowId xmlns:a16="http://schemas.microsoft.com/office/drawing/2014/main" val="10006"/>
-                  </a:ext>
-                </a:extLst>
-              </a:tr>
-              <a:tr h="310810">
-                <a:tc>
-                  <a:txBody>
-                    <a:bodyPr/>
-                    <a:lstStyle/>
-                    <a:p>
-                      <a:r>
-                        <a:rPr lang="en-IN" sz="1500"/>
-                        <a:t>7</a:t>
-                      </a:r>
-                    </a:p>
-                  </a:txBody>
-                  <a:tcPr marL="77702" marR="77702" marT="38851" marB="38851" anchor="ctr">
-                    <a:lnL w="12700" cap="flat" cmpd="sng" algn="ctr">
-                      <a:solidFill>
-                        <a:schemeClr val="tx1"/>
-                      </a:solidFill>
-                      <a:prstDash val="solid"/>
-                      <a:round/>
-                      <a:headEnd type="none" w="med" len="med"/>
-                      <a:tailEnd type="none" w="med" len="med"/>
-                    </a:lnL>
-                    <a:lnR w="12700" cap="flat" cmpd="sng" algn="ctr">
-                      <a:solidFill>
-                        <a:schemeClr val="tx1"/>
-                      </a:solidFill>
-                      <a:prstDash val="solid"/>
-                      <a:round/>
-                      <a:headEnd type="none" w="med" len="med"/>
-                      <a:tailEnd type="none" w="med" len="med"/>
-                    </a:lnR>
-                    <a:lnT w="12700" cap="flat" cmpd="sng" algn="ctr">
-                      <a:solidFill>
-                        <a:schemeClr val="tx1"/>
-                      </a:solidFill>
-                      <a:prstDash val="solid"/>
-                      <a:round/>
-                      <a:headEnd type="none" w="med" len="med"/>
-                      <a:tailEnd type="none" w="med" len="med"/>
-                    </a:lnT>
-                    <a:lnB w="12700" cap="flat" cmpd="sng" algn="ctr">
-                      <a:solidFill>
-                        <a:schemeClr val="tx1"/>
-                      </a:solidFill>
-                      <a:prstDash val="solid"/>
-                      <a:round/>
-                      <a:headEnd type="none" w="med" len="med"/>
-                      <a:tailEnd type="none" w="med" len="med"/>
-                    </a:lnB>
-                    <a:cell3D prstMaterial="dkEdge">
-                      <a:bevel w="25400" h="25400" prst="angle"/>
-                      <a:lightRig rig="flood" dir="t"/>
-                    </a:cell3D>
-                  </a:tcPr>
-                </a:tc>
-                <a:tc>
-                  <a:txBody>
-                    <a:bodyPr/>
-                    <a:lstStyle/>
-                    <a:p>
-                      <a:pPr algn="r"/>
-                      <a:r>
-                        <a:rPr lang="en-IN" sz="1500" dirty="0">
-                          <a:latin typeface="Times New Roman" panose="02020603050405020304" pitchFamily="18" charset="0"/>
-                          <a:cs typeface="Times New Roman" panose="02020603050405020304" pitchFamily="18" charset="0"/>
-                        </a:rPr>
-                        <a:t>Dynamic UI generation</a:t>
-                      </a:r>
-                    </a:p>
-                  </a:txBody>
-                  <a:tcPr marL="77702" marR="77702" marT="38851" marB="38851" anchor="ctr">
-                    <a:lnL w="12700" cap="flat" cmpd="sng" algn="ctr">
-                      <a:solidFill>
-                        <a:schemeClr val="tx1"/>
-                      </a:solidFill>
-                      <a:prstDash val="solid"/>
-                      <a:round/>
-                      <a:headEnd type="none" w="med" len="med"/>
-                      <a:tailEnd type="none" w="med" len="med"/>
-                    </a:lnL>
-                    <a:lnR w="12700" cap="flat" cmpd="sng" algn="ctr">
-                      <a:solidFill>
-                        <a:schemeClr val="tx1"/>
-                      </a:solidFill>
-                      <a:prstDash val="solid"/>
-                      <a:round/>
-                      <a:headEnd type="none" w="med" len="med"/>
-                      <a:tailEnd type="none" w="med" len="med"/>
-                    </a:lnR>
-                    <a:lnT w="12700" cap="flat" cmpd="sng" algn="ctr">
-                      <a:solidFill>
-                        <a:schemeClr val="tx1"/>
-                      </a:solidFill>
-                      <a:prstDash val="solid"/>
-                      <a:round/>
-                      <a:headEnd type="none" w="med" len="med"/>
-                      <a:tailEnd type="none" w="med" len="med"/>
-                    </a:lnT>
-                    <a:lnB w="12700" cap="flat" cmpd="sng" algn="ctr">
-                      <a:solidFill>
-                        <a:schemeClr val="tx1"/>
-                      </a:solidFill>
-                      <a:prstDash val="solid"/>
-                      <a:round/>
-                      <a:headEnd type="none" w="med" len="med"/>
-                      <a:tailEnd type="none" w="med" len="med"/>
-                    </a:lnB>
-                    <a:cell3D prstMaterial="dkEdge">
-                      <a:bevel w="25400" h="25400" prst="angle"/>
-                      <a:lightRig rig="flood" dir="t"/>
-                    </a:cell3D>
-                  </a:tcPr>
-                </a:tc>
-                <a:tc>
-                  <a:txBody>
-                    <a:bodyPr/>
-                    <a:lstStyle/>
-                    <a:p>
-                      <a:r>
-                        <a:rPr lang="en-IN" sz="1500" dirty="0">
-                          <a:latin typeface="Times New Roman" panose="02020603050405020304" pitchFamily="18" charset="0"/>
-                          <a:cs typeface="Times New Roman" panose="02020603050405020304" pitchFamily="18" charset="0"/>
-                        </a:rPr>
-                        <a:t>⏳ Pending</a:t>
-                      </a:r>
-                    </a:p>
-                  </a:txBody>
-                  <a:tcPr marL="77702" marR="77702" marT="38851" marB="38851" anchor="ctr">
-                    <a:lnL w="12700" cap="flat" cmpd="sng" algn="ctr">
-                      <a:solidFill>
-                        <a:schemeClr val="tx1"/>
-                      </a:solidFill>
-                      <a:prstDash val="solid"/>
-                      <a:round/>
-                      <a:headEnd type="none" w="med" len="med"/>
-                      <a:tailEnd type="none" w="med" len="med"/>
-                    </a:lnL>
-                    <a:lnR w="12700" cap="flat" cmpd="sng" algn="ctr">
-                      <a:solidFill>
-                        <a:schemeClr val="tx1"/>
-                      </a:solidFill>
-                      <a:prstDash val="solid"/>
-                      <a:round/>
-                      <a:headEnd type="none" w="med" len="med"/>
-                      <a:tailEnd type="none" w="med" len="med"/>
-                    </a:lnR>
-                    <a:lnT w="12700" cap="flat" cmpd="sng" algn="ctr">
-                      <a:solidFill>
-                        <a:schemeClr val="tx1"/>
-                      </a:solidFill>
-                      <a:prstDash val="solid"/>
-                      <a:round/>
-                      <a:headEnd type="none" w="med" len="med"/>
-                      <a:tailEnd type="none" w="med" len="med"/>
-                    </a:lnT>
-                    <a:lnB w="12700" cap="flat" cmpd="sng" algn="ctr">
-                      <a:solidFill>
-                        <a:schemeClr val="tx1"/>
-                      </a:solidFill>
-                      <a:prstDash val="solid"/>
-                      <a:round/>
-                      <a:headEnd type="none" w="med" len="med"/>
-                      <a:tailEnd type="none" w="med" len="med"/>
-                    </a:lnB>
-                    <a:cell3D prstMaterial="dkEdge">
-                      <a:bevel w="25400" h="25400" prst="angle"/>
-                      <a:lightRig rig="flood" dir="t"/>
-                    </a:cell3D>
-                  </a:tcPr>
-                </a:tc>
-                <a:extLst>
-                  <a:ext uri="{0D108BD9-81ED-4DB2-BD59-A6C34878D82A}">
-                    <a16:rowId xmlns:a16="http://schemas.microsoft.com/office/drawing/2014/main" val="10007"/>
-                  </a:ext>
-                </a:extLst>
-              </a:tr>
-              <a:tr h="310810">
-                <a:tc>
-                  <a:txBody>
-                    <a:bodyPr/>
-                    <a:lstStyle/>
-                    <a:p>
-                      <a:r>
-                        <a:rPr lang="en-IN" sz="1500"/>
-                        <a:t>8</a:t>
-                      </a:r>
-                    </a:p>
-                  </a:txBody>
-                  <a:tcPr marL="77702" marR="77702" marT="38851" marB="38851" anchor="ctr">
-                    <a:lnL w="12700" cap="flat" cmpd="sng" algn="ctr">
-                      <a:solidFill>
-                        <a:schemeClr val="tx1"/>
-                      </a:solidFill>
-                      <a:prstDash val="solid"/>
-                      <a:round/>
-                      <a:headEnd type="none" w="med" len="med"/>
-                      <a:tailEnd type="none" w="med" len="med"/>
-                    </a:lnL>
-                    <a:lnR w="12700" cap="flat" cmpd="sng" algn="ctr">
-                      <a:solidFill>
-                        <a:schemeClr val="tx1"/>
-                      </a:solidFill>
-                      <a:prstDash val="solid"/>
-                      <a:round/>
-                      <a:headEnd type="none" w="med" len="med"/>
-                      <a:tailEnd type="none" w="med" len="med"/>
-                    </a:lnR>
-                    <a:lnT w="12700" cap="flat" cmpd="sng" algn="ctr">
-                      <a:solidFill>
-                        <a:schemeClr val="tx1"/>
-                      </a:solidFill>
-                      <a:prstDash val="solid"/>
-                      <a:round/>
-                      <a:headEnd type="none" w="med" len="med"/>
-                      <a:tailEnd type="none" w="med" len="med"/>
-                    </a:lnT>
-                    <a:lnB w="12700" cap="flat" cmpd="sng" algn="ctr">
-                      <a:solidFill>
-                        <a:schemeClr val="tx1"/>
-                      </a:solidFill>
-                      <a:prstDash val="solid"/>
-                      <a:round/>
-                      <a:headEnd type="none" w="med" len="med"/>
-                      <a:tailEnd type="none" w="med" len="med"/>
-                    </a:lnB>
-                    <a:cell3D prstMaterial="dkEdge">
-                      <a:bevel w="25400" h="25400" prst="angle"/>
-                      <a:lightRig rig="flood" dir="t"/>
-                    </a:cell3D>
-                  </a:tcPr>
-                </a:tc>
-                <a:tc>
-                  <a:txBody>
-                    <a:bodyPr/>
-                    <a:lstStyle/>
-                    <a:p>
-                      <a:pPr algn="r"/>
-                      <a:r>
-                        <a:rPr lang="en-IN" sz="1500" dirty="0">
-                          <a:latin typeface="Times New Roman" panose="02020603050405020304" pitchFamily="18" charset="0"/>
-                          <a:cs typeface="Times New Roman" panose="02020603050405020304" pitchFamily="18" charset="0"/>
-                        </a:rPr>
-                        <a:t>Self-healing/adaptive UI</a:t>
-                      </a:r>
-                    </a:p>
-                  </a:txBody>
-                  <a:tcPr marL="77702" marR="77702" marT="38851" marB="38851" anchor="ctr">
-                    <a:lnL w="12700" cap="flat" cmpd="sng" algn="ctr">
-                      <a:solidFill>
-                        <a:schemeClr val="tx1"/>
-                      </a:solidFill>
-                      <a:prstDash val="solid"/>
-                      <a:round/>
-                      <a:headEnd type="none" w="med" len="med"/>
-                      <a:tailEnd type="none" w="med" len="med"/>
-                    </a:lnL>
-                    <a:lnR w="12700" cap="flat" cmpd="sng" algn="ctr">
-                      <a:solidFill>
-                        <a:schemeClr val="tx1"/>
-                      </a:solidFill>
-                      <a:prstDash val="solid"/>
-                      <a:round/>
-                      <a:headEnd type="none" w="med" len="med"/>
-                      <a:tailEnd type="none" w="med" len="med"/>
-                    </a:lnR>
-                    <a:lnT w="12700" cap="flat" cmpd="sng" algn="ctr">
-                      <a:solidFill>
-                        <a:schemeClr val="tx1"/>
-                      </a:solidFill>
-                      <a:prstDash val="solid"/>
-                      <a:round/>
-                      <a:headEnd type="none" w="med" len="med"/>
-                      <a:tailEnd type="none" w="med" len="med"/>
-                    </a:lnT>
-                    <a:lnB w="12700" cap="flat" cmpd="sng" algn="ctr">
-                      <a:solidFill>
-                        <a:schemeClr val="tx1"/>
-                      </a:solidFill>
-                      <a:prstDash val="solid"/>
-                      <a:round/>
-                      <a:headEnd type="none" w="med" len="med"/>
-                      <a:tailEnd type="none" w="med" len="med"/>
-                    </a:lnB>
-                    <a:cell3D prstMaterial="dkEdge">
-                      <a:bevel w="25400" h="25400" prst="angle"/>
-                      <a:lightRig rig="flood" dir="t"/>
-                    </a:cell3D>
-                  </a:tcPr>
-                </a:tc>
-                <a:tc>
-                  <a:txBody>
-                    <a:bodyPr/>
-                    <a:lstStyle/>
-                    <a:p>
-                      <a:r>
-                        <a:rPr lang="en-IN" sz="1500" dirty="0">
-                          <a:latin typeface="Times New Roman" panose="02020603050405020304" pitchFamily="18" charset="0"/>
-                          <a:cs typeface="Times New Roman" panose="02020603050405020304" pitchFamily="18" charset="0"/>
-                        </a:rPr>
-                        <a:t>⏳ Pending</a:t>
-                      </a:r>
-                    </a:p>
-                  </a:txBody>
-                  <a:tcPr marL="77702" marR="77702" marT="38851" marB="38851" anchor="ctr">
-                    <a:lnL w="12700" cap="flat" cmpd="sng" algn="ctr">
-                      <a:solidFill>
-                        <a:schemeClr val="tx1"/>
-                      </a:solidFill>
-                      <a:prstDash val="solid"/>
-                      <a:round/>
-                      <a:headEnd type="none" w="med" len="med"/>
-                      <a:tailEnd type="none" w="med" len="med"/>
-                    </a:lnL>
-                    <a:lnR w="12700" cap="flat" cmpd="sng" algn="ctr">
-                      <a:solidFill>
-                        <a:schemeClr val="tx1"/>
-                      </a:solidFill>
-                      <a:prstDash val="solid"/>
-                      <a:round/>
-                      <a:headEnd type="none" w="med" len="med"/>
-                      <a:tailEnd type="none" w="med" len="med"/>
-                    </a:lnR>
-                    <a:lnT w="12700" cap="flat" cmpd="sng" algn="ctr">
-                      <a:solidFill>
-                        <a:schemeClr val="tx1"/>
-                      </a:solidFill>
-                      <a:prstDash val="solid"/>
-                      <a:round/>
-                      <a:headEnd type="none" w="med" len="med"/>
-                      <a:tailEnd type="none" w="med" len="med"/>
-                    </a:lnT>
-                    <a:lnB w="12700" cap="flat" cmpd="sng" algn="ctr">
-                      <a:solidFill>
-                        <a:schemeClr val="tx1"/>
-                      </a:solidFill>
-                      <a:prstDash val="solid"/>
-                      <a:round/>
-                      <a:headEnd type="none" w="med" len="med"/>
-                      <a:tailEnd type="none" w="med" len="med"/>
-                    </a:lnB>
-                    <a:cell3D prstMaterial="dkEdge">
-                      <a:bevel w="25400" h="25400" prst="angle"/>
-                      <a:lightRig rig="flood" dir="t"/>
-                    </a:cell3D>
-                  </a:tcPr>
-                </a:tc>
-                <a:extLst>
-                  <a:ext uri="{0D108BD9-81ED-4DB2-BD59-A6C34878D82A}">
-                    <a16:rowId xmlns:a16="http://schemas.microsoft.com/office/drawing/2014/main" val="10008"/>
-                  </a:ext>
-                </a:extLst>
-              </a:tr>
-              <a:tr h="310810">
-                <a:tc>
-                  <a:txBody>
-                    <a:bodyPr/>
-                    <a:lstStyle/>
-                    <a:p>
-                      <a:r>
-                        <a:rPr lang="en-IN" sz="1500"/>
-                        <a:t>9</a:t>
-                      </a:r>
-                    </a:p>
-                  </a:txBody>
-                  <a:tcPr marL="77702" marR="77702" marT="38851" marB="38851" anchor="ctr">
-                    <a:lnL w="12700" cap="flat" cmpd="sng" algn="ctr">
-                      <a:solidFill>
-                        <a:schemeClr val="tx1"/>
-                      </a:solidFill>
-                      <a:prstDash val="solid"/>
-                      <a:round/>
-                      <a:headEnd type="none" w="med" len="med"/>
-                      <a:tailEnd type="none" w="med" len="med"/>
-                    </a:lnL>
-                    <a:lnR w="12700" cap="flat" cmpd="sng" algn="ctr">
-                      <a:solidFill>
-                        <a:schemeClr val="tx1"/>
-                      </a:solidFill>
-                      <a:prstDash val="solid"/>
-                      <a:round/>
-                      <a:headEnd type="none" w="med" len="med"/>
-                      <a:tailEnd type="none" w="med" len="med"/>
-                    </a:lnR>
-                    <a:lnT w="12700" cap="flat" cmpd="sng" algn="ctr">
-                      <a:solidFill>
-                        <a:schemeClr val="tx1"/>
-                      </a:solidFill>
-                      <a:prstDash val="solid"/>
-                      <a:round/>
-                      <a:headEnd type="none" w="med" len="med"/>
-                      <a:tailEnd type="none" w="med" len="med"/>
-                    </a:lnT>
-                    <a:lnB w="12700" cap="flat" cmpd="sng" algn="ctr">
-                      <a:solidFill>
-                        <a:schemeClr val="tx1"/>
-                      </a:solidFill>
-                      <a:prstDash val="solid"/>
-                      <a:round/>
-                      <a:headEnd type="none" w="med" len="med"/>
-                      <a:tailEnd type="none" w="med" len="med"/>
-                    </a:lnB>
-                    <a:cell3D prstMaterial="dkEdge">
-                      <a:bevel w="25400" h="25400" prst="angle"/>
-                      <a:lightRig rig="flood" dir="t"/>
-                    </a:cell3D>
-                  </a:tcPr>
-                </a:tc>
-                <a:tc>
-                  <a:txBody>
-                    <a:bodyPr/>
-                    <a:lstStyle/>
-                    <a:p>
-                      <a:pPr algn="r"/>
-                      <a:r>
-                        <a:rPr lang="en-IN" sz="1500" dirty="0">
-                          <a:latin typeface="Times New Roman" panose="02020603050405020304" pitchFamily="18" charset="0"/>
-                          <a:cs typeface="Times New Roman" panose="02020603050405020304" pitchFamily="18" charset="0"/>
-                        </a:rPr>
-                        <a:t>Testing &amp; evaluation</a:t>
-                      </a:r>
-                    </a:p>
-                  </a:txBody>
-                  <a:tcPr marL="77702" marR="77702" marT="38851" marB="38851" anchor="ctr">
-                    <a:lnL w="12700" cap="flat" cmpd="sng" algn="ctr">
-                      <a:solidFill>
-                        <a:schemeClr val="tx1"/>
-                      </a:solidFill>
-                      <a:prstDash val="solid"/>
-                      <a:round/>
-                      <a:headEnd type="none" w="med" len="med"/>
-                      <a:tailEnd type="none" w="med" len="med"/>
-                    </a:lnL>
-                    <a:lnR w="12700" cap="flat" cmpd="sng" algn="ctr">
-                      <a:solidFill>
-                        <a:schemeClr val="tx1"/>
-                      </a:solidFill>
-                      <a:prstDash val="solid"/>
-                      <a:round/>
-                      <a:headEnd type="none" w="med" len="med"/>
-                      <a:tailEnd type="none" w="med" len="med"/>
-                    </a:lnR>
-                    <a:lnT w="12700" cap="flat" cmpd="sng" algn="ctr">
-                      <a:solidFill>
-                        <a:schemeClr val="tx1"/>
-                      </a:solidFill>
-                      <a:prstDash val="solid"/>
-                      <a:round/>
-                      <a:headEnd type="none" w="med" len="med"/>
-                      <a:tailEnd type="none" w="med" len="med"/>
-                    </a:lnT>
-                    <a:lnB w="12700" cap="flat" cmpd="sng" algn="ctr">
-                      <a:solidFill>
-                        <a:schemeClr val="tx1"/>
-                      </a:solidFill>
-                      <a:prstDash val="solid"/>
-                      <a:round/>
-                      <a:headEnd type="none" w="med" len="med"/>
-                      <a:tailEnd type="none" w="med" len="med"/>
-                    </a:lnB>
-                    <a:cell3D prstMaterial="dkEdge">
-                      <a:bevel w="25400" h="25400" prst="angle"/>
-                      <a:lightRig rig="flood" dir="t"/>
-                    </a:cell3D>
-                  </a:tcPr>
-                </a:tc>
-                <a:tc>
-                  <a:txBody>
-                    <a:bodyPr/>
-                    <a:lstStyle/>
-                    <a:p>
-                      <a:r>
-                        <a:rPr lang="en-IN" sz="1500" dirty="0">
-                          <a:latin typeface="Times New Roman" panose="02020603050405020304" pitchFamily="18" charset="0"/>
-                          <a:cs typeface="Times New Roman" panose="02020603050405020304" pitchFamily="18" charset="0"/>
-                        </a:rPr>
-                        <a:t>⏳ Pending</a:t>
-                      </a:r>
-                    </a:p>
-                  </a:txBody>
-                  <a:tcPr marL="77702" marR="77702" marT="38851" marB="38851" anchor="ctr">
-                    <a:lnL w="12700" cap="flat" cmpd="sng" algn="ctr">
-                      <a:solidFill>
-                        <a:schemeClr val="tx1"/>
-                      </a:solidFill>
-                      <a:prstDash val="solid"/>
-                      <a:round/>
-                      <a:headEnd type="none" w="med" len="med"/>
-                      <a:tailEnd type="none" w="med" len="med"/>
-                    </a:lnL>
-                    <a:lnR w="12700" cap="flat" cmpd="sng" algn="ctr">
-                      <a:solidFill>
-                        <a:schemeClr val="tx1"/>
-                      </a:solidFill>
-                      <a:prstDash val="solid"/>
-                      <a:round/>
-                      <a:headEnd type="none" w="med" len="med"/>
-                      <a:tailEnd type="none" w="med" len="med"/>
-                    </a:lnR>
-                    <a:lnT w="12700" cap="flat" cmpd="sng" algn="ctr">
-                      <a:solidFill>
-                        <a:schemeClr val="tx1"/>
-                      </a:solidFill>
-                      <a:prstDash val="solid"/>
-                      <a:round/>
-                      <a:headEnd type="none" w="med" len="med"/>
-                      <a:tailEnd type="none" w="med" len="med"/>
-                    </a:lnT>
-                    <a:lnB w="12700" cap="flat" cmpd="sng" algn="ctr">
-                      <a:solidFill>
-                        <a:schemeClr val="tx1"/>
-                      </a:solidFill>
-                      <a:prstDash val="solid"/>
-                      <a:round/>
-                      <a:headEnd type="none" w="med" len="med"/>
-                      <a:tailEnd type="none" w="med" len="med"/>
-                    </a:lnB>
-                    <a:cell3D prstMaterial="dkEdge">
-                      <a:bevel w="25400" h="25400" prst="angle"/>
-                      <a:lightRig rig="flood" dir="t"/>
-                    </a:cell3D>
-                  </a:tcPr>
-                </a:tc>
-                <a:extLst>
-                  <a:ext uri="{0D108BD9-81ED-4DB2-BD59-A6C34878D82A}">
-                    <a16:rowId xmlns:a16="http://schemas.microsoft.com/office/drawing/2014/main" val="10009"/>
-                  </a:ext>
-                </a:extLst>
-              </a:tr>
-              <a:tr h="310810">
-                <a:tc>
-                  <a:txBody>
-                    <a:bodyPr/>
-                    <a:lstStyle/>
-                    <a:p>
-                      <a:r>
-                        <a:rPr lang="en-IN" sz="1500"/>
-                        <a:t>10</a:t>
-                      </a:r>
-                    </a:p>
-                  </a:txBody>
-                  <a:tcPr marL="77702" marR="77702" marT="38851" marB="38851" anchor="ctr">
-                    <a:lnL w="12700" cap="flat" cmpd="sng" algn="ctr">
-                      <a:solidFill>
-                        <a:schemeClr val="tx1"/>
-                      </a:solidFill>
-                      <a:prstDash val="solid"/>
-                      <a:round/>
-                      <a:headEnd type="none" w="med" len="med"/>
-                      <a:tailEnd type="none" w="med" len="med"/>
-                    </a:lnL>
-                    <a:lnR w="12700" cap="flat" cmpd="sng" algn="ctr">
-                      <a:solidFill>
-                        <a:schemeClr val="tx1"/>
-                      </a:solidFill>
-                      <a:prstDash val="solid"/>
-                      <a:round/>
-                      <a:headEnd type="none" w="med" len="med"/>
-                      <a:tailEnd type="none" w="med" len="med"/>
-                    </a:lnR>
-                    <a:lnT w="12700" cap="flat" cmpd="sng" algn="ctr">
-                      <a:solidFill>
-                        <a:schemeClr val="tx1"/>
-                      </a:solidFill>
-                      <a:prstDash val="solid"/>
-                      <a:round/>
-                      <a:headEnd type="none" w="med" len="med"/>
-                      <a:tailEnd type="none" w="med" len="med"/>
-                    </a:lnT>
-                    <a:lnB w="12700" cap="flat" cmpd="sng" algn="ctr">
-                      <a:solidFill>
-                        <a:schemeClr val="tx1"/>
-                      </a:solidFill>
-                      <a:prstDash val="solid"/>
-                      <a:round/>
-                      <a:headEnd type="none" w="med" len="med"/>
-                      <a:tailEnd type="none" w="med" len="med"/>
-                    </a:lnB>
-                    <a:cell3D prstMaterial="dkEdge">
-                      <a:bevel w="25400" h="25400" prst="angle"/>
-                      <a:lightRig rig="flood" dir="t"/>
-                    </a:cell3D>
-                  </a:tcPr>
-                </a:tc>
-                <a:tc>
-                  <a:txBody>
-                    <a:bodyPr/>
-                    <a:lstStyle/>
-                    <a:p>
-                      <a:pPr algn="r"/>
-                      <a:r>
-                        <a:rPr lang="en-IN" sz="1500" dirty="0">
-                          <a:latin typeface="Times New Roman" panose="02020603050405020304" pitchFamily="18" charset="0"/>
-                          <a:cs typeface="Times New Roman" panose="02020603050405020304" pitchFamily="18" charset="0"/>
-                        </a:rPr>
-                        <a:t>Final documentation/demo</a:t>
-                      </a:r>
-                    </a:p>
-                  </a:txBody>
-                  <a:tcPr marL="77702" marR="77702" marT="38851" marB="38851" anchor="ctr">
-                    <a:lnL w="12700" cap="flat" cmpd="sng" algn="ctr">
-                      <a:solidFill>
-                        <a:schemeClr val="tx1"/>
-                      </a:solidFill>
-                      <a:prstDash val="solid"/>
-                      <a:round/>
-                      <a:headEnd type="none" w="med" len="med"/>
-                      <a:tailEnd type="none" w="med" len="med"/>
-                    </a:lnL>
-                    <a:lnR w="12700" cap="flat" cmpd="sng" algn="ctr">
-                      <a:solidFill>
-                        <a:schemeClr val="tx1"/>
-                      </a:solidFill>
-                      <a:prstDash val="solid"/>
-                      <a:round/>
-                      <a:headEnd type="none" w="med" len="med"/>
-                      <a:tailEnd type="none" w="med" len="med"/>
-                    </a:lnR>
-                    <a:lnT w="12700" cap="flat" cmpd="sng" algn="ctr">
-                      <a:solidFill>
-                        <a:schemeClr val="tx1"/>
-                      </a:solidFill>
-                      <a:prstDash val="solid"/>
-                      <a:round/>
-                      <a:headEnd type="none" w="med" len="med"/>
-                      <a:tailEnd type="none" w="med" len="med"/>
-                    </a:lnT>
-                    <a:lnB w="12700" cap="flat" cmpd="sng" algn="ctr">
-                      <a:solidFill>
-                        <a:schemeClr val="tx1"/>
-                      </a:solidFill>
-                      <a:prstDash val="solid"/>
-                      <a:round/>
-                      <a:headEnd type="none" w="med" len="med"/>
-                      <a:tailEnd type="none" w="med" len="med"/>
-                    </a:lnB>
-                    <a:cell3D prstMaterial="dkEdge">
-                      <a:bevel w="25400" h="25400" prst="angle"/>
-                      <a:lightRig rig="flood" dir="t"/>
-                    </a:cell3D>
-                  </a:tcPr>
-                </a:tc>
-                <a:tc>
-                  <a:txBody>
-                    <a:bodyPr/>
-                    <a:lstStyle/>
-                    <a:p>
-                      <a:r>
-                        <a:rPr lang="en-IN" sz="1500" dirty="0">
-                          <a:latin typeface="Times New Roman" panose="02020603050405020304" pitchFamily="18" charset="0"/>
-                          <a:cs typeface="Times New Roman" panose="02020603050405020304" pitchFamily="18" charset="0"/>
-                        </a:rPr>
-                        <a:t>⏳ Pending</a:t>
-                      </a:r>
-                    </a:p>
-                  </a:txBody>
-                  <a:tcPr marL="77702" marR="77702" marT="38851" marB="38851" anchor="ctr">
-                    <a:lnL w="12700" cap="flat" cmpd="sng" algn="ctr">
-                      <a:solidFill>
-                        <a:schemeClr val="tx1"/>
-                      </a:solidFill>
-                      <a:prstDash val="solid"/>
-                      <a:round/>
-                      <a:headEnd type="none" w="med" len="med"/>
-                      <a:tailEnd type="none" w="med" len="med"/>
-                    </a:lnL>
-                    <a:lnR w="12700" cap="flat" cmpd="sng" algn="ctr">
-                      <a:solidFill>
-                        <a:schemeClr val="tx1"/>
-                      </a:solidFill>
-                      <a:prstDash val="solid"/>
-                      <a:round/>
-                      <a:headEnd type="none" w="med" len="med"/>
-                      <a:tailEnd type="none" w="med" len="med"/>
-                    </a:lnR>
-                    <a:lnT w="12700" cap="flat" cmpd="sng" algn="ctr">
-                      <a:solidFill>
-                        <a:schemeClr val="tx1"/>
-                      </a:solidFill>
-                      <a:prstDash val="solid"/>
-                      <a:round/>
-                      <a:headEnd type="none" w="med" len="med"/>
-                      <a:tailEnd type="none" w="med" len="med"/>
-                    </a:lnT>
-                    <a:lnB w="12700" cap="flat" cmpd="sng" algn="ctr">
-                      <a:solidFill>
-                        <a:schemeClr val="tx1"/>
-                      </a:solidFill>
-                      <a:prstDash val="solid"/>
-                      <a:round/>
-                      <a:headEnd type="none" w="med" len="med"/>
-                      <a:tailEnd type="none" w="med" len="med"/>
-                    </a:lnB>
-                    <a:cell3D prstMaterial="dkEdge">
-                      <a:bevel w="25400" h="25400" prst="angle"/>
-                      <a:lightRig rig="flood" dir="t"/>
-                    </a:cell3D>
-                  </a:tcPr>
-                </a:tc>
-                <a:extLst>
-                  <a:ext uri="{0D108BD9-81ED-4DB2-BD59-A6C34878D82A}">
-                    <a16:rowId xmlns:a16="http://schemas.microsoft.com/office/drawing/2014/main" val="10010"/>
+                    <a16:rowId xmlns:a16="http://schemas.microsoft.com/office/drawing/2014/main" val="2464001426"/>
                   </a:ext>
                 </a:extLst>
               </a:tr>
@@ -18010,6 +16922,11 @@
         </a:graphic>
       </p:graphicFrame>
     </p:spTree>
+    <p:extLst>
+      <p:ext uri="{BB962C8B-B14F-4D97-AF65-F5344CB8AC3E}">
+        <p14:creationId xmlns:p14="http://schemas.microsoft.com/office/powerpoint/2010/main" val="3881198412"/>
+      </p:ext>
+    </p:extLst>
   </p:cSld>
   <p:clrMapOvr>
     <a:masterClrMapping/>
@@ -18017,7 +16934,7 @@
 </p:sld>
 </file>
 
-<file path=ppt/slides/slide3.xml><?xml version="1.0" encoding="utf-8"?>
+<file path=ppt/slides/slide5.xml><?xml version="1.0" encoding="utf-8"?>
 <p:sld xmlns:a="http://schemas.openxmlformats.org/drawingml/2006/main" xmlns:r="http://schemas.openxmlformats.org/officeDocument/2006/relationships" xmlns:p="http://schemas.openxmlformats.org/presentationml/2006/main">
   <p:cSld>
     <p:spTree>
@@ -18119,6 +17036,87 @@
           </a:graphicData>
         </a:graphic>
       </p:graphicFrame>
+      <p:sp>
+        <p:nvSpPr>
+          <p:cNvPr id="5" name="TextBox 4">
+            <a:extLst>
+              <a:ext uri="{FF2B5EF4-FFF2-40B4-BE49-F238E27FC236}">
+                <a16:creationId xmlns:a16="http://schemas.microsoft.com/office/drawing/2014/main" id="{3375CD09-6CEA-6FB0-9D88-66A8A6774AA7}"/>
+              </a:ext>
+            </a:extLst>
+          </p:cNvPr>
+          <p:cNvSpPr txBox="1"/>
+          <p:nvPr/>
+        </p:nvSpPr>
+        <p:spPr>
+          <a:xfrm>
+            <a:off x="7639915" y="5587064"/>
+            <a:ext cx="4403149" cy="923330"/>
+          </a:xfrm>
+          <a:prstGeom prst="rect">
+            <a:avLst/>
+          </a:prstGeom>
+          <a:noFill/>
+        </p:spPr>
+        <p:txBody>
+          <a:bodyPr wrap="square">
+            <a:spAutoFit/>
+          </a:bodyPr>
+          <a:lstStyle/>
+          <a:p>
+            <a:pPr marL="0" marR="0" indent="0" algn="l">
+              <a:buNone/>
+            </a:pPr>
+            <a:r>
+              <a:rPr lang="en-IN" sz="1800" b="1" i="0" dirty="0">
+                <a:solidFill>
+                  <a:schemeClr val="tx1"/>
+                </a:solidFill>
+                <a:effectLst/>
+                <a:latin typeface="+mn-lt"/>
+              </a:rPr>
+              <a:t>Sriram Gandhi Prabha V</a:t>
+            </a:r>
+          </a:p>
+          <a:p>
+            <a:pPr marL="0" marR="0" indent="0" algn="l">
+              <a:buNone/>
+            </a:pPr>
+            <a:r>
+              <a:rPr lang="en-IN" b="1" i="0" dirty="0">
+                <a:solidFill>
+                  <a:schemeClr val="tx1"/>
+                </a:solidFill>
+                <a:effectLst/>
+                <a:latin typeface="+mn-lt"/>
+              </a:rPr>
+              <a:t>prabhasrivel1311@gmail.com</a:t>
+            </a:r>
+          </a:p>
+          <a:p>
+            <a:pPr marL="0" marR="0" indent="0" algn="l">
+              <a:buNone/>
+            </a:pPr>
+            <a:r>
+              <a:rPr lang="en-IN" sz="1800" b="1" i="0" dirty="0">
+                <a:solidFill>
+                  <a:schemeClr val="tx1"/>
+                </a:solidFill>
+                <a:effectLst/>
+                <a:latin typeface="+mn-lt"/>
+              </a:rPr>
+              <a:t>dd7a2bc00106</a:t>
+            </a:r>
+            <a:endParaRPr lang="en-IN" sz="825" b="1" i="0" dirty="0">
+              <a:solidFill>
+                <a:srgbClr val="64748B"/>
+              </a:solidFill>
+              <a:effectLst/>
+              <a:latin typeface="ui-sans-serif"/>
+            </a:endParaRPr>
+          </a:p>
+        </p:txBody>
+      </p:sp>
     </p:spTree>
   </p:cSld>
   <p:clrMapOvr>
@@ -18127,7 +17125,7 @@
 </p:sld>
 </file>
 
-<file path=ppt/slides/slide4.xml><?xml version="1.0" encoding="utf-8"?>
+<file path=ppt/slides/slide6.xml><?xml version="1.0" encoding="utf-8"?>
 <p:sld xmlns:a="http://schemas.openxmlformats.org/drawingml/2006/main" xmlns:r="http://schemas.openxmlformats.org/officeDocument/2006/relationships" xmlns:p="http://schemas.openxmlformats.org/presentationml/2006/main">
   <p:cSld>
     <p:spTree>
@@ -18179,7 +17177,7 @@
           <p:nvPr>
             <p:extLst>
               <p:ext uri="{D42A27DB-BD31-4B8C-83A1-F6EECF244321}">
-                <p14:modId xmlns:p14="http://schemas.microsoft.com/office/powerpoint/2010/main" val="2310072293"/>
+                <p14:modId xmlns:p14="http://schemas.microsoft.com/office/powerpoint/2010/main" val="2910509738"/>
               </p:ext>
             </p:extLst>
           </p:nvPr>
@@ -18194,6 +17192,87 @@
           </a:graphicData>
         </a:graphic>
       </p:graphicFrame>
+      <p:sp>
+        <p:nvSpPr>
+          <p:cNvPr id="5" name="TextBox 4">
+            <a:extLst>
+              <a:ext uri="{FF2B5EF4-FFF2-40B4-BE49-F238E27FC236}">
+                <a16:creationId xmlns:a16="http://schemas.microsoft.com/office/drawing/2014/main" id="{B5BE9F4A-7839-E0B8-551F-1941F8832C11}"/>
+              </a:ext>
+            </a:extLst>
+          </p:cNvPr>
+          <p:cNvSpPr txBox="1"/>
+          <p:nvPr/>
+        </p:nvSpPr>
+        <p:spPr>
+          <a:xfrm>
+            <a:off x="8263370" y="5934670"/>
+            <a:ext cx="4631748" cy="923330"/>
+          </a:xfrm>
+          <a:prstGeom prst="rect">
+            <a:avLst/>
+          </a:prstGeom>
+          <a:noFill/>
+        </p:spPr>
+        <p:txBody>
+          <a:bodyPr wrap="square">
+            <a:spAutoFit/>
+          </a:bodyPr>
+          <a:lstStyle/>
+          <a:p>
+            <a:pPr marL="0" marR="0" indent="0" algn="l">
+              <a:buNone/>
+            </a:pPr>
+            <a:r>
+              <a:rPr lang="en-IN" sz="1800" b="1" i="0" dirty="0">
+                <a:solidFill>
+                  <a:schemeClr val="tx1"/>
+                </a:solidFill>
+                <a:effectLst/>
+                <a:latin typeface="+mn-lt"/>
+              </a:rPr>
+              <a:t>Sriram Gandhi Prabha V</a:t>
+            </a:r>
+          </a:p>
+          <a:p>
+            <a:pPr marL="0" marR="0" indent="0" algn="l">
+              <a:buNone/>
+            </a:pPr>
+            <a:r>
+              <a:rPr lang="en-IN" b="1" i="0" dirty="0">
+                <a:solidFill>
+                  <a:schemeClr val="tx1"/>
+                </a:solidFill>
+                <a:effectLst/>
+                <a:latin typeface="+mn-lt"/>
+              </a:rPr>
+              <a:t>prabhasrivel1311@gmail.com</a:t>
+            </a:r>
+          </a:p>
+          <a:p>
+            <a:pPr marL="0" marR="0" indent="0" algn="l">
+              <a:buNone/>
+            </a:pPr>
+            <a:r>
+              <a:rPr lang="en-IN" sz="1800" b="1" i="0" dirty="0">
+                <a:solidFill>
+                  <a:schemeClr val="tx1"/>
+                </a:solidFill>
+                <a:effectLst/>
+                <a:latin typeface="+mn-lt"/>
+              </a:rPr>
+              <a:t>dd7a2bc00106</a:t>
+            </a:r>
+            <a:endParaRPr lang="en-IN" sz="825" b="1" i="0" dirty="0">
+              <a:solidFill>
+                <a:srgbClr val="64748B"/>
+              </a:solidFill>
+              <a:effectLst/>
+              <a:latin typeface="ui-sans-serif"/>
+            </a:endParaRPr>
+          </a:p>
+        </p:txBody>
+      </p:sp>
     </p:spTree>
   </p:cSld>
   <p:clrMapOvr>
@@ -18202,7 +17281,7 @@
 </p:sld>
 </file>
 
-<file path=ppt/slides/slide5.xml><?xml version="1.0" encoding="utf-8"?>
+<file path=ppt/slides/slide7.xml><?xml version="1.0" encoding="utf-8"?>
 <p:sld xmlns:a="http://schemas.openxmlformats.org/drawingml/2006/main" xmlns:r="http://schemas.openxmlformats.org/officeDocument/2006/relationships" xmlns:p="http://schemas.openxmlformats.org/presentationml/2006/main">
   <p:cSld>
     <p:spTree>
@@ -19105,6 +18184,87 @@
           </a:graphicData>
         </a:graphic>
       </p:graphicFrame>
+      <p:sp>
+        <p:nvSpPr>
+          <p:cNvPr id="5" name="TextBox 4">
+            <a:extLst>
+              <a:ext uri="{FF2B5EF4-FFF2-40B4-BE49-F238E27FC236}">
+                <a16:creationId xmlns:a16="http://schemas.microsoft.com/office/drawing/2014/main" id="{FE98495B-EF4F-D99A-6F2D-95C602784019}"/>
+              </a:ext>
+            </a:extLst>
+          </p:cNvPr>
+          <p:cNvSpPr txBox="1"/>
+          <p:nvPr/>
+        </p:nvSpPr>
+        <p:spPr>
+          <a:xfrm>
+            <a:off x="0" y="5934670"/>
+            <a:ext cx="4631748" cy="923330"/>
+          </a:xfrm>
+          <a:prstGeom prst="rect">
+            <a:avLst/>
+          </a:prstGeom>
+          <a:noFill/>
+        </p:spPr>
+        <p:txBody>
+          <a:bodyPr wrap="square">
+            <a:spAutoFit/>
+          </a:bodyPr>
+          <a:lstStyle/>
+          <a:p>
+            <a:pPr marL="0" marR="0" indent="0" algn="l">
+              <a:buNone/>
+            </a:pPr>
+            <a:r>
+              <a:rPr lang="en-IN" sz="1800" b="1" i="0" dirty="0">
+                <a:solidFill>
+                  <a:schemeClr val="tx1"/>
+                </a:solidFill>
+                <a:effectLst/>
+                <a:latin typeface="+mn-lt"/>
+              </a:rPr>
+              <a:t>Sriram Gandhi Prabha V</a:t>
+            </a:r>
+          </a:p>
+          <a:p>
+            <a:pPr marL="0" marR="0" indent="0" algn="l">
+              <a:buNone/>
+            </a:pPr>
+            <a:r>
+              <a:rPr lang="en-IN" b="1" i="0" dirty="0">
+                <a:solidFill>
+                  <a:schemeClr val="tx1"/>
+                </a:solidFill>
+                <a:effectLst/>
+                <a:latin typeface="+mn-lt"/>
+              </a:rPr>
+              <a:t>prabhasrivel1311@gmail.com</a:t>
+            </a:r>
+          </a:p>
+          <a:p>
+            <a:pPr marL="0" marR="0" indent="0" algn="l">
+              <a:buNone/>
+            </a:pPr>
+            <a:r>
+              <a:rPr lang="en-IN" sz="1800" b="1" i="0" dirty="0">
+                <a:solidFill>
+                  <a:schemeClr val="tx1"/>
+                </a:solidFill>
+                <a:effectLst/>
+                <a:latin typeface="+mn-lt"/>
+              </a:rPr>
+              <a:t>dd7a2bc00106</a:t>
+            </a:r>
+            <a:endParaRPr lang="en-IN" sz="825" b="1" i="0" dirty="0">
+              <a:solidFill>
+                <a:srgbClr val="64748B"/>
+              </a:solidFill>
+              <a:effectLst/>
+              <a:latin typeface="ui-sans-serif"/>
+            </a:endParaRPr>
+          </a:p>
+        </p:txBody>
+      </p:sp>
     </p:spTree>
   </p:cSld>
   <p:clrMapOvr>
@@ -19113,7 +18273,7 @@
 </p:sld>
 </file>
 
-<file path=ppt/slides/slide6.xml><?xml version="1.0" encoding="utf-8"?>
+<file path=ppt/slides/slide8.xml><?xml version="1.0" encoding="utf-8"?>
 <p:sld xmlns:a="http://schemas.openxmlformats.org/drawingml/2006/main" xmlns:r="http://schemas.openxmlformats.org/officeDocument/2006/relationships" xmlns:p="http://schemas.openxmlformats.org/presentationml/2006/main">
   <p:cSld>
     <p:spTree>
@@ -19873,6 +19033,87 @@
           </a:p>
         </p:txBody>
       </p:sp>
+      <p:sp>
+        <p:nvSpPr>
+          <p:cNvPr id="4" name="TextBox 3">
+            <a:extLst>
+              <a:ext uri="{FF2B5EF4-FFF2-40B4-BE49-F238E27FC236}">
+                <a16:creationId xmlns:a16="http://schemas.microsoft.com/office/drawing/2014/main" id="{012BCFCC-6CD5-AF29-C200-9FFCA7F00DF3}"/>
+              </a:ext>
+            </a:extLst>
+          </p:cNvPr>
+          <p:cNvSpPr txBox="1"/>
+          <p:nvPr/>
+        </p:nvSpPr>
+        <p:spPr>
+          <a:xfrm>
+            <a:off x="112630" y="5732947"/>
+            <a:ext cx="4631748" cy="923330"/>
+          </a:xfrm>
+          <a:prstGeom prst="rect">
+            <a:avLst/>
+          </a:prstGeom>
+          <a:noFill/>
+        </p:spPr>
+        <p:txBody>
+          <a:bodyPr wrap="square">
+            <a:spAutoFit/>
+          </a:bodyPr>
+          <a:lstStyle/>
+          <a:p>
+            <a:pPr marL="0" marR="0" indent="0" algn="l">
+              <a:buNone/>
+            </a:pPr>
+            <a:r>
+              <a:rPr lang="en-IN" sz="1800" b="1" i="0" dirty="0">
+                <a:solidFill>
+                  <a:schemeClr val="tx1"/>
+                </a:solidFill>
+                <a:effectLst/>
+                <a:latin typeface="+mn-lt"/>
+              </a:rPr>
+              <a:t>Sriram Gandhi Prabha V</a:t>
+            </a:r>
+          </a:p>
+          <a:p>
+            <a:pPr marL="0" marR="0" indent="0" algn="l">
+              <a:buNone/>
+            </a:pPr>
+            <a:r>
+              <a:rPr lang="en-IN" b="1" i="0" dirty="0">
+                <a:solidFill>
+                  <a:schemeClr val="tx1"/>
+                </a:solidFill>
+                <a:effectLst/>
+                <a:latin typeface="+mn-lt"/>
+              </a:rPr>
+              <a:t>prabhasrivel1311@gmail.com</a:t>
+            </a:r>
+          </a:p>
+          <a:p>
+            <a:pPr marL="0" marR="0" indent="0" algn="l">
+              <a:buNone/>
+            </a:pPr>
+            <a:r>
+              <a:rPr lang="en-IN" sz="1800" b="1" i="0" dirty="0">
+                <a:solidFill>
+                  <a:schemeClr val="tx1"/>
+                </a:solidFill>
+                <a:effectLst/>
+                <a:latin typeface="+mn-lt"/>
+              </a:rPr>
+              <a:t>dd7a2bc00106</a:t>
+            </a:r>
+            <a:endParaRPr lang="en-IN" sz="825" b="1" i="0" dirty="0">
+              <a:solidFill>
+                <a:srgbClr val="64748B"/>
+              </a:solidFill>
+              <a:effectLst/>
+              <a:latin typeface="ui-sans-serif"/>
+            </a:endParaRPr>
+          </a:p>
+        </p:txBody>
+      </p:sp>
     </p:spTree>
   </p:cSld>
   <p:clrMapOvr>
@@ -19881,56 +19122,7 @@
 </p:sld>
 </file>
 
-<file path=ppt/slides/slide7.xml><?xml version="1.0" encoding="utf-8"?>
-<p:sld xmlns:a="http://schemas.openxmlformats.org/drawingml/2006/main" xmlns:r="http://schemas.openxmlformats.org/officeDocument/2006/relationships" xmlns:p="http://schemas.openxmlformats.org/presentationml/2006/main">
-  <p:cSld>
-    <p:spTree>
-      <p:nvGrpSpPr>
-        <p:cNvPr id="1" name=""/>
-        <p:cNvGrpSpPr/>
-        <p:nvPr/>
-      </p:nvGrpSpPr>
-      <p:grpSpPr>
-        <a:xfrm>
-          <a:off x="0" y="0"/>
-          <a:ext cx="0" cy="0"/>
-          <a:chOff x="0" y="0"/>
-          <a:chExt cx="0" cy="0"/>
-        </a:xfrm>
-      </p:grpSpPr>
-      <p:pic>
-        <p:nvPicPr>
-          <p:cNvPr id="5" name="Picture 4"/>
-          <p:cNvPicPr>
-            <a:picLocks noChangeAspect="1"/>
-          </p:cNvPicPr>
-          <p:nvPr/>
-        </p:nvPicPr>
-        <p:blipFill>
-          <a:blip r:embed="rId2"/>
-          <a:stretch>
-            <a:fillRect/>
-          </a:stretch>
-        </p:blipFill>
-        <p:spPr>
-          <a:xfrm>
-            <a:off x="0" y="0"/>
-            <a:ext cx="12192000" cy="6858000"/>
-          </a:xfrm>
-          <a:prstGeom prst="rect">
-            <a:avLst/>
-          </a:prstGeom>
-        </p:spPr>
-      </p:pic>
-    </p:spTree>
-  </p:cSld>
-  <p:clrMapOvr>
-    <a:masterClrMapping/>
-  </p:clrMapOvr>
-</p:sld>
-</file>
-
-<file path=ppt/slides/slide8.xml><?xml version="1.0" encoding="utf-8"?>
+<file path=ppt/slides/slide9.xml><?xml version="1.0" encoding="utf-8"?>
 <p:sld xmlns:a="http://schemas.openxmlformats.org/drawingml/2006/main" xmlns:r="http://schemas.openxmlformats.org/officeDocument/2006/relationships" xmlns:p="http://schemas.openxmlformats.org/presentationml/2006/main">
   <p:cSld>
     <p:spTree>
